--- a/results/slides.pptx
+++ b/results/slides.pptx
@@ -5,33 +5,35 @@
     <p:sldMasterId id="2147483648" r:id="rId1"/>
   </p:sldMasterIdLst>
   <p:sldIdLst>
-    <p:sldId id="256" r:id="rId2"/>
-    <p:sldId id="257" r:id="rId3"/>
-    <p:sldId id="258" r:id="rId4"/>
-    <p:sldId id="259" r:id="rId5"/>
-    <p:sldId id="260" r:id="rId6"/>
-    <p:sldId id="261" r:id="rId7"/>
-    <p:sldId id="262" r:id="rId8"/>
-    <p:sldId id="263" r:id="rId9"/>
-    <p:sldId id="264" r:id="rId10"/>
-    <p:sldId id="265" r:id="rId11"/>
-    <p:sldId id="266" r:id="rId12"/>
-    <p:sldId id="267" r:id="rId13"/>
-    <p:sldId id="268" r:id="rId14"/>
-    <p:sldId id="269" r:id="rId15"/>
-    <p:sldId id="270" r:id="rId16"/>
-    <p:sldId id="271" r:id="rId17"/>
-    <p:sldId id="272" r:id="rId18"/>
-    <p:sldId id="273" r:id="rId19"/>
-    <p:sldId id="274" r:id="rId20"/>
-    <p:sldId id="275" r:id="rId21"/>
-    <p:sldId id="276" r:id="rId22"/>
-    <p:sldId id="277" r:id="rId23"/>
-    <p:sldId id="278" r:id="rId24"/>
-    <p:sldId id="279" r:id="rId25"/>
-    <p:sldId id="280" r:id="rId26"/>
+    <p:sldId id="256" r:id="rId7"/>
+    <p:sldId id="257" r:id="rId8"/>
+    <p:sldId id="258" r:id="rId9"/>
+    <p:sldId id="259" r:id="rId10"/>
+    <p:sldId id="260" r:id="rId11"/>
+    <p:sldId id="261" r:id="rId12"/>
+    <p:sldId id="262" r:id="rId13"/>
+    <p:sldId id="263" r:id="rId14"/>
+    <p:sldId id="264" r:id="rId15"/>
+    <p:sldId id="265" r:id="rId16"/>
+    <p:sldId id="266" r:id="rId17"/>
+    <p:sldId id="267" r:id="rId18"/>
+    <p:sldId id="268" r:id="rId19"/>
+    <p:sldId id="269" r:id="rId20"/>
+    <p:sldId id="270" r:id="rId21"/>
+    <p:sldId id="271" r:id="rId22"/>
+    <p:sldId id="272" r:id="rId23"/>
+    <p:sldId id="273" r:id="rId24"/>
+    <p:sldId id="274" r:id="rId25"/>
+    <p:sldId id="275" r:id="rId26"/>
+    <p:sldId id="276" r:id="rId27"/>
+    <p:sldId id="277" r:id="rId28"/>
+    <p:sldId id="278" r:id="rId29"/>
+    <p:sldId id="279" r:id="rId30"/>
+    <p:sldId id="280" r:id="rId31"/>
+    <p:sldId id="281" r:id="rId32"/>
+    <p:sldId id="282" r:id="rId33"/>
   </p:sldIdLst>
-  <p:sldSz cx="12188825" cy="6858000"/>
+  <p:sldSz cx="12188952" cy="6858000" type="screen4x3"/>
   <p:notesSz cx="6858000" cy="9144000"/>
   <p:defaultTextStyle>
     <a:defPPr>
@@ -128,22 +130,6 @@
       </a:defRPr>
     </a:lvl9pPr>
   </p:defaultTextStyle>
-  <p:extLst>
-    <p:ext uri="{EFAFB233-063F-42B5-8137-9DF3F51BA10A}">
-      <p15:sldGuideLst xmlns:p15="http://schemas.microsoft.com/office/powerpoint/2012/main">
-        <p15:guide id="1" orient="horz" pos="2160">
-          <p15:clr>
-            <a:srgbClr val="A4A3A4"/>
-          </p15:clr>
-        </p15:guide>
-        <p15:guide id="2" pos="2880">
-          <p15:clr>
-            <a:srgbClr val="A4A3A4"/>
-          </p15:clr>
-        </p15:guide>
-      </p15:sldGuideLst>
-    </p:ext>
-  </p:extLst>
 </p:presentation>
 </file>
 
@@ -185,9 +171,10 @@
           <a:lstStyle/>
           <a:p>
             <a:r>
-              <a:rPr lang="en-US"/>
+              <a:rPr lang="en-US" smtClean="0"/>
               <a:t>Click to edit Master title style</a:t>
             </a:r>
+            <a:endParaRPr lang="en-US"/>
           </a:p>
         </p:txBody>
       </p:sp>
@@ -303,9 +290,10 @@
           </a:lstStyle>
           <a:p>
             <a:r>
-              <a:rPr lang="en-US"/>
+              <a:rPr lang="en-US" smtClean="0"/>
               <a:t>Click to edit Master subtitle style</a:t>
             </a:r>
+            <a:endParaRPr lang="en-US"/>
           </a:p>
         </p:txBody>
       </p:sp>
@@ -326,7 +314,7 @@
           <a:p>
             <a:fld id="{5BCAD085-E8A6-8845-BD4E-CB4CCA059FC4}" type="datetimeFigureOut">
               <a:rPr lang="en-US" smtClean="0"/>
-              <a:t>4/3/26</a:t>
+              <a:t>1/27/13</a:t>
             </a:fld>
             <a:endParaRPr lang="en-US"/>
           </a:p>
@@ -420,9 +408,10 @@
           <a:lstStyle/>
           <a:p>
             <a:r>
-              <a:rPr lang="en-US"/>
+              <a:rPr lang="en-US" smtClean="0"/>
               <a:t>Click to edit Master title style</a:t>
             </a:r>
+            <a:endParaRPr lang="en-US"/>
           </a:p>
         </p:txBody>
       </p:sp>
@@ -443,37 +432,38 @@
           <a:p>
             <a:pPr lvl="0"/>
             <a:r>
-              <a:rPr lang="en-US"/>
+              <a:rPr lang="en-US" smtClean="0"/>
               <a:t>Click to edit Master text styles</a:t>
             </a:r>
           </a:p>
           <a:p>
             <a:pPr lvl="1"/>
             <a:r>
-              <a:rPr lang="en-US"/>
+              <a:rPr lang="en-US" smtClean="0"/>
               <a:t>Second level</a:t>
             </a:r>
           </a:p>
           <a:p>
             <a:pPr lvl="2"/>
             <a:r>
-              <a:rPr lang="en-US"/>
+              <a:rPr lang="en-US" smtClean="0"/>
               <a:t>Third level</a:t>
             </a:r>
           </a:p>
           <a:p>
             <a:pPr lvl="3"/>
             <a:r>
-              <a:rPr lang="en-US"/>
+              <a:rPr lang="en-US" smtClean="0"/>
               <a:t>Fourth level</a:t>
             </a:r>
           </a:p>
           <a:p>
             <a:pPr lvl="4"/>
             <a:r>
-              <a:rPr lang="en-US"/>
+              <a:rPr lang="en-US" smtClean="0"/>
               <a:t>Fifth level</a:t>
             </a:r>
+            <a:endParaRPr lang="en-US"/>
           </a:p>
         </p:txBody>
       </p:sp>
@@ -494,7 +484,7 @@
           <a:p>
             <a:fld id="{5BCAD085-E8A6-8845-BD4E-CB4CCA059FC4}" type="datetimeFigureOut">
               <a:rPr lang="en-US" smtClean="0"/>
-              <a:t>4/3/26</a:t>
+              <a:t>1/27/13</a:t>
             </a:fld>
             <a:endParaRPr lang="en-US"/>
           </a:p>
@@ -593,9 +583,10 @@
           <a:lstStyle/>
           <a:p>
             <a:r>
-              <a:rPr lang="en-US"/>
+              <a:rPr lang="en-US" smtClean="0"/>
               <a:t>Click to edit Master title style</a:t>
             </a:r>
+            <a:endParaRPr lang="en-US"/>
           </a:p>
         </p:txBody>
       </p:sp>
@@ -621,37 +612,38 @@
           <a:p>
             <a:pPr lvl="0"/>
             <a:r>
-              <a:rPr lang="en-US"/>
+              <a:rPr lang="en-US" smtClean="0"/>
               <a:t>Click to edit Master text styles</a:t>
             </a:r>
           </a:p>
           <a:p>
             <a:pPr lvl="1"/>
             <a:r>
-              <a:rPr lang="en-US"/>
+              <a:rPr lang="en-US" smtClean="0"/>
               <a:t>Second level</a:t>
             </a:r>
           </a:p>
           <a:p>
             <a:pPr lvl="2"/>
             <a:r>
-              <a:rPr lang="en-US"/>
+              <a:rPr lang="en-US" smtClean="0"/>
               <a:t>Third level</a:t>
             </a:r>
           </a:p>
           <a:p>
             <a:pPr lvl="3"/>
             <a:r>
-              <a:rPr lang="en-US"/>
+              <a:rPr lang="en-US" smtClean="0"/>
               <a:t>Fourth level</a:t>
             </a:r>
           </a:p>
           <a:p>
             <a:pPr lvl="4"/>
             <a:r>
-              <a:rPr lang="en-US"/>
+              <a:rPr lang="en-US" smtClean="0"/>
               <a:t>Fifth level</a:t>
             </a:r>
+            <a:endParaRPr lang="en-US"/>
           </a:p>
         </p:txBody>
       </p:sp>
@@ -672,7 +664,7 @@
           <a:p>
             <a:fld id="{5BCAD085-E8A6-8845-BD4E-CB4CCA059FC4}" type="datetimeFigureOut">
               <a:rPr lang="en-US" smtClean="0"/>
-              <a:t>4/3/26</a:t>
+              <a:t>1/27/13</a:t>
             </a:fld>
             <a:endParaRPr lang="en-US"/>
           </a:p>
@@ -766,9 +758,10 @@
           <a:lstStyle/>
           <a:p>
             <a:r>
-              <a:rPr lang="en-US"/>
+              <a:rPr lang="en-US" smtClean="0"/>
               <a:t>Click to edit Master title style</a:t>
             </a:r>
+            <a:endParaRPr lang="en-US"/>
           </a:p>
         </p:txBody>
       </p:sp>
@@ -789,37 +782,38 @@
           <a:p>
             <a:pPr lvl="0"/>
             <a:r>
-              <a:rPr lang="en-US"/>
+              <a:rPr lang="en-US" smtClean="0"/>
               <a:t>Click to edit Master text styles</a:t>
             </a:r>
           </a:p>
           <a:p>
             <a:pPr lvl="1"/>
             <a:r>
-              <a:rPr lang="en-US"/>
+              <a:rPr lang="en-US" smtClean="0"/>
               <a:t>Second level</a:t>
             </a:r>
           </a:p>
           <a:p>
             <a:pPr lvl="2"/>
             <a:r>
-              <a:rPr lang="en-US"/>
+              <a:rPr lang="en-US" smtClean="0"/>
               <a:t>Third level</a:t>
             </a:r>
           </a:p>
           <a:p>
             <a:pPr lvl="3"/>
             <a:r>
-              <a:rPr lang="en-US"/>
+              <a:rPr lang="en-US" smtClean="0"/>
               <a:t>Fourth level</a:t>
             </a:r>
           </a:p>
           <a:p>
             <a:pPr lvl="4"/>
             <a:r>
-              <a:rPr lang="en-US"/>
+              <a:rPr lang="en-US" smtClean="0"/>
               <a:t>Fifth level</a:t>
             </a:r>
+            <a:endParaRPr lang="en-US"/>
           </a:p>
         </p:txBody>
       </p:sp>
@@ -840,7 +834,7 @@
           <a:p>
             <a:fld id="{5BCAD085-E8A6-8845-BD4E-CB4CCA059FC4}" type="datetimeFigureOut">
               <a:rPr lang="en-US" smtClean="0"/>
-              <a:t>4/3/26</a:t>
+              <a:t>1/27/13</a:t>
             </a:fld>
             <a:endParaRPr lang="en-US"/>
           </a:p>
@@ -943,9 +937,10 @@
           </a:lstStyle>
           <a:p>
             <a:r>
-              <a:rPr lang="en-US"/>
+              <a:rPr lang="en-US" smtClean="0"/>
               <a:t>Click to edit Master title style</a:t>
             </a:r>
+            <a:endParaRPr lang="en-US"/>
           </a:p>
         </p:txBody>
       </p:sp>
@@ -1062,7 +1057,7 @@
           <a:p>
             <a:pPr lvl="0"/>
             <a:r>
-              <a:rPr lang="en-US"/>
+              <a:rPr lang="en-US" smtClean="0"/>
               <a:t>Click to edit Master text styles</a:t>
             </a:r>
           </a:p>
@@ -1085,7 +1080,7 @@
           <a:p>
             <a:fld id="{5BCAD085-E8A6-8845-BD4E-CB4CCA059FC4}" type="datetimeFigureOut">
               <a:rPr lang="en-US" smtClean="0"/>
-              <a:t>4/3/26</a:t>
+              <a:t>1/27/13</a:t>
             </a:fld>
             <a:endParaRPr lang="en-US"/>
           </a:p>
@@ -1179,9 +1174,10 @@
           <a:lstStyle/>
           <a:p>
             <a:r>
-              <a:rPr lang="en-US"/>
+              <a:rPr lang="en-US" smtClean="0"/>
               <a:t>Click to edit Master title style</a:t>
             </a:r>
+            <a:endParaRPr lang="en-US"/>
           </a:p>
         </p:txBody>
       </p:sp>
@@ -1235,37 +1231,38 @@
           <a:p>
             <a:pPr lvl="0"/>
             <a:r>
-              <a:rPr lang="en-US"/>
+              <a:rPr lang="en-US" smtClean="0"/>
               <a:t>Click to edit Master text styles</a:t>
             </a:r>
           </a:p>
           <a:p>
             <a:pPr lvl="1"/>
             <a:r>
-              <a:rPr lang="en-US"/>
+              <a:rPr lang="en-US" smtClean="0"/>
               <a:t>Second level</a:t>
             </a:r>
           </a:p>
           <a:p>
             <a:pPr lvl="2"/>
             <a:r>
-              <a:rPr lang="en-US"/>
+              <a:rPr lang="en-US" smtClean="0"/>
               <a:t>Third level</a:t>
             </a:r>
           </a:p>
           <a:p>
             <a:pPr lvl="3"/>
             <a:r>
-              <a:rPr lang="en-US"/>
+              <a:rPr lang="en-US" smtClean="0"/>
               <a:t>Fourth level</a:t>
             </a:r>
           </a:p>
           <a:p>
             <a:pPr lvl="4"/>
             <a:r>
-              <a:rPr lang="en-US"/>
+              <a:rPr lang="en-US" smtClean="0"/>
               <a:t>Fifth level</a:t>
             </a:r>
+            <a:endParaRPr lang="en-US"/>
           </a:p>
         </p:txBody>
       </p:sp>
@@ -1319,37 +1316,38 @@
           <a:p>
             <a:pPr lvl="0"/>
             <a:r>
-              <a:rPr lang="en-US"/>
+              <a:rPr lang="en-US" smtClean="0"/>
               <a:t>Click to edit Master text styles</a:t>
             </a:r>
           </a:p>
           <a:p>
             <a:pPr lvl="1"/>
             <a:r>
-              <a:rPr lang="en-US"/>
+              <a:rPr lang="en-US" smtClean="0"/>
               <a:t>Second level</a:t>
             </a:r>
           </a:p>
           <a:p>
             <a:pPr lvl="2"/>
             <a:r>
-              <a:rPr lang="en-US"/>
+              <a:rPr lang="en-US" smtClean="0"/>
               <a:t>Third level</a:t>
             </a:r>
           </a:p>
           <a:p>
             <a:pPr lvl="3"/>
             <a:r>
-              <a:rPr lang="en-US"/>
+              <a:rPr lang="en-US" smtClean="0"/>
               <a:t>Fourth level</a:t>
             </a:r>
           </a:p>
           <a:p>
             <a:pPr lvl="4"/>
             <a:r>
-              <a:rPr lang="en-US"/>
+              <a:rPr lang="en-US" smtClean="0"/>
               <a:t>Fifth level</a:t>
             </a:r>
+            <a:endParaRPr lang="en-US"/>
           </a:p>
         </p:txBody>
       </p:sp>
@@ -1370,7 +1368,7 @@
           <a:p>
             <a:fld id="{5BCAD085-E8A6-8845-BD4E-CB4CCA059FC4}" type="datetimeFigureOut">
               <a:rPr lang="en-US" smtClean="0"/>
-              <a:t>4/3/26</a:t>
+              <a:t>1/27/13</a:t>
             </a:fld>
             <a:endParaRPr lang="en-US"/>
           </a:p>
@@ -1468,9 +1466,10 @@
           </a:lstStyle>
           <a:p>
             <a:r>
-              <a:rPr lang="en-US"/>
+              <a:rPr lang="en-US" smtClean="0"/>
               <a:t>Click to edit Master title style</a:t>
             </a:r>
+            <a:endParaRPr lang="en-US"/>
           </a:p>
         </p:txBody>
       </p:sp>
@@ -1533,7 +1532,7 @@
           <a:p>
             <a:pPr lvl="0"/>
             <a:r>
-              <a:rPr lang="en-US"/>
+              <a:rPr lang="en-US" smtClean="0"/>
               <a:t>Click to edit Master text styles</a:t>
             </a:r>
           </a:p>
@@ -1589,37 +1588,38 @@
           <a:p>
             <a:pPr lvl="0"/>
             <a:r>
-              <a:rPr lang="en-US"/>
+              <a:rPr lang="en-US" smtClean="0"/>
               <a:t>Click to edit Master text styles</a:t>
             </a:r>
           </a:p>
           <a:p>
             <a:pPr lvl="1"/>
             <a:r>
-              <a:rPr lang="en-US"/>
+              <a:rPr lang="en-US" smtClean="0"/>
               <a:t>Second level</a:t>
             </a:r>
           </a:p>
           <a:p>
             <a:pPr lvl="2"/>
             <a:r>
-              <a:rPr lang="en-US"/>
+              <a:rPr lang="en-US" smtClean="0"/>
               <a:t>Third level</a:t>
             </a:r>
           </a:p>
           <a:p>
             <a:pPr lvl="3"/>
             <a:r>
-              <a:rPr lang="en-US"/>
+              <a:rPr lang="en-US" smtClean="0"/>
               <a:t>Fourth level</a:t>
             </a:r>
           </a:p>
           <a:p>
             <a:pPr lvl="4"/>
             <a:r>
-              <a:rPr lang="en-US"/>
+              <a:rPr lang="en-US" smtClean="0"/>
               <a:t>Fifth level</a:t>
             </a:r>
+            <a:endParaRPr lang="en-US"/>
           </a:p>
         </p:txBody>
       </p:sp>
@@ -1682,7 +1682,7 @@
           <a:p>
             <a:pPr lvl="0"/>
             <a:r>
-              <a:rPr lang="en-US"/>
+              <a:rPr lang="en-US" smtClean="0"/>
               <a:t>Click to edit Master text styles</a:t>
             </a:r>
           </a:p>
@@ -1738,37 +1738,38 @@
           <a:p>
             <a:pPr lvl="0"/>
             <a:r>
-              <a:rPr lang="en-US"/>
+              <a:rPr lang="en-US" smtClean="0"/>
               <a:t>Click to edit Master text styles</a:t>
             </a:r>
           </a:p>
           <a:p>
             <a:pPr lvl="1"/>
             <a:r>
-              <a:rPr lang="en-US"/>
+              <a:rPr lang="en-US" smtClean="0"/>
               <a:t>Second level</a:t>
             </a:r>
           </a:p>
           <a:p>
             <a:pPr lvl="2"/>
             <a:r>
-              <a:rPr lang="en-US"/>
+              <a:rPr lang="en-US" smtClean="0"/>
               <a:t>Third level</a:t>
             </a:r>
           </a:p>
           <a:p>
             <a:pPr lvl="3"/>
             <a:r>
-              <a:rPr lang="en-US"/>
+              <a:rPr lang="en-US" smtClean="0"/>
               <a:t>Fourth level</a:t>
             </a:r>
           </a:p>
           <a:p>
             <a:pPr lvl="4"/>
             <a:r>
-              <a:rPr lang="en-US"/>
+              <a:rPr lang="en-US" smtClean="0"/>
               <a:t>Fifth level</a:t>
             </a:r>
+            <a:endParaRPr lang="en-US"/>
           </a:p>
         </p:txBody>
       </p:sp>
@@ -1789,7 +1790,7 @@
           <a:p>
             <a:fld id="{5BCAD085-E8A6-8845-BD4E-CB4CCA059FC4}" type="datetimeFigureOut">
               <a:rPr lang="en-US" smtClean="0"/>
-              <a:t>4/3/26</a:t>
+              <a:t>1/27/13</a:t>
             </a:fld>
             <a:endParaRPr lang="en-US"/>
           </a:p>
@@ -1883,9 +1884,10 @@
           <a:lstStyle/>
           <a:p>
             <a:r>
-              <a:rPr lang="en-US"/>
+              <a:rPr lang="en-US" smtClean="0"/>
               <a:t>Click to edit Master title style</a:t>
             </a:r>
+            <a:endParaRPr lang="en-US"/>
           </a:p>
         </p:txBody>
       </p:sp>
@@ -1906,7 +1908,7 @@
           <a:p>
             <a:fld id="{5BCAD085-E8A6-8845-BD4E-CB4CCA059FC4}" type="datetimeFigureOut">
               <a:rPr lang="en-US" smtClean="0"/>
-              <a:t>4/3/26</a:t>
+              <a:t>1/27/13</a:t>
             </a:fld>
             <a:endParaRPr lang="en-US"/>
           </a:p>
@@ -2001,7 +2003,7 @@
           <a:p>
             <a:fld id="{5BCAD085-E8A6-8845-BD4E-CB4CCA059FC4}" type="datetimeFigureOut">
               <a:rPr lang="en-US" smtClean="0"/>
-              <a:t>4/3/26</a:t>
+              <a:t>1/27/13</a:t>
             </a:fld>
             <a:endParaRPr lang="en-US"/>
           </a:p>
@@ -2104,9 +2106,10 @@
           </a:lstStyle>
           <a:p>
             <a:r>
-              <a:rPr lang="en-US"/>
+              <a:rPr lang="en-US" smtClean="0"/>
               <a:t>Click to edit Master title style</a:t>
             </a:r>
+            <a:endParaRPr lang="en-US"/>
           </a:p>
         </p:txBody>
       </p:sp>
@@ -2160,37 +2163,38 @@
           <a:p>
             <a:pPr lvl="0"/>
             <a:r>
-              <a:rPr lang="en-US"/>
+              <a:rPr lang="en-US" smtClean="0"/>
               <a:t>Click to edit Master text styles</a:t>
             </a:r>
           </a:p>
           <a:p>
             <a:pPr lvl="1"/>
             <a:r>
-              <a:rPr lang="en-US"/>
+              <a:rPr lang="en-US" smtClean="0"/>
               <a:t>Second level</a:t>
             </a:r>
           </a:p>
           <a:p>
             <a:pPr lvl="2"/>
             <a:r>
-              <a:rPr lang="en-US"/>
+              <a:rPr lang="en-US" smtClean="0"/>
               <a:t>Third level</a:t>
             </a:r>
           </a:p>
           <a:p>
             <a:pPr lvl="3"/>
             <a:r>
-              <a:rPr lang="en-US"/>
+              <a:rPr lang="en-US" smtClean="0"/>
               <a:t>Fourth level</a:t>
             </a:r>
           </a:p>
           <a:p>
             <a:pPr lvl="4"/>
             <a:r>
-              <a:rPr lang="en-US"/>
+              <a:rPr lang="en-US" smtClean="0"/>
               <a:t>Fifth level</a:t>
             </a:r>
+            <a:endParaRPr lang="en-US"/>
           </a:p>
         </p:txBody>
       </p:sp>
@@ -2253,7 +2257,7 @@
           <a:p>
             <a:pPr lvl="0"/>
             <a:r>
-              <a:rPr lang="en-US"/>
+              <a:rPr lang="en-US" smtClean="0"/>
               <a:t>Click to edit Master text styles</a:t>
             </a:r>
           </a:p>
@@ -2276,7 +2280,7 @@
           <a:p>
             <a:fld id="{5BCAD085-E8A6-8845-BD4E-CB4CCA059FC4}" type="datetimeFigureOut">
               <a:rPr lang="en-US" smtClean="0"/>
-              <a:t>4/3/26</a:t>
+              <a:t>1/27/13</a:t>
             </a:fld>
             <a:endParaRPr lang="en-US"/>
           </a:p>
@@ -2379,9 +2383,10 @@
           </a:lstStyle>
           <a:p>
             <a:r>
-              <a:rPr lang="en-US"/>
+              <a:rPr lang="en-US" smtClean="0"/>
               <a:t>Click to edit Master title style</a:t>
             </a:r>
+            <a:endParaRPr lang="en-US"/>
           </a:p>
         </p:txBody>
       </p:sp>
@@ -2505,7 +2510,7 @@
           <a:p>
             <a:pPr lvl="0"/>
             <a:r>
-              <a:rPr lang="en-US"/>
+              <a:rPr lang="en-US" smtClean="0"/>
               <a:t>Click to edit Master text styles</a:t>
             </a:r>
           </a:p>
@@ -2528,7 +2533,7 @@
           <a:p>
             <a:fld id="{5BCAD085-E8A6-8845-BD4E-CB4CCA059FC4}" type="datetimeFigureOut">
               <a:rPr lang="en-US" smtClean="0"/>
-              <a:t>4/3/26</a:t>
+              <a:t>1/27/13</a:t>
             </a:fld>
             <a:endParaRPr lang="en-US"/>
           </a:p>
@@ -2637,9 +2642,10 @@
           <a:lstStyle/>
           <a:p>
             <a:r>
-              <a:rPr lang="en-US"/>
+              <a:rPr lang="en-US" smtClean="0"/>
               <a:t>Click to edit Master title style</a:t>
             </a:r>
+            <a:endParaRPr lang="en-US"/>
           </a:p>
         </p:txBody>
       </p:sp>
@@ -2670,37 +2676,38 @@
           <a:p>
             <a:pPr lvl="0"/>
             <a:r>
-              <a:rPr lang="en-US"/>
+              <a:rPr lang="en-US" smtClean="0"/>
               <a:t>Click to edit Master text styles</a:t>
             </a:r>
           </a:p>
           <a:p>
             <a:pPr lvl="1"/>
             <a:r>
-              <a:rPr lang="en-US"/>
+              <a:rPr lang="en-US" smtClean="0"/>
               <a:t>Second level</a:t>
             </a:r>
           </a:p>
           <a:p>
             <a:pPr lvl="2"/>
             <a:r>
-              <a:rPr lang="en-US"/>
+              <a:rPr lang="en-US" smtClean="0"/>
               <a:t>Third level</a:t>
             </a:r>
           </a:p>
           <a:p>
             <a:pPr lvl="3"/>
             <a:r>
-              <a:rPr lang="en-US"/>
+              <a:rPr lang="en-US" smtClean="0"/>
               <a:t>Fourth level</a:t>
             </a:r>
           </a:p>
           <a:p>
             <a:pPr lvl="4"/>
             <a:r>
-              <a:rPr lang="en-US"/>
+              <a:rPr lang="en-US" smtClean="0"/>
               <a:t>Fifth level</a:t>
             </a:r>
+            <a:endParaRPr lang="en-US"/>
           </a:p>
         </p:txBody>
       </p:sp>
@@ -2739,7 +2746,7 @@
           <a:p>
             <a:fld id="{5BCAD085-E8A6-8845-BD4E-CB4CCA059FC4}" type="datetimeFigureOut">
               <a:rPr lang="en-US" smtClean="0"/>
-              <a:t>4/3/26</a:t>
+              <a:t>1/27/13</a:t>
             </a:fld>
             <a:endParaRPr lang="en-US"/>
           </a:p>
@@ -3098,7 +3105,7 @@
 </file>
 
 <file path=ppt/slides/slide1.xml><?xml version="1.0" encoding="utf-8"?>
-<p:sld xmlns:a="http://schemas.openxmlformats.org/drawingml/2006/main" xmlns:r="http://schemas.openxmlformats.org/officeDocument/2006/relationships" xmlns:p="http://schemas.openxmlformats.org/presentationml/2006/main">
+<p:sld xmlns:a="http://schemas.openxmlformats.org/drawingml/2006/main" xmlns:p="http://schemas.openxmlformats.org/presentationml/2006/main" xmlns:r="http://schemas.openxmlformats.org/officeDocument/2006/relationships">
   <p:cSld>
     <p:spTree>
       <p:nvGrpSpPr>
@@ -3106,14 +3113,7 @@
         <p:cNvGrpSpPr/>
         <p:nvPr/>
       </p:nvGrpSpPr>
-      <p:grpSpPr>
-        <a:xfrm>
-          <a:off x="0" y="0"/>
-          <a:ext cx="0" cy="0"/>
-          <a:chOff x="0" y="0"/>
-          <a:chExt cx="0" cy="0"/>
-        </a:xfrm>
-      </p:grpSpPr>
+      <p:grpSpPr/>
       <p:sp>
         <p:nvSpPr>
           <p:cNvPr id="2" name="Rectangle 1"/>
@@ -3154,7 +3154,6 @@
           <a:lstStyle/>
           <a:p>
             <a:pPr algn="ctr"/>
-            <a:endParaRPr/>
           </a:p>
         </p:txBody>
       </p:sp>
@@ -3198,7 +3197,6 @@
           <a:lstStyle/>
           <a:p>
             <a:pPr algn="ctr"/>
-            <a:endParaRPr/>
           </a:p>
         </p:txBody>
       </p:sp>
@@ -3261,7 +3259,7 @@
           <a:p>
             <a:pPr algn="l"/>
             <a:r>
-              <a:rPr sz="1600" b="0" dirty="0">
+              <a:rPr sz="1600" b="0">
                 <a:solidFill>
                   <a:srgbClr val="BBDEFB"/>
                 </a:solidFill>
@@ -3346,7 +3344,6 @@
           <a:lstStyle/>
           <a:p>
             <a:pPr algn="ctr"/>
-            <a:endParaRPr/>
           </a:p>
         </p:txBody>
       </p:sp>
@@ -3393,7 +3390,7 @@
 </file>
 
 <file path=ppt/slides/slide10.xml><?xml version="1.0" encoding="utf-8"?>
-<p:sld xmlns:a="http://schemas.openxmlformats.org/drawingml/2006/main" xmlns:r="http://schemas.openxmlformats.org/officeDocument/2006/relationships" xmlns:p="http://schemas.openxmlformats.org/presentationml/2006/main">
+<p:sld xmlns:a="http://schemas.openxmlformats.org/drawingml/2006/main" xmlns:p="http://schemas.openxmlformats.org/presentationml/2006/main" xmlns:r="http://schemas.openxmlformats.org/officeDocument/2006/relationships">
   <p:cSld>
     <p:spTree>
       <p:nvGrpSpPr>
@@ -3401,14 +3398,7 @@
         <p:cNvGrpSpPr/>
         <p:nvPr/>
       </p:nvGrpSpPr>
-      <p:grpSpPr>
-        <a:xfrm>
-          <a:off x="0" y="0"/>
-          <a:ext cx="0" cy="0"/>
-          <a:chOff x="0" y="0"/>
-          <a:chExt cx="0" cy="0"/>
-        </a:xfrm>
-      </p:grpSpPr>
+      <p:grpSpPr/>
       <p:sp>
         <p:nvSpPr>
           <p:cNvPr id="2" name="Rectangle 1"/>
@@ -3449,7 +3439,6 @@
           <a:lstStyle/>
           <a:p>
             <a:pPr algn="ctr"/>
-            <a:endParaRPr/>
           </a:p>
         </p:txBody>
       </p:sp>
@@ -3527,7 +3516,6 @@
           <a:lstStyle/>
           <a:p>
             <a:pPr algn="ctr"/>
-            <a:endParaRPr/>
           </a:p>
         </p:txBody>
       </p:sp>
@@ -3605,7 +3593,6 @@
           <a:lstStyle/>
           <a:p>
             <a:pPr algn="ctr"/>
-            <a:endParaRPr/>
           </a:p>
         </p:txBody>
       </p:sp>
@@ -3718,7 +3705,6 @@
           <a:lstStyle/>
           <a:p>
             <a:pPr algn="ctr"/>
-            <a:endParaRPr/>
           </a:p>
         </p:txBody>
       </p:sp>
@@ -3831,7 +3817,6 @@
           <a:lstStyle/>
           <a:p>
             <a:pPr algn="ctr"/>
-            <a:endParaRPr/>
           </a:p>
         </p:txBody>
       </p:sp>
@@ -3979,7 +3964,6 @@
           <a:lstStyle/>
           <a:p>
             <a:pPr algn="ctr"/>
-            <a:endParaRPr/>
           </a:p>
         </p:txBody>
       </p:sp>
@@ -4057,7 +4041,6 @@
           <a:lstStyle/>
           <a:p>
             <a:pPr algn="ctr"/>
-            <a:endParaRPr/>
           </a:p>
         </p:txBody>
       </p:sp>
@@ -4169,7 +4152,6 @@
           <a:lstStyle/>
           <a:p>
             <a:pPr algn="ctr"/>
-            <a:endParaRPr/>
           </a:p>
         </p:txBody>
       </p:sp>
@@ -4281,7 +4263,6 @@
           <a:lstStyle/>
           <a:p>
             <a:pPr algn="ctr"/>
-            <a:endParaRPr/>
           </a:p>
         </p:txBody>
       </p:sp>
@@ -4393,7 +4374,6 @@
           <a:lstStyle/>
           <a:p>
             <a:pPr algn="ctr"/>
-            <a:endParaRPr/>
           </a:p>
         </p:txBody>
       </p:sp>
@@ -4540,7 +4520,6 @@
           <a:lstStyle/>
           <a:p>
             <a:pPr algn="ctr"/>
-            <a:endParaRPr/>
           </a:p>
         </p:txBody>
       </p:sp>
@@ -4587,7 +4566,7 @@
 </file>
 
 <file path=ppt/slides/slide11.xml><?xml version="1.0" encoding="utf-8"?>
-<p:sld xmlns:a="http://schemas.openxmlformats.org/drawingml/2006/main" xmlns:r="http://schemas.openxmlformats.org/officeDocument/2006/relationships" xmlns:p="http://schemas.openxmlformats.org/presentationml/2006/main">
+<p:sld xmlns:a="http://schemas.openxmlformats.org/drawingml/2006/main" xmlns:p="http://schemas.openxmlformats.org/presentationml/2006/main" xmlns:r="http://schemas.openxmlformats.org/officeDocument/2006/relationships">
   <p:cSld>
     <p:spTree>
       <p:nvGrpSpPr>
@@ -4595,14 +4574,7 @@
         <p:cNvGrpSpPr/>
         <p:nvPr/>
       </p:nvGrpSpPr>
-      <p:grpSpPr>
-        <a:xfrm>
-          <a:off x="0" y="0"/>
-          <a:ext cx="0" cy="0"/>
-          <a:chOff x="0" y="0"/>
-          <a:chExt cx="0" cy="0"/>
-        </a:xfrm>
-      </p:grpSpPr>
+      <p:grpSpPr/>
       <p:sp>
         <p:nvSpPr>
           <p:cNvPr id="2" name="Rectangle 1"/>
@@ -4643,7 +4615,6 @@
           <a:lstStyle/>
           <a:p>
             <a:pPr algn="ctr"/>
-            <a:endParaRPr/>
           </a:p>
         </p:txBody>
       </p:sp>
@@ -4789,7 +4760,6 @@
           <a:lstStyle/>
           <a:p>
             <a:pPr algn="ctr"/>
-            <a:endParaRPr/>
           </a:p>
         </p:txBody>
       </p:sp>
@@ -4867,7 +4837,6 @@
           <a:lstStyle/>
           <a:p>
             <a:pPr algn="ctr"/>
-            <a:endParaRPr/>
           </a:p>
         </p:txBody>
       </p:sp>
@@ -5047,7 +5016,6 @@
           <a:lstStyle/>
           <a:p>
             <a:pPr algn="ctr"/>
-            <a:endParaRPr/>
           </a:p>
         </p:txBody>
       </p:sp>
@@ -5227,7 +5195,6 @@
           <a:lstStyle/>
           <a:p>
             <a:pPr algn="ctr"/>
-            <a:endParaRPr/>
           </a:p>
         </p:txBody>
       </p:sp>
@@ -5441,7 +5408,6 @@
           <a:lstStyle/>
           <a:p>
             <a:pPr algn="ctr"/>
-            <a:endParaRPr/>
           </a:p>
         </p:txBody>
       </p:sp>
@@ -5488,7 +5454,7 @@
 </file>
 
 <file path=ppt/slides/slide12.xml><?xml version="1.0" encoding="utf-8"?>
-<p:sld xmlns:a="http://schemas.openxmlformats.org/drawingml/2006/main" xmlns:r="http://schemas.openxmlformats.org/officeDocument/2006/relationships" xmlns:p="http://schemas.openxmlformats.org/presentationml/2006/main">
+<p:sld xmlns:a="http://schemas.openxmlformats.org/drawingml/2006/main" xmlns:p="http://schemas.openxmlformats.org/presentationml/2006/main" xmlns:r="http://schemas.openxmlformats.org/officeDocument/2006/relationships">
   <p:cSld>
     <p:spTree>
       <p:nvGrpSpPr>
@@ -5496,14 +5462,7 @@
         <p:cNvGrpSpPr/>
         <p:nvPr/>
       </p:nvGrpSpPr>
-      <p:grpSpPr>
-        <a:xfrm>
-          <a:off x="0" y="0"/>
-          <a:ext cx="0" cy="0"/>
-          <a:chOff x="0" y="0"/>
-          <a:chExt cx="0" cy="0"/>
-        </a:xfrm>
-      </p:grpSpPr>
+      <p:grpSpPr/>
       <p:sp>
         <p:nvSpPr>
           <p:cNvPr id="2" name="Rectangle 1"/>
@@ -5544,7 +5503,6 @@
           <a:lstStyle/>
           <a:p>
             <a:pPr algn="ctr"/>
-            <a:endParaRPr/>
           </a:p>
         </p:txBody>
       </p:sp>
@@ -5656,7 +5614,6 @@
           <a:lstStyle/>
           <a:p>
             <a:pPr algn="ctr"/>
-            <a:endParaRPr/>
           </a:p>
         </p:txBody>
       </p:sp>
@@ -5904,7 +5861,6 @@
           <a:lstStyle/>
           <a:p>
             <a:pPr algn="ctr"/>
-            <a:endParaRPr/>
           </a:p>
         </p:txBody>
       </p:sp>
@@ -5982,7 +5938,6 @@
           <a:lstStyle/>
           <a:p>
             <a:pPr algn="ctr"/>
-            <a:endParaRPr/>
           </a:p>
         </p:txBody>
       </p:sp>
@@ -6230,7 +6185,6 @@
           <a:lstStyle/>
           <a:p>
             <a:pPr algn="ctr"/>
-            <a:endParaRPr/>
           </a:p>
         </p:txBody>
       </p:sp>
@@ -6306,7 +6260,7 @@
           </a:fontRef>
         </p:style>
         <p:txBody>
-          <a:bodyPr wrap="square" rtlCol="0" anchor="ctr"/>
+          <a:bodyPr rtlCol="0" anchor="ctr" wrap="square"/>
           <a:lstStyle/>
           <a:p>
             <a:pPr algn="ctr"/>
@@ -6362,7 +6316,6 @@
           <a:lstStyle/>
           <a:p>
             <a:pPr algn="ctr"/>
-            <a:endParaRPr/>
           </a:p>
         </p:txBody>
       </p:sp>
@@ -6409,7 +6362,7 @@
 </file>
 
 <file path=ppt/slides/slide13.xml><?xml version="1.0" encoding="utf-8"?>
-<p:sld xmlns:a="http://schemas.openxmlformats.org/drawingml/2006/main" xmlns:r="http://schemas.openxmlformats.org/officeDocument/2006/relationships" xmlns:p="http://schemas.openxmlformats.org/presentationml/2006/main">
+<p:sld xmlns:a="http://schemas.openxmlformats.org/drawingml/2006/main" xmlns:p="http://schemas.openxmlformats.org/presentationml/2006/main" xmlns:r="http://schemas.openxmlformats.org/officeDocument/2006/relationships">
   <p:cSld>
     <p:spTree>
       <p:nvGrpSpPr>
@@ -6417,14 +6370,7 @@
         <p:cNvGrpSpPr/>
         <p:nvPr/>
       </p:nvGrpSpPr>
-      <p:grpSpPr>
-        <a:xfrm>
-          <a:off x="0" y="0"/>
-          <a:ext cx="0" cy="0"/>
-          <a:chOff x="0" y="0"/>
-          <a:chExt cx="0" cy="0"/>
-        </a:xfrm>
-      </p:grpSpPr>
+      <p:grpSpPr/>
       <p:sp>
         <p:nvSpPr>
           <p:cNvPr id="2" name="Rectangle 1"/>
@@ -6465,7 +6411,6 @@
           <a:lstStyle/>
           <a:p>
             <a:pPr algn="ctr"/>
-            <a:endParaRPr/>
           </a:p>
         </p:txBody>
       </p:sp>
@@ -6567,7 +6512,6 @@
           <a:lstStyle/>
           <a:p>
             <a:pPr algn="ctr"/>
-            <a:endParaRPr/>
           </a:p>
         </p:txBody>
       </p:sp>
@@ -6713,7 +6657,6 @@
           <a:lstStyle/>
           <a:p>
             <a:pPr algn="ctr"/>
-            <a:endParaRPr/>
           </a:p>
         </p:txBody>
       </p:sp>
@@ -6859,7 +6802,6 @@
           <a:lstStyle/>
           <a:p>
             <a:pPr algn="ctr"/>
-            <a:endParaRPr/>
           </a:p>
         </p:txBody>
       </p:sp>
@@ -7005,7 +6947,6 @@
           <a:lstStyle/>
           <a:p>
             <a:pPr algn="ctr"/>
-            <a:endParaRPr/>
           </a:p>
         </p:txBody>
       </p:sp>
@@ -7185,7 +7126,6 @@
           <a:lstStyle/>
           <a:p>
             <a:pPr algn="ctr"/>
-            <a:endParaRPr/>
           </a:p>
         </p:txBody>
       </p:sp>
@@ -7232,7 +7172,7 @@
 </file>
 
 <file path=ppt/slides/slide14.xml><?xml version="1.0" encoding="utf-8"?>
-<p:sld xmlns:a="http://schemas.openxmlformats.org/drawingml/2006/main" xmlns:r="http://schemas.openxmlformats.org/officeDocument/2006/relationships" xmlns:p="http://schemas.openxmlformats.org/presentationml/2006/main">
+<p:sld xmlns:a="http://schemas.openxmlformats.org/drawingml/2006/main" xmlns:p="http://schemas.openxmlformats.org/presentationml/2006/main" xmlns:r="http://schemas.openxmlformats.org/officeDocument/2006/relationships">
   <p:cSld>
     <p:spTree>
       <p:nvGrpSpPr>
@@ -7240,14 +7180,7 @@
         <p:cNvGrpSpPr/>
         <p:nvPr/>
       </p:nvGrpSpPr>
-      <p:grpSpPr>
-        <a:xfrm>
-          <a:off x="0" y="0"/>
-          <a:ext cx="0" cy="0"/>
-          <a:chOff x="0" y="0"/>
-          <a:chExt cx="0" cy="0"/>
-        </a:xfrm>
-      </p:grpSpPr>
+      <p:grpSpPr/>
       <p:sp>
         <p:nvSpPr>
           <p:cNvPr id="2" name="Rectangle 1"/>
@@ -7288,7 +7221,6 @@
           <a:lstStyle/>
           <a:p>
             <a:pPr algn="ctr"/>
-            <a:endParaRPr/>
           </a:p>
         </p:txBody>
       </p:sp>
@@ -7416,7 +7348,7 @@
         </p:nvSpPr>
         <p:spPr>
           <a:xfrm>
-            <a:off x="393066" y="5010912"/>
+            <a:off x="274320" y="4800600"/>
             <a:ext cx="5760720" cy="320040"/>
           </a:xfrm>
           <a:prstGeom prst="rect">
@@ -7432,18 +7364,13 @@
           <a:p>
             <a:pPr algn="ctr"/>
             <a:r>
-              <a:rPr sz="1300" b="1" dirty="0" err="1">
+              <a:rPr sz="1300" b="1">
                 <a:solidFill>
                   <a:srgbClr val="1A237E"/>
                 </a:solidFill>
               </a:rPr>
               <a:t>白色ノイズ</a:t>
             </a:r>
-            <a:endParaRPr sz="1300" b="1" dirty="0">
-              <a:solidFill>
-                <a:srgbClr val="1A237E"/>
-              </a:solidFill>
-            </a:endParaRPr>
           </a:p>
         </p:txBody>
       </p:sp>
@@ -7455,7 +7382,7 @@
         </p:nvSpPr>
         <p:spPr>
           <a:xfrm>
-            <a:off x="6519924" y="5010912"/>
+            <a:off x="6217920" y="4800600"/>
             <a:ext cx="5760720" cy="320040"/>
           </a:xfrm>
           <a:prstGeom prst="rect">
@@ -7471,18 +7398,13 @@
           <a:p>
             <a:pPr algn="ctr"/>
             <a:r>
-              <a:rPr sz="1300" b="1" dirty="0" err="1">
+              <a:rPr sz="1300" b="1">
                 <a:solidFill>
                   <a:srgbClr val="1A237E"/>
                 </a:solidFill>
               </a:rPr>
               <a:t>ピンクノイズ</a:t>
             </a:r>
-            <a:endParaRPr sz="1300" b="1" dirty="0">
-              <a:solidFill>
-                <a:srgbClr val="1A237E"/>
-              </a:solidFill>
-            </a:endParaRPr>
           </a:p>
         </p:txBody>
       </p:sp>
@@ -7524,7 +7446,7 @@
           </a:fontRef>
         </p:style>
         <p:txBody>
-          <a:bodyPr wrap="square" rtlCol="0" anchor="ctr"/>
+          <a:bodyPr rtlCol="0" anchor="ctr" wrap="square"/>
           <a:lstStyle/>
           <a:p>
             <a:pPr algn="ctr"/>
@@ -7580,7 +7502,6 @@
           <a:lstStyle/>
           <a:p>
             <a:pPr algn="ctr"/>
-            <a:endParaRPr/>
           </a:p>
         </p:txBody>
       </p:sp>
@@ -7627,7 +7548,7 @@
 </file>
 
 <file path=ppt/slides/slide15.xml><?xml version="1.0" encoding="utf-8"?>
-<p:sld xmlns:a="http://schemas.openxmlformats.org/drawingml/2006/main" xmlns:r="http://schemas.openxmlformats.org/officeDocument/2006/relationships" xmlns:p="http://schemas.openxmlformats.org/presentationml/2006/main">
+<p:sld xmlns:a="http://schemas.openxmlformats.org/drawingml/2006/main" xmlns:p="http://schemas.openxmlformats.org/presentationml/2006/main" xmlns:r="http://schemas.openxmlformats.org/officeDocument/2006/relationships">
   <p:cSld>
     <p:spTree>
       <p:nvGrpSpPr>
@@ -7635,14 +7556,7 @@
         <p:cNvGrpSpPr/>
         <p:nvPr/>
       </p:nvGrpSpPr>
-      <p:grpSpPr>
-        <a:xfrm>
-          <a:off x="0" y="0"/>
-          <a:ext cx="0" cy="0"/>
-          <a:chOff x="0" y="0"/>
-          <a:chExt cx="0" cy="0"/>
-        </a:xfrm>
-      </p:grpSpPr>
+      <p:grpSpPr/>
       <p:sp>
         <p:nvSpPr>
           <p:cNvPr id="2" name="Rectangle 1"/>
@@ -7683,7 +7597,6 @@
           <a:lstStyle/>
           <a:p>
             <a:pPr algn="ctr"/>
-            <a:endParaRPr/>
           </a:p>
         </p:txBody>
       </p:sp>
@@ -7829,7 +7742,6 @@
           <a:lstStyle/>
           <a:p>
             <a:pPr algn="ctr"/>
-            <a:endParaRPr/>
           </a:p>
         </p:txBody>
       </p:sp>
@@ -7907,7 +7819,6 @@
           <a:lstStyle/>
           <a:p>
             <a:pPr algn="ctr"/>
-            <a:endParaRPr/>
           </a:p>
         </p:txBody>
       </p:sp>
@@ -7985,7 +7896,6 @@
           <a:lstStyle/>
           <a:p>
             <a:pPr algn="ctr"/>
-            <a:endParaRPr/>
           </a:p>
         </p:txBody>
       </p:sp>
@@ -8063,7 +7973,6 @@
           <a:lstStyle/>
           <a:p>
             <a:pPr algn="ctr"/>
-            <a:endParaRPr/>
           </a:p>
         </p:txBody>
       </p:sp>
@@ -8141,7 +8050,6 @@
           <a:lstStyle/>
           <a:p>
             <a:pPr algn="ctr"/>
-            <a:endParaRPr/>
           </a:p>
         </p:txBody>
       </p:sp>
@@ -8219,7 +8127,6 @@
           <a:lstStyle/>
           <a:p>
             <a:pPr algn="ctr"/>
-            <a:endParaRPr/>
           </a:p>
         </p:txBody>
       </p:sp>
@@ -8297,7 +8204,6 @@
           <a:lstStyle/>
           <a:p>
             <a:pPr algn="ctr"/>
-            <a:endParaRPr/>
           </a:p>
         </p:txBody>
       </p:sp>
@@ -8375,7 +8281,6 @@
           <a:lstStyle/>
           <a:p>
             <a:pPr algn="ctr"/>
-            <a:endParaRPr/>
           </a:p>
         </p:txBody>
       </p:sp>
@@ -8453,7 +8358,6 @@
           <a:lstStyle/>
           <a:p>
             <a:pPr algn="ctr"/>
-            <a:endParaRPr/>
           </a:p>
         </p:txBody>
       </p:sp>
@@ -8531,7 +8435,6 @@
           <a:lstStyle/>
           <a:p>
             <a:pPr algn="ctr"/>
-            <a:endParaRPr/>
           </a:p>
         </p:txBody>
       </p:sp>
@@ -8609,7 +8512,6 @@
           <a:lstStyle/>
           <a:p>
             <a:pPr algn="ctr"/>
-            <a:endParaRPr/>
           </a:p>
         </p:txBody>
       </p:sp>
@@ -8687,7 +8589,6 @@
           <a:lstStyle/>
           <a:p>
             <a:pPr algn="ctr"/>
-            <a:endParaRPr/>
           </a:p>
         </p:txBody>
       </p:sp>
@@ -8765,7 +8666,6 @@
           <a:lstStyle/>
           <a:p>
             <a:pPr algn="ctr"/>
-            <a:endParaRPr/>
           </a:p>
         </p:txBody>
       </p:sp>
@@ -8843,7 +8743,6 @@
           <a:lstStyle/>
           <a:p>
             <a:pPr algn="ctr"/>
-            <a:endParaRPr/>
           </a:p>
         </p:txBody>
       </p:sp>
@@ -8921,7 +8820,6 @@
           <a:lstStyle/>
           <a:p>
             <a:pPr algn="ctr"/>
-            <a:endParaRPr/>
           </a:p>
         </p:txBody>
       </p:sp>
@@ -8999,7 +8897,6 @@
           <a:lstStyle/>
           <a:p>
             <a:pPr algn="ctr"/>
-            <a:endParaRPr/>
           </a:p>
         </p:txBody>
       </p:sp>
@@ -9077,7 +8974,6 @@
           <a:lstStyle/>
           <a:p>
             <a:pPr algn="ctr"/>
-            <a:endParaRPr/>
           </a:p>
         </p:txBody>
       </p:sp>
@@ -9155,7 +9051,6 @@
           <a:lstStyle/>
           <a:p>
             <a:pPr algn="ctr"/>
-            <a:endParaRPr/>
           </a:p>
         </p:txBody>
       </p:sp>
@@ -9233,7 +9128,6 @@
           <a:lstStyle/>
           <a:p>
             <a:pPr algn="ctr"/>
-            <a:endParaRPr/>
           </a:p>
         </p:txBody>
       </p:sp>
@@ -9311,7 +9205,6 @@
           <a:lstStyle/>
           <a:p>
             <a:pPr algn="ctr"/>
-            <a:endParaRPr/>
           </a:p>
         </p:txBody>
       </p:sp>
@@ -9389,7 +9282,6 @@
           <a:lstStyle/>
           <a:p>
             <a:pPr algn="ctr"/>
-            <a:endParaRPr/>
           </a:p>
         </p:txBody>
       </p:sp>
@@ -9467,7 +9359,6 @@
           <a:lstStyle/>
           <a:p>
             <a:pPr algn="ctr"/>
-            <a:endParaRPr/>
           </a:p>
         </p:txBody>
       </p:sp>
@@ -9545,7 +9436,6 @@
           <a:lstStyle/>
           <a:p>
             <a:pPr algn="ctr"/>
-            <a:endParaRPr/>
           </a:p>
         </p:txBody>
       </p:sp>
@@ -9623,7 +9513,6 @@
           <a:lstStyle/>
           <a:p>
             <a:pPr algn="ctr"/>
-            <a:endParaRPr/>
           </a:p>
         </p:txBody>
       </p:sp>
@@ -9769,7 +9658,6 @@
           <a:lstStyle/>
           <a:p>
             <a:pPr algn="ctr"/>
-            <a:endParaRPr/>
           </a:p>
         </p:txBody>
       </p:sp>
@@ -9816,7 +9704,7 @@
 </file>
 
 <file path=ppt/slides/slide16.xml><?xml version="1.0" encoding="utf-8"?>
-<p:sld xmlns:a="http://schemas.openxmlformats.org/drawingml/2006/main" xmlns:r="http://schemas.openxmlformats.org/officeDocument/2006/relationships" xmlns:p="http://schemas.openxmlformats.org/presentationml/2006/main">
+<p:sld xmlns:a="http://schemas.openxmlformats.org/drawingml/2006/main" xmlns:p="http://schemas.openxmlformats.org/presentationml/2006/main" xmlns:r="http://schemas.openxmlformats.org/officeDocument/2006/relationships">
   <p:cSld>
     <p:spTree>
       <p:nvGrpSpPr>
@@ -9824,14 +9712,7 @@
         <p:cNvGrpSpPr/>
         <p:nvPr/>
       </p:nvGrpSpPr>
-      <p:grpSpPr>
-        <a:xfrm>
-          <a:off x="0" y="0"/>
-          <a:ext cx="0" cy="0"/>
-          <a:chOff x="0" y="0"/>
-          <a:chExt cx="0" cy="0"/>
-        </a:xfrm>
-      </p:grpSpPr>
+      <p:grpSpPr/>
       <p:sp>
         <p:nvSpPr>
           <p:cNvPr id="2" name="Rectangle 1"/>
@@ -9872,7 +9753,6 @@
           <a:lstStyle/>
           <a:p>
             <a:pPr algn="ctr"/>
-            <a:endParaRPr/>
           </a:p>
         </p:txBody>
       </p:sp>
@@ -10008,7 +9888,6 @@
           <a:lstStyle/>
           <a:p>
             <a:pPr algn="ctr"/>
-            <a:endParaRPr/>
           </a:p>
         </p:txBody>
       </p:sp>
@@ -10120,7 +9999,6 @@
           <a:lstStyle/>
           <a:p>
             <a:pPr algn="ctr"/>
-            <a:endParaRPr/>
           </a:p>
         </p:txBody>
       </p:sp>
@@ -10232,7 +10110,6 @@
           <a:lstStyle/>
           <a:p>
             <a:pPr algn="ctr"/>
-            <a:endParaRPr/>
           </a:p>
         </p:txBody>
       </p:sp>
@@ -10342,7 +10219,7 @@
           </a:fontRef>
         </p:style>
         <p:txBody>
-          <a:bodyPr wrap="square" rtlCol="0" anchor="ctr"/>
+          <a:bodyPr rtlCol="0" anchor="ctr" wrap="square"/>
           <a:lstStyle/>
           <a:p>
             <a:pPr algn="ctr"/>
@@ -10399,7 +10276,6 @@
           <a:lstStyle/>
           <a:p>
             <a:pPr algn="ctr"/>
-            <a:endParaRPr/>
           </a:p>
         </p:txBody>
       </p:sp>
@@ -10446,7 +10322,7 @@
 </file>
 
 <file path=ppt/slides/slide17.xml><?xml version="1.0" encoding="utf-8"?>
-<p:sld xmlns:a="http://schemas.openxmlformats.org/drawingml/2006/main" xmlns:r="http://schemas.openxmlformats.org/officeDocument/2006/relationships" xmlns:p="http://schemas.openxmlformats.org/presentationml/2006/main">
+<p:sld xmlns:a="http://schemas.openxmlformats.org/drawingml/2006/main" xmlns:p="http://schemas.openxmlformats.org/presentationml/2006/main" xmlns:r="http://schemas.openxmlformats.org/officeDocument/2006/relationships">
   <p:cSld>
     <p:spTree>
       <p:nvGrpSpPr>
@@ -10454,14 +10330,7 @@
         <p:cNvGrpSpPr/>
         <p:nvPr/>
       </p:nvGrpSpPr>
-      <p:grpSpPr>
-        <a:xfrm>
-          <a:off x="0" y="0"/>
-          <a:ext cx="0" cy="0"/>
-          <a:chOff x="0" y="0"/>
-          <a:chExt cx="0" cy="0"/>
-        </a:xfrm>
-      </p:grpSpPr>
+      <p:grpSpPr/>
       <p:sp>
         <p:nvSpPr>
           <p:cNvPr id="2" name="Rectangle 1"/>
@@ -10502,7 +10371,6 @@
           <a:lstStyle/>
           <a:p>
             <a:pPr algn="ctr"/>
-            <a:endParaRPr/>
           </a:p>
         </p:txBody>
       </p:sp>
@@ -10874,7 +10742,7 @@
           </a:fontRef>
         </p:style>
         <p:txBody>
-          <a:bodyPr wrap="square" rtlCol="0" anchor="ctr"/>
+          <a:bodyPr rtlCol="0" anchor="ctr" wrap="square"/>
           <a:lstStyle/>
           <a:p>
             <a:pPr algn="ctr"/>
@@ -10931,7 +10799,6 @@
           <a:lstStyle/>
           <a:p>
             <a:pPr algn="ctr"/>
-            <a:endParaRPr/>
           </a:p>
         </p:txBody>
       </p:sp>
@@ -10978,7 +10845,7 @@
 </file>
 
 <file path=ppt/slides/slide18.xml><?xml version="1.0" encoding="utf-8"?>
-<p:sld xmlns:a="http://schemas.openxmlformats.org/drawingml/2006/main" xmlns:r="http://schemas.openxmlformats.org/officeDocument/2006/relationships" xmlns:p="http://schemas.openxmlformats.org/presentationml/2006/main">
+<p:sld xmlns:a="http://schemas.openxmlformats.org/drawingml/2006/main" xmlns:p="http://schemas.openxmlformats.org/presentationml/2006/main" xmlns:r="http://schemas.openxmlformats.org/officeDocument/2006/relationships">
   <p:cSld>
     <p:spTree>
       <p:nvGrpSpPr>
@@ -10986,14 +10853,7 @@
         <p:cNvGrpSpPr/>
         <p:nvPr/>
       </p:nvGrpSpPr>
-      <p:grpSpPr>
-        <a:xfrm>
-          <a:off x="0" y="0"/>
-          <a:ext cx="0" cy="0"/>
-          <a:chOff x="0" y="0"/>
-          <a:chExt cx="0" cy="0"/>
-        </a:xfrm>
-      </p:grpSpPr>
+      <p:grpSpPr/>
       <p:sp>
         <p:nvSpPr>
           <p:cNvPr id="2" name="Rectangle 1"/>
@@ -11034,7 +10894,6 @@
           <a:lstStyle/>
           <a:p>
             <a:pPr algn="ctr"/>
-            <a:endParaRPr/>
           </a:p>
         </p:txBody>
       </p:sp>
@@ -11146,7 +11005,6 @@
           <a:lstStyle/>
           <a:p>
             <a:pPr algn="ctr"/>
-            <a:endParaRPr/>
           </a:p>
         </p:txBody>
       </p:sp>
@@ -11259,7 +11117,6 @@
           <a:lstStyle/>
           <a:p>
             <a:pPr algn="ctr"/>
-            <a:endParaRPr/>
           </a:p>
         </p:txBody>
       </p:sp>
@@ -11372,7 +11229,6 @@
           <a:lstStyle/>
           <a:p>
             <a:pPr algn="ctr"/>
-            <a:endParaRPr/>
           </a:p>
         </p:txBody>
       </p:sp>
@@ -11485,7 +11341,6 @@
           <a:lstStyle/>
           <a:p>
             <a:pPr algn="ctr"/>
-            <a:endParaRPr/>
           </a:p>
         </p:txBody>
       </p:sp>
@@ -11660,7 +11515,7 @@
           </a:fontRef>
         </p:style>
         <p:txBody>
-          <a:bodyPr wrap="square" rtlCol="0" anchor="ctr"/>
+          <a:bodyPr rtlCol="0" anchor="ctr" wrap="square"/>
           <a:lstStyle/>
           <a:p>
             <a:pPr algn="ctr"/>
@@ -11716,7 +11571,6 @@
           <a:lstStyle/>
           <a:p>
             <a:pPr algn="ctr"/>
-            <a:endParaRPr/>
           </a:p>
         </p:txBody>
       </p:sp>
@@ -11763,7 +11617,7 @@
 </file>
 
 <file path=ppt/slides/slide19.xml><?xml version="1.0" encoding="utf-8"?>
-<p:sld xmlns:a="http://schemas.openxmlformats.org/drawingml/2006/main" xmlns:r="http://schemas.openxmlformats.org/officeDocument/2006/relationships" xmlns:p="http://schemas.openxmlformats.org/presentationml/2006/main">
+<p:sld xmlns:a="http://schemas.openxmlformats.org/drawingml/2006/main" xmlns:p="http://schemas.openxmlformats.org/presentationml/2006/main" xmlns:r="http://schemas.openxmlformats.org/officeDocument/2006/relationships">
   <p:cSld>
     <p:spTree>
       <p:nvGrpSpPr>
@@ -11771,14 +11625,7 @@
         <p:cNvGrpSpPr/>
         <p:nvPr/>
       </p:nvGrpSpPr>
-      <p:grpSpPr>
-        <a:xfrm>
-          <a:off x="0" y="0"/>
-          <a:ext cx="0" cy="0"/>
-          <a:chOff x="0" y="0"/>
-          <a:chExt cx="0" cy="0"/>
-        </a:xfrm>
-      </p:grpSpPr>
+      <p:grpSpPr/>
       <p:sp>
         <p:nvSpPr>
           <p:cNvPr id="2" name="Rectangle 1"/>
@@ -11819,7 +11666,6 @@
           <a:lstStyle/>
           <a:p>
             <a:pPr algn="ctr"/>
-            <a:endParaRPr/>
           </a:p>
         </p:txBody>
       </p:sp>
@@ -11897,7 +11743,6 @@
           <a:lstStyle/>
           <a:p>
             <a:pPr algn="ctr"/>
-            <a:endParaRPr/>
           </a:p>
         </p:txBody>
       </p:sp>
@@ -12127,7 +11972,6 @@
           <a:lstStyle/>
           <a:p>
             <a:pPr algn="ctr"/>
-            <a:endParaRPr/>
           </a:p>
         </p:txBody>
       </p:sp>
@@ -12174,7 +12018,7 @@
 </file>
 
 <file path=ppt/slides/slide2.xml><?xml version="1.0" encoding="utf-8"?>
-<p:sld xmlns:a="http://schemas.openxmlformats.org/drawingml/2006/main" xmlns:r="http://schemas.openxmlformats.org/officeDocument/2006/relationships" xmlns:p="http://schemas.openxmlformats.org/presentationml/2006/main">
+<p:sld xmlns:a="http://schemas.openxmlformats.org/drawingml/2006/main" xmlns:p="http://schemas.openxmlformats.org/presentationml/2006/main" xmlns:r="http://schemas.openxmlformats.org/officeDocument/2006/relationships">
   <p:cSld>
     <p:spTree>
       <p:nvGrpSpPr>
@@ -12182,14 +12026,7 @@
         <p:cNvGrpSpPr/>
         <p:nvPr/>
       </p:nvGrpSpPr>
-      <p:grpSpPr>
-        <a:xfrm>
-          <a:off x="0" y="0"/>
-          <a:ext cx="0" cy="0"/>
-          <a:chOff x="0" y="0"/>
-          <a:chExt cx="0" cy="0"/>
-        </a:xfrm>
-      </p:grpSpPr>
+      <p:grpSpPr/>
       <p:sp>
         <p:nvSpPr>
           <p:cNvPr id="2" name="Rectangle 1"/>
@@ -12230,7 +12067,6 @@
           <a:lstStyle/>
           <a:p>
             <a:pPr algn="ctr"/>
-            <a:endParaRPr/>
           </a:p>
         </p:txBody>
       </p:sp>
@@ -12308,7 +12144,6 @@
           <a:lstStyle/>
           <a:p>
             <a:pPr algn="ctr"/>
-            <a:endParaRPr/>
           </a:p>
         </p:txBody>
       </p:sp>
@@ -12420,7 +12255,6 @@
           <a:lstStyle/>
           <a:p>
             <a:pPr algn="ctr"/>
-            <a:endParaRPr/>
           </a:p>
         </p:txBody>
       </p:sp>
@@ -12532,7 +12366,6 @@
           <a:lstStyle/>
           <a:p>
             <a:pPr algn="ctr"/>
-            <a:endParaRPr/>
           </a:p>
         </p:txBody>
       </p:sp>
@@ -12644,7 +12477,6 @@
           <a:lstStyle/>
           <a:p>
             <a:pPr algn="ctr"/>
-            <a:endParaRPr/>
           </a:p>
         </p:txBody>
       </p:sp>
@@ -12756,7 +12588,6 @@
           <a:lstStyle/>
           <a:p>
             <a:pPr algn="ctr"/>
-            <a:endParaRPr/>
           </a:p>
         </p:txBody>
       </p:sp>
@@ -12868,7 +12699,6 @@
           <a:lstStyle/>
           <a:p>
             <a:pPr algn="ctr"/>
-            <a:endParaRPr/>
           </a:p>
         </p:txBody>
       </p:sp>
@@ -12980,7 +12810,6 @@
           <a:lstStyle/>
           <a:p>
             <a:pPr algn="ctr"/>
-            <a:endParaRPr/>
           </a:p>
         </p:txBody>
       </p:sp>
@@ -13092,7 +12921,6 @@
           <a:lstStyle/>
           <a:p>
             <a:pPr algn="ctr"/>
-            <a:endParaRPr/>
           </a:p>
         </p:txBody>
       </p:sp>
@@ -13204,7 +13032,6 @@
           <a:lstStyle/>
           <a:p>
             <a:pPr algn="ctr"/>
-            <a:endParaRPr/>
           </a:p>
         </p:txBody>
       </p:sp>
@@ -13251,7 +13078,7 @@
 </file>
 
 <file path=ppt/slides/slide20.xml><?xml version="1.0" encoding="utf-8"?>
-<p:sld xmlns:a="http://schemas.openxmlformats.org/drawingml/2006/main" xmlns:r="http://schemas.openxmlformats.org/officeDocument/2006/relationships" xmlns:p="http://schemas.openxmlformats.org/presentationml/2006/main">
+<p:sld xmlns:a="http://schemas.openxmlformats.org/drawingml/2006/main" xmlns:p="http://schemas.openxmlformats.org/presentationml/2006/main" xmlns:r="http://schemas.openxmlformats.org/officeDocument/2006/relationships">
   <p:cSld>
     <p:spTree>
       <p:nvGrpSpPr>
@@ -13259,14 +13086,7 @@
         <p:cNvGrpSpPr/>
         <p:nvPr/>
       </p:nvGrpSpPr>
-      <p:grpSpPr>
-        <a:xfrm>
-          <a:off x="0" y="0"/>
-          <a:ext cx="0" cy="0"/>
-          <a:chOff x="0" y="0"/>
-          <a:chExt cx="0" cy="0"/>
-        </a:xfrm>
-      </p:grpSpPr>
+      <p:grpSpPr/>
       <p:sp>
         <p:nvSpPr>
           <p:cNvPr id="2" name="Rectangle 1"/>
@@ -13307,7 +13127,6 @@
           <a:lstStyle/>
           <a:p>
             <a:pPr algn="ctr"/>
-            <a:endParaRPr/>
           </a:p>
         </p:txBody>
       </p:sp>
@@ -13419,7 +13238,6 @@
           <a:lstStyle/>
           <a:p>
             <a:pPr algn="ctr"/>
-            <a:endParaRPr/>
           </a:p>
         </p:txBody>
       </p:sp>
@@ -13532,7 +13350,6 @@
           <a:lstStyle/>
           <a:p>
             <a:pPr algn="ctr"/>
-            <a:endParaRPr/>
           </a:p>
         </p:txBody>
       </p:sp>
@@ -13627,7 +13444,14 @@
           <a:lstStyle/>
           <a:p>
             <a:pPr algn="l"/>
-            <a:endParaRPr/>
+            <a:r>
+              <a:rPr sz="1300" b="0">
+                <a:solidFill>
+                  <a:srgbClr val="43A047"/>
+                </a:solidFill>
+              </a:rPr>
+              <a:t/>
+            </a:r>
           </a:p>
         </p:txBody>
       </p:sp>
@@ -13671,7 +13495,6 @@
           <a:lstStyle/>
           <a:p>
             <a:pPr algn="ctr"/>
-            <a:endParaRPr/>
           </a:p>
         </p:txBody>
       </p:sp>
@@ -13817,7 +13640,6 @@
           <a:lstStyle/>
           <a:p>
             <a:pPr algn="ctr"/>
-            <a:endParaRPr/>
           </a:p>
         </p:txBody>
       </p:sp>
@@ -13998,7 +13820,6 @@
           <a:lstStyle/>
           <a:p>
             <a:pPr algn="ctr"/>
-            <a:endParaRPr/>
           </a:p>
         </p:txBody>
       </p:sp>
@@ -14045,7 +13866,7 @@
 </file>
 
 <file path=ppt/slides/slide21.xml><?xml version="1.0" encoding="utf-8"?>
-<p:sld xmlns:a="http://schemas.openxmlformats.org/drawingml/2006/main" xmlns:r="http://schemas.openxmlformats.org/officeDocument/2006/relationships" xmlns:p="http://schemas.openxmlformats.org/presentationml/2006/main">
+<p:sld xmlns:a="http://schemas.openxmlformats.org/drawingml/2006/main" xmlns:p="http://schemas.openxmlformats.org/presentationml/2006/main" xmlns:r="http://schemas.openxmlformats.org/officeDocument/2006/relationships">
   <p:cSld>
     <p:spTree>
       <p:nvGrpSpPr>
@@ -14053,14 +13874,7 @@
         <p:cNvGrpSpPr/>
         <p:nvPr/>
       </p:nvGrpSpPr>
-      <p:grpSpPr>
-        <a:xfrm>
-          <a:off x="0" y="0"/>
-          <a:ext cx="0" cy="0"/>
-          <a:chOff x="0" y="0"/>
-          <a:chExt cx="0" cy="0"/>
-        </a:xfrm>
-      </p:grpSpPr>
+      <p:grpSpPr/>
       <p:sp>
         <p:nvSpPr>
           <p:cNvPr id="2" name="Rectangle 1"/>
@@ -14101,7 +13915,6 @@
           <a:lstStyle/>
           <a:p>
             <a:pPr algn="ctr"/>
-            <a:endParaRPr/>
           </a:p>
         </p:txBody>
       </p:sp>
@@ -14179,7 +13992,6 @@
           <a:lstStyle/>
           <a:p>
             <a:pPr algn="ctr"/>
-            <a:endParaRPr/>
           </a:p>
         </p:txBody>
       </p:sp>
@@ -14326,7 +14138,6 @@
           <a:lstStyle/>
           <a:p>
             <a:pPr algn="ctr"/>
-            <a:endParaRPr/>
           </a:p>
         </p:txBody>
       </p:sp>
@@ -14473,7 +14284,6 @@
           <a:lstStyle/>
           <a:p>
             <a:pPr algn="ctr"/>
-            <a:endParaRPr/>
           </a:p>
         </p:txBody>
       </p:sp>
@@ -14620,7 +14430,6 @@
           <a:lstStyle/>
           <a:p>
             <a:pPr algn="ctr"/>
-            <a:endParaRPr/>
           </a:p>
         </p:txBody>
       </p:sp>
@@ -14667,7 +14476,7 @@
 </file>
 
 <file path=ppt/slides/slide22.xml><?xml version="1.0" encoding="utf-8"?>
-<p:sld xmlns:a="http://schemas.openxmlformats.org/drawingml/2006/main" xmlns:r="http://schemas.openxmlformats.org/officeDocument/2006/relationships" xmlns:p="http://schemas.openxmlformats.org/presentationml/2006/main">
+<p:sld xmlns:a="http://schemas.openxmlformats.org/drawingml/2006/main" xmlns:p="http://schemas.openxmlformats.org/presentationml/2006/main" xmlns:r="http://schemas.openxmlformats.org/officeDocument/2006/relationships">
   <p:cSld>
     <p:spTree>
       <p:nvGrpSpPr>
@@ -14675,14 +14484,7 @@
         <p:cNvGrpSpPr/>
         <p:nvPr/>
       </p:nvGrpSpPr>
-      <p:grpSpPr>
-        <a:xfrm>
-          <a:off x="0" y="0"/>
-          <a:ext cx="0" cy="0"/>
-          <a:chOff x="0" y="0"/>
-          <a:chExt cx="0" cy="0"/>
-        </a:xfrm>
-      </p:grpSpPr>
+      <p:grpSpPr/>
       <p:sp>
         <p:nvSpPr>
           <p:cNvPr id="2" name="Rectangle 1"/>
@@ -14723,7 +14525,6 @@
           <a:lstStyle/>
           <a:p>
             <a:pPr algn="ctr"/>
-            <a:endParaRPr/>
           </a:p>
         </p:txBody>
       </p:sp>
@@ -14756,7 +14557,7 @@
                   <a:srgbClr val="FFFFFF"/>
                 </a:solidFill>
               </a:rPr>
-              <a:t>まとめ</a:t>
+              <a:t>フェーズ2：アプローチの転換</a:t>
             </a:r>
           </a:p>
         </p:txBody>
@@ -14769,8 +14570,8 @@
         </p:nvSpPr>
         <p:spPr>
           <a:xfrm>
-            <a:off x="365760" y="1463040"/>
-            <a:ext cx="11430000" cy="502920"/>
+            <a:off x="365760" y="1371600"/>
+            <a:ext cx="11430000" cy="457200"/>
           </a:xfrm>
           <a:prstGeom prst="rect">
             <a:avLst/>
@@ -14785,12 +14586,12 @@
           <a:p>
             <a:pPr algn="l"/>
             <a:r>
-              <a:rPr sz="1700" b="0">
-                <a:solidFill>
-                  <a:srgbClr val="212121"/>
-                </a:solidFill>
-              </a:rPr>
-              <a:t>喉マイク音声に対するSEの効果を、CER・STOI・PESQ・統計検定を用いて34条件で定量評価した。</a:t>
+              <a:rPr sz="2000" b="1">
+                <a:solidFill>
+                  <a:srgbClr val="1A237E"/>
+                </a:solidFill>
+              </a:rPr>
+              <a:t>なぜSEではなくASR再学習か？</a:t>
             </a:r>
           </a:p>
         </p:txBody>
@@ -14803,14 +14604,14 @@
         </p:nvSpPr>
         <p:spPr>
           <a:xfrm>
-            <a:off x="365760" y="2103120"/>
-            <a:ext cx="11430000" cy="749808"/>
+            <a:off x="365760" y="2011680"/>
+            <a:ext cx="11430000" cy="1691640"/>
           </a:xfrm>
           <a:prstGeom prst="rect">
             <a:avLst/>
           </a:prstGeom>
           <a:solidFill>
-            <a:srgbClr val="F5F5F5"/>
+            <a:srgbClr val="FFEBEE"/>
           </a:solidFill>
           <a:ln>
             <a:noFill/>
@@ -14835,7 +14636,6 @@
           <a:lstStyle/>
           <a:p>
             <a:pPr algn="ctr"/>
-            <a:endParaRPr/>
           </a:p>
         </p:txBody>
       </p:sp>
@@ -14847,8 +14647,8 @@
         </p:nvSpPr>
         <p:spPr>
           <a:xfrm>
-            <a:off x="502920" y="2249424"/>
-            <a:ext cx="731520" cy="411480"/>
+            <a:off x="502920" y="2103120"/>
+            <a:ext cx="10972800" cy="411480"/>
           </a:xfrm>
           <a:prstGeom prst="rect">
             <a:avLst/>
@@ -14863,12 +14663,12 @@
           <a:p>
             <a:pPr algn="l"/>
             <a:r>
-              <a:rPr sz="1500" b="1">
+              <a:rPr sz="1600" b="1">
                 <a:solidFill>
                   <a:srgbClr val="C62828"/>
                 </a:solidFill>
               </a:rPr>
-              <a:t>（1）</a:t>
+              <a:t>✗  SEによる音声変換（フェーズ2-試行）</a:t>
             </a:r>
           </a:p>
         </p:txBody>
@@ -14881,8 +14681,8 @@
         </p:nvSpPr>
         <p:spPr>
           <a:xfrm>
-            <a:off x="1143000" y="2249424"/>
-            <a:ext cx="10424160" cy="411480"/>
+            <a:off x="640080" y="2560320"/>
+            <a:ext cx="10972800" cy="1005840"/>
           </a:xfrm>
           <a:prstGeom prst="rect">
             <a:avLst/>
@@ -14897,12 +14697,14 @@
           <a:p>
             <a:pPr algn="l"/>
             <a:r>
-              <a:rPr sz="1500" b="0">
+              <a:rPr sz="1300" b="0">
                 <a:solidFill>
                   <a:srgbClr val="212121"/>
                 </a:solidFill>
               </a:rPr>
-              <a:t>DSP-onlyおよびGTCRNは全ノイズ条件でCERを有意に悪化させる（30検定中26件 p&lt;0.05）</a:t>
+              <a:t>GTCRNを「喉マイク→気導マイク変換」にFT
+→ 存在しない高周波を生成することはできない
+→ Loss収束せず、CER≈1.0で失敗</a:t>
             </a:r>
           </a:p>
         </p:txBody>
@@ -14915,14 +14717,14 @@
         </p:nvSpPr>
         <p:spPr>
           <a:xfrm>
-            <a:off x="365760" y="2971800"/>
-            <a:ext cx="11430000" cy="749808"/>
+            <a:off x="365760" y="3931920"/>
+            <a:ext cx="11430000" cy="1691640"/>
           </a:xfrm>
           <a:prstGeom prst="rect">
             <a:avLst/>
           </a:prstGeom>
           <a:solidFill>
-            <a:srgbClr val="F5F5F5"/>
+            <a:srgbClr val="E8F5E9"/>
           </a:solidFill>
           <a:ln>
             <a:noFill/>
@@ -14947,7 +14749,6 @@
           <a:lstStyle/>
           <a:p>
             <a:pPr algn="ctr"/>
-            <a:endParaRPr/>
           </a:p>
         </p:txBody>
       </p:sp>
@@ -14959,8 +14760,8 @@
         </p:nvSpPr>
         <p:spPr>
           <a:xfrm>
-            <a:off x="502920" y="3118104"/>
-            <a:ext cx="731520" cy="411480"/>
+            <a:off x="502920" y="4023360"/>
+            <a:ext cx="10972800" cy="411480"/>
           </a:xfrm>
           <a:prstGeom prst="rect">
             <a:avLst/>
@@ -14975,12 +14776,12 @@
           <a:p>
             <a:pPr algn="l"/>
             <a:r>
-              <a:rPr sz="1500" b="1">
-                <a:solidFill>
-                  <a:srgbClr val="FF9800"/>
-                </a:solidFill>
-              </a:rPr>
-              <a:t>（2）</a:t>
+              <a:rPr sz="1600" b="1">
+                <a:solidFill>
+                  <a:srgbClr val="43A047"/>
+                </a:solidFill>
+              </a:rPr>
+              <a:t>✓  ASRモデルのドメイン適応（採用）</a:t>
             </a:r>
           </a:p>
         </p:txBody>
@@ -14993,8 +14794,8 @@
         </p:nvSpPr>
         <p:spPr>
           <a:xfrm>
-            <a:off x="1143000" y="3118104"/>
-            <a:ext cx="10424160" cy="411480"/>
+            <a:off x="640080" y="4480560"/>
+            <a:ext cx="10972800" cy="1005840"/>
           </a:xfrm>
           <a:prstGeom prst="rect">
             <a:avLst/>
@@ -15009,12 +14810,14 @@
           <a:p>
             <a:pPr algn="l"/>
             <a:r>
-              <a:rPr sz="1500" b="0">
+              <a:rPr sz="1300" b="0">
                 <a:solidFill>
                   <a:srgbClr val="212121"/>
                 </a:solidFill>
               </a:rPr>
-              <a:t>GTCRNはSTOI・PESQを改善しながらCERを悪化させる三重パラドックスが全ノイズ条件で観測された</a:t>
+              <a:t>Whisper smallをTAPS喉マイク音声でFT（4,000発話・10時間）
+→ 「喉マイクの音響特性」をASR側が直接学習
+→ CER 0.269 → 0.095（64.6%改善）</a:t>
             </a:r>
           </a:p>
         </p:txBody>
@@ -15022,230 +14825,6 @@
       <p:sp>
         <p:nvSpPr>
           <p:cNvPr id="11" name="Rectangle 10"/>
-          <p:cNvSpPr/>
-          <p:nvPr/>
-        </p:nvSpPr>
-        <p:spPr>
-          <a:xfrm>
-            <a:off x="365760" y="3840480"/>
-            <a:ext cx="11430000" cy="749808"/>
-          </a:xfrm>
-          <a:prstGeom prst="rect">
-            <a:avLst/>
-          </a:prstGeom>
-          <a:solidFill>
-            <a:srgbClr val="F5F5F5"/>
-          </a:solidFill>
-          <a:ln>
-            <a:noFill/>
-          </a:ln>
-        </p:spPr>
-        <p:style>
-          <a:lnRef idx="1">
-            <a:schemeClr val="accent1"/>
-          </a:lnRef>
-          <a:fillRef idx="3">
-            <a:schemeClr val="accent1"/>
-          </a:fillRef>
-          <a:effectRef idx="2">
-            <a:schemeClr val="accent1"/>
-          </a:effectRef>
-          <a:fontRef idx="minor">
-            <a:schemeClr val="lt1"/>
-          </a:fontRef>
-        </p:style>
-        <p:txBody>
-          <a:bodyPr rtlCol="0" anchor="ctr"/>
-          <a:lstStyle/>
-          <a:p>
-            <a:pPr algn="ctr"/>
-            <a:endParaRPr/>
-          </a:p>
-        </p:txBody>
-      </p:sp>
-      <p:sp>
-        <p:nvSpPr>
-          <p:cNvPr id="12" name="TextBox 11"/>
-          <p:cNvSpPr txBox="1"/>
-          <p:nvPr/>
-        </p:nvSpPr>
-        <p:spPr>
-          <a:xfrm>
-            <a:off x="502920" y="3986784"/>
-            <a:ext cx="731520" cy="411480"/>
-          </a:xfrm>
-          <a:prstGeom prst="rect">
-            <a:avLst/>
-          </a:prstGeom>
-          <a:noFill/>
-        </p:spPr>
-        <p:txBody>
-          <a:bodyPr wrap="square">
-            <a:spAutoFit/>
-          </a:bodyPr>
-          <a:lstStyle/>
-          <a:p>
-            <a:pPr algn="l"/>
-            <a:r>
-              <a:rPr sz="1500" b="1">
-                <a:solidFill>
-                  <a:srgbClr val="FF9800"/>
-                </a:solidFill>
-              </a:rPr>
-              <a:t>（3）</a:t>
-            </a:r>
-          </a:p>
-        </p:txBody>
-      </p:sp>
-      <p:sp>
-        <p:nvSpPr>
-          <p:cNvPr id="13" name="TextBox 12"/>
-          <p:cNvSpPr txBox="1"/>
-          <p:nvPr/>
-        </p:nvSpPr>
-        <p:spPr>
-          <a:xfrm>
-            <a:off x="1143000" y="3986784"/>
-            <a:ext cx="10424160" cy="411480"/>
-          </a:xfrm>
-          <a:prstGeom prst="rect">
-            <a:avLst/>
-          </a:prstGeom>
-          <a:noFill/>
-        </p:spPr>
-        <p:txBody>
-          <a:bodyPr wrap="square">
-            <a:spAutoFit/>
-          </a:bodyPr>
-          <a:lstStyle/>
-          <a:p>
-            <a:pPr algn="l"/>
-            <a:r>
-              <a:rPr sz="1500" b="0">
-                <a:solidFill>
-                  <a:srgbClr val="212121"/>
-                </a:solidFill>
-              </a:rPr>
-              <a:t>DSP-onlyは3指標すべてを悪化させ、喉マイクには不適切な前処理である</a:t>
-            </a:r>
-          </a:p>
-        </p:txBody>
-      </p:sp>
-      <p:sp>
-        <p:nvSpPr>
-          <p:cNvPr id="14" name="Rectangle 13"/>
-          <p:cNvSpPr/>
-          <p:nvPr/>
-        </p:nvSpPr>
-        <p:spPr>
-          <a:xfrm>
-            <a:off x="365760" y="4709160"/>
-            <a:ext cx="11430000" cy="749808"/>
-          </a:xfrm>
-          <a:prstGeom prst="rect">
-            <a:avLst/>
-          </a:prstGeom>
-          <a:solidFill>
-            <a:srgbClr val="F5F5F5"/>
-          </a:solidFill>
-          <a:ln>
-            <a:noFill/>
-          </a:ln>
-        </p:spPr>
-        <p:style>
-          <a:lnRef idx="1">
-            <a:schemeClr val="accent1"/>
-          </a:lnRef>
-          <a:fillRef idx="3">
-            <a:schemeClr val="accent1"/>
-          </a:fillRef>
-          <a:effectRef idx="2">
-            <a:schemeClr val="accent1"/>
-          </a:effectRef>
-          <a:fontRef idx="minor">
-            <a:schemeClr val="lt1"/>
-          </a:fontRef>
-        </p:style>
-        <p:txBody>
-          <a:bodyPr rtlCol="0" anchor="ctr"/>
-          <a:lstStyle/>
-          <a:p>
-            <a:pPr algn="ctr"/>
-            <a:endParaRPr/>
-          </a:p>
-        </p:txBody>
-      </p:sp>
-      <p:sp>
-        <p:nvSpPr>
-          <p:cNvPr id="15" name="TextBox 14"/>
-          <p:cNvSpPr txBox="1"/>
-          <p:nvPr/>
-        </p:nvSpPr>
-        <p:spPr>
-          <a:xfrm>
-            <a:off x="502920" y="4855464"/>
-            <a:ext cx="731520" cy="411480"/>
-          </a:xfrm>
-          <a:prstGeom prst="rect">
-            <a:avLst/>
-          </a:prstGeom>
-          <a:noFill/>
-        </p:spPr>
-        <p:txBody>
-          <a:bodyPr wrap="square">
-            <a:spAutoFit/>
-          </a:bodyPr>
-          <a:lstStyle/>
-          <a:p>
-            <a:pPr algn="l"/>
-            <a:r>
-              <a:rPr sz="1500" b="1">
-                <a:solidFill>
-                  <a:srgbClr val="1A237E"/>
-                </a:solidFill>
-              </a:rPr>
-              <a:t>（4）</a:t>
-            </a:r>
-          </a:p>
-        </p:txBody>
-      </p:sp>
-      <p:sp>
-        <p:nvSpPr>
-          <p:cNvPr id="16" name="TextBox 15"/>
-          <p:cNvSpPr txBox="1"/>
-          <p:nvPr/>
-        </p:nvSpPr>
-        <p:spPr>
-          <a:xfrm>
-            <a:off x="1143000" y="4855464"/>
-            <a:ext cx="10424160" cy="411480"/>
-          </a:xfrm>
-          <a:prstGeom prst="rect">
-            <a:avLst/>
-          </a:prstGeom>
-          <a:noFill/>
-        </p:spPr>
-        <p:txBody>
-          <a:bodyPr wrap="square">
-            <a:spAutoFit/>
-          </a:bodyPr>
-          <a:lstStyle/>
-          <a:p>
-            <a:pPr algn="l"/>
-            <a:r>
-              <a:rPr sz="1500" b="0">
-                <a:solidFill>
-                  <a:srgbClr val="212121"/>
-                </a:solidFill>
-              </a:rPr>
-              <a:t>ASRを目的とするSE評価では、STOI/PESQ等の知覚品質指標だけでなくCERによる直接評価が不可欠</a:t>
-            </a:r>
-          </a:p>
-        </p:txBody>
-      </p:sp>
-      <p:sp>
-        <p:nvSpPr>
-          <p:cNvPr id="17" name="Rectangle 16"/>
           <p:cNvSpPr/>
           <p:nvPr/>
         </p:nvSpPr>
@@ -15283,13 +14862,12 @@
           <a:lstStyle/>
           <a:p>
             <a:pPr algn="ctr"/>
-            <a:endParaRPr/>
-          </a:p>
-        </p:txBody>
-      </p:sp>
-      <p:sp>
-        <p:nvSpPr>
-          <p:cNvPr id="18" name="TextBox 17"/>
+          </a:p>
+        </p:txBody>
+      </p:sp>
+      <p:sp>
+        <p:nvSpPr>
+          <p:cNvPr id="12" name="TextBox 11"/>
           <p:cNvSpPr txBox="1"/>
           <p:nvPr/>
         </p:nvSpPr>
@@ -15330,7 +14908,7 @@
 </file>
 
 <file path=ppt/slides/slide23.xml><?xml version="1.0" encoding="utf-8"?>
-<p:sld xmlns:a="http://schemas.openxmlformats.org/drawingml/2006/main" xmlns:r="http://schemas.openxmlformats.org/officeDocument/2006/relationships" xmlns:p="http://schemas.openxmlformats.org/presentationml/2006/main">
+<p:sld xmlns:a="http://schemas.openxmlformats.org/drawingml/2006/main" xmlns:p="http://schemas.openxmlformats.org/presentationml/2006/main" xmlns:r="http://schemas.openxmlformats.org/officeDocument/2006/relationships">
   <p:cSld>
     <p:spTree>
       <p:nvGrpSpPr>
@@ -15338,14 +14916,7 @@
         <p:cNvGrpSpPr/>
         <p:nvPr/>
       </p:nvGrpSpPr>
-      <p:grpSpPr>
-        <a:xfrm>
-          <a:off x="0" y="0"/>
-          <a:ext cx="0" cy="0"/>
-          <a:chOff x="0" y="0"/>
-          <a:chExt cx="0" cy="0"/>
-        </a:xfrm>
-      </p:grpSpPr>
+      <p:grpSpPr/>
       <p:sp>
         <p:nvSpPr>
           <p:cNvPr id="2" name="Rectangle 1"/>
@@ -15386,7 +14957,6 @@
           <a:lstStyle/>
           <a:p>
             <a:pPr algn="ctr"/>
-            <a:endParaRPr/>
           </a:p>
         </p:txBody>
       </p:sp>
@@ -15419,7 +14989,7 @@
                   <a:srgbClr val="FFFFFF"/>
                 </a:solidFill>
               </a:rPr>
-              <a:t>今後の展望</a:t>
+              <a:t>フェーズ2：Whisperファインチューニング結果</a:t>
             </a:r>
           </a:p>
         </p:txBody>
@@ -15432,14 +15002,14 @@
         </p:nvSpPr>
         <p:spPr>
           <a:xfrm>
-            <a:off x="365760" y="1463040"/>
-            <a:ext cx="11430000" cy="1463040"/>
+            <a:off x="365760" y="1417320"/>
+            <a:ext cx="5394960" cy="2286000"/>
           </a:xfrm>
           <a:prstGeom prst="rect">
             <a:avLst/>
           </a:prstGeom>
           <a:solidFill>
-            <a:srgbClr val="FFEBEE"/>
+            <a:srgbClr val="E3F2FD"/>
           </a:solidFill>
           <a:ln>
             <a:noFill/>
@@ -15464,7 +15034,6 @@
           <a:lstStyle/>
           <a:p>
             <a:pPr algn="ctr"/>
-            <a:endParaRPr/>
           </a:p>
         </p:txBody>
       </p:sp>
@@ -15476,130 +15045,130 @@
         </p:nvSpPr>
         <p:spPr>
           <a:xfrm>
-            <a:off x="502920" y="1508760"/>
-            <a:ext cx="2560320" cy="320040"/>
-          </a:xfrm>
-          <a:prstGeom prst="rect">
-            <a:avLst/>
-          </a:prstGeom>
-          <a:noFill/>
-        </p:spPr>
-        <p:txBody>
-          <a:bodyPr wrap="square">
-            <a:spAutoFit/>
-          </a:bodyPr>
-          <a:lstStyle/>
-          <a:p>
-            <a:pPr algn="l"/>
-            <a:r>
-              <a:rPr sz="1100" b="1">
+            <a:off x="457200" y="1508760"/>
+            <a:ext cx="5212080" cy="411480"/>
+          </a:xfrm>
+          <a:prstGeom prst="rect">
+            <a:avLst/>
+          </a:prstGeom>
+          <a:noFill/>
+        </p:spPr>
+        <p:txBody>
+          <a:bodyPr wrap="square">
+            <a:spAutoFit/>
+          </a:bodyPr>
+          <a:lstStyle/>
+          <a:p>
+            <a:pPr algn="ctr"/>
+            <a:r>
+              <a:rPr sz="1400" b="1">
+                <a:solidFill>
+                  <a:srgbClr val="1A237E"/>
+                </a:solidFill>
+              </a:rPr>
+              <a:t>未学習 Whisper small</a:t>
+            </a:r>
+          </a:p>
+        </p:txBody>
+      </p:sp>
+      <p:sp>
+        <p:nvSpPr>
+          <p:cNvPr id="6" name="TextBox 5"/>
+          <p:cNvSpPr txBox="1"/>
+          <p:nvPr/>
+        </p:nvSpPr>
+        <p:spPr>
+          <a:xfrm>
+            <a:off x="457200" y="1920240"/>
+            <a:ext cx="5212080" cy="731520"/>
+          </a:xfrm>
+          <a:prstGeom prst="rect">
+            <a:avLst/>
+          </a:prstGeom>
+          <a:noFill/>
+        </p:spPr>
+        <p:txBody>
+          <a:bodyPr wrap="square">
+            <a:spAutoFit/>
+          </a:bodyPr>
+          <a:lstStyle/>
+          <a:p>
+            <a:pPr algn="ctr"/>
+            <a:r>
+              <a:rPr sz="3200" b="1">
+                <a:solidFill>
+                  <a:srgbClr val="C62828"/>
+                </a:solidFill>
+              </a:rPr>
+              <a:t>CER  0.269</a:t>
+            </a:r>
+          </a:p>
+        </p:txBody>
+      </p:sp>
+      <p:sp>
+        <p:nvSpPr>
+          <p:cNvPr id="7" name="TextBox 6"/>
+          <p:cNvSpPr txBox="1"/>
+          <p:nvPr/>
+        </p:nvSpPr>
+        <p:spPr>
+          <a:xfrm>
+            <a:off x="457200" y="2651760"/>
+            <a:ext cx="5212080" cy="365760"/>
+          </a:xfrm>
+          <a:prstGeom prst="rect">
+            <a:avLst/>
+          </a:prstGeom>
+          <a:noFill/>
+        </p:spPr>
+        <p:txBody>
+          <a:bodyPr wrap="square">
+            <a:spAutoFit/>
+          </a:bodyPr>
+          <a:lstStyle/>
+          <a:p>
+            <a:pPr algn="ctr"/>
+            <a:r>
+              <a:rPr sz="1200" b="0">
                 <a:solidFill>
                   <a:srgbClr val="78909C"/>
                 </a:solidFill>
               </a:rPr>
-              <a:t>優先度：高</a:t>
-            </a:r>
-          </a:p>
-        </p:txBody>
-      </p:sp>
-      <p:sp>
-        <p:nvSpPr>
-          <p:cNvPr id="6" name="TextBox 5"/>
-          <p:cNvSpPr txBox="1"/>
-          <p:nvPr/>
-        </p:nvSpPr>
-        <p:spPr>
-          <a:xfrm>
-            <a:off x="502920" y="1810512"/>
-            <a:ext cx="11064240" cy="384048"/>
-          </a:xfrm>
-          <a:prstGeom prst="rect">
-            <a:avLst/>
-          </a:prstGeom>
-          <a:noFill/>
-        </p:spPr>
-        <p:txBody>
-          <a:bodyPr wrap="square">
-            <a:spAutoFit/>
-          </a:bodyPr>
-          <a:lstStyle/>
-          <a:p>
-            <a:pPr algn="l"/>
-            <a:r>
-              <a:rPr sz="1600" b="1">
+              <a:t>（フェーズ1 ベースライン）</a:t>
+            </a:r>
+          </a:p>
+        </p:txBody>
+      </p:sp>
+      <p:sp>
+        <p:nvSpPr>
+          <p:cNvPr id="8" name="TextBox 7"/>
+          <p:cNvSpPr txBox="1"/>
+          <p:nvPr/>
+        </p:nvSpPr>
+        <p:spPr>
+          <a:xfrm>
+            <a:off x="5852160" y="2103120"/>
+            <a:ext cx="822960" cy="731520"/>
+          </a:xfrm>
+          <a:prstGeom prst="rect">
+            <a:avLst/>
+          </a:prstGeom>
+          <a:noFill/>
+        </p:spPr>
+        <p:txBody>
+          <a:bodyPr wrap="square">
+            <a:spAutoFit/>
+          </a:bodyPr>
+          <a:lstStyle/>
+          <a:p>
+            <a:pPr algn="ctr"/>
+            <a:r>
+              <a:rPr sz="3600" b="1">
                 <a:solidFill>
                   <a:srgbClr val="1A237E"/>
                 </a:solidFill>
               </a:rPr>
-              <a:t>Whisper large-v3 での再評価</a:t>
-            </a:r>
-          </a:p>
-        </p:txBody>
-      </p:sp>
-      <p:sp>
-        <p:nvSpPr>
-          <p:cNvPr id="7" name="TextBox 6"/>
-          <p:cNvSpPr txBox="1"/>
-          <p:nvPr/>
-        </p:nvSpPr>
-        <p:spPr>
-          <a:xfrm>
-            <a:off x="640080" y="2267712"/>
-            <a:ext cx="10972800" cy="292608"/>
-          </a:xfrm>
-          <a:prstGeom prst="rect">
-            <a:avLst/>
-          </a:prstGeom>
-          <a:noFill/>
-        </p:spPr>
-        <p:txBody>
-          <a:bodyPr wrap="square">
-            <a:spAutoFit/>
-          </a:bodyPr>
-          <a:lstStyle/>
-          <a:p>
-            <a:pPr algn="l"/>
-            <a:r>
-              <a:rPr sz="1300" b="0">
-                <a:solidFill>
-                  <a:srgbClr val="212121"/>
-                </a:solidFill>
-              </a:rPr>
-              <a:t>・ 現在の結論はWhisper smallに限定される可能性</a:t>
-            </a:r>
-          </a:p>
-        </p:txBody>
-      </p:sp>
-      <p:sp>
-        <p:nvSpPr>
-          <p:cNvPr id="8" name="TextBox 7"/>
-          <p:cNvSpPr txBox="1"/>
-          <p:nvPr/>
-        </p:nvSpPr>
-        <p:spPr>
-          <a:xfrm>
-            <a:off x="640080" y="2587752"/>
-            <a:ext cx="10972800" cy="292608"/>
-          </a:xfrm>
-          <a:prstGeom prst="rect">
-            <a:avLst/>
-          </a:prstGeom>
-          <a:noFill/>
-        </p:spPr>
-        <p:txBody>
-          <a:bodyPr wrap="square">
-            <a:spAutoFit/>
-          </a:bodyPr>
-          <a:lstStyle/>
-          <a:p>
-            <a:pPr algn="l"/>
-            <a:r>
-              <a:rPr sz="1300" b="0">
-                <a:solidFill>
-                  <a:srgbClr val="212121"/>
-                </a:solidFill>
-              </a:rPr>
-              <a:t>・ 同じ結論が出れば「モデルサイズに依存しない現象」として主張強化</a:t>
+              <a:t>→</a:t>
             </a:r>
           </a:p>
         </p:txBody>
@@ -15612,188 +15181,8 @@
         </p:nvSpPr>
         <p:spPr>
           <a:xfrm>
-            <a:off x="365760" y="3063240"/>
-            <a:ext cx="11430000" cy="1463040"/>
-          </a:xfrm>
-          <a:prstGeom prst="rect">
-            <a:avLst/>
-          </a:prstGeom>
-          <a:solidFill>
-            <a:srgbClr val="FFF8E1"/>
-          </a:solidFill>
-          <a:ln>
-            <a:noFill/>
-          </a:ln>
-        </p:spPr>
-        <p:style>
-          <a:lnRef idx="1">
-            <a:schemeClr val="accent1"/>
-          </a:lnRef>
-          <a:fillRef idx="3">
-            <a:schemeClr val="accent1"/>
-          </a:fillRef>
-          <a:effectRef idx="2">
-            <a:schemeClr val="accent1"/>
-          </a:effectRef>
-          <a:fontRef idx="minor">
-            <a:schemeClr val="lt1"/>
-          </a:fontRef>
-        </p:style>
-        <p:txBody>
-          <a:bodyPr rtlCol="0" anchor="ctr"/>
-          <a:lstStyle/>
-          <a:p>
-            <a:pPr algn="ctr"/>
-            <a:endParaRPr/>
-          </a:p>
-        </p:txBody>
-      </p:sp>
-      <p:sp>
-        <p:nvSpPr>
-          <p:cNvPr id="10" name="TextBox 9"/>
-          <p:cNvSpPr txBox="1"/>
-          <p:nvPr/>
-        </p:nvSpPr>
-        <p:spPr>
-          <a:xfrm>
-            <a:off x="502920" y="3108960"/>
-            <a:ext cx="2560320" cy="320040"/>
-          </a:xfrm>
-          <a:prstGeom prst="rect">
-            <a:avLst/>
-          </a:prstGeom>
-          <a:noFill/>
-        </p:spPr>
-        <p:txBody>
-          <a:bodyPr wrap="square">
-            <a:spAutoFit/>
-          </a:bodyPr>
-          <a:lstStyle/>
-          <a:p>
-            <a:pPr algn="l"/>
-            <a:r>
-              <a:rPr sz="1100" b="1">
-                <a:solidFill>
-                  <a:srgbClr val="78909C"/>
-                </a:solidFill>
-              </a:rPr>
-              <a:t>優先度：中</a:t>
-            </a:r>
-          </a:p>
-        </p:txBody>
-      </p:sp>
-      <p:sp>
-        <p:nvSpPr>
-          <p:cNvPr id="11" name="TextBox 10"/>
-          <p:cNvSpPr txBox="1"/>
-          <p:nvPr/>
-        </p:nvSpPr>
-        <p:spPr>
-          <a:xfrm>
-            <a:off x="502920" y="3410712"/>
-            <a:ext cx="11064240" cy="384048"/>
-          </a:xfrm>
-          <a:prstGeom prst="rect">
-            <a:avLst/>
-          </a:prstGeom>
-          <a:noFill/>
-        </p:spPr>
-        <p:txBody>
-          <a:bodyPr wrap="square">
-            <a:spAutoFit/>
-          </a:bodyPr>
-          <a:lstStyle/>
-          <a:p>
-            <a:pPr algn="l"/>
-            <a:r>
-              <a:rPr sz="1600" b="1">
-                <a:solidFill>
-                  <a:srgbClr val="1A237E"/>
-                </a:solidFill>
-              </a:rPr>
-              <a:t>DSPパラメータ感度分析</a:t>
-            </a:r>
-          </a:p>
-        </p:txBody>
-      </p:sp>
-      <p:sp>
-        <p:nvSpPr>
-          <p:cNvPr id="12" name="TextBox 11"/>
-          <p:cNvSpPr txBox="1"/>
-          <p:nvPr/>
-        </p:nvSpPr>
-        <p:spPr>
-          <a:xfrm>
-            <a:off x="640080" y="3867912"/>
-            <a:ext cx="10972800" cy="292608"/>
-          </a:xfrm>
-          <a:prstGeom prst="rect">
-            <a:avLst/>
-          </a:prstGeom>
-          <a:noFill/>
-        </p:spPr>
-        <p:txBody>
-          <a:bodyPr wrap="square">
-            <a:spAutoFit/>
-          </a:bodyPr>
-          <a:lstStyle/>
-          <a:p>
-            <a:pPr algn="l"/>
-            <a:r>
-              <a:rPr sz="1300" b="0">
-                <a:solidFill>
-                  <a:srgbClr val="212121"/>
-                </a:solidFill>
-              </a:rPr>
-              <a:t>・ HPFカットオフを100/200/300/500Hzで変化させて比較</a:t>
-            </a:r>
-          </a:p>
-        </p:txBody>
-      </p:sp>
-      <p:sp>
-        <p:nvSpPr>
-          <p:cNvPr id="13" name="TextBox 12"/>
-          <p:cNvSpPr txBox="1"/>
-          <p:nvPr/>
-        </p:nvSpPr>
-        <p:spPr>
-          <a:xfrm>
-            <a:off x="640080" y="4187952"/>
-            <a:ext cx="10972800" cy="292608"/>
-          </a:xfrm>
-          <a:prstGeom prst="rect">
-            <a:avLst/>
-          </a:prstGeom>
-          <a:noFill/>
-        </p:spPr>
-        <p:txBody>
-          <a:bodyPr wrap="square">
-            <a:spAutoFit/>
-          </a:bodyPr>
-          <a:lstStyle/>
-          <a:p>
-            <a:pPr algn="l"/>
-            <a:r>
-              <a:rPr sz="1300" b="0">
-                <a:solidFill>
-                  <a:srgbClr val="212121"/>
-                </a:solidFill>
-              </a:rPr>
-              <a:t>・ 300Hzという選択が恣意的という査読批判への回答</a:t>
-            </a:r>
-          </a:p>
-        </p:txBody>
-      </p:sp>
-      <p:sp>
-        <p:nvSpPr>
-          <p:cNvPr id="14" name="Rectangle 13"/>
-          <p:cNvSpPr/>
-          <p:nvPr/>
-        </p:nvSpPr>
-        <p:spPr>
-          <a:xfrm>
-            <a:off x="365760" y="4663440"/>
-            <a:ext cx="11430000" cy="1463040"/>
+            <a:off x="6766560" y="1417320"/>
+            <a:ext cx="5029200" cy="2286000"/>
           </a:xfrm>
           <a:prstGeom prst="rect">
             <a:avLst/>
@@ -15824,20 +15213,164 @@
           <a:lstStyle/>
           <a:p>
             <a:pPr algn="ctr"/>
-            <a:endParaRPr/>
-          </a:p>
-        </p:txBody>
-      </p:sp>
-      <p:sp>
-        <p:nvSpPr>
-          <p:cNvPr id="15" name="TextBox 14"/>
-          <p:cNvSpPr txBox="1"/>
-          <p:nvPr/>
-        </p:nvSpPr>
-        <p:spPr>
-          <a:xfrm>
-            <a:off x="502920" y="4709160"/>
-            <a:ext cx="2560320" cy="320040"/>
+          </a:p>
+        </p:txBody>
+      </p:sp>
+      <p:sp>
+        <p:nvSpPr>
+          <p:cNvPr id="10" name="TextBox 9"/>
+          <p:cNvSpPr txBox="1"/>
+          <p:nvPr/>
+        </p:nvSpPr>
+        <p:spPr>
+          <a:xfrm>
+            <a:off x="6858000" y="1508760"/>
+            <a:ext cx="4846320" cy="411480"/>
+          </a:xfrm>
+          <a:prstGeom prst="rect">
+            <a:avLst/>
+          </a:prstGeom>
+          <a:noFill/>
+        </p:spPr>
+        <p:txBody>
+          <a:bodyPr wrap="square">
+            <a:spAutoFit/>
+          </a:bodyPr>
+          <a:lstStyle/>
+          <a:p>
+            <a:pPr algn="ctr"/>
+            <a:r>
+              <a:rPr sz="1400" b="1">
+                <a:solidFill>
+                  <a:srgbClr val="43A047"/>
+                </a:solidFill>
+              </a:rPr>
+              <a:t>FT済み Whisper small</a:t>
+            </a:r>
+          </a:p>
+        </p:txBody>
+      </p:sp>
+      <p:sp>
+        <p:nvSpPr>
+          <p:cNvPr id="11" name="TextBox 10"/>
+          <p:cNvSpPr txBox="1"/>
+          <p:nvPr/>
+        </p:nvSpPr>
+        <p:spPr>
+          <a:xfrm>
+            <a:off x="6858000" y="1920240"/>
+            <a:ext cx="4846320" cy="731520"/>
+          </a:xfrm>
+          <a:prstGeom prst="rect">
+            <a:avLst/>
+          </a:prstGeom>
+          <a:noFill/>
+        </p:spPr>
+        <p:txBody>
+          <a:bodyPr wrap="square">
+            <a:spAutoFit/>
+          </a:bodyPr>
+          <a:lstStyle/>
+          <a:p>
+            <a:pPr algn="ctr"/>
+            <a:r>
+              <a:rPr sz="3200" b="1">
+                <a:solidFill>
+                  <a:srgbClr val="43A047"/>
+                </a:solidFill>
+              </a:rPr>
+              <a:t>CER  0.095</a:t>
+            </a:r>
+          </a:p>
+        </p:txBody>
+      </p:sp>
+      <p:sp>
+        <p:nvSpPr>
+          <p:cNvPr id="12" name="TextBox 11"/>
+          <p:cNvSpPr txBox="1"/>
+          <p:nvPr/>
+        </p:nvSpPr>
+        <p:spPr>
+          <a:xfrm>
+            <a:off x="6858000" y="2651760"/>
+            <a:ext cx="4846320" cy="365760"/>
+          </a:xfrm>
+          <a:prstGeom prst="rect">
+            <a:avLst/>
+          </a:prstGeom>
+          <a:noFill/>
+        </p:spPr>
+        <p:txBody>
+          <a:bodyPr wrap="square">
+            <a:spAutoFit/>
+          </a:bodyPr>
+          <a:lstStyle/>
+          <a:p>
+            <a:pPr algn="ctr"/>
+            <a:r>
+              <a:rPr sz="1600" b="1">
+                <a:solidFill>
+                  <a:srgbClr val="43A047"/>
+                </a:solidFill>
+              </a:rPr>
+              <a:t>64.6% 改善</a:t>
+            </a:r>
+          </a:p>
+        </p:txBody>
+      </p:sp>
+      <p:sp>
+        <p:nvSpPr>
+          <p:cNvPr id="13" name="Rectangle 12"/>
+          <p:cNvSpPr/>
+          <p:nvPr/>
+        </p:nvSpPr>
+        <p:spPr>
+          <a:xfrm>
+            <a:off x="365760" y="3886200"/>
+            <a:ext cx="11430000" cy="914400"/>
+          </a:xfrm>
+          <a:prstGeom prst="rect">
+            <a:avLst/>
+          </a:prstGeom>
+          <a:solidFill>
+            <a:srgbClr val="F5F5F5"/>
+          </a:solidFill>
+          <a:ln>
+            <a:noFill/>
+          </a:ln>
+        </p:spPr>
+        <p:style>
+          <a:lnRef idx="1">
+            <a:schemeClr val="accent1"/>
+          </a:lnRef>
+          <a:fillRef idx="3">
+            <a:schemeClr val="accent1"/>
+          </a:fillRef>
+          <a:effectRef idx="2">
+            <a:schemeClr val="accent1"/>
+          </a:effectRef>
+          <a:fontRef idx="minor">
+            <a:schemeClr val="lt1"/>
+          </a:fontRef>
+        </p:style>
+        <p:txBody>
+          <a:bodyPr rtlCol="0" anchor="ctr"/>
+          <a:lstStyle/>
+          <a:p>
+            <a:pPr algn="ctr"/>
+          </a:p>
+        </p:txBody>
+      </p:sp>
+      <p:sp>
+        <p:nvSpPr>
+          <p:cNvPr id="14" name="TextBox 13"/>
+          <p:cNvSpPr txBox="1"/>
+          <p:nvPr/>
+        </p:nvSpPr>
+        <p:spPr>
+          <a:xfrm>
+            <a:off x="502920" y="4023360"/>
+            <a:ext cx="11155680" cy="457200"/>
           </a:xfrm>
           <a:prstGeom prst="rect">
             <a:avLst/>
@@ -15852,13 +15385,56 @@
           <a:p>
             <a:pPr algn="l"/>
             <a:r>
-              <a:rPr sz="1100" b="1">
-                <a:solidFill>
-                  <a:srgbClr val="78909C"/>
-                </a:solidFill>
-              </a:rPr>
-              <a:t>優先度：中</a:t>
-            </a:r>
+              <a:rPr sz="1300" b="0">
+                <a:solidFill>
+                  <a:srgbClr val="212121"/>
+                </a:solidFill>
+              </a:rPr>
+              <a:t>学習設定：train 4,000発話 / epochs=20（early stop, best=epoch3）/ batch=16 / lr=1e-5 / fp16</a:t>
+            </a:r>
+          </a:p>
+        </p:txBody>
+      </p:sp>
+      <p:sp>
+        <p:nvSpPr>
+          <p:cNvPr id="15" name="Rectangle 14"/>
+          <p:cNvSpPr/>
+          <p:nvPr/>
+        </p:nvSpPr>
+        <p:spPr>
+          <a:xfrm>
+            <a:off x="365760" y="4983480"/>
+            <a:ext cx="11430000" cy="731520"/>
+          </a:xfrm>
+          <a:prstGeom prst="rect">
+            <a:avLst/>
+          </a:prstGeom>
+          <a:solidFill>
+            <a:srgbClr val="FFF9C4"/>
+          </a:solidFill>
+          <a:ln>
+            <a:noFill/>
+          </a:ln>
+        </p:spPr>
+        <p:style>
+          <a:lnRef idx="1">
+            <a:schemeClr val="accent1"/>
+          </a:lnRef>
+          <a:fillRef idx="3">
+            <a:schemeClr val="accent1"/>
+          </a:fillRef>
+          <a:effectRef idx="2">
+            <a:schemeClr val="accent1"/>
+          </a:effectRef>
+          <a:fontRef idx="minor">
+            <a:schemeClr val="lt1"/>
+          </a:fontRef>
+        </p:style>
+        <p:txBody>
+          <a:bodyPr rtlCol="0" anchor="ctr"/>
+          <a:lstStyle/>
+          <a:p>
+            <a:pPr algn="ctr"/>
           </a:p>
         </p:txBody>
       </p:sp>
@@ -15870,103 +15446,35 @@
         </p:nvSpPr>
         <p:spPr>
           <a:xfrm>
-            <a:off x="502920" y="5010912"/>
-            <a:ext cx="11064240" cy="384048"/>
-          </a:xfrm>
-          <a:prstGeom prst="rect">
-            <a:avLst/>
-          </a:prstGeom>
-          <a:noFill/>
-        </p:spPr>
-        <p:txBody>
-          <a:bodyPr wrap="square">
-            <a:spAutoFit/>
-          </a:bodyPr>
-          <a:lstStyle/>
-          <a:p>
-            <a:pPr algn="l"/>
-            <a:r>
-              <a:rPr sz="1600" b="1">
+            <a:off x="502920" y="5074920"/>
+            <a:ext cx="11155680" cy="457200"/>
+          </a:xfrm>
+          <a:prstGeom prst="rect">
+            <a:avLst/>
+          </a:prstGeom>
+          <a:noFill/>
+        </p:spPr>
+        <p:txBody>
+          <a:bodyPr wrap="square">
+            <a:spAutoFit/>
+          </a:bodyPr>
+          <a:lstStyle/>
+          <a:p>
+            <a:pPr algn="ctr"/>
+            <a:r>
+              <a:rPr sz="1700" b="1">
                 <a:solidFill>
                   <a:srgbClr val="1A237E"/>
                 </a:solidFill>
               </a:rPr>
-              <a:t>実環境ノイズでの検証</a:t>
-            </a:r>
-          </a:p>
-        </p:txBody>
-      </p:sp>
-      <p:sp>
-        <p:nvSpPr>
-          <p:cNvPr id="17" name="TextBox 16"/>
-          <p:cNvSpPr txBox="1"/>
-          <p:nvPr/>
-        </p:nvSpPr>
-        <p:spPr>
-          <a:xfrm>
-            <a:off x="640080" y="5468112"/>
-            <a:ext cx="10972800" cy="292608"/>
-          </a:xfrm>
-          <a:prstGeom prst="rect">
-            <a:avLst/>
-          </a:prstGeom>
-          <a:noFill/>
-        </p:spPr>
-        <p:txBody>
-          <a:bodyPr wrap="square">
-            <a:spAutoFit/>
-          </a:bodyPr>
-          <a:lstStyle/>
-          <a:p>
-            <a:pPr algn="l"/>
-            <a:r>
-              <a:rPr sz="1300" b="0">
-                <a:solidFill>
-                  <a:srgbClr val="212121"/>
-                </a:solidFill>
-              </a:rPr>
-              <a:t>・ 現在は人工ノイズ（白色・ピンク）のみ</a:t>
-            </a:r>
-          </a:p>
-        </p:txBody>
-      </p:sp>
-      <p:sp>
-        <p:nvSpPr>
-          <p:cNvPr id="18" name="TextBox 17"/>
-          <p:cNvSpPr txBox="1"/>
-          <p:nvPr/>
-        </p:nvSpPr>
-        <p:spPr>
-          <a:xfrm>
-            <a:off x="640080" y="5788152"/>
-            <a:ext cx="10972800" cy="292608"/>
-          </a:xfrm>
-          <a:prstGeom prst="rect">
-            <a:avLst/>
-          </a:prstGeom>
-          <a:noFill/>
-        </p:spPr>
-        <p:txBody>
-          <a:bodyPr wrap="square">
-            <a:spAutoFit/>
-          </a:bodyPr>
-          <a:lstStyle/>
-          <a:p>
-            <a:pPr algn="l"/>
-            <a:r>
-              <a:rPr sz="1300" b="0">
-                <a:solidFill>
-                  <a:srgbClr val="212121"/>
-                </a:solidFill>
-              </a:rPr>
-              <a:t>・ MUSAN・DEMANDなどの実録音ノイズで再現実験</a:t>
-            </a:r>
-          </a:p>
-        </p:txBody>
-      </p:sp>
-      <p:sp>
-        <p:nvSpPr>
-          <p:cNvPr id="19" name="Rectangle 18"/>
+              <a:t>「音声を直す」より「ASRを慣れさせる」方が喉マイクには効果的</a:t>
+            </a:r>
+          </a:p>
+        </p:txBody>
+      </p:sp>
+      <p:sp>
+        <p:nvSpPr>
+          <p:cNvPr id="17" name="Rectangle 16"/>
           <p:cNvSpPr/>
           <p:nvPr/>
         </p:nvSpPr>
@@ -16004,13 +15512,12 @@
           <a:lstStyle/>
           <a:p>
             <a:pPr algn="ctr"/>
-            <a:endParaRPr/>
-          </a:p>
-        </p:txBody>
-      </p:sp>
-      <p:sp>
-        <p:nvSpPr>
-          <p:cNvPr id="20" name="TextBox 19"/>
+          </a:p>
+        </p:txBody>
+      </p:sp>
+      <p:sp>
+        <p:nvSpPr>
+          <p:cNvPr id="18" name="TextBox 17"/>
           <p:cNvSpPr txBox="1"/>
           <p:nvPr/>
         </p:nvSpPr>
@@ -16051,7 +15558,7 @@
 </file>
 
 <file path=ppt/slides/slide24.xml><?xml version="1.0" encoding="utf-8"?>
-<p:sld xmlns:a="http://schemas.openxmlformats.org/drawingml/2006/main" xmlns:r="http://schemas.openxmlformats.org/officeDocument/2006/relationships" xmlns:p="http://schemas.openxmlformats.org/presentationml/2006/main">
+<p:sld xmlns:a="http://schemas.openxmlformats.org/drawingml/2006/main" xmlns:p="http://schemas.openxmlformats.org/presentationml/2006/main" xmlns:r="http://schemas.openxmlformats.org/officeDocument/2006/relationships">
   <p:cSld>
     <p:spTree>
       <p:nvGrpSpPr>
@@ -16059,14 +15566,7 @@
         <p:cNvGrpSpPr/>
         <p:nvPr/>
       </p:nvGrpSpPr>
-      <p:grpSpPr>
-        <a:xfrm>
-          <a:off x="0" y="0"/>
-          <a:ext cx="0" cy="0"/>
-          <a:chOff x="0" y="0"/>
-          <a:chExt cx="0" cy="0"/>
-        </a:xfrm>
-      </p:grpSpPr>
+      <p:grpSpPr/>
       <p:sp>
         <p:nvSpPr>
           <p:cNvPr id="2" name="Rectangle 1"/>
@@ -16107,7 +15607,6 @@
           <a:lstStyle/>
           <a:p>
             <a:pPr algn="ctr"/>
-            <a:endParaRPr/>
           </a:p>
         </p:txBody>
       </p:sp>
@@ -16140,21 +15639,55 @@
                   <a:srgbClr val="FFFFFF"/>
                 </a:solidFill>
               </a:rPr>
-              <a:t>参考文献</a:t>
-            </a:r>
-          </a:p>
-        </p:txBody>
-      </p:sp>
-      <p:sp>
-        <p:nvSpPr>
-          <p:cNvPr id="4" name="Rectangle 3"/>
+              <a:t>まとめ</a:t>
+            </a:r>
+          </a:p>
+        </p:txBody>
+      </p:sp>
+      <p:sp>
+        <p:nvSpPr>
+          <p:cNvPr id="4" name="TextBox 3"/>
+          <p:cNvSpPr txBox="1"/>
+          <p:nvPr/>
+        </p:nvSpPr>
+        <p:spPr>
+          <a:xfrm>
+            <a:off x="365760" y="1463040"/>
+            <a:ext cx="11430000" cy="502920"/>
+          </a:xfrm>
+          <a:prstGeom prst="rect">
+            <a:avLst/>
+          </a:prstGeom>
+          <a:noFill/>
+        </p:spPr>
+        <p:txBody>
+          <a:bodyPr wrap="square">
+            <a:spAutoFit/>
+          </a:bodyPr>
+          <a:lstStyle/>
+          <a:p>
+            <a:pPr algn="l"/>
+            <a:r>
+              <a:rPr sz="1700" b="0">
+                <a:solidFill>
+                  <a:srgbClr val="212121"/>
+                </a:solidFill>
+              </a:rPr>
+              <a:t>喉マイク音声に対するSEの効果と、ASRモデルのドメイン適応効果を定量評価した。</a:t>
+            </a:r>
+          </a:p>
+        </p:txBody>
+      </p:sp>
+      <p:sp>
+        <p:nvSpPr>
+          <p:cNvPr id="5" name="Rectangle 4"/>
           <p:cNvSpPr/>
           <p:nvPr/>
         </p:nvSpPr>
         <p:spPr>
           <a:xfrm>
-            <a:off x="365760" y="1508760"/>
-            <a:ext cx="11430000" cy="1143000"/>
+            <a:off x="365760" y="2103120"/>
+            <a:ext cx="11430000" cy="749808"/>
           </a:xfrm>
           <a:prstGeom prst="rect">
             <a:avLst/>
@@ -16185,20 +15718,19 @@
           <a:lstStyle/>
           <a:p>
             <a:pPr algn="ctr"/>
-            <a:endParaRPr/>
-          </a:p>
-        </p:txBody>
-      </p:sp>
-      <p:sp>
-        <p:nvSpPr>
-          <p:cNvPr id="5" name="TextBox 4"/>
-          <p:cNvSpPr txBox="1"/>
-          <p:nvPr/>
-        </p:nvSpPr>
-        <p:spPr>
-          <a:xfrm>
-            <a:off x="502920" y="1581912"/>
-            <a:ext cx="11155680" cy="1005840"/>
+          </a:p>
+        </p:txBody>
+      </p:sp>
+      <p:sp>
+        <p:nvSpPr>
+          <p:cNvPr id="6" name="TextBox 5"/>
+          <p:cNvSpPr txBox="1"/>
+          <p:nvPr/>
+        </p:nvSpPr>
+        <p:spPr>
+          <a:xfrm>
+            <a:off x="502920" y="2249424"/>
+            <a:ext cx="731520" cy="411480"/>
           </a:xfrm>
           <a:prstGeom prst="rect">
             <a:avLst/>
@@ -16213,29 +15745,60 @@
           <a:p>
             <a:pPr algn="l"/>
             <a:r>
-              <a:rPr sz="1200" b="0">
+              <a:rPr sz="1500" b="1">
+                <a:solidFill>
+                  <a:srgbClr val="C62828"/>
+                </a:solidFill>
+              </a:rPr>
+              <a:t>（1）</a:t>
+            </a:r>
+          </a:p>
+        </p:txBody>
+      </p:sp>
+      <p:sp>
+        <p:nvSpPr>
+          <p:cNvPr id="7" name="TextBox 6"/>
+          <p:cNvSpPr txBox="1"/>
+          <p:nvPr/>
+        </p:nvSpPr>
+        <p:spPr>
+          <a:xfrm>
+            <a:off x="1143000" y="2249424"/>
+            <a:ext cx="10424160" cy="411480"/>
+          </a:xfrm>
+          <a:prstGeom prst="rect">
+            <a:avLst/>
+          </a:prstGeom>
+          <a:noFill/>
+        </p:spPr>
+        <p:txBody>
+          <a:bodyPr wrap="square">
+            <a:spAutoFit/>
+          </a:bodyPr>
+          <a:lstStyle/>
+          <a:p>
+            <a:pPr algn="l"/>
+            <a:r>
+              <a:rPr sz="1500" b="0">
                 <a:solidFill>
                   <a:srgbClr val="212121"/>
                 </a:solidFill>
               </a:rPr>
-              <a:t>[1]  C.O. Mawalim, S. Okada, M. Unoki,
-     "Are Recent Deep Learning-Based Speech Enhancement Methods Ready to Confront
-     Real-World Noisy Environments?"
-     Interspeech 2024, pp. 1735–1739, DOI: 10.21437/Interspeech.2024-129</a:t>
-            </a:r>
-          </a:p>
-        </p:txBody>
-      </p:sp>
-      <p:sp>
-        <p:nvSpPr>
-          <p:cNvPr id="6" name="Rectangle 5"/>
+              <a:t>DSP-onlyおよびGTCRNは全ノイズ条件でCERを有意に悪化させる（30検定中26件 p&lt;0.05）</a:t>
+            </a:r>
+          </a:p>
+        </p:txBody>
+      </p:sp>
+      <p:sp>
+        <p:nvSpPr>
+          <p:cNvPr id="8" name="Rectangle 7"/>
           <p:cNvSpPr/>
           <p:nvPr/>
         </p:nvSpPr>
         <p:spPr>
           <a:xfrm>
-            <a:off x="365760" y="2743200"/>
-            <a:ext cx="11430000" cy="1143000"/>
+            <a:off x="365760" y="2971800"/>
+            <a:ext cx="11430000" cy="749808"/>
           </a:xfrm>
           <a:prstGeom prst="rect">
             <a:avLst/>
@@ -16266,20 +15829,19 @@
           <a:lstStyle/>
           <a:p>
             <a:pPr algn="ctr"/>
-            <a:endParaRPr/>
-          </a:p>
-        </p:txBody>
-      </p:sp>
-      <p:sp>
-        <p:nvSpPr>
-          <p:cNvPr id="7" name="TextBox 6"/>
-          <p:cNvSpPr txBox="1"/>
-          <p:nvPr/>
-        </p:nvSpPr>
-        <p:spPr>
-          <a:xfrm>
-            <a:off x="502920" y="2816352"/>
-            <a:ext cx="11155680" cy="1005840"/>
+          </a:p>
+        </p:txBody>
+      </p:sp>
+      <p:sp>
+        <p:nvSpPr>
+          <p:cNvPr id="9" name="TextBox 8"/>
+          <p:cNvSpPr txBox="1"/>
+          <p:nvPr/>
+        </p:nvSpPr>
+        <p:spPr>
+          <a:xfrm>
+            <a:off x="502920" y="3118104"/>
+            <a:ext cx="731520" cy="411480"/>
           </a:xfrm>
           <a:prstGeom prst="rect">
             <a:avLst/>
@@ -16294,29 +15856,60 @@
           <a:p>
             <a:pPr algn="l"/>
             <a:r>
-              <a:rPr sz="1200" b="0">
+              <a:rPr sz="1500" b="1">
+                <a:solidFill>
+                  <a:srgbClr val="FF9800"/>
+                </a:solidFill>
+              </a:rPr>
+              <a:t>（2）</a:t>
+            </a:r>
+          </a:p>
+        </p:txBody>
+      </p:sp>
+      <p:sp>
+        <p:nvSpPr>
+          <p:cNvPr id="10" name="TextBox 9"/>
+          <p:cNvSpPr txBox="1"/>
+          <p:nvPr/>
+        </p:nvSpPr>
+        <p:spPr>
+          <a:xfrm>
+            <a:off x="1143000" y="3118104"/>
+            <a:ext cx="10424160" cy="411480"/>
+          </a:xfrm>
+          <a:prstGeom prst="rect">
+            <a:avLst/>
+          </a:prstGeom>
+          <a:noFill/>
+        </p:spPr>
+        <p:txBody>
+          <a:bodyPr wrap="square">
+            <a:spAutoFit/>
+          </a:bodyPr>
+          <a:lstStyle/>
+          <a:p>
+            <a:pPr algn="l"/>
+            <a:r>
+              <a:rPr sz="1500" b="0">
                 <a:solidFill>
                   <a:srgbClr val="212121"/>
                 </a:solidFill>
               </a:rPr>
-              <a:t>[2]  T. Ochiai, K. Iwamoto, M. Delcroix et al.,
-     "Rethinking Processing Distortions: How Do They Affect the Downstream ASR Performance?"
-     IEEE/ACM Transactions on Audio, Speech, and Language Processing, TASLP 2024,
-     arXiv:2404.14860</a:t>
-            </a:r>
-          </a:p>
-        </p:txBody>
-      </p:sp>
-      <p:sp>
-        <p:nvSpPr>
-          <p:cNvPr id="8" name="Rectangle 7"/>
+              <a:t>GTCRNはSTOI・PESQを改善しながらCERを悪化させる三重パラドックスが全ノイズ条件で観測された</a:t>
+            </a:r>
+          </a:p>
+        </p:txBody>
+      </p:sp>
+      <p:sp>
+        <p:nvSpPr>
+          <p:cNvPr id="11" name="Rectangle 10"/>
           <p:cNvSpPr/>
           <p:nvPr/>
         </p:nvSpPr>
         <p:spPr>
           <a:xfrm>
-            <a:off x="365760" y="3977640"/>
-            <a:ext cx="11430000" cy="1143000"/>
+            <a:off x="365760" y="3840480"/>
+            <a:ext cx="11430000" cy="749808"/>
           </a:xfrm>
           <a:prstGeom prst="rect">
             <a:avLst/>
@@ -16347,20 +15940,19 @@
           <a:lstStyle/>
           <a:p>
             <a:pPr algn="ctr"/>
-            <a:endParaRPr/>
-          </a:p>
-        </p:txBody>
-      </p:sp>
-      <p:sp>
-        <p:nvSpPr>
-          <p:cNvPr id="9" name="TextBox 8"/>
-          <p:cNvSpPr txBox="1"/>
-          <p:nvPr/>
-        </p:nvSpPr>
-        <p:spPr>
-          <a:xfrm>
-            <a:off x="502920" y="4050792"/>
-            <a:ext cx="11155680" cy="1005840"/>
+          </a:p>
+        </p:txBody>
+      </p:sp>
+      <p:sp>
+        <p:nvSpPr>
+          <p:cNvPr id="12" name="TextBox 11"/>
+          <p:cNvSpPr txBox="1"/>
+          <p:nvPr/>
+        </p:nvSpPr>
+        <p:spPr>
+          <a:xfrm>
+            <a:off x="502920" y="3986784"/>
+            <a:ext cx="731520" cy="411480"/>
           </a:xfrm>
           <a:prstGeom prst="rect">
             <a:avLst/>
@@ -16375,28 +15967,60 @@
           <a:p>
             <a:pPr algn="l"/>
             <a:r>
-              <a:rPr sz="1200" b="0">
+              <a:rPr sz="1500" b="1">
+                <a:solidFill>
+                  <a:srgbClr val="FF9800"/>
+                </a:solidFill>
+              </a:rPr>
+              <a:t>（3）</a:t>
+            </a:r>
+          </a:p>
+        </p:txBody>
+      </p:sp>
+      <p:sp>
+        <p:nvSpPr>
+          <p:cNvPr id="13" name="TextBox 12"/>
+          <p:cNvSpPr txBox="1"/>
+          <p:nvPr/>
+        </p:nvSpPr>
+        <p:spPr>
+          <a:xfrm>
+            <a:off x="1143000" y="3986784"/>
+            <a:ext cx="10424160" cy="411480"/>
+          </a:xfrm>
+          <a:prstGeom prst="rect">
+            <a:avLst/>
+          </a:prstGeom>
+          <a:noFill/>
+        </p:spPr>
+        <p:txBody>
+          <a:bodyPr wrap="square">
+            <a:spAutoFit/>
+          </a:bodyPr>
+          <a:lstStyle/>
+          <a:p>
+            <a:pPr algn="l"/>
+            <a:r>
+              <a:rPr sz="1500" b="0">
                 <a:solidFill>
                   <a:srgbClr val="212121"/>
                 </a:solidFill>
               </a:rPr>
-              <a:t>[3]  X. Rong, C. Li, J. Xiao,
-     "GTCRN: A Speech Enhancement Model Requiring Ultra-Tiny Resources"
-     arXiv:2404.11567, 2024</a:t>
-            </a:r>
-          </a:p>
-        </p:txBody>
-      </p:sp>
-      <p:sp>
-        <p:nvSpPr>
-          <p:cNvPr id="10" name="Rectangle 9"/>
+              <a:t>DSP-onlyは3指標すべてを悪化させ、喉マイクには不適切な前処理である</a:t>
+            </a:r>
+          </a:p>
+        </p:txBody>
+      </p:sp>
+      <p:sp>
+        <p:nvSpPr>
+          <p:cNvPr id="14" name="Rectangle 13"/>
           <p:cNvSpPr/>
           <p:nvPr/>
         </p:nvSpPr>
         <p:spPr>
           <a:xfrm>
-            <a:off x="365760" y="5212080"/>
-            <a:ext cx="11430000" cy="1143000"/>
+            <a:off x="365760" y="4709160"/>
+            <a:ext cx="11430000" cy="749808"/>
           </a:xfrm>
           <a:prstGeom prst="rect">
             <a:avLst/>
@@ -16427,20 +16051,19 @@
           <a:lstStyle/>
           <a:p>
             <a:pPr algn="ctr"/>
-            <a:endParaRPr/>
-          </a:p>
-        </p:txBody>
-      </p:sp>
-      <p:sp>
-        <p:nvSpPr>
-          <p:cNvPr id="11" name="TextBox 10"/>
-          <p:cNvSpPr txBox="1"/>
-          <p:nvPr/>
-        </p:nvSpPr>
-        <p:spPr>
-          <a:xfrm>
-            <a:off x="502920" y="5285232"/>
-            <a:ext cx="11155680" cy="1005840"/>
+          </a:p>
+        </p:txBody>
+      </p:sp>
+      <p:sp>
+        <p:nvSpPr>
+          <p:cNvPr id="15" name="TextBox 14"/>
+          <p:cNvSpPr txBox="1"/>
+          <p:nvPr/>
+        </p:nvSpPr>
+        <p:spPr>
+          <a:xfrm>
+            <a:off x="502920" y="4855464"/>
+            <a:ext cx="731520" cy="411480"/>
           </a:xfrm>
           <a:prstGeom prst="rect">
             <a:avLst/>
@@ -16455,21 +16078,53 @@
           <a:p>
             <a:pPr algn="l"/>
             <a:r>
-              <a:rPr sz="1200" b="0">
+              <a:rPr sz="1500" b="1">
+                <a:solidFill>
+                  <a:srgbClr val="43A047"/>
+                </a:solidFill>
+              </a:rPr>
+              <a:t>（4）</a:t>
+            </a:r>
+          </a:p>
+        </p:txBody>
+      </p:sp>
+      <p:sp>
+        <p:nvSpPr>
+          <p:cNvPr id="16" name="TextBox 15"/>
+          <p:cNvSpPr txBox="1"/>
+          <p:nvPr/>
+        </p:nvSpPr>
+        <p:spPr>
+          <a:xfrm>
+            <a:off x="1143000" y="4855464"/>
+            <a:ext cx="10424160" cy="411480"/>
+          </a:xfrm>
+          <a:prstGeom prst="rect">
+            <a:avLst/>
+          </a:prstGeom>
+          <a:noFill/>
+        </p:spPr>
+        <p:txBody>
+          <a:bodyPr wrap="square">
+            <a:spAutoFit/>
+          </a:bodyPr>
+          <a:lstStyle/>
+          <a:p>
+            <a:pPr algn="l"/>
+            <a:r>
+              <a:rPr sz="1500" b="0">
                 <a:solidFill>
                   <a:srgbClr val="212121"/>
                 </a:solidFill>
               </a:rPr>
-              <a:t>[4]  Y. Kim et al.,
-     "TAPS: Throat and Acoustic Pairing Speech Dataset"
-     HuggingFace: yskim3271/Throat_and_Acoustic_Pairing_Speech_Dataset</a:t>
-            </a:r>
-          </a:p>
-        </p:txBody>
-      </p:sp>
-      <p:sp>
-        <p:nvSpPr>
-          <p:cNvPr id="12" name="Rectangle 11"/>
+              <a:t>Whisper smallのFTによりCERが0.269→0.095（64.6%改善）—「ASR側の適応」が音声処理より有効</a:t>
+            </a:r>
+          </a:p>
+        </p:txBody>
+      </p:sp>
+      <p:sp>
+        <p:nvSpPr>
+          <p:cNvPr id="17" name="Rectangle 16"/>
           <p:cNvSpPr/>
           <p:nvPr/>
         </p:nvSpPr>
@@ -16507,13 +16162,12 @@
           <a:lstStyle/>
           <a:p>
             <a:pPr algn="ctr"/>
-            <a:endParaRPr/>
-          </a:p>
-        </p:txBody>
-      </p:sp>
-      <p:sp>
-        <p:nvSpPr>
-          <p:cNvPr id="13" name="TextBox 12"/>
+          </a:p>
+        </p:txBody>
+      </p:sp>
+      <p:sp>
+        <p:nvSpPr>
+          <p:cNvPr id="18" name="TextBox 17"/>
           <p:cNvSpPr txBox="1"/>
           <p:nvPr/>
         </p:nvSpPr>
@@ -16554,7 +16208,7 @@
 </file>
 
 <file path=ppt/slides/slide25.xml><?xml version="1.0" encoding="utf-8"?>
-<p:sld xmlns:a="http://schemas.openxmlformats.org/drawingml/2006/main" xmlns:r="http://schemas.openxmlformats.org/officeDocument/2006/relationships" xmlns:p="http://schemas.openxmlformats.org/presentationml/2006/main">
+<p:sld xmlns:a="http://schemas.openxmlformats.org/drawingml/2006/main" xmlns:p="http://schemas.openxmlformats.org/presentationml/2006/main" xmlns:r="http://schemas.openxmlformats.org/officeDocument/2006/relationships">
   <p:cSld>
     <p:spTree>
       <p:nvGrpSpPr>
@@ -16562,14 +16216,7 @@
         <p:cNvGrpSpPr/>
         <p:nvPr/>
       </p:nvGrpSpPr>
-      <p:grpSpPr>
-        <a:xfrm>
-          <a:off x="0" y="0"/>
-          <a:ext cx="0" cy="0"/>
-          <a:chOff x="0" y="0"/>
-          <a:chExt cx="0" cy="0"/>
-        </a:xfrm>
-      </p:grpSpPr>
+      <p:grpSpPr/>
       <p:sp>
         <p:nvSpPr>
           <p:cNvPr id="2" name="Rectangle 1"/>
@@ -16579,7 +16226,7 @@
         <p:spPr>
           <a:xfrm>
             <a:off x="0" y="0"/>
-            <a:ext cx="12188952" cy="6858000"/>
+            <a:ext cx="12188952" cy="1280160"/>
           </a:xfrm>
           <a:prstGeom prst="rect">
             <a:avLst/>
@@ -16610,7 +16257,1205 @@
           <a:lstStyle/>
           <a:p>
             <a:pPr algn="ctr"/>
-            <a:endParaRPr/>
+          </a:p>
+        </p:txBody>
+      </p:sp>
+      <p:sp>
+        <p:nvSpPr>
+          <p:cNvPr id="3" name="TextBox 2"/>
+          <p:cNvSpPr txBox="1"/>
+          <p:nvPr/>
+        </p:nvSpPr>
+        <p:spPr>
+          <a:xfrm>
+            <a:off x="365760" y="164592"/>
+            <a:ext cx="11430000" cy="822960"/>
+          </a:xfrm>
+          <a:prstGeom prst="rect">
+            <a:avLst/>
+          </a:prstGeom>
+          <a:noFill/>
+        </p:spPr>
+        <p:txBody>
+          <a:bodyPr wrap="square">
+            <a:spAutoFit/>
+          </a:bodyPr>
+          <a:lstStyle/>
+          <a:p>
+            <a:pPr algn="l"/>
+            <a:r>
+              <a:rPr sz="2800" b="1">
+                <a:solidFill>
+                  <a:srgbClr val="FFFFFF"/>
+                </a:solidFill>
+              </a:rPr>
+              <a:t>今後の展望</a:t>
+            </a:r>
+          </a:p>
+        </p:txBody>
+      </p:sp>
+      <p:sp>
+        <p:nvSpPr>
+          <p:cNvPr id="4" name="Rectangle 3"/>
+          <p:cNvSpPr/>
+          <p:nvPr/>
+        </p:nvSpPr>
+        <p:spPr>
+          <a:xfrm>
+            <a:off x="365760" y="1463040"/>
+            <a:ext cx="11430000" cy="1463040"/>
+          </a:xfrm>
+          <a:prstGeom prst="rect">
+            <a:avLst/>
+          </a:prstGeom>
+          <a:solidFill>
+            <a:srgbClr val="FFEBEE"/>
+          </a:solidFill>
+          <a:ln>
+            <a:noFill/>
+          </a:ln>
+        </p:spPr>
+        <p:style>
+          <a:lnRef idx="1">
+            <a:schemeClr val="accent1"/>
+          </a:lnRef>
+          <a:fillRef idx="3">
+            <a:schemeClr val="accent1"/>
+          </a:fillRef>
+          <a:effectRef idx="2">
+            <a:schemeClr val="accent1"/>
+          </a:effectRef>
+          <a:fontRef idx="minor">
+            <a:schemeClr val="lt1"/>
+          </a:fontRef>
+        </p:style>
+        <p:txBody>
+          <a:bodyPr rtlCol="0" anchor="ctr"/>
+          <a:lstStyle/>
+          <a:p>
+            <a:pPr algn="ctr"/>
+          </a:p>
+        </p:txBody>
+      </p:sp>
+      <p:sp>
+        <p:nvSpPr>
+          <p:cNvPr id="5" name="TextBox 4"/>
+          <p:cNvSpPr txBox="1"/>
+          <p:nvPr/>
+        </p:nvSpPr>
+        <p:spPr>
+          <a:xfrm>
+            <a:off x="502920" y="1508760"/>
+            <a:ext cx="2560320" cy="320040"/>
+          </a:xfrm>
+          <a:prstGeom prst="rect">
+            <a:avLst/>
+          </a:prstGeom>
+          <a:noFill/>
+        </p:spPr>
+        <p:txBody>
+          <a:bodyPr wrap="square">
+            <a:spAutoFit/>
+          </a:bodyPr>
+          <a:lstStyle/>
+          <a:p>
+            <a:pPr algn="l"/>
+            <a:r>
+              <a:rPr sz="1100" b="1">
+                <a:solidFill>
+                  <a:srgbClr val="78909C"/>
+                </a:solidFill>
+              </a:rPr>
+              <a:t>優先度：高</a:t>
+            </a:r>
+          </a:p>
+        </p:txBody>
+      </p:sp>
+      <p:sp>
+        <p:nvSpPr>
+          <p:cNvPr id="6" name="TextBox 5"/>
+          <p:cNvSpPr txBox="1"/>
+          <p:nvPr/>
+        </p:nvSpPr>
+        <p:spPr>
+          <a:xfrm>
+            <a:off x="502920" y="1810512"/>
+            <a:ext cx="11064240" cy="384048"/>
+          </a:xfrm>
+          <a:prstGeom prst="rect">
+            <a:avLst/>
+          </a:prstGeom>
+          <a:noFill/>
+        </p:spPr>
+        <p:txBody>
+          <a:bodyPr wrap="square">
+            <a:spAutoFit/>
+          </a:bodyPr>
+          <a:lstStyle/>
+          <a:p>
+            <a:pPr algn="l"/>
+            <a:r>
+              <a:rPr sz="1600" b="1">
+                <a:solidFill>
+                  <a:srgbClr val="1A237E"/>
+                </a:solidFill>
+              </a:rPr>
+              <a:t>Whisper large-v3 でのFTと比較</a:t>
+            </a:r>
+          </a:p>
+        </p:txBody>
+      </p:sp>
+      <p:sp>
+        <p:nvSpPr>
+          <p:cNvPr id="7" name="TextBox 6"/>
+          <p:cNvSpPr txBox="1"/>
+          <p:nvPr/>
+        </p:nvSpPr>
+        <p:spPr>
+          <a:xfrm>
+            <a:off x="640080" y="2267712"/>
+            <a:ext cx="10972800" cy="292608"/>
+          </a:xfrm>
+          <a:prstGeom prst="rect">
+            <a:avLst/>
+          </a:prstGeom>
+          <a:noFill/>
+        </p:spPr>
+        <p:txBody>
+          <a:bodyPr wrap="square">
+            <a:spAutoFit/>
+          </a:bodyPr>
+          <a:lstStyle/>
+          <a:p>
+            <a:pPr algn="l"/>
+            <a:r>
+              <a:rPr sz="1300" b="0">
+                <a:solidFill>
+                  <a:srgbClr val="212121"/>
+                </a:solidFill>
+              </a:rPr>
+              <a:t>・ smallとlargeでFT効果の差を比較</a:t>
+            </a:r>
+          </a:p>
+        </p:txBody>
+      </p:sp>
+      <p:sp>
+        <p:nvSpPr>
+          <p:cNvPr id="8" name="TextBox 7"/>
+          <p:cNvSpPr txBox="1"/>
+          <p:nvPr/>
+        </p:nvSpPr>
+        <p:spPr>
+          <a:xfrm>
+            <a:off x="640080" y="2587752"/>
+            <a:ext cx="10972800" cy="292608"/>
+          </a:xfrm>
+          <a:prstGeom prst="rect">
+            <a:avLst/>
+          </a:prstGeom>
+          <a:noFill/>
+        </p:spPr>
+        <p:txBody>
+          <a:bodyPr wrap="square">
+            <a:spAutoFit/>
+          </a:bodyPr>
+          <a:lstStyle/>
+          <a:p>
+            <a:pPr algn="l"/>
+            <a:r>
+              <a:rPr sz="1300" b="0">
+                <a:solidFill>
+                  <a:srgbClr val="212121"/>
+                </a:solidFill>
+              </a:rPr>
+              <a:t>・ モデルサイズとドメイン適応効果の関係を明らかにする</a:t>
+            </a:r>
+          </a:p>
+        </p:txBody>
+      </p:sp>
+      <p:sp>
+        <p:nvSpPr>
+          <p:cNvPr id="9" name="Rectangle 8"/>
+          <p:cNvSpPr/>
+          <p:nvPr/>
+        </p:nvSpPr>
+        <p:spPr>
+          <a:xfrm>
+            <a:off x="365760" y="3063240"/>
+            <a:ext cx="11430000" cy="1463040"/>
+          </a:xfrm>
+          <a:prstGeom prst="rect">
+            <a:avLst/>
+          </a:prstGeom>
+          <a:solidFill>
+            <a:srgbClr val="FFF8E1"/>
+          </a:solidFill>
+          <a:ln>
+            <a:noFill/>
+          </a:ln>
+        </p:spPr>
+        <p:style>
+          <a:lnRef idx="1">
+            <a:schemeClr val="accent1"/>
+          </a:lnRef>
+          <a:fillRef idx="3">
+            <a:schemeClr val="accent1"/>
+          </a:fillRef>
+          <a:effectRef idx="2">
+            <a:schemeClr val="accent1"/>
+          </a:effectRef>
+          <a:fontRef idx="minor">
+            <a:schemeClr val="lt1"/>
+          </a:fontRef>
+        </p:style>
+        <p:txBody>
+          <a:bodyPr rtlCol="0" anchor="ctr"/>
+          <a:lstStyle/>
+          <a:p>
+            <a:pPr algn="ctr"/>
+          </a:p>
+        </p:txBody>
+      </p:sp>
+      <p:sp>
+        <p:nvSpPr>
+          <p:cNvPr id="10" name="TextBox 9"/>
+          <p:cNvSpPr txBox="1"/>
+          <p:nvPr/>
+        </p:nvSpPr>
+        <p:spPr>
+          <a:xfrm>
+            <a:off x="502920" y="3108960"/>
+            <a:ext cx="2560320" cy="320040"/>
+          </a:xfrm>
+          <a:prstGeom prst="rect">
+            <a:avLst/>
+          </a:prstGeom>
+          <a:noFill/>
+        </p:spPr>
+        <p:txBody>
+          <a:bodyPr wrap="square">
+            <a:spAutoFit/>
+          </a:bodyPr>
+          <a:lstStyle/>
+          <a:p>
+            <a:pPr algn="l"/>
+            <a:r>
+              <a:rPr sz="1100" b="1">
+                <a:solidFill>
+                  <a:srgbClr val="78909C"/>
+                </a:solidFill>
+              </a:rPr>
+              <a:t>優先度：中</a:t>
+            </a:r>
+          </a:p>
+        </p:txBody>
+      </p:sp>
+      <p:sp>
+        <p:nvSpPr>
+          <p:cNvPr id="11" name="TextBox 10"/>
+          <p:cNvSpPr txBox="1"/>
+          <p:nvPr/>
+        </p:nvSpPr>
+        <p:spPr>
+          <a:xfrm>
+            <a:off x="502920" y="3410712"/>
+            <a:ext cx="11064240" cy="384048"/>
+          </a:xfrm>
+          <a:prstGeom prst="rect">
+            <a:avLst/>
+          </a:prstGeom>
+          <a:noFill/>
+        </p:spPr>
+        <p:txBody>
+          <a:bodyPr wrap="square">
+            <a:spAutoFit/>
+          </a:bodyPr>
+          <a:lstStyle/>
+          <a:p>
+            <a:pPr algn="l"/>
+            <a:r>
+              <a:rPr sz="1600" b="1">
+                <a:solidFill>
+                  <a:srgbClr val="1A237E"/>
+                </a:solidFill>
+              </a:rPr>
+              <a:t>ノイズ条件下でのWhisper FT評価</a:t>
+            </a:r>
+          </a:p>
+        </p:txBody>
+      </p:sp>
+      <p:sp>
+        <p:nvSpPr>
+          <p:cNvPr id="12" name="TextBox 11"/>
+          <p:cNvSpPr txBox="1"/>
+          <p:nvPr/>
+        </p:nvSpPr>
+        <p:spPr>
+          <a:xfrm>
+            <a:off x="640080" y="3867912"/>
+            <a:ext cx="10972800" cy="292608"/>
+          </a:xfrm>
+          <a:prstGeom prst="rect">
+            <a:avLst/>
+          </a:prstGeom>
+          <a:noFill/>
+        </p:spPr>
+        <p:txBody>
+          <a:bodyPr wrap="square">
+            <a:spAutoFit/>
+          </a:bodyPr>
+          <a:lstStyle/>
+          <a:p>
+            <a:pPr algn="l"/>
+            <a:r>
+              <a:rPr sz="1300" b="0">
+                <a:solidFill>
+                  <a:srgbClr val="212121"/>
+                </a:solidFill>
+              </a:rPr>
+              <a:t>・ 現在のFT評価はクリーン音声のみ</a:t>
+            </a:r>
+          </a:p>
+        </p:txBody>
+      </p:sp>
+      <p:sp>
+        <p:nvSpPr>
+          <p:cNvPr id="13" name="TextBox 12"/>
+          <p:cNvSpPr txBox="1"/>
+          <p:nvPr/>
+        </p:nvSpPr>
+        <p:spPr>
+          <a:xfrm>
+            <a:off x="640080" y="4187952"/>
+            <a:ext cx="10972800" cy="292608"/>
+          </a:xfrm>
+          <a:prstGeom prst="rect">
+            <a:avLst/>
+          </a:prstGeom>
+          <a:noFill/>
+        </p:spPr>
+        <p:txBody>
+          <a:bodyPr wrap="square">
+            <a:spAutoFit/>
+          </a:bodyPr>
+          <a:lstStyle/>
+          <a:p>
+            <a:pPr algn="l"/>
+            <a:r>
+              <a:rPr sz="1300" b="0">
+                <a:solidFill>
+                  <a:srgbClr val="212121"/>
+                </a:solidFill>
+              </a:rPr>
+              <a:t>・ フェーズ1と同じSNR条件（白色・ピンクノイズ）でのCER比較</a:t>
+            </a:r>
+          </a:p>
+        </p:txBody>
+      </p:sp>
+      <p:sp>
+        <p:nvSpPr>
+          <p:cNvPr id="14" name="Rectangle 13"/>
+          <p:cNvSpPr/>
+          <p:nvPr/>
+        </p:nvSpPr>
+        <p:spPr>
+          <a:xfrm>
+            <a:off x="365760" y="4663440"/>
+            <a:ext cx="11430000" cy="1463040"/>
+          </a:xfrm>
+          <a:prstGeom prst="rect">
+            <a:avLst/>
+          </a:prstGeom>
+          <a:solidFill>
+            <a:srgbClr val="E8F5E9"/>
+          </a:solidFill>
+          <a:ln>
+            <a:noFill/>
+          </a:ln>
+        </p:spPr>
+        <p:style>
+          <a:lnRef idx="1">
+            <a:schemeClr val="accent1"/>
+          </a:lnRef>
+          <a:fillRef idx="3">
+            <a:schemeClr val="accent1"/>
+          </a:fillRef>
+          <a:effectRef idx="2">
+            <a:schemeClr val="accent1"/>
+          </a:effectRef>
+          <a:fontRef idx="minor">
+            <a:schemeClr val="lt1"/>
+          </a:fontRef>
+        </p:style>
+        <p:txBody>
+          <a:bodyPr rtlCol="0" anchor="ctr"/>
+          <a:lstStyle/>
+          <a:p>
+            <a:pPr algn="ctr"/>
+          </a:p>
+        </p:txBody>
+      </p:sp>
+      <p:sp>
+        <p:nvSpPr>
+          <p:cNvPr id="15" name="TextBox 14"/>
+          <p:cNvSpPr txBox="1"/>
+          <p:nvPr/>
+        </p:nvSpPr>
+        <p:spPr>
+          <a:xfrm>
+            <a:off x="502920" y="4709160"/>
+            <a:ext cx="2560320" cy="320040"/>
+          </a:xfrm>
+          <a:prstGeom prst="rect">
+            <a:avLst/>
+          </a:prstGeom>
+          <a:noFill/>
+        </p:spPr>
+        <p:txBody>
+          <a:bodyPr wrap="square">
+            <a:spAutoFit/>
+          </a:bodyPr>
+          <a:lstStyle/>
+          <a:p>
+            <a:pPr algn="l"/>
+            <a:r>
+              <a:rPr sz="1100" b="1">
+                <a:solidFill>
+                  <a:srgbClr val="78909C"/>
+                </a:solidFill>
+              </a:rPr>
+              <a:t>優先度：中</a:t>
+            </a:r>
+          </a:p>
+        </p:txBody>
+      </p:sp>
+      <p:sp>
+        <p:nvSpPr>
+          <p:cNvPr id="16" name="TextBox 15"/>
+          <p:cNvSpPr txBox="1"/>
+          <p:nvPr/>
+        </p:nvSpPr>
+        <p:spPr>
+          <a:xfrm>
+            <a:off x="502920" y="5010912"/>
+            <a:ext cx="11064240" cy="384048"/>
+          </a:xfrm>
+          <a:prstGeom prst="rect">
+            <a:avLst/>
+          </a:prstGeom>
+          <a:noFill/>
+        </p:spPr>
+        <p:txBody>
+          <a:bodyPr wrap="square">
+            <a:spAutoFit/>
+          </a:bodyPr>
+          <a:lstStyle/>
+          <a:p>
+            <a:pPr algn="l"/>
+            <a:r>
+              <a:rPr sz="1600" b="1">
+                <a:solidFill>
+                  <a:srgbClr val="1A237E"/>
+                </a:solidFill>
+              </a:rPr>
+              <a:t>実環境ノイズでの検証</a:t>
+            </a:r>
+          </a:p>
+        </p:txBody>
+      </p:sp>
+      <p:sp>
+        <p:nvSpPr>
+          <p:cNvPr id="17" name="TextBox 16"/>
+          <p:cNvSpPr txBox="1"/>
+          <p:nvPr/>
+        </p:nvSpPr>
+        <p:spPr>
+          <a:xfrm>
+            <a:off x="640080" y="5468112"/>
+            <a:ext cx="10972800" cy="292608"/>
+          </a:xfrm>
+          <a:prstGeom prst="rect">
+            <a:avLst/>
+          </a:prstGeom>
+          <a:noFill/>
+        </p:spPr>
+        <p:txBody>
+          <a:bodyPr wrap="square">
+            <a:spAutoFit/>
+          </a:bodyPr>
+          <a:lstStyle/>
+          <a:p>
+            <a:pPr algn="l"/>
+            <a:r>
+              <a:rPr sz="1300" b="0">
+                <a:solidFill>
+                  <a:srgbClr val="212121"/>
+                </a:solidFill>
+              </a:rPr>
+              <a:t>・ 現在は人工ノイズ（白色・ピンク）のみ</a:t>
+            </a:r>
+          </a:p>
+        </p:txBody>
+      </p:sp>
+      <p:sp>
+        <p:nvSpPr>
+          <p:cNvPr id="18" name="TextBox 17"/>
+          <p:cNvSpPr txBox="1"/>
+          <p:nvPr/>
+        </p:nvSpPr>
+        <p:spPr>
+          <a:xfrm>
+            <a:off x="640080" y="5788152"/>
+            <a:ext cx="10972800" cy="292608"/>
+          </a:xfrm>
+          <a:prstGeom prst="rect">
+            <a:avLst/>
+          </a:prstGeom>
+          <a:noFill/>
+        </p:spPr>
+        <p:txBody>
+          <a:bodyPr wrap="square">
+            <a:spAutoFit/>
+          </a:bodyPr>
+          <a:lstStyle/>
+          <a:p>
+            <a:pPr algn="l"/>
+            <a:r>
+              <a:rPr sz="1300" b="0">
+                <a:solidFill>
+                  <a:srgbClr val="212121"/>
+                </a:solidFill>
+              </a:rPr>
+              <a:t>・ MUSAN・DEMANDなどの実録音ノイズで再現実験</a:t>
+            </a:r>
+          </a:p>
+        </p:txBody>
+      </p:sp>
+      <p:sp>
+        <p:nvSpPr>
+          <p:cNvPr id="19" name="Rectangle 18"/>
+          <p:cNvSpPr/>
+          <p:nvPr/>
+        </p:nvSpPr>
+        <p:spPr>
+          <a:xfrm>
+            <a:off x="0" y="6537960"/>
+            <a:ext cx="12188952" cy="320040"/>
+          </a:xfrm>
+          <a:prstGeom prst="rect">
+            <a:avLst/>
+          </a:prstGeom>
+          <a:solidFill>
+            <a:srgbClr val="E8EAF6"/>
+          </a:solidFill>
+          <a:ln>
+            <a:noFill/>
+          </a:ln>
+        </p:spPr>
+        <p:style>
+          <a:lnRef idx="1">
+            <a:schemeClr val="accent1"/>
+          </a:lnRef>
+          <a:fillRef idx="3">
+            <a:schemeClr val="accent1"/>
+          </a:fillRef>
+          <a:effectRef idx="2">
+            <a:schemeClr val="accent1"/>
+          </a:effectRef>
+          <a:fontRef idx="minor">
+            <a:schemeClr val="lt1"/>
+          </a:fontRef>
+        </p:style>
+        <p:txBody>
+          <a:bodyPr rtlCol="0" anchor="ctr"/>
+          <a:lstStyle/>
+          <a:p>
+            <a:pPr algn="ctr"/>
+          </a:p>
+        </p:txBody>
+      </p:sp>
+      <p:sp>
+        <p:nvSpPr>
+          <p:cNvPr id="20" name="TextBox 19"/>
+          <p:cNvSpPr txBox="1"/>
+          <p:nvPr/>
+        </p:nvSpPr>
+        <p:spPr>
+          <a:xfrm>
+            <a:off x="11091672" y="6565392"/>
+            <a:ext cx="1005840" cy="274320"/>
+          </a:xfrm>
+          <a:prstGeom prst="rect">
+            <a:avLst/>
+          </a:prstGeom>
+          <a:noFill/>
+        </p:spPr>
+        <p:txBody>
+          <a:bodyPr wrap="square">
+            <a:spAutoFit/>
+          </a:bodyPr>
+          <a:lstStyle/>
+          <a:p>
+            <a:pPr algn="r"/>
+            <a:r>
+              <a:rPr sz="1000" b="0">
+                <a:solidFill>
+                  <a:srgbClr val="1A237E"/>
+                </a:solidFill>
+              </a:rPr>
+              <a:t>25 / 25</a:t>
+            </a:r>
+          </a:p>
+        </p:txBody>
+      </p:sp>
+    </p:spTree>
+  </p:cSld>
+  <p:clrMapOvr>
+    <a:masterClrMapping/>
+  </p:clrMapOvr>
+</p:sld>
+</file>
+
+<file path=ppt/slides/slide26.xml><?xml version="1.0" encoding="utf-8"?>
+<p:sld xmlns:a="http://schemas.openxmlformats.org/drawingml/2006/main" xmlns:p="http://schemas.openxmlformats.org/presentationml/2006/main" xmlns:r="http://schemas.openxmlformats.org/officeDocument/2006/relationships">
+  <p:cSld>
+    <p:spTree>
+      <p:nvGrpSpPr>
+        <p:cNvPr id="1" name=""/>
+        <p:cNvGrpSpPr/>
+        <p:nvPr/>
+      </p:nvGrpSpPr>
+      <p:grpSpPr/>
+      <p:sp>
+        <p:nvSpPr>
+          <p:cNvPr id="2" name="Rectangle 1"/>
+          <p:cNvSpPr/>
+          <p:nvPr/>
+        </p:nvSpPr>
+        <p:spPr>
+          <a:xfrm>
+            <a:off x="0" y="0"/>
+            <a:ext cx="12188952" cy="1280160"/>
+          </a:xfrm>
+          <a:prstGeom prst="rect">
+            <a:avLst/>
+          </a:prstGeom>
+          <a:solidFill>
+            <a:srgbClr val="1A237E"/>
+          </a:solidFill>
+          <a:ln>
+            <a:noFill/>
+          </a:ln>
+        </p:spPr>
+        <p:style>
+          <a:lnRef idx="1">
+            <a:schemeClr val="accent1"/>
+          </a:lnRef>
+          <a:fillRef idx="3">
+            <a:schemeClr val="accent1"/>
+          </a:fillRef>
+          <a:effectRef idx="2">
+            <a:schemeClr val="accent1"/>
+          </a:effectRef>
+          <a:fontRef idx="minor">
+            <a:schemeClr val="lt1"/>
+          </a:fontRef>
+        </p:style>
+        <p:txBody>
+          <a:bodyPr rtlCol="0" anchor="ctr"/>
+          <a:lstStyle/>
+          <a:p>
+            <a:pPr algn="ctr"/>
+          </a:p>
+        </p:txBody>
+      </p:sp>
+      <p:sp>
+        <p:nvSpPr>
+          <p:cNvPr id="3" name="TextBox 2"/>
+          <p:cNvSpPr txBox="1"/>
+          <p:nvPr/>
+        </p:nvSpPr>
+        <p:spPr>
+          <a:xfrm>
+            <a:off x="365760" y="164592"/>
+            <a:ext cx="11430000" cy="822960"/>
+          </a:xfrm>
+          <a:prstGeom prst="rect">
+            <a:avLst/>
+          </a:prstGeom>
+          <a:noFill/>
+        </p:spPr>
+        <p:txBody>
+          <a:bodyPr wrap="square">
+            <a:spAutoFit/>
+          </a:bodyPr>
+          <a:lstStyle/>
+          <a:p>
+            <a:pPr algn="l"/>
+            <a:r>
+              <a:rPr sz="2800" b="1">
+                <a:solidFill>
+                  <a:srgbClr val="FFFFFF"/>
+                </a:solidFill>
+              </a:rPr>
+              <a:t>参考文献</a:t>
+            </a:r>
+          </a:p>
+        </p:txBody>
+      </p:sp>
+      <p:sp>
+        <p:nvSpPr>
+          <p:cNvPr id="4" name="Rectangle 3"/>
+          <p:cNvSpPr/>
+          <p:nvPr/>
+        </p:nvSpPr>
+        <p:spPr>
+          <a:xfrm>
+            <a:off x="365760" y="1508760"/>
+            <a:ext cx="11430000" cy="1143000"/>
+          </a:xfrm>
+          <a:prstGeom prst="rect">
+            <a:avLst/>
+          </a:prstGeom>
+          <a:solidFill>
+            <a:srgbClr val="F5F5F5"/>
+          </a:solidFill>
+          <a:ln>
+            <a:noFill/>
+          </a:ln>
+        </p:spPr>
+        <p:style>
+          <a:lnRef idx="1">
+            <a:schemeClr val="accent1"/>
+          </a:lnRef>
+          <a:fillRef idx="3">
+            <a:schemeClr val="accent1"/>
+          </a:fillRef>
+          <a:effectRef idx="2">
+            <a:schemeClr val="accent1"/>
+          </a:effectRef>
+          <a:fontRef idx="minor">
+            <a:schemeClr val="lt1"/>
+          </a:fontRef>
+        </p:style>
+        <p:txBody>
+          <a:bodyPr rtlCol="0" anchor="ctr"/>
+          <a:lstStyle/>
+          <a:p>
+            <a:pPr algn="ctr"/>
+          </a:p>
+        </p:txBody>
+      </p:sp>
+      <p:sp>
+        <p:nvSpPr>
+          <p:cNvPr id="5" name="TextBox 4"/>
+          <p:cNvSpPr txBox="1"/>
+          <p:nvPr/>
+        </p:nvSpPr>
+        <p:spPr>
+          <a:xfrm>
+            <a:off x="502920" y="1581912"/>
+            <a:ext cx="11155680" cy="1005840"/>
+          </a:xfrm>
+          <a:prstGeom prst="rect">
+            <a:avLst/>
+          </a:prstGeom>
+          <a:noFill/>
+        </p:spPr>
+        <p:txBody>
+          <a:bodyPr wrap="square">
+            <a:spAutoFit/>
+          </a:bodyPr>
+          <a:lstStyle/>
+          <a:p>
+            <a:pPr algn="l"/>
+            <a:r>
+              <a:rPr sz="1200" b="0">
+                <a:solidFill>
+                  <a:srgbClr val="212121"/>
+                </a:solidFill>
+              </a:rPr>
+              <a:t>[1]  C.O. Mawalim, S. Okada, M. Unoki,
+     "Are Recent Deep Learning-Based Speech Enhancement Methods Ready to Confront
+     Real-World Noisy Environments?"
+     Interspeech 2024, pp. 1735–1739, DOI: 10.21437/Interspeech.2024-129</a:t>
+            </a:r>
+          </a:p>
+        </p:txBody>
+      </p:sp>
+      <p:sp>
+        <p:nvSpPr>
+          <p:cNvPr id="6" name="Rectangle 5"/>
+          <p:cNvSpPr/>
+          <p:nvPr/>
+        </p:nvSpPr>
+        <p:spPr>
+          <a:xfrm>
+            <a:off x="365760" y="2743200"/>
+            <a:ext cx="11430000" cy="1143000"/>
+          </a:xfrm>
+          <a:prstGeom prst="rect">
+            <a:avLst/>
+          </a:prstGeom>
+          <a:solidFill>
+            <a:srgbClr val="F5F5F5"/>
+          </a:solidFill>
+          <a:ln>
+            <a:noFill/>
+          </a:ln>
+        </p:spPr>
+        <p:style>
+          <a:lnRef idx="1">
+            <a:schemeClr val="accent1"/>
+          </a:lnRef>
+          <a:fillRef idx="3">
+            <a:schemeClr val="accent1"/>
+          </a:fillRef>
+          <a:effectRef idx="2">
+            <a:schemeClr val="accent1"/>
+          </a:effectRef>
+          <a:fontRef idx="minor">
+            <a:schemeClr val="lt1"/>
+          </a:fontRef>
+        </p:style>
+        <p:txBody>
+          <a:bodyPr rtlCol="0" anchor="ctr"/>
+          <a:lstStyle/>
+          <a:p>
+            <a:pPr algn="ctr"/>
+          </a:p>
+        </p:txBody>
+      </p:sp>
+      <p:sp>
+        <p:nvSpPr>
+          <p:cNvPr id="7" name="TextBox 6"/>
+          <p:cNvSpPr txBox="1"/>
+          <p:nvPr/>
+        </p:nvSpPr>
+        <p:spPr>
+          <a:xfrm>
+            <a:off x="502920" y="2816352"/>
+            <a:ext cx="11155680" cy="1005840"/>
+          </a:xfrm>
+          <a:prstGeom prst="rect">
+            <a:avLst/>
+          </a:prstGeom>
+          <a:noFill/>
+        </p:spPr>
+        <p:txBody>
+          <a:bodyPr wrap="square">
+            <a:spAutoFit/>
+          </a:bodyPr>
+          <a:lstStyle/>
+          <a:p>
+            <a:pPr algn="l"/>
+            <a:r>
+              <a:rPr sz="1200" b="0">
+                <a:solidFill>
+                  <a:srgbClr val="212121"/>
+                </a:solidFill>
+              </a:rPr>
+              <a:t>[2]  T. Ochiai, K. Iwamoto, M. Delcroix et al.,
+     "Rethinking Processing Distortions: How Do They Affect the Downstream ASR Performance?"
+     IEEE/ACM Transactions on Audio, Speech, and Language Processing, TASLP 2024,
+     arXiv:2404.14860</a:t>
+            </a:r>
+          </a:p>
+        </p:txBody>
+      </p:sp>
+      <p:sp>
+        <p:nvSpPr>
+          <p:cNvPr id="8" name="Rectangle 7"/>
+          <p:cNvSpPr/>
+          <p:nvPr/>
+        </p:nvSpPr>
+        <p:spPr>
+          <a:xfrm>
+            <a:off x="365760" y="3977640"/>
+            <a:ext cx="11430000" cy="1143000"/>
+          </a:xfrm>
+          <a:prstGeom prst="rect">
+            <a:avLst/>
+          </a:prstGeom>
+          <a:solidFill>
+            <a:srgbClr val="F5F5F5"/>
+          </a:solidFill>
+          <a:ln>
+            <a:noFill/>
+          </a:ln>
+        </p:spPr>
+        <p:style>
+          <a:lnRef idx="1">
+            <a:schemeClr val="accent1"/>
+          </a:lnRef>
+          <a:fillRef idx="3">
+            <a:schemeClr val="accent1"/>
+          </a:fillRef>
+          <a:effectRef idx="2">
+            <a:schemeClr val="accent1"/>
+          </a:effectRef>
+          <a:fontRef idx="minor">
+            <a:schemeClr val="lt1"/>
+          </a:fontRef>
+        </p:style>
+        <p:txBody>
+          <a:bodyPr rtlCol="0" anchor="ctr"/>
+          <a:lstStyle/>
+          <a:p>
+            <a:pPr algn="ctr"/>
+          </a:p>
+        </p:txBody>
+      </p:sp>
+      <p:sp>
+        <p:nvSpPr>
+          <p:cNvPr id="9" name="TextBox 8"/>
+          <p:cNvSpPr txBox="1"/>
+          <p:nvPr/>
+        </p:nvSpPr>
+        <p:spPr>
+          <a:xfrm>
+            <a:off x="502920" y="4050792"/>
+            <a:ext cx="11155680" cy="1005840"/>
+          </a:xfrm>
+          <a:prstGeom prst="rect">
+            <a:avLst/>
+          </a:prstGeom>
+          <a:noFill/>
+        </p:spPr>
+        <p:txBody>
+          <a:bodyPr wrap="square">
+            <a:spAutoFit/>
+          </a:bodyPr>
+          <a:lstStyle/>
+          <a:p>
+            <a:pPr algn="l"/>
+            <a:r>
+              <a:rPr sz="1200" b="0">
+                <a:solidFill>
+                  <a:srgbClr val="212121"/>
+                </a:solidFill>
+              </a:rPr>
+              <a:t>[3]  X. Rong, C. Li, J. Xiao,
+     "GTCRN: A Speech Enhancement Model Requiring Ultra-Tiny Resources"
+     arXiv:2404.11567, 2024</a:t>
+            </a:r>
+          </a:p>
+        </p:txBody>
+      </p:sp>
+      <p:sp>
+        <p:nvSpPr>
+          <p:cNvPr id="10" name="Rectangle 9"/>
+          <p:cNvSpPr/>
+          <p:nvPr/>
+        </p:nvSpPr>
+        <p:spPr>
+          <a:xfrm>
+            <a:off x="365760" y="5212080"/>
+            <a:ext cx="11430000" cy="1143000"/>
+          </a:xfrm>
+          <a:prstGeom prst="rect">
+            <a:avLst/>
+          </a:prstGeom>
+          <a:solidFill>
+            <a:srgbClr val="F5F5F5"/>
+          </a:solidFill>
+          <a:ln>
+            <a:noFill/>
+          </a:ln>
+        </p:spPr>
+        <p:style>
+          <a:lnRef idx="1">
+            <a:schemeClr val="accent1"/>
+          </a:lnRef>
+          <a:fillRef idx="3">
+            <a:schemeClr val="accent1"/>
+          </a:fillRef>
+          <a:effectRef idx="2">
+            <a:schemeClr val="accent1"/>
+          </a:effectRef>
+          <a:fontRef idx="minor">
+            <a:schemeClr val="lt1"/>
+          </a:fontRef>
+        </p:style>
+        <p:txBody>
+          <a:bodyPr rtlCol="0" anchor="ctr"/>
+          <a:lstStyle/>
+          <a:p>
+            <a:pPr algn="ctr"/>
+          </a:p>
+        </p:txBody>
+      </p:sp>
+      <p:sp>
+        <p:nvSpPr>
+          <p:cNvPr id="11" name="TextBox 10"/>
+          <p:cNvSpPr txBox="1"/>
+          <p:nvPr/>
+        </p:nvSpPr>
+        <p:spPr>
+          <a:xfrm>
+            <a:off x="502920" y="5285232"/>
+            <a:ext cx="11155680" cy="1005840"/>
+          </a:xfrm>
+          <a:prstGeom prst="rect">
+            <a:avLst/>
+          </a:prstGeom>
+          <a:noFill/>
+        </p:spPr>
+        <p:txBody>
+          <a:bodyPr wrap="square">
+            <a:spAutoFit/>
+          </a:bodyPr>
+          <a:lstStyle/>
+          <a:p>
+            <a:pPr algn="l"/>
+            <a:r>
+              <a:rPr sz="1200" b="0">
+                <a:solidFill>
+                  <a:srgbClr val="212121"/>
+                </a:solidFill>
+              </a:rPr>
+              <a:t>[4]  Y. Kim et al.,
+     "TAPS: Throat and Acoustic Pairing Speech Dataset"
+     HuggingFace: yskim3271/Throat_and_Acoustic_Pairing_Speech_Dataset</a:t>
+            </a:r>
+          </a:p>
+        </p:txBody>
+      </p:sp>
+      <p:sp>
+        <p:nvSpPr>
+          <p:cNvPr id="12" name="Rectangle 11"/>
+          <p:cNvSpPr/>
+          <p:nvPr/>
+        </p:nvSpPr>
+        <p:spPr>
+          <a:xfrm>
+            <a:off x="0" y="6537960"/>
+            <a:ext cx="12188952" cy="320040"/>
+          </a:xfrm>
+          <a:prstGeom prst="rect">
+            <a:avLst/>
+          </a:prstGeom>
+          <a:solidFill>
+            <a:srgbClr val="E8EAF6"/>
+          </a:solidFill>
+          <a:ln>
+            <a:noFill/>
+          </a:ln>
+        </p:spPr>
+        <p:style>
+          <a:lnRef idx="1">
+            <a:schemeClr val="accent1"/>
+          </a:lnRef>
+          <a:fillRef idx="3">
+            <a:schemeClr val="accent1"/>
+          </a:fillRef>
+          <a:effectRef idx="2">
+            <a:schemeClr val="accent1"/>
+          </a:effectRef>
+          <a:fontRef idx="minor">
+            <a:schemeClr val="lt1"/>
+          </a:fontRef>
+        </p:style>
+        <p:txBody>
+          <a:bodyPr rtlCol="0" anchor="ctr"/>
+          <a:lstStyle/>
+          <a:p>
+            <a:pPr algn="ctr"/>
+          </a:p>
+        </p:txBody>
+      </p:sp>
+      <p:sp>
+        <p:nvSpPr>
+          <p:cNvPr id="13" name="TextBox 12"/>
+          <p:cNvSpPr txBox="1"/>
+          <p:nvPr/>
+        </p:nvSpPr>
+        <p:spPr>
+          <a:xfrm>
+            <a:off x="11091672" y="6565392"/>
+            <a:ext cx="1005840" cy="274320"/>
+          </a:xfrm>
+          <a:prstGeom prst="rect">
+            <a:avLst/>
+          </a:prstGeom>
+          <a:noFill/>
+        </p:spPr>
+        <p:txBody>
+          <a:bodyPr wrap="square">
+            <a:spAutoFit/>
+          </a:bodyPr>
+          <a:lstStyle/>
+          <a:p>
+            <a:pPr algn="r"/>
+            <a:r>
+              <a:rPr sz="1000" b="0">
+                <a:solidFill>
+                  <a:srgbClr val="1A237E"/>
+                </a:solidFill>
+              </a:rPr>
+              <a:t>26 / 25</a:t>
+            </a:r>
+          </a:p>
+        </p:txBody>
+      </p:sp>
+    </p:spTree>
+  </p:cSld>
+  <p:clrMapOvr>
+    <a:masterClrMapping/>
+  </p:clrMapOvr>
+</p:sld>
+</file>
+
+<file path=ppt/slides/slide27.xml><?xml version="1.0" encoding="utf-8"?>
+<p:sld xmlns:a="http://schemas.openxmlformats.org/drawingml/2006/main" xmlns:p="http://schemas.openxmlformats.org/presentationml/2006/main" xmlns:r="http://schemas.openxmlformats.org/officeDocument/2006/relationships">
+  <p:cSld>
+    <p:spTree>
+      <p:nvGrpSpPr>
+        <p:cNvPr id="1" name=""/>
+        <p:cNvGrpSpPr/>
+        <p:nvPr/>
+      </p:nvGrpSpPr>
+      <p:grpSpPr/>
+      <p:sp>
+        <p:nvSpPr>
+          <p:cNvPr id="2" name="Rectangle 1"/>
+          <p:cNvSpPr/>
+          <p:nvPr/>
+        </p:nvSpPr>
+        <p:spPr>
+          <a:xfrm>
+            <a:off x="0" y="0"/>
+            <a:ext cx="12188952" cy="6858000"/>
+          </a:xfrm>
+          <a:prstGeom prst="rect">
+            <a:avLst/>
+          </a:prstGeom>
+          <a:solidFill>
+            <a:srgbClr val="1A237E"/>
+          </a:solidFill>
+          <a:ln>
+            <a:noFill/>
+          </a:ln>
+        </p:spPr>
+        <p:style>
+          <a:lnRef idx="1">
+            <a:schemeClr val="accent1"/>
+          </a:lnRef>
+          <a:fillRef idx="3">
+            <a:schemeClr val="accent1"/>
+          </a:fillRef>
+          <a:effectRef idx="2">
+            <a:schemeClr val="accent1"/>
+          </a:effectRef>
+          <a:fontRef idx="minor">
+            <a:schemeClr val="lt1"/>
+          </a:fontRef>
+        </p:style>
+        <p:txBody>
+          <a:bodyPr rtlCol="0" anchor="ctr"/>
+          <a:lstStyle/>
+          <a:p>
+            <a:pPr algn="ctr"/>
           </a:p>
         </p:txBody>
       </p:sp>
@@ -16654,7 +17499,6 @@
           <a:lstStyle/>
           <a:p>
             <a:pPr algn="ctr"/>
-            <a:endParaRPr/>
           </a:p>
         </p:txBody>
       </p:sp>
@@ -16801,7 +17645,6 @@
           <a:lstStyle/>
           <a:p>
             <a:pPr algn="ctr"/>
-            <a:endParaRPr/>
           </a:p>
         </p:txBody>
       </p:sp>
@@ -16834,7 +17677,7 @@
                   <a:srgbClr val="1A237E"/>
                 </a:solidFill>
               </a:rPr>
-              <a:t>25 / 25</a:t>
+              <a:t>27 / 25</a:t>
             </a:r>
           </a:p>
         </p:txBody>
@@ -16848,7 +17691,7 @@
 </file>
 
 <file path=ppt/slides/slide3.xml><?xml version="1.0" encoding="utf-8"?>
-<p:sld xmlns:a="http://schemas.openxmlformats.org/drawingml/2006/main" xmlns:r="http://schemas.openxmlformats.org/officeDocument/2006/relationships" xmlns:p="http://schemas.openxmlformats.org/presentationml/2006/main">
+<p:sld xmlns:a="http://schemas.openxmlformats.org/drawingml/2006/main" xmlns:p="http://schemas.openxmlformats.org/presentationml/2006/main" xmlns:r="http://schemas.openxmlformats.org/officeDocument/2006/relationships">
   <p:cSld>
     <p:spTree>
       <p:nvGrpSpPr>
@@ -16856,14 +17699,7 @@
         <p:cNvGrpSpPr/>
         <p:nvPr/>
       </p:nvGrpSpPr>
-      <p:grpSpPr>
-        <a:xfrm>
-          <a:off x="0" y="0"/>
-          <a:ext cx="0" cy="0"/>
-          <a:chOff x="0" y="0"/>
-          <a:chExt cx="0" cy="0"/>
-        </a:xfrm>
-      </p:grpSpPr>
+      <p:grpSpPr/>
       <p:sp>
         <p:nvSpPr>
           <p:cNvPr id="2" name="Rectangle 1"/>
@@ -16904,7 +17740,6 @@
           <a:lstStyle/>
           <a:p>
             <a:pPr algn="ctr"/>
-            <a:endParaRPr/>
           </a:p>
         </p:txBody>
       </p:sp>
@@ -17084,7 +17919,6 @@
           <a:lstStyle/>
           <a:p>
             <a:pPr algn="ctr"/>
-            <a:endParaRPr/>
           </a:p>
         </p:txBody>
       </p:sp>
@@ -17196,7 +18030,6 @@
           <a:lstStyle/>
           <a:p>
             <a:pPr algn="ctr"/>
-            <a:endParaRPr/>
           </a:p>
         </p:txBody>
       </p:sp>
@@ -17308,7 +18141,6 @@
           <a:lstStyle/>
           <a:p>
             <a:pPr algn="ctr"/>
-            <a:endParaRPr/>
           </a:p>
         </p:txBody>
       </p:sp>
@@ -17420,7 +18252,6 @@
           <a:lstStyle/>
           <a:p>
             <a:pPr algn="ctr"/>
-            <a:endParaRPr/>
           </a:p>
         </p:txBody>
       </p:sp>
@@ -17668,7 +18499,6 @@
           <a:lstStyle/>
           <a:p>
             <a:pPr algn="ctr"/>
-            <a:endParaRPr/>
           </a:p>
         </p:txBody>
       </p:sp>
@@ -17715,7 +18545,7 @@
 </file>
 
 <file path=ppt/slides/slide4.xml><?xml version="1.0" encoding="utf-8"?>
-<p:sld xmlns:a="http://schemas.openxmlformats.org/drawingml/2006/main" xmlns:r="http://schemas.openxmlformats.org/officeDocument/2006/relationships" xmlns:p="http://schemas.openxmlformats.org/presentationml/2006/main">
+<p:sld xmlns:a="http://schemas.openxmlformats.org/drawingml/2006/main" xmlns:p="http://schemas.openxmlformats.org/presentationml/2006/main" xmlns:r="http://schemas.openxmlformats.org/officeDocument/2006/relationships">
   <p:cSld>
     <p:spTree>
       <p:nvGrpSpPr>
@@ -17723,14 +18553,7 @@
         <p:cNvGrpSpPr/>
         <p:nvPr/>
       </p:nvGrpSpPr>
-      <p:grpSpPr>
-        <a:xfrm>
-          <a:off x="0" y="0"/>
-          <a:ext cx="0" cy="0"/>
-          <a:chOff x="0" y="0"/>
-          <a:chExt cx="0" cy="0"/>
-        </a:xfrm>
-      </p:grpSpPr>
+      <p:grpSpPr/>
       <p:sp>
         <p:nvSpPr>
           <p:cNvPr id="2" name="Rectangle 1"/>
@@ -17771,7 +18594,6 @@
           <a:lstStyle/>
           <a:p>
             <a:pPr algn="ctr"/>
-            <a:endParaRPr/>
           </a:p>
         </p:txBody>
       </p:sp>
@@ -17917,7 +18739,6 @@
           <a:lstStyle/>
           <a:p>
             <a:pPr algn="ctr"/>
-            <a:endParaRPr/>
           </a:p>
         </p:txBody>
       </p:sp>
@@ -18030,7 +18851,6 @@
           <a:lstStyle/>
           <a:p>
             <a:pPr algn="ctr"/>
-            <a:endParaRPr/>
           </a:p>
         </p:txBody>
       </p:sp>
@@ -18142,7 +18962,6 @@
           <a:lstStyle/>
           <a:p>
             <a:pPr algn="ctr"/>
-            <a:endParaRPr/>
           </a:p>
         </p:txBody>
       </p:sp>
@@ -18255,7 +19074,6 @@
           <a:lstStyle/>
           <a:p>
             <a:pPr algn="ctr"/>
-            <a:endParaRPr/>
           </a:p>
         </p:txBody>
       </p:sp>
@@ -18368,7 +19186,6 @@
           <a:lstStyle/>
           <a:p>
             <a:pPr algn="ctr"/>
-            <a:endParaRPr/>
           </a:p>
         </p:txBody>
       </p:sp>
@@ -18446,7 +19263,6 @@
           <a:lstStyle/>
           <a:p>
             <a:pPr algn="ctr"/>
-            <a:endParaRPr/>
           </a:p>
         </p:txBody>
       </p:sp>
@@ -18660,7 +19476,6 @@
           <a:lstStyle/>
           <a:p>
             <a:pPr algn="ctr"/>
-            <a:endParaRPr/>
           </a:p>
         </p:txBody>
       </p:sp>
@@ -18874,7 +19689,6 @@
           <a:lstStyle/>
           <a:p>
             <a:pPr algn="ctr"/>
-            <a:endParaRPr/>
           </a:p>
         </p:txBody>
       </p:sp>
@@ -18921,7 +19735,7 @@
 </file>
 
 <file path=ppt/slides/slide5.xml><?xml version="1.0" encoding="utf-8"?>
-<p:sld xmlns:a="http://schemas.openxmlformats.org/drawingml/2006/main" xmlns:r="http://schemas.openxmlformats.org/officeDocument/2006/relationships" xmlns:p="http://schemas.openxmlformats.org/presentationml/2006/main">
+<p:sld xmlns:a="http://schemas.openxmlformats.org/drawingml/2006/main" xmlns:p="http://schemas.openxmlformats.org/presentationml/2006/main" xmlns:r="http://schemas.openxmlformats.org/officeDocument/2006/relationships">
   <p:cSld>
     <p:spTree>
       <p:nvGrpSpPr>
@@ -18929,14 +19743,7 @@
         <p:cNvGrpSpPr/>
         <p:nvPr/>
       </p:nvGrpSpPr>
-      <p:grpSpPr>
-        <a:xfrm>
-          <a:off x="0" y="0"/>
-          <a:ext cx="0" cy="0"/>
-          <a:chOff x="0" y="0"/>
-          <a:chExt cx="0" cy="0"/>
-        </a:xfrm>
-      </p:grpSpPr>
+      <p:grpSpPr/>
       <p:sp>
         <p:nvSpPr>
           <p:cNvPr id="2" name="Rectangle 1"/>
@@ -18977,7 +19784,6 @@
           <a:lstStyle/>
           <a:p>
             <a:pPr algn="ctr"/>
-            <a:endParaRPr/>
           </a:p>
         </p:txBody>
       </p:sp>
@@ -19089,7 +19895,6 @@
           <a:lstStyle/>
           <a:p>
             <a:pPr algn="ctr"/>
-            <a:endParaRPr/>
           </a:p>
         </p:txBody>
       </p:sp>
@@ -19235,7 +20040,6 @@
           <a:lstStyle/>
           <a:p>
             <a:pPr algn="ctr"/>
-            <a:endParaRPr/>
           </a:p>
         </p:txBody>
       </p:sp>
@@ -19346,7 +20150,7 @@
           </a:fontRef>
         </p:style>
         <p:txBody>
-          <a:bodyPr wrap="square" rtlCol="0" anchor="ctr"/>
+          <a:bodyPr rtlCol="0" anchor="ctr" wrap="square"/>
           <a:lstStyle/>
           <a:p>
             <a:pPr algn="ctr"/>
@@ -19437,7 +20241,6 @@
           <a:lstStyle/>
           <a:p>
             <a:pPr algn="ctr"/>
-            <a:endParaRPr/>
           </a:p>
         </p:txBody>
       </p:sp>
@@ -19484,7 +20287,7 @@
 </file>
 
 <file path=ppt/slides/slide6.xml><?xml version="1.0" encoding="utf-8"?>
-<p:sld xmlns:a="http://schemas.openxmlformats.org/drawingml/2006/main" xmlns:r="http://schemas.openxmlformats.org/officeDocument/2006/relationships" xmlns:p="http://schemas.openxmlformats.org/presentationml/2006/main">
+<p:sld xmlns:a="http://schemas.openxmlformats.org/drawingml/2006/main" xmlns:p="http://schemas.openxmlformats.org/presentationml/2006/main" xmlns:r="http://schemas.openxmlformats.org/officeDocument/2006/relationships">
   <p:cSld>
     <p:spTree>
       <p:nvGrpSpPr>
@@ -19492,14 +20295,7 @@
         <p:cNvGrpSpPr/>
         <p:nvPr/>
       </p:nvGrpSpPr>
-      <p:grpSpPr>
-        <a:xfrm>
-          <a:off x="0" y="0"/>
-          <a:ext cx="0" cy="0"/>
-          <a:chOff x="0" y="0"/>
-          <a:chExt cx="0" cy="0"/>
-        </a:xfrm>
-      </p:grpSpPr>
+      <p:grpSpPr/>
       <p:sp>
         <p:nvSpPr>
           <p:cNvPr id="2" name="Rectangle 1"/>
@@ -19540,7 +20336,6 @@
           <a:lstStyle/>
           <a:p>
             <a:pPr algn="ctr"/>
-            <a:endParaRPr/>
           </a:p>
         </p:txBody>
       </p:sp>
@@ -19686,7 +20481,6 @@
           <a:lstStyle/>
           <a:p>
             <a:pPr algn="ctr"/>
-            <a:endParaRPr/>
           </a:p>
         </p:txBody>
       </p:sp>
@@ -19834,7 +20628,6 @@
           <a:lstStyle/>
           <a:p>
             <a:pPr algn="ctr"/>
-            <a:endParaRPr/>
           </a:p>
         </p:txBody>
       </p:sp>
@@ -19981,7 +20774,6 @@
           <a:lstStyle/>
           <a:p>
             <a:pPr algn="ctr"/>
-            <a:endParaRPr/>
           </a:p>
         </p:txBody>
       </p:sp>
@@ -20126,7 +20918,7 @@
           </a:fontRef>
         </p:style>
         <p:txBody>
-          <a:bodyPr wrap="square" rtlCol="0" anchor="ctr"/>
+          <a:bodyPr rtlCol="0" anchor="ctr" wrap="square"/>
           <a:lstStyle/>
           <a:p>
             <a:pPr algn="ctr"/>
@@ -20182,7 +20974,6 @@
           <a:lstStyle/>
           <a:p>
             <a:pPr algn="ctr"/>
-            <a:endParaRPr/>
           </a:p>
         </p:txBody>
       </p:sp>
@@ -20229,7 +21020,7 @@
 </file>
 
 <file path=ppt/slides/slide7.xml><?xml version="1.0" encoding="utf-8"?>
-<p:sld xmlns:a="http://schemas.openxmlformats.org/drawingml/2006/main" xmlns:r="http://schemas.openxmlformats.org/officeDocument/2006/relationships" xmlns:p="http://schemas.openxmlformats.org/presentationml/2006/main">
+<p:sld xmlns:a="http://schemas.openxmlformats.org/drawingml/2006/main" xmlns:p="http://schemas.openxmlformats.org/presentationml/2006/main" xmlns:r="http://schemas.openxmlformats.org/officeDocument/2006/relationships">
   <p:cSld>
     <p:spTree>
       <p:nvGrpSpPr>
@@ -20237,14 +21028,7 @@
         <p:cNvGrpSpPr/>
         <p:nvPr/>
       </p:nvGrpSpPr>
-      <p:grpSpPr>
-        <a:xfrm>
-          <a:off x="0" y="0"/>
-          <a:ext cx="0" cy="0"/>
-          <a:chOff x="0" y="0"/>
-          <a:chExt cx="0" cy="0"/>
-        </a:xfrm>
-      </p:grpSpPr>
+      <p:grpSpPr/>
       <p:sp>
         <p:nvSpPr>
           <p:cNvPr id="2" name="Rectangle 1"/>
@@ -20285,7 +21069,6 @@
           <a:lstStyle/>
           <a:p>
             <a:pPr algn="ctr"/>
-            <a:endParaRPr/>
           </a:p>
         </p:txBody>
       </p:sp>
@@ -20431,7 +21214,6 @@
           <a:lstStyle/>
           <a:p>
             <a:pPr algn="ctr"/>
-            <a:endParaRPr/>
           </a:p>
         </p:txBody>
       </p:sp>
@@ -20543,7 +21325,6 @@
           <a:lstStyle/>
           <a:p>
             <a:pPr algn="ctr"/>
-            <a:endParaRPr/>
           </a:p>
         </p:txBody>
       </p:sp>
@@ -20655,7 +21436,6 @@
           <a:lstStyle/>
           <a:p>
             <a:pPr algn="ctr"/>
-            <a:endParaRPr/>
           </a:p>
         </p:txBody>
       </p:sp>
@@ -20833,7 +21613,7 @@
           </a:fontRef>
         </p:style>
         <p:txBody>
-          <a:bodyPr wrap="square" rtlCol="0" anchor="ctr"/>
+          <a:bodyPr rtlCol="0" anchor="ctr" wrap="square"/>
           <a:lstStyle/>
           <a:p>
             <a:pPr algn="ctr"/>
@@ -20889,7 +21669,6 @@
           <a:lstStyle/>
           <a:p>
             <a:pPr algn="ctr"/>
-            <a:endParaRPr/>
           </a:p>
         </p:txBody>
       </p:sp>
@@ -20936,7 +21715,7 @@
 </file>
 
 <file path=ppt/slides/slide8.xml><?xml version="1.0" encoding="utf-8"?>
-<p:sld xmlns:a="http://schemas.openxmlformats.org/drawingml/2006/main" xmlns:r="http://schemas.openxmlformats.org/officeDocument/2006/relationships" xmlns:p="http://schemas.openxmlformats.org/presentationml/2006/main">
+<p:sld xmlns:a="http://schemas.openxmlformats.org/drawingml/2006/main" xmlns:p="http://schemas.openxmlformats.org/presentationml/2006/main" xmlns:r="http://schemas.openxmlformats.org/officeDocument/2006/relationships">
   <p:cSld>
     <p:spTree>
       <p:nvGrpSpPr>
@@ -20944,14 +21723,7 @@
         <p:cNvGrpSpPr/>
         <p:nvPr/>
       </p:nvGrpSpPr>
-      <p:grpSpPr>
-        <a:xfrm>
-          <a:off x="0" y="0"/>
-          <a:ext cx="0" cy="0"/>
-          <a:chOff x="0" y="0"/>
-          <a:chExt cx="0" cy="0"/>
-        </a:xfrm>
-      </p:grpSpPr>
+      <p:grpSpPr/>
       <p:sp>
         <p:nvSpPr>
           <p:cNvPr id="2" name="Rectangle 1"/>
@@ -20992,7 +21764,6 @@
           <a:lstStyle/>
           <a:p>
             <a:pPr algn="ctr"/>
-            <a:endParaRPr/>
           </a:p>
         </p:txBody>
       </p:sp>
@@ -21202,7 +21973,6 @@
           <a:lstStyle/>
           <a:p>
             <a:pPr algn="ctr"/>
-            <a:endParaRPr/>
           </a:p>
         </p:txBody>
       </p:sp>
@@ -21280,7 +22050,6 @@
           <a:lstStyle/>
           <a:p>
             <a:pPr algn="ctr"/>
-            <a:endParaRPr/>
           </a:p>
         </p:txBody>
       </p:sp>
@@ -21426,7 +22195,6 @@
           <a:lstStyle/>
           <a:p>
             <a:pPr algn="ctr"/>
-            <a:endParaRPr/>
           </a:p>
         </p:txBody>
       </p:sp>
@@ -21572,7 +22340,6 @@
           <a:lstStyle/>
           <a:p>
             <a:pPr algn="ctr"/>
-            <a:endParaRPr/>
           </a:p>
         </p:txBody>
       </p:sp>
@@ -21718,7 +22485,6 @@
           <a:lstStyle/>
           <a:p>
             <a:pPr algn="ctr"/>
-            <a:endParaRPr/>
           </a:p>
         </p:txBody>
       </p:sp>
@@ -21898,7 +22664,6 @@
           <a:lstStyle/>
           <a:p>
             <a:pPr algn="ctr"/>
-            <a:endParaRPr/>
           </a:p>
         </p:txBody>
       </p:sp>
@@ -21945,7 +22710,7 @@
 </file>
 
 <file path=ppt/slides/slide9.xml><?xml version="1.0" encoding="utf-8"?>
-<p:sld xmlns:a="http://schemas.openxmlformats.org/drawingml/2006/main" xmlns:r="http://schemas.openxmlformats.org/officeDocument/2006/relationships" xmlns:p="http://schemas.openxmlformats.org/presentationml/2006/main">
+<p:sld xmlns:a="http://schemas.openxmlformats.org/drawingml/2006/main" xmlns:p="http://schemas.openxmlformats.org/presentationml/2006/main" xmlns:r="http://schemas.openxmlformats.org/officeDocument/2006/relationships">
   <p:cSld>
     <p:spTree>
       <p:nvGrpSpPr>
@@ -21953,14 +22718,7 @@
         <p:cNvGrpSpPr/>
         <p:nvPr/>
       </p:nvGrpSpPr>
-      <p:grpSpPr>
-        <a:xfrm>
-          <a:off x="0" y="0"/>
-          <a:ext cx="0" cy="0"/>
-          <a:chOff x="0" y="0"/>
-          <a:chExt cx="0" cy="0"/>
-        </a:xfrm>
-      </p:grpSpPr>
+      <p:grpSpPr/>
       <p:sp>
         <p:nvSpPr>
           <p:cNvPr id="2" name="Rectangle 1"/>
@@ -22001,7 +22759,6 @@
           <a:lstStyle/>
           <a:p>
             <a:pPr algn="ctr"/>
-            <a:endParaRPr/>
           </a:p>
         </p:txBody>
       </p:sp>
@@ -22113,7 +22870,6 @@
           <a:lstStyle/>
           <a:p>
             <a:pPr algn="ctr"/>
-            <a:endParaRPr/>
           </a:p>
         </p:txBody>
       </p:sp>
@@ -22227,7 +22983,6 @@
           <a:lstStyle/>
           <a:p>
             <a:pPr algn="ctr"/>
-            <a:endParaRPr/>
           </a:p>
         </p:txBody>
       </p:sp>
@@ -22341,7 +23096,6 @@
           <a:lstStyle/>
           <a:p>
             <a:pPr algn="ctr"/>
-            <a:endParaRPr/>
           </a:p>
         </p:txBody>
       </p:sp>
@@ -22555,7 +23309,6 @@
           <a:lstStyle/>
           <a:p>
             <a:pPr algn="ctr"/>
-            <a:endParaRPr/>
           </a:p>
         </p:txBody>
       </p:sp>
@@ -22769,7 +23522,6 @@
           <a:lstStyle/>
           <a:p>
             <a:pPr algn="ctr"/>
-            <a:endParaRPr/>
           </a:p>
         </p:txBody>
       </p:sp>

--- a/results/slides.pptx
+++ b/results/slides.pptx
@@ -32,6 +32,7 @@
     <p:sldId id="280" r:id="rId31"/>
     <p:sldId id="281" r:id="rId32"/>
     <p:sldId id="282" r:id="rId33"/>
+    <p:sldId id="283" r:id="rId34"/>
   </p:sldIdLst>
   <p:sldSz cx="12188952" cy="6858000" type="screen4x3"/>
   <p:notesSz cx="6858000" cy="9144000"/>
@@ -3376,7 +3377,7 @@
                   <a:srgbClr val="1A237E"/>
                 </a:solidFill>
               </a:rPr>
-              <a:t>1 / 25</a:t>
+              <a:t>1 / 28</a:t>
             </a:r>
           </a:p>
         </p:txBody>
@@ -4552,7 +4553,7 @@
                   <a:srgbClr val="1A237E"/>
                 </a:solidFill>
               </a:rPr>
-              <a:t>10 / 25</a:t>
+              <a:t>10 / 28</a:t>
             </a:r>
           </a:p>
         </p:txBody>
@@ -5440,7 +5441,7 @@
                   <a:srgbClr val="1A237E"/>
                 </a:solidFill>
               </a:rPr>
-              <a:t>11 / 25</a:t>
+              <a:t>11 / 28</a:t>
             </a:r>
           </a:p>
         </p:txBody>
@@ -6348,7 +6349,7 @@
                   <a:srgbClr val="1A237E"/>
                 </a:solidFill>
               </a:rPr>
-              <a:t>12 / 25</a:t>
+              <a:t>12 / 28</a:t>
             </a:r>
           </a:p>
         </p:txBody>
@@ -7158,7 +7159,7 @@
                   <a:srgbClr val="1A237E"/>
                 </a:solidFill>
               </a:rPr>
-              <a:t>13 / 25</a:t>
+              <a:t>13 / 28</a:t>
             </a:r>
           </a:p>
         </p:txBody>
@@ -7534,7 +7535,7 @@
                   <a:srgbClr val="1A237E"/>
                 </a:solidFill>
               </a:rPr>
-              <a:t>14 / 25</a:t>
+              <a:t>14 / 28</a:t>
             </a:r>
           </a:p>
         </p:txBody>
@@ -9690,7 +9691,7 @@
                   <a:srgbClr val="1A237E"/>
                 </a:solidFill>
               </a:rPr>
-              <a:t>15 / 25</a:t>
+              <a:t>15 / 28</a:t>
             </a:r>
           </a:p>
         </p:txBody>
@@ -10308,7 +10309,7 @@
                   <a:srgbClr val="1A237E"/>
                 </a:solidFill>
               </a:rPr>
-              <a:t>16 / 25</a:t>
+              <a:t>16 / 28</a:t>
             </a:r>
           </a:p>
         </p:txBody>
@@ -10831,7 +10832,7 @@
                   <a:srgbClr val="1A237E"/>
                 </a:solidFill>
               </a:rPr>
-              <a:t>17 / 25</a:t>
+              <a:t>17 / 28</a:t>
             </a:r>
           </a:p>
         </p:txBody>
@@ -11603,7 +11604,7 @@
                   <a:srgbClr val="1A237E"/>
                 </a:solidFill>
               </a:rPr>
-              <a:t>18 / 25</a:t>
+              <a:t>18 / 28</a:t>
             </a:r>
           </a:p>
         </p:txBody>
@@ -12004,7 +12005,7 @@
                   <a:srgbClr val="1A237E"/>
                 </a:solidFill>
               </a:rPr>
-              <a:t>19 / 25</a:t>
+              <a:t>19 / 28</a:t>
             </a:r>
           </a:p>
         </p:txBody>
@@ -13064,7 +13065,7 @@
                   <a:srgbClr val="1A237E"/>
                 </a:solidFill>
               </a:rPr>
-              <a:t>2 / 25</a:t>
+              <a:t>2 / 28</a:t>
             </a:r>
           </a:p>
         </p:txBody>
@@ -13852,7 +13853,7 @@
                   <a:srgbClr val="1A237E"/>
                 </a:solidFill>
               </a:rPr>
-              <a:t>20 / 25</a:t>
+              <a:t>20 / 28</a:t>
             </a:r>
           </a:p>
         </p:txBody>
@@ -14462,7 +14463,7 @@
                   <a:srgbClr val="1A237E"/>
                 </a:solidFill>
               </a:rPr>
-              <a:t>21 / 25</a:t>
+              <a:t>21 / 28</a:t>
             </a:r>
           </a:p>
         </p:txBody>
@@ -14894,7 +14895,7 @@
                   <a:srgbClr val="1A237E"/>
                 </a:solidFill>
               </a:rPr>
-              <a:t>22 / 25</a:t>
+              <a:t>22 / 28</a:t>
             </a:r>
           </a:p>
         </p:txBody>
@@ -15544,7 +15545,7 @@
                   <a:srgbClr val="1A237E"/>
                 </a:solidFill>
               </a:rPr>
-              <a:t>23 / 25</a:t>
+              <a:t>23 / 28</a:t>
             </a:r>
           </a:p>
         </p:txBody>
@@ -15639,7 +15640,7 @@
                   <a:srgbClr val="FFFFFF"/>
                 </a:solidFill>
               </a:rPr>
-              <a:t>まとめ</a:t>
+              <a:t>補足：2×2 比較（ASRモデル × SE）</a:t>
             </a:r>
           </a:p>
         </p:txBody>
@@ -15652,8 +15653,8 @@
         </p:nvSpPr>
         <p:spPr>
           <a:xfrm>
-            <a:off x="365760" y="1463040"/>
-            <a:ext cx="11430000" cy="502920"/>
+            <a:off x="365760" y="868680"/>
+            <a:ext cx="11430000" cy="365760"/>
           </a:xfrm>
           <a:prstGeom prst="rect">
             <a:avLst/>
@@ -15668,12 +15669,12 @@
           <a:p>
             <a:pPr algn="l"/>
             <a:r>
-              <a:rPr sz="1700" b="0">
-                <a:solidFill>
-                  <a:srgbClr val="212121"/>
-                </a:solidFill>
-              </a:rPr>
-              <a:t>喉マイク音声に対するSEの効果と、ASRモデルのドメイン適応効果を定量評価した。</a:t>
+              <a:rPr sz="1400" b="0">
+                <a:solidFill>
+                  <a:srgbClr val="BBDEFB"/>
+                </a:solidFill>
+              </a:rPr>
+              <a:t>FT後もSEは有害—ただし悪影響は縮小</a:t>
             </a:r>
           </a:p>
         </p:txBody>
@@ -15686,14 +15687,14 @@
         </p:nvSpPr>
         <p:spPr>
           <a:xfrm>
-            <a:off x="365760" y="2103120"/>
-            <a:ext cx="11430000" cy="749808"/>
+            <a:off x="365760" y="1508760"/>
+            <a:ext cx="2743200" cy="777240"/>
           </a:xfrm>
           <a:prstGeom prst="rect">
             <a:avLst/>
           </a:prstGeom>
           <a:solidFill>
-            <a:srgbClr val="F5F5F5"/>
+            <a:srgbClr val="1A237E"/>
           </a:solidFill>
           <a:ln>
             <a:noFill/>
@@ -15729,82 +15730,48 @@
         </p:nvSpPr>
         <p:spPr>
           <a:xfrm>
-            <a:off x="502920" y="2249424"/>
-            <a:ext cx="731520" cy="411480"/>
-          </a:xfrm>
-          <a:prstGeom prst="rect">
-            <a:avLst/>
-          </a:prstGeom>
-          <a:noFill/>
-        </p:spPr>
-        <p:txBody>
-          <a:bodyPr wrap="square">
-            <a:spAutoFit/>
-          </a:bodyPr>
-          <a:lstStyle/>
-          <a:p>
-            <a:pPr algn="l"/>
-            <a:r>
-              <a:rPr sz="1500" b="1">
-                <a:solidFill>
-                  <a:srgbClr val="C62828"/>
-                </a:solidFill>
-              </a:rPr>
-              <a:t>（1）</a:t>
-            </a:r>
-          </a:p>
-        </p:txBody>
-      </p:sp>
-      <p:sp>
-        <p:nvSpPr>
-          <p:cNvPr id="7" name="TextBox 6"/>
-          <p:cNvSpPr txBox="1"/>
-          <p:nvPr/>
-        </p:nvSpPr>
-        <p:spPr>
-          <a:xfrm>
-            <a:off x="1143000" y="2249424"/>
-            <a:ext cx="10424160" cy="411480"/>
-          </a:xfrm>
-          <a:prstGeom prst="rect">
-            <a:avLst/>
-          </a:prstGeom>
-          <a:noFill/>
-        </p:spPr>
-        <p:txBody>
-          <a:bodyPr wrap="square">
-            <a:spAutoFit/>
-          </a:bodyPr>
-          <a:lstStyle/>
-          <a:p>
-            <a:pPr algn="l"/>
-            <a:r>
-              <a:rPr sz="1500" b="0">
-                <a:solidFill>
-                  <a:srgbClr val="212121"/>
-                </a:solidFill>
-              </a:rPr>
-              <a:t>DSP-onlyおよびGTCRNは全ノイズ条件でCERを有意に悪化させる（30検定中26件 p&lt;0.05）</a:t>
-            </a:r>
-          </a:p>
-        </p:txBody>
-      </p:sp>
-      <p:sp>
-        <p:nvSpPr>
-          <p:cNvPr id="8" name="Rectangle 7"/>
+            <a:off x="411480" y="1709928"/>
+            <a:ext cx="2651760" cy="365760"/>
+          </a:xfrm>
+          <a:prstGeom prst="rect">
+            <a:avLst/>
+          </a:prstGeom>
+          <a:noFill/>
+        </p:spPr>
+        <p:txBody>
+          <a:bodyPr wrap="square">
+            <a:spAutoFit/>
+          </a:bodyPr>
+          <a:lstStyle/>
+          <a:p>
+            <a:pPr algn="ctr"/>
+            <a:r>
+              <a:rPr sz="1600" b="1">
+                <a:solidFill>
+                  <a:srgbClr val="FFFFFF"/>
+                </a:solidFill>
+              </a:rPr>
+              <a:t/>
+            </a:r>
+          </a:p>
+        </p:txBody>
+      </p:sp>
+      <p:sp>
+        <p:nvSpPr>
+          <p:cNvPr id="7" name="Rectangle 6"/>
           <p:cNvSpPr/>
           <p:nvPr/>
         </p:nvSpPr>
         <p:spPr>
           <a:xfrm>
-            <a:off x="365760" y="2971800"/>
-            <a:ext cx="11430000" cy="749808"/>
+            <a:off x="3200400" y="1508760"/>
+            <a:ext cx="3931920" cy="777240"/>
           </a:xfrm>
           <a:prstGeom prst="rect">
             <a:avLst/>
           </a:prstGeom>
           <a:solidFill>
-            <a:srgbClr val="F5F5F5"/>
+            <a:srgbClr val="1A237E"/>
           </a:solidFill>
           <a:ln>
             <a:noFill/>
@@ -15834,88 +15801,54 @@
       </p:sp>
       <p:sp>
         <p:nvSpPr>
-          <p:cNvPr id="9" name="TextBox 8"/>
-          <p:cNvSpPr txBox="1"/>
-          <p:nvPr/>
-        </p:nvSpPr>
-        <p:spPr>
-          <a:xfrm>
-            <a:off x="502920" y="3118104"/>
-            <a:ext cx="731520" cy="411480"/>
-          </a:xfrm>
-          <a:prstGeom prst="rect">
-            <a:avLst/>
-          </a:prstGeom>
-          <a:noFill/>
-        </p:spPr>
-        <p:txBody>
-          <a:bodyPr wrap="square">
-            <a:spAutoFit/>
-          </a:bodyPr>
-          <a:lstStyle/>
-          <a:p>
-            <a:pPr algn="l"/>
-            <a:r>
-              <a:rPr sz="1500" b="1">
-                <a:solidFill>
-                  <a:srgbClr val="FF9800"/>
-                </a:solidFill>
-              </a:rPr>
-              <a:t>（2）</a:t>
-            </a:r>
-          </a:p>
-        </p:txBody>
-      </p:sp>
-      <p:sp>
-        <p:nvSpPr>
-          <p:cNvPr id="10" name="TextBox 9"/>
-          <p:cNvSpPr txBox="1"/>
-          <p:nvPr/>
-        </p:nvSpPr>
-        <p:spPr>
-          <a:xfrm>
-            <a:off x="1143000" y="3118104"/>
-            <a:ext cx="10424160" cy="411480"/>
-          </a:xfrm>
-          <a:prstGeom prst="rect">
-            <a:avLst/>
-          </a:prstGeom>
-          <a:noFill/>
-        </p:spPr>
-        <p:txBody>
-          <a:bodyPr wrap="square">
-            <a:spAutoFit/>
-          </a:bodyPr>
-          <a:lstStyle/>
-          <a:p>
-            <a:pPr algn="l"/>
-            <a:r>
-              <a:rPr sz="1500" b="0">
-                <a:solidFill>
-                  <a:srgbClr val="212121"/>
-                </a:solidFill>
-              </a:rPr>
-              <a:t>GTCRNはSTOI・PESQを改善しながらCERを悪化させる三重パラドックスが全ノイズ条件で観測された</a:t>
-            </a:r>
-          </a:p>
-        </p:txBody>
-      </p:sp>
-      <p:sp>
-        <p:nvSpPr>
-          <p:cNvPr id="11" name="Rectangle 10"/>
+          <p:cNvPr id="8" name="TextBox 7"/>
+          <p:cNvSpPr txBox="1"/>
+          <p:nvPr/>
+        </p:nvSpPr>
+        <p:spPr>
+          <a:xfrm>
+            <a:off x="3246120" y="1709928"/>
+            <a:ext cx="3840480" cy="365760"/>
+          </a:xfrm>
+          <a:prstGeom prst="rect">
+            <a:avLst/>
+          </a:prstGeom>
+          <a:noFill/>
+        </p:spPr>
+        <p:txBody>
+          <a:bodyPr wrap="square">
+            <a:spAutoFit/>
+          </a:bodyPr>
+          <a:lstStyle/>
+          <a:p>
+            <a:pPr algn="ctr"/>
+            <a:r>
+              <a:rPr sz="1600" b="1">
+                <a:solidFill>
+                  <a:srgbClr val="FFFFFF"/>
+                </a:solidFill>
+              </a:rPr>
+              <a:t>No SE</a:t>
+            </a:r>
+          </a:p>
+        </p:txBody>
+      </p:sp>
+      <p:sp>
+        <p:nvSpPr>
+          <p:cNvPr id="9" name="Rectangle 8"/>
           <p:cNvSpPr/>
           <p:nvPr/>
         </p:nvSpPr>
         <p:spPr>
           <a:xfrm>
-            <a:off x="365760" y="3840480"/>
-            <a:ext cx="11430000" cy="749808"/>
+            <a:off x="7315200" y="1508760"/>
+            <a:ext cx="4114800" cy="777240"/>
           </a:xfrm>
           <a:prstGeom prst="rect">
             <a:avLst/>
           </a:prstGeom>
           <a:solidFill>
-            <a:srgbClr val="F5F5F5"/>
+            <a:srgbClr val="1A237E"/>
           </a:solidFill>
           <a:ln>
             <a:noFill/>
@@ -15945,88 +15878,54 @@
       </p:sp>
       <p:sp>
         <p:nvSpPr>
-          <p:cNvPr id="12" name="TextBox 11"/>
-          <p:cNvSpPr txBox="1"/>
-          <p:nvPr/>
-        </p:nvSpPr>
-        <p:spPr>
-          <a:xfrm>
-            <a:off x="502920" y="3986784"/>
-            <a:ext cx="731520" cy="411480"/>
-          </a:xfrm>
-          <a:prstGeom prst="rect">
-            <a:avLst/>
-          </a:prstGeom>
-          <a:noFill/>
-        </p:spPr>
-        <p:txBody>
-          <a:bodyPr wrap="square">
-            <a:spAutoFit/>
-          </a:bodyPr>
-          <a:lstStyle/>
-          <a:p>
-            <a:pPr algn="l"/>
-            <a:r>
-              <a:rPr sz="1500" b="1">
-                <a:solidFill>
-                  <a:srgbClr val="FF9800"/>
-                </a:solidFill>
-              </a:rPr>
-              <a:t>（3）</a:t>
-            </a:r>
-          </a:p>
-        </p:txBody>
-      </p:sp>
-      <p:sp>
-        <p:nvSpPr>
-          <p:cNvPr id="13" name="TextBox 12"/>
-          <p:cNvSpPr txBox="1"/>
-          <p:nvPr/>
-        </p:nvSpPr>
-        <p:spPr>
-          <a:xfrm>
-            <a:off x="1143000" y="3986784"/>
-            <a:ext cx="10424160" cy="411480"/>
-          </a:xfrm>
-          <a:prstGeom prst="rect">
-            <a:avLst/>
-          </a:prstGeom>
-          <a:noFill/>
-        </p:spPr>
-        <p:txBody>
-          <a:bodyPr wrap="square">
-            <a:spAutoFit/>
-          </a:bodyPr>
-          <a:lstStyle/>
-          <a:p>
-            <a:pPr algn="l"/>
-            <a:r>
-              <a:rPr sz="1500" b="0">
-                <a:solidFill>
-                  <a:srgbClr val="212121"/>
-                </a:solidFill>
-              </a:rPr>
-              <a:t>DSP-onlyは3指標すべてを悪化させ、喉マイクには不適切な前処理である</a:t>
-            </a:r>
-          </a:p>
-        </p:txBody>
-      </p:sp>
-      <p:sp>
-        <p:nvSpPr>
-          <p:cNvPr id="14" name="Rectangle 13"/>
+          <p:cNvPr id="10" name="TextBox 9"/>
+          <p:cNvSpPr txBox="1"/>
+          <p:nvPr/>
+        </p:nvSpPr>
+        <p:spPr>
+          <a:xfrm>
+            <a:off x="7360920" y="1709928"/>
+            <a:ext cx="4023360" cy="365760"/>
+          </a:xfrm>
+          <a:prstGeom prst="rect">
+            <a:avLst/>
+          </a:prstGeom>
+          <a:noFill/>
+        </p:spPr>
+        <p:txBody>
+          <a:bodyPr wrap="square">
+            <a:spAutoFit/>
+          </a:bodyPr>
+          <a:lstStyle/>
+          <a:p>
+            <a:pPr algn="ctr"/>
+            <a:r>
+              <a:rPr sz="1600" b="1">
+                <a:solidFill>
+                  <a:srgbClr val="FFFFFF"/>
+                </a:solidFill>
+              </a:rPr>
+              <a:t>GTCRN SE</a:t>
+            </a:r>
+          </a:p>
+        </p:txBody>
+      </p:sp>
+      <p:sp>
+        <p:nvSpPr>
+          <p:cNvPr id="11" name="Rectangle 10"/>
           <p:cNvSpPr/>
           <p:nvPr/>
         </p:nvSpPr>
         <p:spPr>
           <a:xfrm>
-            <a:off x="365760" y="4709160"/>
-            <a:ext cx="11430000" cy="749808"/>
+            <a:off x="365760" y="2377440"/>
+            <a:ext cx="2743200" cy="777240"/>
           </a:xfrm>
           <a:prstGeom prst="rect">
             <a:avLst/>
           </a:prstGeom>
           <a:solidFill>
-            <a:srgbClr val="F5F5F5"/>
+            <a:srgbClr val="1A237E"/>
           </a:solidFill>
           <a:ln>
             <a:noFill/>
@@ -16056,14 +15955,467 @@
       </p:sp>
       <p:sp>
         <p:nvSpPr>
-          <p:cNvPr id="15" name="TextBox 14"/>
-          <p:cNvSpPr txBox="1"/>
-          <p:nvPr/>
-        </p:nvSpPr>
-        <p:spPr>
-          <a:xfrm>
-            <a:off x="502920" y="4855464"/>
-            <a:ext cx="731520" cy="411480"/>
+          <p:cNvPr id="12" name="TextBox 11"/>
+          <p:cNvSpPr txBox="1"/>
+          <p:nvPr/>
+        </p:nvSpPr>
+        <p:spPr>
+          <a:xfrm>
+            <a:off x="411480" y="2560320"/>
+            <a:ext cx="2651760" cy="457200"/>
+          </a:xfrm>
+          <a:prstGeom prst="rect">
+            <a:avLst/>
+          </a:prstGeom>
+          <a:noFill/>
+        </p:spPr>
+        <p:txBody>
+          <a:bodyPr wrap="square">
+            <a:spAutoFit/>
+          </a:bodyPr>
+          <a:lstStyle/>
+          <a:p>
+            <a:pPr algn="ctr"/>
+            <a:r>
+              <a:rPr sz="1500" b="1">
+                <a:solidFill>
+                  <a:srgbClr val="FFFFFF"/>
+                </a:solidFill>
+              </a:rPr>
+              <a:t>未学習 Whisper</a:t>
+            </a:r>
+          </a:p>
+        </p:txBody>
+      </p:sp>
+      <p:sp>
+        <p:nvSpPr>
+          <p:cNvPr id="13" name="Rectangle 12"/>
+          <p:cNvSpPr/>
+          <p:nvPr/>
+        </p:nvSpPr>
+        <p:spPr>
+          <a:xfrm>
+            <a:off x="3200400" y="2377440"/>
+            <a:ext cx="3931920" cy="777240"/>
+          </a:xfrm>
+          <a:prstGeom prst="rect">
+            <a:avLst/>
+          </a:prstGeom>
+          <a:solidFill>
+            <a:srgbClr val="E3F2FD"/>
+          </a:solidFill>
+          <a:ln>
+            <a:noFill/>
+          </a:ln>
+        </p:spPr>
+        <p:style>
+          <a:lnRef idx="1">
+            <a:schemeClr val="accent1"/>
+          </a:lnRef>
+          <a:fillRef idx="3">
+            <a:schemeClr val="accent1"/>
+          </a:fillRef>
+          <a:effectRef idx="2">
+            <a:schemeClr val="accent1"/>
+          </a:effectRef>
+          <a:fontRef idx="minor">
+            <a:schemeClr val="lt1"/>
+          </a:fontRef>
+        </p:style>
+        <p:txBody>
+          <a:bodyPr rtlCol="0" anchor="ctr"/>
+          <a:lstStyle/>
+          <a:p>
+            <a:pPr algn="ctr"/>
+          </a:p>
+        </p:txBody>
+      </p:sp>
+      <p:sp>
+        <p:nvSpPr>
+          <p:cNvPr id="14" name="TextBox 13"/>
+          <p:cNvSpPr txBox="1"/>
+          <p:nvPr/>
+        </p:nvSpPr>
+        <p:spPr>
+          <a:xfrm>
+            <a:off x="3246120" y="2560320"/>
+            <a:ext cx="3840480" cy="457200"/>
+          </a:xfrm>
+          <a:prstGeom prst="rect">
+            <a:avLst/>
+          </a:prstGeom>
+          <a:noFill/>
+        </p:spPr>
+        <p:txBody>
+          <a:bodyPr wrap="square">
+            <a:spAutoFit/>
+          </a:bodyPr>
+          <a:lstStyle/>
+          <a:p>
+            <a:pPr algn="ctr"/>
+            <a:r>
+              <a:rPr sz="2000" b="0">
+                <a:solidFill>
+                  <a:srgbClr val="212121"/>
+                </a:solidFill>
+              </a:rPr>
+              <a:t>0.269  [A]</a:t>
+            </a:r>
+          </a:p>
+        </p:txBody>
+      </p:sp>
+      <p:sp>
+        <p:nvSpPr>
+          <p:cNvPr id="15" name="Rectangle 14"/>
+          <p:cNvSpPr/>
+          <p:nvPr/>
+        </p:nvSpPr>
+        <p:spPr>
+          <a:xfrm>
+            <a:off x="7315200" y="2377440"/>
+            <a:ext cx="4114800" cy="777240"/>
+          </a:xfrm>
+          <a:prstGeom prst="rect">
+            <a:avLst/>
+          </a:prstGeom>
+          <a:solidFill>
+            <a:srgbClr val="FFEBEE"/>
+          </a:solidFill>
+          <a:ln>
+            <a:noFill/>
+          </a:ln>
+        </p:spPr>
+        <p:style>
+          <a:lnRef idx="1">
+            <a:schemeClr val="accent1"/>
+          </a:lnRef>
+          <a:fillRef idx="3">
+            <a:schemeClr val="accent1"/>
+          </a:fillRef>
+          <a:effectRef idx="2">
+            <a:schemeClr val="accent1"/>
+          </a:effectRef>
+          <a:fontRef idx="minor">
+            <a:schemeClr val="lt1"/>
+          </a:fontRef>
+        </p:style>
+        <p:txBody>
+          <a:bodyPr rtlCol="0" anchor="ctr"/>
+          <a:lstStyle/>
+          <a:p>
+            <a:pPr algn="ctr"/>
+          </a:p>
+        </p:txBody>
+      </p:sp>
+      <p:sp>
+        <p:nvSpPr>
+          <p:cNvPr id="16" name="TextBox 15"/>
+          <p:cNvSpPr txBox="1"/>
+          <p:nvPr/>
+        </p:nvSpPr>
+        <p:spPr>
+          <a:xfrm>
+            <a:off x="7360920" y="2560320"/>
+            <a:ext cx="4023360" cy="457200"/>
+          </a:xfrm>
+          <a:prstGeom prst="rect">
+            <a:avLst/>
+          </a:prstGeom>
+          <a:noFill/>
+        </p:spPr>
+        <p:txBody>
+          <a:bodyPr wrap="square">
+            <a:spAutoFit/>
+          </a:bodyPr>
+          <a:lstStyle/>
+          <a:p>
+            <a:pPr algn="ctr"/>
+            <a:r>
+              <a:rPr sz="2000" b="0">
+                <a:solidFill>
+                  <a:srgbClr val="212121"/>
+                </a:solidFill>
+              </a:rPr>
+              <a:t>0.296  [B]  (+0.027)</a:t>
+            </a:r>
+          </a:p>
+        </p:txBody>
+      </p:sp>
+      <p:sp>
+        <p:nvSpPr>
+          <p:cNvPr id="17" name="Rectangle 16"/>
+          <p:cNvSpPr/>
+          <p:nvPr/>
+        </p:nvSpPr>
+        <p:spPr>
+          <a:xfrm>
+            <a:off x="365760" y="3246120"/>
+            <a:ext cx="2743200" cy="777240"/>
+          </a:xfrm>
+          <a:prstGeom prst="rect">
+            <a:avLst/>
+          </a:prstGeom>
+          <a:solidFill>
+            <a:srgbClr val="1A237E"/>
+          </a:solidFill>
+          <a:ln>
+            <a:noFill/>
+          </a:ln>
+        </p:spPr>
+        <p:style>
+          <a:lnRef idx="1">
+            <a:schemeClr val="accent1"/>
+          </a:lnRef>
+          <a:fillRef idx="3">
+            <a:schemeClr val="accent1"/>
+          </a:fillRef>
+          <a:effectRef idx="2">
+            <a:schemeClr val="accent1"/>
+          </a:effectRef>
+          <a:fontRef idx="minor">
+            <a:schemeClr val="lt1"/>
+          </a:fontRef>
+        </p:style>
+        <p:txBody>
+          <a:bodyPr rtlCol="0" anchor="ctr"/>
+          <a:lstStyle/>
+          <a:p>
+            <a:pPr algn="ctr"/>
+          </a:p>
+        </p:txBody>
+      </p:sp>
+      <p:sp>
+        <p:nvSpPr>
+          <p:cNvPr id="18" name="TextBox 17"/>
+          <p:cNvSpPr txBox="1"/>
+          <p:nvPr/>
+        </p:nvSpPr>
+        <p:spPr>
+          <a:xfrm>
+            <a:off x="411480" y="3429000"/>
+            <a:ext cx="2651760" cy="457200"/>
+          </a:xfrm>
+          <a:prstGeom prst="rect">
+            <a:avLst/>
+          </a:prstGeom>
+          <a:noFill/>
+        </p:spPr>
+        <p:txBody>
+          <a:bodyPr wrap="square">
+            <a:spAutoFit/>
+          </a:bodyPr>
+          <a:lstStyle/>
+          <a:p>
+            <a:pPr algn="ctr"/>
+            <a:r>
+              <a:rPr sz="1500" b="1">
+                <a:solidFill>
+                  <a:srgbClr val="FFFFFF"/>
+                </a:solidFill>
+              </a:rPr>
+              <a:t>FT済み Whisper</a:t>
+            </a:r>
+          </a:p>
+        </p:txBody>
+      </p:sp>
+      <p:sp>
+        <p:nvSpPr>
+          <p:cNvPr id="19" name="Rectangle 18"/>
+          <p:cNvSpPr/>
+          <p:nvPr/>
+        </p:nvSpPr>
+        <p:spPr>
+          <a:xfrm>
+            <a:off x="3200400" y="3246120"/>
+            <a:ext cx="3931920" cy="777240"/>
+          </a:xfrm>
+          <a:prstGeom prst="rect">
+            <a:avLst/>
+          </a:prstGeom>
+          <a:solidFill>
+            <a:srgbClr val="C8E6C9"/>
+          </a:solidFill>
+          <a:ln>
+            <a:noFill/>
+          </a:ln>
+        </p:spPr>
+        <p:style>
+          <a:lnRef idx="1">
+            <a:schemeClr val="accent1"/>
+          </a:lnRef>
+          <a:fillRef idx="3">
+            <a:schemeClr val="accent1"/>
+          </a:fillRef>
+          <a:effectRef idx="2">
+            <a:schemeClr val="accent1"/>
+          </a:effectRef>
+          <a:fontRef idx="minor">
+            <a:schemeClr val="lt1"/>
+          </a:fontRef>
+        </p:style>
+        <p:txBody>
+          <a:bodyPr rtlCol="0" anchor="ctr"/>
+          <a:lstStyle/>
+          <a:p>
+            <a:pPr algn="ctr"/>
+          </a:p>
+        </p:txBody>
+      </p:sp>
+      <p:sp>
+        <p:nvSpPr>
+          <p:cNvPr id="20" name="TextBox 19"/>
+          <p:cNvSpPr txBox="1"/>
+          <p:nvPr/>
+        </p:nvSpPr>
+        <p:spPr>
+          <a:xfrm>
+            <a:off x="3246120" y="3429000"/>
+            <a:ext cx="3840480" cy="457200"/>
+          </a:xfrm>
+          <a:prstGeom prst="rect">
+            <a:avLst/>
+          </a:prstGeom>
+          <a:noFill/>
+        </p:spPr>
+        <p:txBody>
+          <a:bodyPr wrap="square">
+            <a:spAutoFit/>
+          </a:bodyPr>
+          <a:lstStyle/>
+          <a:p>
+            <a:pPr algn="ctr"/>
+            <a:r>
+              <a:rPr sz="2000" b="0">
+                <a:solidFill>
+                  <a:srgbClr val="212121"/>
+                </a:solidFill>
+              </a:rPr>
+              <a:t>0.095  [C]</a:t>
+            </a:r>
+          </a:p>
+        </p:txBody>
+      </p:sp>
+      <p:sp>
+        <p:nvSpPr>
+          <p:cNvPr id="21" name="Rectangle 20"/>
+          <p:cNvSpPr/>
+          <p:nvPr/>
+        </p:nvSpPr>
+        <p:spPr>
+          <a:xfrm>
+            <a:off x="7315200" y="3246120"/>
+            <a:ext cx="4114800" cy="777240"/>
+          </a:xfrm>
+          <a:prstGeom prst="rect">
+            <a:avLst/>
+          </a:prstGeom>
+          <a:solidFill>
+            <a:srgbClr val="FFF9C4"/>
+          </a:solidFill>
+          <a:ln>
+            <a:noFill/>
+          </a:ln>
+        </p:spPr>
+        <p:style>
+          <a:lnRef idx="1">
+            <a:schemeClr val="accent1"/>
+          </a:lnRef>
+          <a:fillRef idx="3">
+            <a:schemeClr val="accent1"/>
+          </a:fillRef>
+          <a:effectRef idx="2">
+            <a:schemeClr val="accent1"/>
+          </a:effectRef>
+          <a:fontRef idx="minor">
+            <a:schemeClr val="lt1"/>
+          </a:fontRef>
+        </p:style>
+        <p:txBody>
+          <a:bodyPr rtlCol="0" anchor="ctr"/>
+          <a:lstStyle/>
+          <a:p>
+            <a:pPr algn="ctr"/>
+          </a:p>
+        </p:txBody>
+      </p:sp>
+      <p:sp>
+        <p:nvSpPr>
+          <p:cNvPr id="22" name="TextBox 21"/>
+          <p:cNvSpPr txBox="1"/>
+          <p:nvPr/>
+        </p:nvSpPr>
+        <p:spPr>
+          <a:xfrm>
+            <a:off x="7360920" y="3429000"/>
+            <a:ext cx="4023360" cy="457200"/>
+          </a:xfrm>
+          <a:prstGeom prst="rect">
+            <a:avLst/>
+          </a:prstGeom>
+          <a:noFill/>
+        </p:spPr>
+        <p:txBody>
+          <a:bodyPr wrap="square">
+            <a:spAutoFit/>
+          </a:bodyPr>
+          <a:lstStyle/>
+          <a:p>
+            <a:pPr algn="ctr"/>
+            <a:r>
+              <a:rPr sz="2000" b="0">
+                <a:solidFill>
+                  <a:srgbClr val="212121"/>
+                </a:solidFill>
+              </a:rPr>
+              <a:t>0.1015 [D]  (+0.007)</a:t>
+            </a:r>
+          </a:p>
+        </p:txBody>
+      </p:sp>
+      <p:sp>
+        <p:nvSpPr>
+          <p:cNvPr id="23" name="TextBox 22"/>
+          <p:cNvSpPr txBox="1"/>
+          <p:nvPr/>
+        </p:nvSpPr>
+        <p:spPr>
+          <a:xfrm>
+            <a:off x="7452360" y="2331720"/>
+            <a:ext cx="3931920" cy="320040"/>
+          </a:xfrm>
+          <a:prstGeom prst="rect">
+            <a:avLst/>
+          </a:prstGeom>
+          <a:noFill/>
+        </p:spPr>
+        <p:txBody>
+          <a:bodyPr wrap="square">
+            <a:spAutoFit/>
+          </a:bodyPr>
+          <a:lstStyle/>
+          <a:p>
+            <a:pPr algn="ctr"/>
+            <a:r>
+              <a:rPr sz="1200" b="0">
+                <a:solidFill>
+                  <a:srgbClr val="78909C"/>
+                </a:solidFill>
+              </a:rPr>
+              <a:t>▼ SE悪化幅</a:t>
+            </a:r>
+          </a:p>
+        </p:txBody>
+      </p:sp>
+      <p:sp>
+        <p:nvSpPr>
+          <p:cNvPr id="24" name="TextBox 23"/>
+          <p:cNvSpPr txBox="1"/>
+          <p:nvPr/>
+        </p:nvSpPr>
+        <p:spPr>
+          <a:xfrm>
+            <a:off x="7315200" y="4114800"/>
+            <a:ext cx="4572000" cy="457200"/>
           </a:xfrm>
           <a:prstGeom prst="rect">
             <a:avLst/>
@@ -16078,53 +16430,96 @@
           <a:p>
             <a:pPr algn="l"/>
             <a:r>
-              <a:rPr sz="1500" b="1">
+              <a:rPr sz="1600" b="1">
                 <a:solidFill>
                   <a:srgbClr val="43A047"/>
                 </a:solidFill>
               </a:rPr>
-              <a:t>（4）</a:t>
-            </a:r>
-          </a:p>
-        </p:txBody>
-      </p:sp>
-      <p:sp>
-        <p:nvSpPr>
-          <p:cNvPr id="16" name="TextBox 15"/>
-          <p:cNvSpPr txBox="1"/>
-          <p:nvPr/>
-        </p:nvSpPr>
-        <p:spPr>
-          <a:xfrm>
-            <a:off x="1143000" y="4855464"/>
-            <a:ext cx="10424160" cy="411480"/>
-          </a:xfrm>
-          <a:prstGeom prst="rect">
-            <a:avLst/>
-          </a:prstGeom>
-          <a:noFill/>
-        </p:spPr>
-        <p:txBody>
-          <a:bodyPr wrap="square">
-            <a:spAutoFit/>
-          </a:bodyPr>
-          <a:lstStyle/>
-          <a:p>
-            <a:pPr algn="l"/>
-            <a:r>
-              <a:rPr sz="1500" b="0">
-                <a:solidFill>
-                  <a:srgbClr val="212121"/>
-                </a:solidFill>
-              </a:rPr>
-              <a:t>Whisper smallのFTによりCERが0.269→0.095（64.6%改善）—「ASR側の適応」が音声処理より有効</a:t>
-            </a:r>
-          </a:p>
-        </p:txBody>
-      </p:sp>
-      <p:sp>
-        <p:nvSpPr>
-          <p:cNvPr id="17" name="Rectangle 16"/>
+              <a:t>+0.027 → +0.007 に縮小</a:t>
+            </a:r>
+          </a:p>
+        </p:txBody>
+      </p:sp>
+      <p:sp>
+        <p:nvSpPr>
+          <p:cNvPr id="25" name="Rectangle 24"/>
+          <p:cNvSpPr/>
+          <p:nvPr/>
+        </p:nvSpPr>
+        <p:spPr>
+          <a:xfrm>
+            <a:off x="365760" y="4846320"/>
+            <a:ext cx="11430000" cy="731520"/>
+          </a:xfrm>
+          <a:prstGeom prst="rect">
+            <a:avLst/>
+          </a:prstGeom>
+          <a:solidFill>
+            <a:srgbClr val="FFF9C4"/>
+          </a:solidFill>
+          <a:ln>
+            <a:noFill/>
+          </a:ln>
+        </p:spPr>
+        <p:style>
+          <a:lnRef idx="1">
+            <a:schemeClr val="accent1"/>
+          </a:lnRef>
+          <a:fillRef idx="3">
+            <a:schemeClr val="accent1"/>
+          </a:fillRef>
+          <a:effectRef idx="2">
+            <a:schemeClr val="accent1"/>
+          </a:effectRef>
+          <a:fontRef idx="minor">
+            <a:schemeClr val="lt1"/>
+          </a:fontRef>
+        </p:style>
+        <p:txBody>
+          <a:bodyPr rtlCol="0" anchor="ctr"/>
+          <a:lstStyle/>
+          <a:p>
+            <a:pPr algn="ctr"/>
+          </a:p>
+        </p:txBody>
+      </p:sp>
+      <p:sp>
+        <p:nvSpPr>
+          <p:cNvPr id="26" name="TextBox 25"/>
+          <p:cNvSpPr txBox="1"/>
+          <p:nvPr/>
+        </p:nvSpPr>
+        <p:spPr>
+          <a:xfrm>
+            <a:off x="502920" y="4956048"/>
+            <a:ext cx="11155680" cy="457200"/>
+          </a:xfrm>
+          <a:prstGeom prst="rect">
+            <a:avLst/>
+          </a:prstGeom>
+          <a:noFill/>
+        </p:spPr>
+        <p:txBody>
+          <a:bodyPr wrap="square">
+            <a:spAutoFit/>
+          </a:bodyPr>
+          <a:lstStyle/>
+          <a:p>
+            <a:pPr algn="ctr"/>
+            <a:r>
+              <a:rPr sz="1600" b="1">
+                <a:solidFill>
+                  <a:srgbClr val="1A237E"/>
+                </a:solidFill>
+              </a:rPr>
+              <a:t>FTによりSEの悪影響は縮小するが消えない—SEの適用はFT後も推奨されない</a:t>
+            </a:r>
+          </a:p>
+        </p:txBody>
+      </p:sp>
+      <p:sp>
+        <p:nvSpPr>
+          <p:cNvPr id="27" name="Rectangle 26"/>
           <p:cNvSpPr/>
           <p:nvPr/>
         </p:nvSpPr>
@@ -16167,7 +16562,7 @@
       </p:sp>
       <p:sp>
         <p:nvSpPr>
-          <p:cNvPr id="18" name="TextBox 17"/>
+          <p:cNvPr id="28" name="TextBox 27"/>
           <p:cNvSpPr txBox="1"/>
           <p:nvPr/>
         </p:nvSpPr>
@@ -16194,7 +16589,7 @@
                   <a:srgbClr val="1A237E"/>
                 </a:solidFill>
               </a:rPr>
-              <a:t>24 / 25</a:t>
+              <a:t>24 / 28</a:t>
             </a:r>
           </a:p>
         </p:txBody>
@@ -16289,27 +16684,61 @@
                   <a:srgbClr val="FFFFFF"/>
                 </a:solidFill>
               </a:rPr>
-              <a:t>今後の展望</a:t>
-            </a:r>
-          </a:p>
-        </p:txBody>
-      </p:sp>
-      <p:sp>
-        <p:nvSpPr>
-          <p:cNvPr id="4" name="Rectangle 3"/>
+              <a:t>まとめ</a:t>
+            </a:r>
+          </a:p>
+        </p:txBody>
+      </p:sp>
+      <p:sp>
+        <p:nvSpPr>
+          <p:cNvPr id="4" name="TextBox 3"/>
+          <p:cNvSpPr txBox="1"/>
+          <p:nvPr/>
+        </p:nvSpPr>
+        <p:spPr>
+          <a:xfrm>
+            <a:off x="365760" y="1463040"/>
+            <a:ext cx="11430000" cy="502920"/>
+          </a:xfrm>
+          <a:prstGeom prst="rect">
+            <a:avLst/>
+          </a:prstGeom>
+          <a:noFill/>
+        </p:spPr>
+        <p:txBody>
+          <a:bodyPr wrap="square">
+            <a:spAutoFit/>
+          </a:bodyPr>
+          <a:lstStyle/>
+          <a:p>
+            <a:pPr algn="l"/>
+            <a:r>
+              <a:rPr sz="1700" b="0">
+                <a:solidFill>
+                  <a:srgbClr val="212121"/>
+                </a:solidFill>
+              </a:rPr>
+              <a:t>喉マイク音声に対するSEの効果と、ASRモデルのドメイン適応効果を定量評価した。</a:t>
+            </a:r>
+          </a:p>
+        </p:txBody>
+      </p:sp>
+      <p:sp>
+        <p:nvSpPr>
+          <p:cNvPr id="5" name="Rectangle 4"/>
           <p:cNvSpPr/>
           <p:nvPr/>
         </p:nvSpPr>
         <p:spPr>
           <a:xfrm>
-            <a:off x="365760" y="1463040"/>
-            <a:ext cx="11430000" cy="1463040"/>
+            <a:off x="365760" y="1508760"/>
+            <a:ext cx="11430000" cy="621792"/>
           </a:xfrm>
           <a:prstGeom prst="rect">
             <a:avLst/>
           </a:prstGeom>
           <a:solidFill>
-            <a:srgbClr val="FFEBEE"/>
+            <a:srgbClr val="F5F5F5"/>
           </a:solidFill>
           <a:ln>
             <a:noFill/>
@@ -16339,14 +16768,14 @@
       </p:sp>
       <p:sp>
         <p:nvSpPr>
-          <p:cNvPr id="5" name="TextBox 4"/>
-          <p:cNvSpPr txBox="1"/>
-          <p:nvPr/>
-        </p:nvSpPr>
-        <p:spPr>
-          <a:xfrm>
-            <a:off x="502920" y="1508760"/>
-            <a:ext cx="2560320" cy="320040"/>
+          <p:cNvPr id="6" name="TextBox 5"/>
+          <p:cNvSpPr txBox="1"/>
+          <p:nvPr/>
+        </p:nvSpPr>
+        <p:spPr>
+          <a:xfrm>
+            <a:off x="502920" y="1600200"/>
+            <a:ext cx="731520" cy="411480"/>
           </a:xfrm>
           <a:prstGeom prst="rect">
             <a:avLst/>
@@ -16361,26 +16790,26 @@
           <a:p>
             <a:pPr algn="l"/>
             <a:r>
-              <a:rPr sz="1100" b="1">
-                <a:solidFill>
-                  <a:srgbClr val="78909C"/>
-                </a:solidFill>
-              </a:rPr>
-              <a:t>優先度：高</a:t>
-            </a:r>
-          </a:p>
-        </p:txBody>
-      </p:sp>
-      <p:sp>
-        <p:nvSpPr>
-          <p:cNvPr id="6" name="TextBox 5"/>
-          <p:cNvSpPr txBox="1"/>
-          <p:nvPr/>
-        </p:nvSpPr>
-        <p:spPr>
-          <a:xfrm>
-            <a:off x="502920" y="1810512"/>
-            <a:ext cx="11064240" cy="384048"/>
+              <a:rPr sz="1400" b="1">
+                <a:solidFill>
+                  <a:srgbClr val="C62828"/>
+                </a:solidFill>
+              </a:rPr>
+              <a:t>（1）</a:t>
+            </a:r>
+          </a:p>
+        </p:txBody>
+      </p:sp>
+      <p:sp>
+        <p:nvSpPr>
+          <p:cNvPr id="7" name="TextBox 6"/>
+          <p:cNvSpPr txBox="1"/>
+          <p:nvPr/>
+        </p:nvSpPr>
+        <p:spPr>
+          <a:xfrm>
+            <a:off x="1143000" y="1600200"/>
+            <a:ext cx="10424160" cy="411480"/>
           </a:xfrm>
           <a:prstGeom prst="rect">
             <a:avLst/>
@@ -16395,100 +16824,32 @@
           <a:p>
             <a:pPr algn="l"/>
             <a:r>
-              <a:rPr sz="1600" b="1">
-                <a:solidFill>
-                  <a:srgbClr val="1A237E"/>
-                </a:solidFill>
-              </a:rPr>
-              <a:t>Whisper large-v3 でのFTと比較</a:t>
-            </a:r>
-          </a:p>
-        </p:txBody>
-      </p:sp>
-      <p:sp>
-        <p:nvSpPr>
-          <p:cNvPr id="7" name="TextBox 6"/>
-          <p:cNvSpPr txBox="1"/>
-          <p:nvPr/>
-        </p:nvSpPr>
-        <p:spPr>
-          <a:xfrm>
-            <a:off x="640080" y="2267712"/>
-            <a:ext cx="10972800" cy="292608"/>
-          </a:xfrm>
-          <a:prstGeom prst="rect">
-            <a:avLst/>
-          </a:prstGeom>
-          <a:noFill/>
-        </p:spPr>
-        <p:txBody>
-          <a:bodyPr wrap="square">
-            <a:spAutoFit/>
-          </a:bodyPr>
-          <a:lstStyle/>
-          <a:p>
-            <a:pPr algn="l"/>
-            <a:r>
-              <a:rPr sz="1300" b="0">
+              <a:rPr sz="1400" b="0">
                 <a:solidFill>
                   <a:srgbClr val="212121"/>
                 </a:solidFill>
               </a:rPr>
-              <a:t>・ smallとlargeでFT効果の差を比較</a:t>
-            </a:r>
-          </a:p>
-        </p:txBody>
-      </p:sp>
-      <p:sp>
-        <p:nvSpPr>
-          <p:cNvPr id="8" name="TextBox 7"/>
-          <p:cNvSpPr txBox="1"/>
-          <p:nvPr/>
-        </p:nvSpPr>
-        <p:spPr>
-          <a:xfrm>
-            <a:off x="640080" y="2587752"/>
-            <a:ext cx="10972800" cy="292608"/>
-          </a:xfrm>
-          <a:prstGeom prst="rect">
-            <a:avLst/>
-          </a:prstGeom>
-          <a:noFill/>
-        </p:spPr>
-        <p:txBody>
-          <a:bodyPr wrap="square">
-            <a:spAutoFit/>
-          </a:bodyPr>
-          <a:lstStyle/>
-          <a:p>
-            <a:pPr algn="l"/>
-            <a:r>
-              <a:rPr sz="1300" b="0">
-                <a:solidFill>
-                  <a:srgbClr val="212121"/>
-                </a:solidFill>
-              </a:rPr>
-              <a:t>・ モデルサイズとドメイン適応効果の関係を明らかにする</a:t>
-            </a:r>
-          </a:p>
-        </p:txBody>
-      </p:sp>
-      <p:sp>
-        <p:nvSpPr>
-          <p:cNvPr id="9" name="Rectangle 8"/>
+              <a:t>DSP-onlyおよびGTCRNは全ノイズ条件でCERを有意に悪化させる（30検定中26件 p&lt;0.05）</a:t>
+            </a:r>
+          </a:p>
+        </p:txBody>
+      </p:sp>
+      <p:sp>
+        <p:nvSpPr>
+          <p:cNvPr id="8" name="Rectangle 7"/>
           <p:cNvSpPr/>
           <p:nvPr/>
         </p:nvSpPr>
         <p:spPr>
           <a:xfrm>
-            <a:off x="365760" y="3063240"/>
-            <a:ext cx="11430000" cy="1463040"/>
+            <a:off x="365760" y="2212848"/>
+            <a:ext cx="11430000" cy="621792"/>
           </a:xfrm>
           <a:prstGeom prst="rect">
             <a:avLst/>
           </a:prstGeom>
           <a:solidFill>
-            <a:srgbClr val="FFF8E1"/>
+            <a:srgbClr val="F5F5F5"/>
           </a:solidFill>
           <a:ln>
             <a:noFill/>
@@ -16518,14 +16879,48 @@
       </p:sp>
       <p:sp>
         <p:nvSpPr>
+          <p:cNvPr id="9" name="TextBox 8"/>
+          <p:cNvSpPr txBox="1"/>
+          <p:nvPr/>
+        </p:nvSpPr>
+        <p:spPr>
+          <a:xfrm>
+            <a:off x="502920" y="2304288"/>
+            <a:ext cx="731520" cy="411480"/>
+          </a:xfrm>
+          <a:prstGeom prst="rect">
+            <a:avLst/>
+          </a:prstGeom>
+          <a:noFill/>
+        </p:spPr>
+        <p:txBody>
+          <a:bodyPr wrap="square">
+            <a:spAutoFit/>
+          </a:bodyPr>
+          <a:lstStyle/>
+          <a:p>
+            <a:pPr algn="l"/>
+            <a:r>
+              <a:rPr sz="1400" b="1">
+                <a:solidFill>
+                  <a:srgbClr val="FF9800"/>
+                </a:solidFill>
+              </a:rPr>
+              <a:t>（2）</a:t>
+            </a:r>
+          </a:p>
+        </p:txBody>
+      </p:sp>
+      <p:sp>
+        <p:nvSpPr>
           <p:cNvPr id="10" name="TextBox 9"/>
           <p:cNvSpPr txBox="1"/>
           <p:nvPr/>
         </p:nvSpPr>
         <p:spPr>
           <a:xfrm>
-            <a:off x="502920" y="3108960"/>
-            <a:ext cx="2560320" cy="320040"/>
+            <a:off x="1143000" y="2304288"/>
+            <a:ext cx="10424160" cy="411480"/>
           </a:xfrm>
           <a:prstGeom prst="rect">
             <a:avLst/>
@@ -16540,134 +16935,32 @@
           <a:p>
             <a:pPr algn="l"/>
             <a:r>
-              <a:rPr sz="1100" b="1">
-                <a:solidFill>
-                  <a:srgbClr val="78909C"/>
-                </a:solidFill>
-              </a:rPr>
-              <a:t>優先度：中</a:t>
-            </a:r>
-          </a:p>
-        </p:txBody>
-      </p:sp>
-      <p:sp>
-        <p:nvSpPr>
-          <p:cNvPr id="11" name="TextBox 10"/>
-          <p:cNvSpPr txBox="1"/>
-          <p:nvPr/>
-        </p:nvSpPr>
-        <p:spPr>
-          <a:xfrm>
-            <a:off x="502920" y="3410712"/>
-            <a:ext cx="11064240" cy="384048"/>
-          </a:xfrm>
-          <a:prstGeom prst="rect">
-            <a:avLst/>
-          </a:prstGeom>
-          <a:noFill/>
-        </p:spPr>
-        <p:txBody>
-          <a:bodyPr wrap="square">
-            <a:spAutoFit/>
-          </a:bodyPr>
-          <a:lstStyle/>
-          <a:p>
-            <a:pPr algn="l"/>
-            <a:r>
-              <a:rPr sz="1600" b="1">
-                <a:solidFill>
-                  <a:srgbClr val="1A237E"/>
-                </a:solidFill>
-              </a:rPr>
-              <a:t>ノイズ条件下でのWhisper FT評価</a:t>
-            </a:r>
-          </a:p>
-        </p:txBody>
-      </p:sp>
-      <p:sp>
-        <p:nvSpPr>
-          <p:cNvPr id="12" name="TextBox 11"/>
-          <p:cNvSpPr txBox="1"/>
-          <p:nvPr/>
-        </p:nvSpPr>
-        <p:spPr>
-          <a:xfrm>
-            <a:off x="640080" y="3867912"/>
-            <a:ext cx="10972800" cy="292608"/>
-          </a:xfrm>
-          <a:prstGeom prst="rect">
-            <a:avLst/>
-          </a:prstGeom>
-          <a:noFill/>
-        </p:spPr>
-        <p:txBody>
-          <a:bodyPr wrap="square">
-            <a:spAutoFit/>
-          </a:bodyPr>
-          <a:lstStyle/>
-          <a:p>
-            <a:pPr algn="l"/>
-            <a:r>
-              <a:rPr sz="1300" b="0">
+              <a:rPr sz="1400" b="0">
                 <a:solidFill>
                   <a:srgbClr val="212121"/>
                 </a:solidFill>
               </a:rPr>
-              <a:t>・ 現在のFT評価はクリーン音声のみ</a:t>
-            </a:r>
-          </a:p>
-        </p:txBody>
-      </p:sp>
-      <p:sp>
-        <p:nvSpPr>
-          <p:cNvPr id="13" name="TextBox 12"/>
-          <p:cNvSpPr txBox="1"/>
-          <p:nvPr/>
-        </p:nvSpPr>
-        <p:spPr>
-          <a:xfrm>
-            <a:off x="640080" y="4187952"/>
-            <a:ext cx="10972800" cy="292608"/>
-          </a:xfrm>
-          <a:prstGeom prst="rect">
-            <a:avLst/>
-          </a:prstGeom>
-          <a:noFill/>
-        </p:spPr>
-        <p:txBody>
-          <a:bodyPr wrap="square">
-            <a:spAutoFit/>
-          </a:bodyPr>
-          <a:lstStyle/>
-          <a:p>
-            <a:pPr algn="l"/>
-            <a:r>
-              <a:rPr sz="1300" b="0">
-                <a:solidFill>
-                  <a:srgbClr val="212121"/>
-                </a:solidFill>
-              </a:rPr>
-              <a:t>・ フェーズ1と同じSNR条件（白色・ピンクノイズ）でのCER比較</a:t>
-            </a:r>
-          </a:p>
-        </p:txBody>
-      </p:sp>
-      <p:sp>
-        <p:nvSpPr>
-          <p:cNvPr id="14" name="Rectangle 13"/>
+              <a:t>GTCRNはSTOI・PESQを改善しながらCERを悪化させる三重パラドックスが全ノイズ条件で観測された</a:t>
+            </a:r>
+          </a:p>
+        </p:txBody>
+      </p:sp>
+      <p:sp>
+        <p:nvSpPr>
+          <p:cNvPr id="11" name="Rectangle 10"/>
           <p:cNvSpPr/>
           <p:nvPr/>
         </p:nvSpPr>
         <p:spPr>
           <a:xfrm>
-            <a:off x="365760" y="4663440"/>
-            <a:ext cx="11430000" cy="1463040"/>
+            <a:off x="365760" y="2916936"/>
+            <a:ext cx="11430000" cy="621792"/>
           </a:xfrm>
           <a:prstGeom prst="rect">
             <a:avLst/>
           </a:prstGeom>
           <a:solidFill>
-            <a:srgbClr val="E8F5E9"/>
+            <a:srgbClr val="F5F5F5"/>
           </a:solidFill>
           <a:ln>
             <a:noFill/>
@@ -16697,14 +16990,125 @@
       </p:sp>
       <p:sp>
         <p:nvSpPr>
+          <p:cNvPr id="12" name="TextBox 11"/>
+          <p:cNvSpPr txBox="1"/>
+          <p:nvPr/>
+        </p:nvSpPr>
+        <p:spPr>
+          <a:xfrm>
+            <a:off x="502920" y="3008376"/>
+            <a:ext cx="731520" cy="411480"/>
+          </a:xfrm>
+          <a:prstGeom prst="rect">
+            <a:avLst/>
+          </a:prstGeom>
+          <a:noFill/>
+        </p:spPr>
+        <p:txBody>
+          <a:bodyPr wrap="square">
+            <a:spAutoFit/>
+          </a:bodyPr>
+          <a:lstStyle/>
+          <a:p>
+            <a:pPr algn="l"/>
+            <a:r>
+              <a:rPr sz="1400" b="1">
+                <a:solidFill>
+                  <a:srgbClr val="FF9800"/>
+                </a:solidFill>
+              </a:rPr>
+              <a:t>（3）</a:t>
+            </a:r>
+          </a:p>
+        </p:txBody>
+      </p:sp>
+      <p:sp>
+        <p:nvSpPr>
+          <p:cNvPr id="13" name="TextBox 12"/>
+          <p:cNvSpPr txBox="1"/>
+          <p:nvPr/>
+        </p:nvSpPr>
+        <p:spPr>
+          <a:xfrm>
+            <a:off x="1143000" y="3008376"/>
+            <a:ext cx="10424160" cy="411480"/>
+          </a:xfrm>
+          <a:prstGeom prst="rect">
+            <a:avLst/>
+          </a:prstGeom>
+          <a:noFill/>
+        </p:spPr>
+        <p:txBody>
+          <a:bodyPr wrap="square">
+            <a:spAutoFit/>
+          </a:bodyPr>
+          <a:lstStyle/>
+          <a:p>
+            <a:pPr algn="l"/>
+            <a:r>
+              <a:rPr sz="1400" b="0">
+                <a:solidFill>
+                  <a:srgbClr val="212121"/>
+                </a:solidFill>
+              </a:rPr>
+              <a:t>DSP-onlyは3指標すべてを悪化させ、喉マイクには不適切な前処理である</a:t>
+            </a:r>
+          </a:p>
+        </p:txBody>
+      </p:sp>
+      <p:sp>
+        <p:nvSpPr>
+          <p:cNvPr id="14" name="Rectangle 13"/>
+          <p:cNvSpPr/>
+          <p:nvPr/>
+        </p:nvSpPr>
+        <p:spPr>
+          <a:xfrm>
+            <a:off x="365760" y="3621024"/>
+            <a:ext cx="11430000" cy="621792"/>
+          </a:xfrm>
+          <a:prstGeom prst="rect">
+            <a:avLst/>
+          </a:prstGeom>
+          <a:solidFill>
+            <a:srgbClr val="F5F5F5"/>
+          </a:solidFill>
+          <a:ln>
+            <a:noFill/>
+          </a:ln>
+        </p:spPr>
+        <p:style>
+          <a:lnRef idx="1">
+            <a:schemeClr val="accent1"/>
+          </a:lnRef>
+          <a:fillRef idx="3">
+            <a:schemeClr val="accent1"/>
+          </a:fillRef>
+          <a:effectRef idx="2">
+            <a:schemeClr val="accent1"/>
+          </a:effectRef>
+          <a:fontRef idx="minor">
+            <a:schemeClr val="lt1"/>
+          </a:fontRef>
+        </p:style>
+        <p:txBody>
+          <a:bodyPr rtlCol="0" anchor="ctr"/>
+          <a:lstStyle/>
+          <a:p>
+            <a:pPr algn="ctr"/>
+          </a:p>
+        </p:txBody>
+      </p:sp>
+      <p:sp>
+        <p:nvSpPr>
           <p:cNvPr id="15" name="TextBox 14"/>
           <p:cNvSpPr txBox="1"/>
           <p:nvPr/>
         </p:nvSpPr>
         <p:spPr>
           <a:xfrm>
-            <a:off x="502920" y="4709160"/>
-            <a:ext cx="2560320" cy="320040"/>
+            <a:off x="502920" y="3712464"/>
+            <a:ext cx="731520" cy="411480"/>
           </a:xfrm>
           <a:prstGeom prst="rect">
             <a:avLst/>
@@ -16719,12 +17123,12 @@
           <a:p>
             <a:pPr algn="l"/>
             <a:r>
-              <a:rPr sz="1100" b="1">
-                <a:solidFill>
-                  <a:srgbClr val="78909C"/>
-                </a:solidFill>
-              </a:rPr>
-              <a:t>優先度：中</a:t>
+              <a:rPr sz="1400" b="1">
+                <a:solidFill>
+                  <a:srgbClr val="43A047"/>
+                </a:solidFill>
+              </a:rPr>
+              <a:t>（4）</a:t>
             </a:r>
           </a:p>
         </p:txBody>
@@ -16737,8 +17141,8 @@
         </p:nvSpPr>
         <p:spPr>
           <a:xfrm>
-            <a:off x="502920" y="5010912"/>
-            <a:ext cx="11064240" cy="384048"/>
+            <a:off x="1143000" y="3712464"/>
+            <a:ext cx="10424160" cy="411480"/>
           </a:xfrm>
           <a:prstGeom prst="rect">
             <a:avLst/>
@@ -16753,26 +17157,69 @@
           <a:p>
             <a:pPr algn="l"/>
             <a:r>
-              <a:rPr sz="1600" b="1">
-                <a:solidFill>
-                  <a:srgbClr val="1A237E"/>
-                </a:solidFill>
-              </a:rPr>
-              <a:t>実環境ノイズでの検証</a:t>
-            </a:r>
-          </a:p>
-        </p:txBody>
-      </p:sp>
-      <p:sp>
-        <p:nvSpPr>
-          <p:cNvPr id="17" name="TextBox 16"/>
-          <p:cNvSpPr txBox="1"/>
-          <p:nvPr/>
-        </p:nvSpPr>
-        <p:spPr>
-          <a:xfrm>
-            <a:off x="640080" y="5468112"/>
-            <a:ext cx="10972800" cy="292608"/>
+              <a:rPr sz="1400" b="0">
+                <a:solidFill>
+                  <a:srgbClr val="212121"/>
+                </a:solidFill>
+              </a:rPr>
+              <a:t>Whisper smallのFTによりCERが0.269→0.095（64.6%改善）—「ASR側の適応」が音声処理より有効</a:t>
+            </a:r>
+          </a:p>
+        </p:txBody>
+      </p:sp>
+      <p:sp>
+        <p:nvSpPr>
+          <p:cNvPr id="17" name="Rectangle 16"/>
+          <p:cNvSpPr/>
+          <p:nvPr/>
+        </p:nvSpPr>
+        <p:spPr>
+          <a:xfrm>
+            <a:off x="365760" y="4325112"/>
+            <a:ext cx="11430000" cy="621792"/>
+          </a:xfrm>
+          <a:prstGeom prst="rect">
+            <a:avLst/>
+          </a:prstGeom>
+          <a:solidFill>
+            <a:srgbClr val="F5F5F5"/>
+          </a:solidFill>
+          <a:ln>
+            <a:noFill/>
+          </a:ln>
+        </p:spPr>
+        <p:style>
+          <a:lnRef idx="1">
+            <a:schemeClr val="accent1"/>
+          </a:lnRef>
+          <a:fillRef idx="3">
+            <a:schemeClr val="accent1"/>
+          </a:fillRef>
+          <a:effectRef idx="2">
+            <a:schemeClr val="accent1"/>
+          </a:effectRef>
+          <a:fontRef idx="minor">
+            <a:schemeClr val="lt1"/>
+          </a:fontRef>
+        </p:style>
+        <p:txBody>
+          <a:bodyPr rtlCol="0" anchor="ctr"/>
+          <a:lstStyle/>
+          <a:p>
+            <a:pPr algn="ctr"/>
+          </a:p>
+        </p:txBody>
+      </p:sp>
+      <p:sp>
+        <p:nvSpPr>
+          <p:cNvPr id="18" name="TextBox 17"/>
+          <p:cNvSpPr txBox="1"/>
+          <p:nvPr/>
+        </p:nvSpPr>
+        <p:spPr>
+          <a:xfrm>
+            <a:off x="502920" y="4416552"/>
+            <a:ext cx="731520" cy="411480"/>
           </a:xfrm>
           <a:prstGeom prst="rect">
             <a:avLst/>
@@ -16787,53 +17234,53 @@
           <a:p>
             <a:pPr algn="l"/>
             <a:r>
-              <a:rPr sz="1300" b="0">
+              <a:rPr sz="1400" b="1">
+                <a:solidFill>
+                  <a:srgbClr val="43A047"/>
+                </a:solidFill>
+              </a:rPr>
+              <a:t>（5）</a:t>
+            </a:r>
+          </a:p>
+        </p:txBody>
+      </p:sp>
+      <p:sp>
+        <p:nvSpPr>
+          <p:cNvPr id="19" name="TextBox 18"/>
+          <p:cNvSpPr txBox="1"/>
+          <p:nvPr/>
+        </p:nvSpPr>
+        <p:spPr>
+          <a:xfrm>
+            <a:off x="1143000" y="4416552"/>
+            <a:ext cx="10424160" cy="411480"/>
+          </a:xfrm>
+          <a:prstGeom prst="rect">
+            <a:avLst/>
+          </a:prstGeom>
+          <a:noFill/>
+        </p:spPr>
+        <p:txBody>
+          <a:bodyPr wrap="square">
+            <a:spAutoFit/>
+          </a:bodyPr>
+          <a:lstStyle/>
+          <a:p>
+            <a:pPr algn="l"/>
+            <a:r>
+              <a:rPr sz="1400" b="0">
                 <a:solidFill>
                   <a:srgbClr val="212121"/>
                 </a:solidFill>
               </a:rPr>
-              <a:t>・ 現在は人工ノイズ（白色・ピンク）のみ</a:t>
-            </a:r>
-          </a:p>
-        </p:txBody>
-      </p:sp>
-      <p:sp>
-        <p:nvSpPr>
-          <p:cNvPr id="18" name="TextBox 17"/>
-          <p:cNvSpPr txBox="1"/>
-          <p:nvPr/>
-        </p:nvSpPr>
-        <p:spPr>
-          <a:xfrm>
-            <a:off x="640080" y="5788152"/>
-            <a:ext cx="10972800" cy="292608"/>
-          </a:xfrm>
-          <a:prstGeom prst="rect">
-            <a:avLst/>
-          </a:prstGeom>
-          <a:noFill/>
-        </p:spPr>
-        <p:txBody>
-          <a:bodyPr wrap="square">
-            <a:spAutoFit/>
-          </a:bodyPr>
-          <a:lstStyle/>
-          <a:p>
-            <a:pPr algn="l"/>
-            <a:r>
-              <a:rPr sz="1300" b="0">
-                <a:solidFill>
-                  <a:srgbClr val="212121"/>
-                </a:solidFill>
-              </a:rPr>
-              <a:t>・ MUSAN・DEMANDなどの実録音ノイズで再現実験</a:t>
-            </a:r>
-          </a:p>
-        </p:txBody>
-      </p:sp>
-      <p:sp>
-        <p:nvSpPr>
-          <p:cNvPr id="19" name="Rectangle 18"/>
+              <a:t>FT後もSEの逆効果は残存するが悪化幅は縮小（+0.027→+0.007）—FTがSEアーティファクトへの感受性を低減</a:t>
+            </a:r>
+          </a:p>
+        </p:txBody>
+      </p:sp>
+      <p:sp>
+        <p:nvSpPr>
+          <p:cNvPr id="20" name="Rectangle 19"/>
           <p:cNvSpPr/>
           <p:nvPr/>
         </p:nvSpPr>
@@ -16876,7 +17323,7 @@
       </p:sp>
       <p:sp>
         <p:nvSpPr>
-          <p:cNvPr id="20" name="TextBox 19"/>
+          <p:cNvPr id="21" name="TextBox 20"/>
           <p:cNvSpPr txBox="1"/>
           <p:nvPr/>
         </p:nvSpPr>
@@ -16903,7 +17350,7 @@
                   <a:srgbClr val="1A237E"/>
                 </a:solidFill>
               </a:rPr>
-              <a:t>25 / 25</a:t>
+              <a:t>25 / 28</a:t>
             </a:r>
           </a:p>
         </p:txBody>
@@ -16998,7 +17445,7 @@
                   <a:srgbClr val="FFFFFF"/>
                 </a:solidFill>
               </a:rPr>
-              <a:t>参考文献</a:t>
+              <a:t>今後の展望</a:t>
             </a:r>
           </a:p>
         </p:txBody>
@@ -17011,14 +17458,14 @@
         </p:nvSpPr>
         <p:spPr>
           <a:xfrm>
-            <a:off x="365760" y="1508760"/>
-            <a:ext cx="11430000" cy="1143000"/>
+            <a:off x="365760" y="1463040"/>
+            <a:ext cx="11430000" cy="1463040"/>
           </a:xfrm>
           <a:prstGeom prst="rect">
             <a:avLst/>
           </a:prstGeom>
           <a:solidFill>
-            <a:srgbClr val="F5F5F5"/>
+            <a:srgbClr val="FFEBEE"/>
           </a:solidFill>
           <a:ln>
             <a:noFill/>
@@ -17054,8 +17501,8 @@
         </p:nvSpPr>
         <p:spPr>
           <a:xfrm>
-            <a:off x="502920" y="1581912"/>
-            <a:ext cx="11155680" cy="1005840"/>
+            <a:off x="502920" y="1508760"/>
+            <a:ext cx="2560320" cy="320040"/>
           </a:xfrm>
           <a:prstGeom prst="rect">
             <a:avLst/>
@@ -17070,35 +17517,134 @@
           <a:p>
             <a:pPr algn="l"/>
             <a:r>
-              <a:rPr sz="1200" b="0">
+              <a:rPr sz="1100" b="1">
+                <a:solidFill>
+                  <a:srgbClr val="78909C"/>
+                </a:solidFill>
+              </a:rPr>
+              <a:t>優先度：高</a:t>
+            </a:r>
+          </a:p>
+        </p:txBody>
+      </p:sp>
+      <p:sp>
+        <p:nvSpPr>
+          <p:cNvPr id="6" name="TextBox 5"/>
+          <p:cNvSpPr txBox="1"/>
+          <p:nvPr/>
+        </p:nvSpPr>
+        <p:spPr>
+          <a:xfrm>
+            <a:off x="502920" y="1810512"/>
+            <a:ext cx="11064240" cy="384048"/>
+          </a:xfrm>
+          <a:prstGeom prst="rect">
+            <a:avLst/>
+          </a:prstGeom>
+          <a:noFill/>
+        </p:spPr>
+        <p:txBody>
+          <a:bodyPr wrap="square">
+            <a:spAutoFit/>
+          </a:bodyPr>
+          <a:lstStyle/>
+          <a:p>
+            <a:pPr algn="l"/>
+            <a:r>
+              <a:rPr sz="1600" b="1">
+                <a:solidFill>
+                  <a:srgbClr val="1A237E"/>
+                </a:solidFill>
+              </a:rPr>
+              <a:t>Whisper large-v3 でのFTと比較</a:t>
+            </a:r>
+          </a:p>
+        </p:txBody>
+      </p:sp>
+      <p:sp>
+        <p:nvSpPr>
+          <p:cNvPr id="7" name="TextBox 6"/>
+          <p:cNvSpPr txBox="1"/>
+          <p:nvPr/>
+        </p:nvSpPr>
+        <p:spPr>
+          <a:xfrm>
+            <a:off x="640080" y="2267712"/>
+            <a:ext cx="10972800" cy="292608"/>
+          </a:xfrm>
+          <a:prstGeom prst="rect">
+            <a:avLst/>
+          </a:prstGeom>
+          <a:noFill/>
+        </p:spPr>
+        <p:txBody>
+          <a:bodyPr wrap="square">
+            <a:spAutoFit/>
+          </a:bodyPr>
+          <a:lstStyle/>
+          <a:p>
+            <a:pPr algn="l"/>
+            <a:r>
+              <a:rPr sz="1300" b="0">
                 <a:solidFill>
                   <a:srgbClr val="212121"/>
                 </a:solidFill>
               </a:rPr>
-              <a:t>[1]  C.O. Mawalim, S. Okada, M. Unoki,
-     "Are Recent Deep Learning-Based Speech Enhancement Methods Ready to Confront
-     Real-World Noisy Environments?"
-     Interspeech 2024, pp. 1735–1739, DOI: 10.21437/Interspeech.2024-129</a:t>
-            </a:r>
-          </a:p>
-        </p:txBody>
-      </p:sp>
-      <p:sp>
-        <p:nvSpPr>
-          <p:cNvPr id="6" name="Rectangle 5"/>
+              <a:t>・ smallとlargeでFT効果の差を比較</a:t>
+            </a:r>
+          </a:p>
+        </p:txBody>
+      </p:sp>
+      <p:sp>
+        <p:nvSpPr>
+          <p:cNvPr id="8" name="TextBox 7"/>
+          <p:cNvSpPr txBox="1"/>
+          <p:nvPr/>
+        </p:nvSpPr>
+        <p:spPr>
+          <a:xfrm>
+            <a:off x="640080" y="2587752"/>
+            <a:ext cx="10972800" cy="292608"/>
+          </a:xfrm>
+          <a:prstGeom prst="rect">
+            <a:avLst/>
+          </a:prstGeom>
+          <a:noFill/>
+        </p:spPr>
+        <p:txBody>
+          <a:bodyPr wrap="square">
+            <a:spAutoFit/>
+          </a:bodyPr>
+          <a:lstStyle/>
+          <a:p>
+            <a:pPr algn="l"/>
+            <a:r>
+              <a:rPr sz="1300" b="0">
+                <a:solidFill>
+                  <a:srgbClr val="212121"/>
+                </a:solidFill>
+              </a:rPr>
+              <a:t>・ モデルサイズとドメイン適応効果の関係を明らかにする</a:t>
+            </a:r>
+          </a:p>
+        </p:txBody>
+      </p:sp>
+      <p:sp>
+        <p:nvSpPr>
+          <p:cNvPr id="9" name="Rectangle 8"/>
           <p:cNvSpPr/>
           <p:nvPr/>
         </p:nvSpPr>
         <p:spPr>
           <a:xfrm>
-            <a:off x="365760" y="2743200"/>
-            <a:ext cx="11430000" cy="1143000"/>
+            <a:off x="365760" y="3063240"/>
+            <a:ext cx="11430000" cy="1463040"/>
           </a:xfrm>
           <a:prstGeom prst="rect">
             <a:avLst/>
           </a:prstGeom>
           <a:solidFill>
-            <a:srgbClr val="F5F5F5"/>
+            <a:srgbClr val="FFF8E1"/>
           </a:solidFill>
           <a:ln>
             <a:noFill/>
@@ -17128,14 +17674,14 @@
       </p:sp>
       <p:sp>
         <p:nvSpPr>
-          <p:cNvPr id="7" name="TextBox 6"/>
-          <p:cNvSpPr txBox="1"/>
-          <p:nvPr/>
-        </p:nvSpPr>
-        <p:spPr>
-          <a:xfrm>
-            <a:off x="502920" y="2816352"/>
-            <a:ext cx="11155680" cy="1005840"/>
+          <p:cNvPr id="10" name="TextBox 9"/>
+          <p:cNvSpPr txBox="1"/>
+          <p:nvPr/>
+        </p:nvSpPr>
+        <p:spPr>
+          <a:xfrm>
+            <a:off x="502920" y="3108960"/>
+            <a:ext cx="2560320" cy="320040"/>
           </a:xfrm>
           <a:prstGeom prst="rect">
             <a:avLst/>
@@ -17150,35 +17696,134 @@
           <a:p>
             <a:pPr algn="l"/>
             <a:r>
-              <a:rPr sz="1200" b="0">
+              <a:rPr sz="1100" b="1">
+                <a:solidFill>
+                  <a:srgbClr val="78909C"/>
+                </a:solidFill>
+              </a:rPr>
+              <a:t>優先度：中</a:t>
+            </a:r>
+          </a:p>
+        </p:txBody>
+      </p:sp>
+      <p:sp>
+        <p:nvSpPr>
+          <p:cNvPr id="11" name="TextBox 10"/>
+          <p:cNvSpPr txBox="1"/>
+          <p:nvPr/>
+        </p:nvSpPr>
+        <p:spPr>
+          <a:xfrm>
+            <a:off x="502920" y="3410712"/>
+            <a:ext cx="11064240" cy="384048"/>
+          </a:xfrm>
+          <a:prstGeom prst="rect">
+            <a:avLst/>
+          </a:prstGeom>
+          <a:noFill/>
+        </p:spPr>
+        <p:txBody>
+          <a:bodyPr wrap="square">
+            <a:spAutoFit/>
+          </a:bodyPr>
+          <a:lstStyle/>
+          <a:p>
+            <a:pPr algn="l"/>
+            <a:r>
+              <a:rPr sz="1600" b="1">
+                <a:solidFill>
+                  <a:srgbClr val="1A237E"/>
+                </a:solidFill>
+              </a:rPr>
+              <a:t>ノイズ条件下でのWhisper FT評価</a:t>
+            </a:r>
+          </a:p>
+        </p:txBody>
+      </p:sp>
+      <p:sp>
+        <p:nvSpPr>
+          <p:cNvPr id="12" name="TextBox 11"/>
+          <p:cNvSpPr txBox="1"/>
+          <p:nvPr/>
+        </p:nvSpPr>
+        <p:spPr>
+          <a:xfrm>
+            <a:off x="640080" y="3867912"/>
+            <a:ext cx="10972800" cy="292608"/>
+          </a:xfrm>
+          <a:prstGeom prst="rect">
+            <a:avLst/>
+          </a:prstGeom>
+          <a:noFill/>
+        </p:spPr>
+        <p:txBody>
+          <a:bodyPr wrap="square">
+            <a:spAutoFit/>
+          </a:bodyPr>
+          <a:lstStyle/>
+          <a:p>
+            <a:pPr algn="l"/>
+            <a:r>
+              <a:rPr sz="1300" b="0">
                 <a:solidFill>
                   <a:srgbClr val="212121"/>
                 </a:solidFill>
               </a:rPr>
-              <a:t>[2]  T. Ochiai, K. Iwamoto, M. Delcroix et al.,
-     "Rethinking Processing Distortions: How Do They Affect the Downstream ASR Performance?"
-     IEEE/ACM Transactions on Audio, Speech, and Language Processing, TASLP 2024,
-     arXiv:2404.14860</a:t>
-            </a:r>
-          </a:p>
-        </p:txBody>
-      </p:sp>
-      <p:sp>
-        <p:nvSpPr>
-          <p:cNvPr id="8" name="Rectangle 7"/>
+              <a:t>・ 現在のFT評価はクリーン音声のみ</a:t>
+            </a:r>
+          </a:p>
+        </p:txBody>
+      </p:sp>
+      <p:sp>
+        <p:nvSpPr>
+          <p:cNvPr id="13" name="TextBox 12"/>
+          <p:cNvSpPr txBox="1"/>
+          <p:nvPr/>
+        </p:nvSpPr>
+        <p:spPr>
+          <a:xfrm>
+            <a:off x="640080" y="4187952"/>
+            <a:ext cx="10972800" cy="292608"/>
+          </a:xfrm>
+          <a:prstGeom prst="rect">
+            <a:avLst/>
+          </a:prstGeom>
+          <a:noFill/>
+        </p:spPr>
+        <p:txBody>
+          <a:bodyPr wrap="square">
+            <a:spAutoFit/>
+          </a:bodyPr>
+          <a:lstStyle/>
+          <a:p>
+            <a:pPr algn="l"/>
+            <a:r>
+              <a:rPr sz="1300" b="0">
+                <a:solidFill>
+                  <a:srgbClr val="212121"/>
+                </a:solidFill>
+              </a:rPr>
+              <a:t>・ フェーズ1と同じSNR条件（白色・ピンクノイズ）でのCER比較</a:t>
+            </a:r>
+          </a:p>
+        </p:txBody>
+      </p:sp>
+      <p:sp>
+        <p:nvSpPr>
+          <p:cNvPr id="14" name="Rectangle 13"/>
           <p:cNvSpPr/>
           <p:nvPr/>
         </p:nvSpPr>
         <p:spPr>
           <a:xfrm>
-            <a:off x="365760" y="3977640"/>
-            <a:ext cx="11430000" cy="1143000"/>
+            <a:off x="365760" y="4663440"/>
+            <a:ext cx="11430000" cy="1463040"/>
           </a:xfrm>
           <a:prstGeom prst="rect">
             <a:avLst/>
           </a:prstGeom>
           <a:solidFill>
-            <a:srgbClr val="F5F5F5"/>
+            <a:srgbClr val="E8F5E9"/>
           </a:solidFill>
           <a:ln>
             <a:noFill/>
@@ -17208,14 +17853,14 @@
       </p:sp>
       <p:sp>
         <p:nvSpPr>
-          <p:cNvPr id="9" name="TextBox 8"/>
-          <p:cNvSpPr txBox="1"/>
-          <p:nvPr/>
-        </p:nvSpPr>
-        <p:spPr>
-          <a:xfrm>
-            <a:off x="502920" y="4050792"/>
-            <a:ext cx="11155680" cy="1005840"/>
+          <p:cNvPr id="15" name="TextBox 14"/>
+          <p:cNvSpPr txBox="1"/>
+          <p:nvPr/>
+        </p:nvSpPr>
+        <p:spPr>
+          <a:xfrm>
+            <a:off x="502920" y="4709160"/>
+            <a:ext cx="2560320" cy="320040"/>
           </a:xfrm>
           <a:prstGeom prst="rect">
             <a:avLst/>
@@ -17230,71 +17875,94 @@
           <a:p>
             <a:pPr algn="l"/>
             <a:r>
-              <a:rPr sz="1200" b="0">
+              <a:rPr sz="1100" b="1">
+                <a:solidFill>
+                  <a:srgbClr val="78909C"/>
+                </a:solidFill>
+              </a:rPr>
+              <a:t>優先度：中</a:t>
+            </a:r>
+          </a:p>
+        </p:txBody>
+      </p:sp>
+      <p:sp>
+        <p:nvSpPr>
+          <p:cNvPr id="16" name="TextBox 15"/>
+          <p:cNvSpPr txBox="1"/>
+          <p:nvPr/>
+        </p:nvSpPr>
+        <p:spPr>
+          <a:xfrm>
+            <a:off x="502920" y="5010912"/>
+            <a:ext cx="11064240" cy="384048"/>
+          </a:xfrm>
+          <a:prstGeom prst="rect">
+            <a:avLst/>
+          </a:prstGeom>
+          <a:noFill/>
+        </p:spPr>
+        <p:txBody>
+          <a:bodyPr wrap="square">
+            <a:spAutoFit/>
+          </a:bodyPr>
+          <a:lstStyle/>
+          <a:p>
+            <a:pPr algn="l"/>
+            <a:r>
+              <a:rPr sz="1600" b="1">
+                <a:solidFill>
+                  <a:srgbClr val="1A237E"/>
+                </a:solidFill>
+              </a:rPr>
+              <a:t>実環境ノイズでの検証</a:t>
+            </a:r>
+          </a:p>
+        </p:txBody>
+      </p:sp>
+      <p:sp>
+        <p:nvSpPr>
+          <p:cNvPr id="17" name="TextBox 16"/>
+          <p:cNvSpPr txBox="1"/>
+          <p:nvPr/>
+        </p:nvSpPr>
+        <p:spPr>
+          <a:xfrm>
+            <a:off x="640080" y="5468112"/>
+            <a:ext cx="10972800" cy="292608"/>
+          </a:xfrm>
+          <a:prstGeom prst="rect">
+            <a:avLst/>
+          </a:prstGeom>
+          <a:noFill/>
+        </p:spPr>
+        <p:txBody>
+          <a:bodyPr wrap="square">
+            <a:spAutoFit/>
+          </a:bodyPr>
+          <a:lstStyle/>
+          <a:p>
+            <a:pPr algn="l"/>
+            <a:r>
+              <a:rPr sz="1300" b="0">
                 <a:solidFill>
                   <a:srgbClr val="212121"/>
                 </a:solidFill>
               </a:rPr>
-              <a:t>[3]  X. Rong, C. Li, J. Xiao,
-     "GTCRN: A Speech Enhancement Model Requiring Ultra-Tiny Resources"
-     arXiv:2404.11567, 2024</a:t>
-            </a:r>
-          </a:p>
-        </p:txBody>
-      </p:sp>
-      <p:sp>
-        <p:nvSpPr>
-          <p:cNvPr id="10" name="Rectangle 9"/>
-          <p:cNvSpPr/>
-          <p:nvPr/>
-        </p:nvSpPr>
-        <p:spPr>
-          <a:xfrm>
-            <a:off x="365760" y="5212080"/>
-            <a:ext cx="11430000" cy="1143000"/>
-          </a:xfrm>
-          <a:prstGeom prst="rect">
-            <a:avLst/>
-          </a:prstGeom>
-          <a:solidFill>
-            <a:srgbClr val="F5F5F5"/>
-          </a:solidFill>
-          <a:ln>
-            <a:noFill/>
-          </a:ln>
-        </p:spPr>
-        <p:style>
-          <a:lnRef idx="1">
-            <a:schemeClr val="accent1"/>
-          </a:lnRef>
-          <a:fillRef idx="3">
-            <a:schemeClr val="accent1"/>
-          </a:fillRef>
-          <a:effectRef idx="2">
-            <a:schemeClr val="accent1"/>
-          </a:effectRef>
-          <a:fontRef idx="minor">
-            <a:schemeClr val="lt1"/>
-          </a:fontRef>
-        </p:style>
-        <p:txBody>
-          <a:bodyPr rtlCol="0" anchor="ctr"/>
-          <a:lstStyle/>
-          <a:p>
-            <a:pPr algn="ctr"/>
-          </a:p>
-        </p:txBody>
-      </p:sp>
-      <p:sp>
-        <p:nvSpPr>
-          <p:cNvPr id="11" name="TextBox 10"/>
-          <p:cNvSpPr txBox="1"/>
-          <p:nvPr/>
-        </p:nvSpPr>
-        <p:spPr>
-          <a:xfrm>
-            <a:off x="502920" y="5285232"/>
-            <a:ext cx="11155680" cy="1005840"/>
+              <a:t>・ 現在は人工ノイズ（白色・ピンク）のみ</a:t>
+            </a:r>
+          </a:p>
+        </p:txBody>
+      </p:sp>
+      <p:sp>
+        <p:nvSpPr>
+          <p:cNvPr id="18" name="TextBox 17"/>
+          <p:cNvSpPr txBox="1"/>
+          <p:nvPr/>
+        </p:nvSpPr>
+        <p:spPr>
+          <a:xfrm>
+            <a:off x="640080" y="5788152"/>
+            <a:ext cx="10972800" cy="292608"/>
           </a:xfrm>
           <a:prstGeom prst="rect">
             <a:avLst/>
@@ -17309,21 +17977,19 @@
           <a:p>
             <a:pPr algn="l"/>
             <a:r>
-              <a:rPr sz="1200" b="0">
+              <a:rPr sz="1300" b="0">
                 <a:solidFill>
                   <a:srgbClr val="212121"/>
                 </a:solidFill>
               </a:rPr>
-              <a:t>[4]  Y. Kim et al.,
-     "TAPS: Throat and Acoustic Pairing Speech Dataset"
-     HuggingFace: yskim3271/Throat_and_Acoustic_Pairing_Speech_Dataset</a:t>
-            </a:r>
-          </a:p>
-        </p:txBody>
-      </p:sp>
-      <p:sp>
-        <p:nvSpPr>
-          <p:cNvPr id="12" name="Rectangle 11"/>
+              <a:t>・ MUSAN・DEMANDなどの実録音ノイズで再現実験</a:t>
+            </a:r>
+          </a:p>
+        </p:txBody>
+      </p:sp>
+      <p:sp>
+        <p:nvSpPr>
+          <p:cNvPr id="19" name="Rectangle 18"/>
           <p:cNvSpPr/>
           <p:nvPr/>
         </p:nvSpPr>
@@ -17366,7 +18032,7 @@
       </p:sp>
       <p:sp>
         <p:nvSpPr>
-          <p:cNvPr id="13" name="TextBox 12"/>
+          <p:cNvPr id="20" name="TextBox 19"/>
           <p:cNvSpPr txBox="1"/>
           <p:nvPr/>
         </p:nvSpPr>
@@ -17393,7 +18059,7 @@
                   <a:srgbClr val="1A237E"/>
                 </a:solidFill>
               </a:rPr>
-              <a:t>26 / 25</a:t>
+              <a:t>26 / 28</a:t>
             </a:r>
           </a:p>
         </p:txBody>
@@ -17425,7 +18091,7 @@
         <p:spPr>
           <a:xfrm>
             <a:off x="0" y="0"/>
-            <a:ext cx="12188952" cy="6858000"/>
+            <a:ext cx="12188952" cy="1280160"/>
           </a:xfrm>
           <a:prstGeom prst="rect">
             <a:avLst/>
@@ -17461,6 +18127,496 @@
       </p:sp>
       <p:sp>
         <p:nvSpPr>
+          <p:cNvPr id="3" name="TextBox 2"/>
+          <p:cNvSpPr txBox="1"/>
+          <p:nvPr/>
+        </p:nvSpPr>
+        <p:spPr>
+          <a:xfrm>
+            <a:off x="365760" y="164592"/>
+            <a:ext cx="11430000" cy="822960"/>
+          </a:xfrm>
+          <a:prstGeom prst="rect">
+            <a:avLst/>
+          </a:prstGeom>
+          <a:noFill/>
+        </p:spPr>
+        <p:txBody>
+          <a:bodyPr wrap="square">
+            <a:spAutoFit/>
+          </a:bodyPr>
+          <a:lstStyle/>
+          <a:p>
+            <a:pPr algn="l"/>
+            <a:r>
+              <a:rPr sz="2800" b="1">
+                <a:solidFill>
+                  <a:srgbClr val="FFFFFF"/>
+                </a:solidFill>
+              </a:rPr>
+              <a:t>参考文献</a:t>
+            </a:r>
+          </a:p>
+        </p:txBody>
+      </p:sp>
+      <p:sp>
+        <p:nvSpPr>
+          <p:cNvPr id="4" name="Rectangle 3"/>
+          <p:cNvSpPr/>
+          <p:nvPr/>
+        </p:nvSpPr>
+        <p:spPr>
+          <a:xfrm>
+            <a:off x="365760" y="1508760"/>
+            <a:ext cx="11430000" cy="1143000"/>
+          </a:xfrm>
+          <a:prstGeom prst="rect">
+            <a:avLst/>
+          </a:prstGeom>
+          <a:solidFill>
+            <a:srgbClr val="F5F5F5"/>
+          </a:solidFill>
+          <a:ln>
+            <a:noFill/>
+          </a:ln>
+        </p:spPr>
+        <p:style>
+          <a:lnRef idx="1">
+            <a:schemeClr val="accent1"/>
+          </a:lnRef>
+          <a:fillRef idx="3">
+            <a:schemeClr val="accent1"/>
+          </a:fillRef>
+          <a:effectRef idx="2">
+            <a:schemeClr val="accent1"/>
+          </a:effectRef>
+          <a:fontRef idx="minor">
+            <a:schemeClr val="lt1"/>
+          </a:fontRef>
+        </p:style>
+        <p:txBody>
+          <a:bodyPr rtlCol="0" anchor="ctr"/>
+          <a:lstStyle/>
+          <a:p>
+            <a:pPr algn="ctr"/>
+          </a:p>
+        </p:txBody>
+      </p:sp>
+      <p:sp>
+        <p:nvSpPr>
+          <p:cNvPr id="5" name="TextBox 4"/>
+          <p:cNvSpPr txBox="1"/>
+          <p:nvPr/>
+        </p:nvSpPr>
+        <p:spPr>
+          <a:xfrm>
+            <a:off x="502920" y="1581912"/>
+            <a:ext cx="11155680" cy="1005840"/>
+          </a:xfrm>
+          <a:prstGeom prst="rect">
+            <a:avLst/>
+          </a:prstGeom>
+          <a:noFill/>
+        </p:spPr>
+        <p:txBody>
+          <a:bodyPr wrap="square">
+            <a:spAutoFit/>
+          </a:bodyPr>
+          <a:lstStyle/>
+          <a:p>
+            <a:pPr algn="l"/>
+            <a:r>
+              <a:rPr sz="1200" b="0">
+                <a:solidFill>
+                  <a:srgbClr val="212121"/>
+                </a:solidFill>
+              </a:rPr>
+              <a:t>[1]  C.O. Mawalim, S. Okada, M. Unoki,
+     "Are Recent Deep Learning-Based Speech Enhancement Methods Ready to Confront
+     Real-World Noisy Environments?"
+     Interspeech 2024, pp. 1735–1739, DOI: 10.21437/Interspeech.2024-129</a:t>
+            </a:r>
+          </a:p>
+        </p:txBody>
+      </p:sp>
+      <p:sp>
+        <p:nvSpPr>
+          <p:cNvPr id="6" name="Rectangle 5"/>
+          <p:cNvSpPr/>
+          <p:nvPr/>
+        </p:nvSpPr>
+        <p:spPr>
+          <a:xfrm>
+            <a:off x="365760" y="2743200"/>
+            <a:ext cx="11430000" cy="1143000"/>
+          </a:xfrm>
+          <a:prstGeom prst="rect">
+            <a:avLst/>
+          </a:prstGeom>
+          <a:solidFill>
+            <a:srgbClr val="F5F5F5"/>
+          </a:solidFill>
+          <a:ln>
+            <a:noFill/>
+          </a:ln>
+        </p:spPr>
+        <p:style>
+          <a:lnRef idx="1">
+            <a:schemeClr val="accent1"/>
+          </a:lnRef>
+          <a:fillRef idx="3">
+            <a:schemeClr val="accent1"/>
+          </a:fillRef>
+          <a:effectRef idx="2">
+            <a:schemeClr val="accent1"/>
+          </a:effectRef>
+          <a:fontRef idx="minor">
+            <a:schemeClr val="lt1"/>
+          </a:fontRef>
+        </p:style>
+        <p:txBody>
+          <a:bodyPr rtlCol="0" anchor="ctr"/>
+          <a:lstStyle/>
+          <a:p>
+            <a:pPr algn="ctr"/>
+          </a:p>
+        </p:txBody>
+      </p:sp>
+      <p:sp>
+        <p:nvSpPr>
+          <p:cNvPr id="7" name="TextBox 6"/>
+          <p:cNvSpPr txBox="1"/>
+          <p:nvPr/>
+        </p:nvSpPr>
+        <p:spPr>
+          <a:xfrm>
+            <a:off x="502920" y="2816352"/>
+            <a:ext cx="11155680" cy="1005840"/>
+          </a:xfrm>
+          <a:prstGeom prst="rect">
+            <a:avLst/>
+          </a:prstGeom>
+          <a:noFill/>
+        </p:spPr>
+        <p:txBody>
+          <a:bodyPr wrap="square">
+            <a:spAutoFit/>
+          </a:bodyPr>
+          <a:lstStyle/>
+          <a:p>
+            <a:pPr algn="l"/>
+            <a:r>
+              <a:rPr sz="1200" b="0">
+                <a:solidFill>
+                  <a:srgbClr val="212121"/>
+                </a:solidFill>
+              </a:rPr>
+              <a:t>[2]  T. Ochiai, K. Iwamoto, M. Delcroix et al.,
+     "Rethinking Processing Distortions: How Do They Affect the Downstream ASR Performance?"
+     IEEE/ACM Transactions on Audio, Speech, and Language Processing, TASLP 2024,
+     arXiv:2404.14860</a:t>
+            </a:r>
+          </a:p>
+        </p:txBody>
+      </p:sp>
+      <p:sp>
+        <p:nvSpPr>
+          <p:cNvPr id="8" name="Rectangle 7"/>
+          <p:cNvSpPr/>
+          <p:nvPr/>
+        </p:nvSpPr>
+        <p:spPr>
+          <a:xfrm>
+            <a:off x="365760" y="3977640"/>
+            <a:ext cx="11430000" cy="1143000"/>
+          </a:xfrm>
+          <a:prstGeom prst="rect">
+            <a:avLst/>
+          </a:prstGeom>
+          <a:solidFill>
+            <a:srgbClr val="F5F5F5"/>
+          </a:solidFill>
+          <a:ln>
+            <a:noFill/>
+          </a:ln>
+        </p:spPr>
+        <p:style>
+          <a:lnRef idx="1">
+            <a:schemeClr val="accent1"/>
+          </a:lnRef>
+          <a:fillRef idx="3">
+            <a:schemeClr val="accent1"/>
+          </a:fillRef>
+          <a:effectRef idx="2">
+            <a:schemeClr val="accent1"/>
+          </a:effectRef>
+          <a:fontRef idx="minor">
+            <a:schemeClr val="lt1"/>
+          </a:fontRef>
+        </p:style>
+        <p:txBody>
+          <a:bodyPr rtlCol="0" anchor="ctr"/>
+          <a:lstStyle/>
+          <a:p>
+            <a:pPr algn="ctr"/>
+          </a:p>
+        </p:txBody>
+      </p:sp>
+      <p:sp>
+        <p:nvSpPr>
+          <p:cNvPr id="9" name="TextBox 8"/>
+          <p:cNvSpPr txBox="1"/>
+          <p:nvPr/>
+        </p:nvSpPr>
+        <p:spPr>
+          <a:xfrm>
+            <a:off x="502920" y="4050792"/>
+            <a:ext cx="11155680" cy="1005840"/>
+          </a:xfrm>
+          <a:prstGeom prst="rect">
+            <a:avLst/>
+          </a:prstGeom>
+          <a:noFill/>
+        </p:spPr>
+        <p:txBody>
+          <a:bodyPr wrap="square">
+            <a:spAutoFit/>
+          </a:bodyPr>
+          <a:lstStyle/>
+          <a:p>
+            <a:pPr algn="l"/>
+            <a:r>
+              <a:rPr sz="1200" b="0">
+                <a:solidFill>
+                  <a:srgbClr val="212121"/>
+                </a:solidFill>
+              </a:rPr>
+              <a:t>[3]  X. Rong, C. Li, J. Xiao,
+     "GTCRN: A Speech Enhancement Model Requiring Ultra-Tiny Resources"
+     arXiv:2404.11567, 2024</a:t>
+            </a:r>
+          </a:p>
+        </p:txBody>
+      </p:sp>
+      <p:sp>
+        <p:nvSpPr>
+          <p:cNvPr id="10" name="Rectangle 9"/>
+          <p:cNvSpPr/>
+          <p:nvPr/>
+        </p:nvSpPr>
+        <p:spPr>
+          <a:xfrm>
+            <a:off x="365760" y="5212080"/>
+            <a:ext cx="11430000" cy="1143000"/>
+          </a:xfrm>
+          <a:prstGeom prst="rect">
+            <a:avLst/>
+          </a:prstGeom>
+          <a:solidFill>
+            <a:srgbClr val="F5F5F5"/>
+          </a:solidFill>
+          <a:ln>
+            <a:noFill/>
+          </a:ln>
+        </p:spPr>
+        <p:style>
+          <a:lnRef idx="1">
+            <a:schemeClr val="accent1"/>
+          </a:lnRef>
+          <a:fillRef idx="3">
+            <a:schemeClr val="accent1"/>
+          </a:fillRef>
+          <a:effectRef idx="2">
+            <a:schemeClr val="accent1"/>
+          </a:effectRef>
+          <a:fontRef idx="minor">
+            <a:schemeClr val="lt1"/>
+          </a:fontRef>
+        </p:style>
+        <p:txBody>
+          <a:bodyPr rtlCol="0" anchor="ctr"/>
+          <a:lstStyle/>
+          <a:p>
+            <a:pPr algn="ctr"/>
+          </a:p>
+        </p:txBody>
+      </p:sp>
+      <p:sp>
+        <p:nvSpPr>
+          <p:cNvPr id="11" name="TextBox 10"/>
+          <p:cNvSpPr txBox="1"/>
+          <p:nvPr/>
+        </p:nvSpPr>
+        <p:spPr>
+          <a:xfrm>
+            <a:off x="502920" y="5285232"/>
+            <a:ext cx="11155680" cy="1005840"/>
+          </a:xfrm>
+          <a:prstGeom prst="rect">
+            <a:avLst/>
+          </a:prstGeom>
+          <a:noFill/>
+        </p:spPr>
+        <p:txBody>
+          <a:bodyPr wrap="square">
+            <a:spAutoFit/>
+          </a:bodyPr>
+          <a:lstStyle/>
+          <a:p>
+            <a:pPr algn="l"/>
+            <a:r>
+              <a:rPr sz="1200" b="0">
+                <a:solidFill>
+                  <a:srgbClr val="212121"/>
+                </a:solidFill>
+              </a:rPr>
+              <a:t>[4]  Y. Kim et al.,
+     "TAPS: Throat and Acoustic Pairing Speech Dataset"
+     HuggingFace: yskim3271/Throat_and_Acoustic_Pairing_Speech_Dataset</a:t>
+            </a:r>
+          </a:p>
+        </p:txBody>
+      </p:sp>
+      <p:sp>
+        <p:nvSpPr>
+          <p:cNvPr id="12" name="Rectangle 11"/>
+          <p:cNvSpPr/>
+          <p:nvPr/>
+        </p:nvSpPr>
+        <p:spPr>
+          <a:xfrm>
+            <a:off x="0" y="6537960"/>
+            <a:ext cx="12188952" cy="320040"/>
+          </a:xfrm>
+          <a:prstGeom prst="rect">
+            <a:avLst/>
+          </a:prstGeom>
+          <a:solidFill>
+            <a:srgbClr val="E8EAF6"/>
+          </a:solidFill>
+          <a:ln>
+            <a:noFill/>
+          </a:ln>
+        </p:spPr>
+        <p:style>
+          <a:lnRef idx="1">
+            <a:schemeClr val="accent1"/>
+          </a:lnRef>
+          <a:fillRef idx="3">
+            <a:schemeClr val="accent1"/>
+          </a:fillRef>
+          <a:effectRef idx="2">
+            <a:schemeClr val="accent1"/>
+          </a:effectRef>
+          <a:fontRef idx="minor">
+            <a:schemeClr val="lt1"/>
+          </a:fontRef>
+        </p:style>
+        <p:txBody>
+          <a:bodyPr rtlCol="0" anchor="ctr"/>
+          <a:lstStyle/>
+          <a:p>
+            <a:pPr algn="ctr"/>
+          </a:p>
+        </p:txBody>
+      </p:sp>
+      <p:sp>
+        <p:nvSpPr>
+          <p:cNvPr id="13" name="TextBox 12"/>
+          <p:cNvSpPr txBox="1"/>
+          <p:nvPr/>
+        </p:nvSpPr>
+        <p:spPr>
+          <a:xfrm>
+            <a:off x="11091672" y="6565392"/>
+            <a:ext cx="1005840" cy="274320"/>
+          </a:xfrm>
+          <a:prstGeom prst="rect">
+            <a:avLst/>
+          </a:prstGeom>
+          <a:noFill/>
+        </p:spPr>
+        <p:txBody>
+          <a:bodyPr wrap="square">
+            <a:spAutoFit/>
+          </a:bodyPr>
+          <a:lstStyle/>
+          <a:p>
+            <a:pPr algn="r"/>
+            <a:r>
+              <a:rPr sz="1000" b="0">
+                <a:solidFill>
+                  <a:srgbClr val="1A237E"/>
+                </a:solidFill>
+              </a:rPr>
+              <a:t>27 / 28</a:t>
+            </a:r>
+          </a:p>
+        </p:txBody>
+      </p:sp>
+    </p:spTree>
+  </p:cSld>
+  <p:clrMapOvr>
+    <a:masterClrMapping/>
+  </p:clrMapOvr>
+</p:sld>
+</file>
+
+<file path=ppt/slides/slide28.xml><?xml version="1.0" encoding="utf-8"?>
+<p:sld xmlns:a="http://schemas.openxmlformats.org/drawingml/2006/main" xmlns:p="http://schemas.openxmlformats.org/presentationml/2006/main" xmlns:r="http://schemas.openxmlformats.org/officeDocument/2006/relationships">
+  <p:cSld>
+    <p:spTree>
+      <p:nvGrpSpPr>
+        <p:cNvPr id="1" name=""/>
+        <p:cNvGrpSpPr/>
+        <p:nvPr/>
+      </p:nvGrpSpPr>
+      <p:grpSpPr/>
+      <p:sp>
+        <p:nvSpPr>
+          <p:cNvPr id="2" name="Rectangle 1"/>
+          <p:cNvSpPr/>
+          <p:nvPr/>
+        </p:nvSpPr>
+        <p:spPr>
+          <a:xfrm>
+            <a:off x="0" y="0"/>
+            <a:ext cx="12188952" cy="6858000"/>
+          </a:xfrm>
+          <a:prstGeom prst="rect">
+            <a:avLst/>
+          </a:prstGeom>
+          <a:solidFill>
+            <a:srgbClr val="1A237E"/>
+          </a:solidFill>
+          <a:ln>
+            <a:noFill/>
+          </a:ln>
+        </p:spPr>
+        <p:style>
+          <a:lnRef idx="1">
+            <a:schemeClr val="accent1"/>
+          </a:lnRef>
+          <a:fillRef idx="3">
+            <a:schemeClr val="accent1"/>
+          </a:fillRef>
+          <a:effectRef idx="2">
+            <a:schemeClr val="accent1"/>
+          </a:effectRef>
+          <a:fontRef idx="minor">
+            <a:schemeClr val="lt1"/>
+          </a:fontRef>
+        </p:style>
+        <p:txBody>
+          <a:bodyPr rtlCol="0" anchor="ctr"/>
+          <a:lstStyle/>
+          <a:p>
+            <a:pPr algn="ctr"/>
+          </a:p>
+        </p:txBody>
+      </p:sp>
+      <p:sp>
+        <p:nvSpPr>
           <p:cNvPr id="3" name="Rectangle 2"/>
           <p:cNvSpPr/>
           <p:nvPr/>
@@ -17677,7 +18833,7 @@
                   <a:srgbClr val="1A237E"/>
                 </a:solidFill>
               </a:rPr>
-              <a:t>27 / 25</a:t>
+              <a:t>28 / 28</a:t>
             </a:r>
           </a:p>
         </p:txBody>
@@ -18531,7 +19687,7 @@
                   <a:srgbClr val="1A237E"/>
                 </a:solidFill>
               </a:rPr>
-              <a:t>3 / 25</a:t>
+              <a:t>3 / 28</a:t>
             </a:r>
           </a:p>
         </p:txBody>
@@ -19721,7 +20877,7 @@
                   <a:srgbClr val="1A237E"/>
                 </a:solidFill>
               </a:rPr>
-              <a:t>4 / 25</a:t>
+              <a:t>4 / 28</a:t>
             </a:r>
           </a:p>
         </p:txBody>
@@ -20273,7 +21429,7 @@
                   <a:srgbClr val="1A237E"/>
                 </a:solidFill>
               </a:rPr>
-              <a:t>5 / 25</a:t>
+              <a:t>5 / 28</a:t>
             </a:r>
           </a:p>
         </p:txBody>
@@ -21006,7 +22162,7 @@
                   <a:srgbClr val="1A237E"/>
                 </a:solidFill>
               </a:rPr>
-              <a:t>6 / 25</a:t>
+              <a:t>6 / 28</a:t>
             </a:r>
           </a:p>
         </p:txBody>
@@ -21701,7 +22857,7 @@
                   <a:srgbClr val="1A237E"/>
                 </a:solidFill>
               </a:rPr>
-              <a:t>7 / 25</a:t>
+              <a:t>7 / 28</a:t>
             </a:r>
           </a:p>
         </p:txBody>
@@ -22696,7 +23852,7 @@
                   <a:srgbClr val="1A237E"/>
                 </a:solidFill>
               </a:rPr>
-              <a:t>8 / 25</a:t>
+              <a:t>8 / 28</a:t>
             </a:r>
           </a:p>
         </p:txBody>
@@ -23554,7 +24710,7 @@
                   <a:srgbClr val="1A237E"/>
                 </a:solidFill>
               </a:rPr>
-              <a:t>9 / 25</a:t>
+              <a:t>9 / 28</a:t>
             </a:r>
           </a:p>
         </p:txBody>

--- a/results/slides.pptx
+++ b/results/slides.pptx
@@ -15101,7 +15101,7 @@
                   <a:srgbClr val="C62828"/>
                 </a:solidFill>
               </a:rPr>
-              <a:t>CER  0.269</a:t>
+              <a:t>CER  0.544</a:t>
             </a:r>
           </a:p>
         </p:txBody>
@@ -15135,7 +15135,7 @@
                   <a:srgbClr val="78909C"/>
                 </a:solidFill>
               </a:rPr>
-              <a:t>（フェーズ1 ベースライン）</a:t>
+              <a:t>（10話者・1,000発話 平均）</a:t>
             </a:r>
           </a:p>
         </p:txBody>
@@ -15280,7 +15280,7 @@
                   <a:srgbClr val="43A047"/>
                 </a:solidFill>
               </a:rPr>
-              <a:t>CER  0.095</a:t>
+              <a:t>CER  0.150</a:t>
             </a:r>
           </a:p>
         </p:txBody>
@@ -15314,7 +15314,7 @@
                   <a:srgbClr val="43A047"/>
                 </a:solidFill>
               </a:rPr>
-              <a:t>64.6% 改善</a:t>
+              <a:t>72.4% 改善</a:t>
             </a:r>
           </a:p>
         </p:txBody>
@@ -16059,7 +16059,7 @@
                   <a:srgbClr val="212121"/>
                 </a:solidFill>
               </a:rPr>
-              <a:t>0.269  [A]</a:t>
+              <a:t>0.544  [A]</a:t>
             </a:r>
           </a:p>
         </p:txBody>
@@ -16136,7 +16136,7 @@
                   <a:srgbClr val="212121"/>
                 </a:solidFill>
               </a:rPr>
-              <a:t>0.296  [B]  (+0.027)</a:t>
+              <a:t>0.635  [B]  (+0.091)</a:t>
             </a:r>
           </a:p>
         </p:txBody>
@@ -16290,7 +16290,7 @@
                   <a:srgbClr val="212121"/>
                 </a:solidFill>
               </a:rPr>
-              <a:t>0.095  [C]</a:t>
+              <a:t>0.150  [C]</a:t>
             </a:r>
           </a:p>
         </p:txBody>
@@ -16367,7 +16367,7 @@
                   <a:srgbClr val="212121"/>
                 </a:solidFill>
               </a:rPr>
-              <a:t>0.1015 [D]  (+0.007)</a:t>
+              <a:t>0.186  [D]  (+0.036)</a:t>
             </a:r>
           </a:p>
         </p:txBody>
@@ -16435,7 +16435,7 @@
                   <a:srgbClr val="43A047"/>
                 </a:solidFill>
               </a:rPr>
-              <a:t>+0.027 → +0.007 に縮小</a:t>
+              <a:t>+0.091 → +0.036 に縮小</a:t>
             </a:r>
           </a:p>
         </p:txBody>
@@ -17162,7 +17162,7 @@
                   <a:srgbClr val="212121"/>
                 </a:solidFill>
               </a:rPr>
-              <a:t>Whisper smallのFTによりCERが0.269→0.095（64.6%改善）—「ASR側の適応」が音声処理より有効</a:t>
+              <a:t>Whisper FTによりCERが0.544→0.150（72.4%改善，10話者）—全話者で一貫した改善を確認</a:t>
             </a:r>
           </a:p>
         </p:txBody>
@@ -17273,7 +17273,7 @@
                   <a:srgbClr val="212121"/>
                 </a:solidFill>
               </a:rPr>
-              <a:t>FT後もSEの逆効果は残存するが悪化幅は縮小（+0.027→+0.007）—FTがSEアーティファクトへの感受性を低減</a:t>
+              <a:t>FT後もSEの逆効果は残存するが悪化幅は縮小（+0.091→+0.036）—FTがSEアーティファクト感受性を低減</a:t>
             </a:r>
           </a:p>
         </p:txBody>

--- a/results/slides.pptx
+++ b/results/slides.pptx
@@ -33,6 +33,7 @@
     <p:sldId id="281" r:id="rId32"/>
     <p:sldId id="282" r:id="rId33"/>
     <p:sldId id="283" r:id="rId34"/>
+    <p:sldId id="284" r:id="rId35"/>
   </p:sldIdLst>
   <p:sldSz cx="12188952" cy="6858000" type="screen4x3"/>
   <p:notesSz cx="6858000" cy="9144000"/>
@@ -3377,7 +3378,7 @@
                   <a:srgbClr val="1A237E"/>
                 </a:solidFill>
               </a:rPr>
-              <a:t>1 / 28</a:t>
+              <a:t>1 / 29</a:t>
             </a:r>
           </a:p>
         </p:txBody>
@@ -4553,7 +4554,7 @@
                   <a:srgbClr val="1A237E"/>
                 </a:solidFill>
               </a:rPr>
-              <a:t>10 / 28</a:t>
+              <a:t>10 / 29</a:t>
             </a:r>
           </a:p>
         </p:txBody>
@@ -5441,7 +5442,7 @@
                   <a:srgbClr val="1A237E"/>
                 </a:solidFill>
               </a:rPr>
-              <a:t>11 / 28</a:t>
+              <a:t>11 / 29</a:t>
             </a:r>
           </a:p>
         </p:txBody>
@@ -6349,7 +6350,7 @@
                   <a:srgbClr val="1A237E"/>
                 </a:solidFill>
               </a:rPr>
-              <a:t>12 / 28</a:t>
+              <a:t>12 / 29</a:t>
             </a:r>
           </a:p>
         </p:txBody>
@@ -7159,7 +7160,7 @@
                   <a:srgbClr val="1A237E"/>
                 </a:solidFill>
               </a:rPr>
-              <a:t>13 / 28</a:t>
+              <a:t>13 / 29</a:t>
             </a:r>
           </a:p>
         </p:txBody>
@@ -7535,7 +7536,7 @@
                   <a:srgbClr val="1A237E"/>
                 </a:solidFill>
               </a:rPr>
-              <a:t>14 / 28</a:t>
+              <a:t>14 / 29</a:t>
             </a:r>
           </a:p>
         </p:txBody>
@@ -9691,7 +9692,7 @@
                   <a:srgbClr val="1A237E"/>
                 </a:solidFill>
               </a:rPr>
-              <a:t>15 / 28</a:t>
+              <a:t>15 / 29</a:t>
             </a:r>
           </a:p>
         </p:txBody>
@@ -10309,7 +10310,7 @@
                   <a:srgbClr val="1A237E"/>
                 </a:solidFill>
               </a:rPr>
-              <a:t>16 / 28</a:t>
+              <a:t>16 / 29</a:t>
             </a:r>
           </a:p>
         </p:txBody>
@@ -10832,7 +10833,7 @@
                   <a:srgbClr val="1A237E"/>
                 </a:solidFill>
               </a:rPr>
-              <a:t>17 / 28</a:t>
+              <a:t>17 / 29</a:t>
             </a:r>
           </a:p>
         </p:txBody>
@@ -11604,7 +11605,7 @@
                   <a:srgbClr val="1A237E"/>
                 </a:solidFill>
               </a:rPr>
-              <a:t>18 / 28</a:t>
+              <a:t>18 / 29</a:t>
             </a:r>
           </a:p>
         </p:txBody>
@@ -12005,7 +12006,7 @@
                   <a:srgbClr val="1A237E"/>
                 </a:solidFill>
               </a:rPr>
-              <a:t>19 / 28</a:t>
+              <a:t>19 / 29</a:t>
             </a:r>
           </a:p>
         </p:txBody>
@@ -13065,7 +13066,7 @@
                   <a:srgbClr val="1A237E"/>
                 </a:solidFill>
               </a:rPr>
-              <a:t>2 / 28</a:t>
+              <a:t>2 / 29</a:t>
             </a:r>
           </a:p>
         </p:txBody>
@@ -13853,7 +13854,7 @@
                   <a:srgbClr val="1A237E"/>
                 </a:solidFill>
               </a:rPr>
-              <a:t>20 / 28</a:t>
+              <a:t>20 / 29</a:t>
             </a:r>
           </a:p>
         </p:txBody>
@@ -14463,7 +14464,7 @@
                   <a:srgbClr val="1A237E"/>
                 </a:solidFill>
               </a:rPr>
-              <a:t>21 / 28</a:t>
+              <a:t>21 / 29</a:t>
             </a:r>
           </a:p>
         </p:txBody>
@@ -14895,7 +14896,7 @@
                   <a:srgbClr val="1A237E"/>
                 </a:solidFill>
               </a:rPr>
-              <a:t>22 / 28</a:t>
+              <a:t>22 / 29</a:t>
             </a:r>
           </a:p>
         </p:txBody>
@@ -15545,7 +15546,7 @@
                   <a:srgbClr val="1A237E"/>
                 </a:solidFill>
               </a:rPr>
-              <a:t>23 / 28</a:t>
+              <a:t>23 / 29</a:t>
             </a:r>
           </a:p>
         </p:txBody>
@@ -16589,7 +16590,7 @@
                   <a:srgbClr val="1A237E"/>
                 </a:solidFill>
               </a:rPr>
-              <a:t>24 / 28</a:t>
+              <a:t>24 / 29</a:t>
             </a:r>
           </a:p>
         </p:txBody>
@@ -16684,7 +16685,7 @@
                   <a:srgbClr val="FFFFFF"/>
                 </a:solidFill>
               </a:rPr>
-              <a:t>まとめ</a:t>
+              <a:t>メカニズム分析：スペクトルで見るアーティファクト</a:t>
             </a:r>
           </a:p>
         </p:txBody>
@@ -16697,8 +16698,8 @@
         </p:nvSpPr>
         <p:spPr>
           <a:xfrm>
-            <a:off x="365760" y="1463040"/>
-            <a:ext cx="11430000" cy="502920"/>
+            <a:off x="365760" y="868680"/>
+            <a:ext cx="11430000" cy="365760"/>
           </a:xfrm>
           <a:prstGeom prst="rect">
             <a:avLst/>
@@ -16713,26 +16714,84 @@
           <a:p>
             <a:pPr algn="l"/>
             <a:r>
-              <a:rPr sz="1700" b="0">
-                <a:solidFill>
-                  <a:srgbClr val="212121"/>
-                </a:solidFill>
-              </a:rPr>
-              <a:t>喉マイク音声に対するSEの効果と、ASRモデルのドメイン適応効果を定量評価した。</a:t>
-            </a:r>
-          </a:p>
-        </p:txBody>
-      </p:sp>
-      <p:sp>
-        <p:nvSpPr>
-          <p:cNvPr id="5" name="Rectangle 4"/>
+              <a:rPr sz="1400" b="0">
+                <a:solidFill>
+                  <a:srgbClr val="BBDEFB"/>
+                </a:solidFill>
+              </a:rPr>
+              <a:t>なぜGTCRNが喉マイクASRを悪化させるのか</a:t>
+            </a:r>
+          </a:p>
+        </p:txBody>
+      </p:sp>
+      <p:pic>
+        <p:nvPicPr>
+          <p:cNvPr id="5" name="Picture 4" descr="spectrum_analysis.png"/>
+          <p:cNvPicPr>
+            <a:picLocks noChangeAspect="1"/>
+          </p:cNvPicPr>
+          <p:nvPr/>
+        </p:nvPicPr>
+        <p:blipFill>
+          <a:blip r:embed="rId2"/>
+          <a:stretch>
+            <a:fillRect/>
+          </a:stretch>
+        </p:blipFill>
+        <p:spPr>
+          <a:xfrm>
+            <a:off x="274320" y="1325880"/>
+            <a:ext cx="7315200" cy="6013979"/>
+          </a:xfrm>
+          <a:prstGeom prst="rect">
+            <a:avLst/>
+          </a:prstGeom>
+        </p:spPr>
+      </p:pic>
+      <p:sp>
+        <p:nvSpPr>
+          <p:cNvPr id="6" name="TextBox 5"/>
+          <p:cNvSpPr txBox="1"/>
+          <p:nvPr/>
+        </p:nvSpPr>
+        <p:spPr>
+          <a:xfrm>
+            <a:off x="7863840" y="1371600"/>
+            <a:ext cx="4114800" cy="365760"/>
+          </a:xfrm>
+          <a:prstGeom prst="rect">
+            <a:avLst/>
+          </a:prstGeom>
+          <a:noFill/>
+        </p:spPr>
+        <p:txBody>
+          <a:bodyPr wrap="square">
+            <a:spAutoFit/>
+          </a:bodyPr>
+          <a:lstStyle/>
+          <a:p>
+            <a:pPr algn="l"/>
+            <a:r>
+              <a:rPr sz="1300" b="1">
+                <a:solidFill>
+                  <a:srgbClr val="1A237E"/>
+                </a:solidFill>
+              </a:rPr>
+              <a:t>帯域別エネルギー変化（GTCRN適用後）</a:t>
+            </a:r>
+          </a:p>
+        </p:txBody>
+      </p:sp>
+      <p:sp>
+        <p:nvSpPr>
+          <p:cNvPr id="7" name="Rectangle 6"/>
           <p:cNvSpPr/>
           <p:nvPr/>
         </p:nvSpPr>
         <p:spPr>
           <a:xfrm>
-            <a:off x="365760" y="1508760"/>
-            <a:ext cx="11430000" cy="621792"/>
+            <a:off x="7863840" y="1828800"/>
+            <a:ext cx="4114800" cy="731520"/>
           </a:xfrm>
           <a:prstGeom prst="rect">
             <a:avLst/>
@@ -16768,14 +16827,14 @@
       </p:sp>
       <p:sp>
         <p:nvSpPr>
-          <p:cNvPr id="6" name="TextBox 5"/>
-          <p:cNvSpPr txBox="1"/>
-          <p:nvPr/>
-        </p:nvSpPr>
-        <p:spPr>
-          <a:xfrm>
-            <a:off x="502920" y="1600200"/>
-            <a:ext cx="731520" cy="411480"/>
+          <p:cNvPr id="8" name="TextBox 7"/>
+          <p:cNvSpPr txBox="1"/>
+          <p:nvPr/>
+        </p:nvSpPr>
+        <p:spPr>
+          <a:xfrm>
+            <a:off x="7955279" y="1865376"/>
+            <a:ext cx="1280160" cy="320040"/>
           </a:xfrm>
           <a:prstGeom prst="rect">
             <a:avLst/>
@@ -16790,26 +16849,60 @@
           <a:p>
             <a:pPr algn="l"/>
             <a:r>
-              <a:rPr sz="1400" b="1">
+              <a:rPr sz="1200" b="1">
+                <a:solidFill>
+                  <a:srgbClr val="212121"/>
+                </a:solidFill>
+              </a:rPr>
+              <a:t>0–0.5 kHz</a:t>
+            </a:r>
+          </a:p>
+        </p:txBody>
+      </p:sp>
+      <p:sp>
+        <p:nvSpPr>
+          <p:cNvPr id="9" name="TextBox 8"/>
+          <p:cNvSpPr txBox="1"/>
+          <p:nvPr/>
+        </p:nvSpPr>
+        <p:spPr>
+          <a:xfrm>
+            <a:off x="9235440" y="1865376"/>
+            <a:ext cx="1371600" cy="320040"/>
+          </a:xfrm>
+          <a:prstGeom prst="rect">
+            <a:avLst/>
+          </a:prstGeom>
+          <a:noFill/>
+        </p:spPr>
+        <p:txBody>
+          <a:bodyPr wrap="square">
+            <a:spAutoFit/>
+          </a:bodyPr>
+          <a:lstStyle/>
+          <a:p>
+            <a:pPr algn="l"/>
+            <a:r>
+              <a:rPr sz="1300" b="1">
                 <a:solidFill>
                   <a:srgbClr val="C62828"/>
                 </a:solidFill>
               </a:rPr>
-              <a:t>（1）</a:t>
-            </a:r>
-          </a:p>
-        </p:txBody>
-      </p:sp>
-      <p:sp>
-        <p:nvSpPr>
-          <p:cNvPr id="7" name="TextBox 6"/>
-          <p:cNvSpPr txBox="1"/>
-          <p:nvPr/>
-        </p:nvSpPr>
-        <p:spPr>
-          <a:xfrm>
-            <a:off x="1143000" y="1600200"/>
-            <a:ext cx="10424160" cy="411480"/>
+              <a:t>+1.58 dB</a:t>
+            </a:r>
+          </a:p>
+        </p:txBody>
+      </p:sp>
+      <p:sp>
+        <p:nvSpPr>
+          <p:cNvPr id="10" name="TextBox 9"/>
+          <p:cNvSpPr txBox="1"/>
+          <p:nvPr/>
+        </p:nvSpPr>
+        <p:spPr>
+          <a:xfrm>
+            <a:off x="7955279" y="2212848"/>
+            <a:ext cx="3840480" cy="274320"/>
           </a:xfrm>
           <a:prstGeom prst="rect">
             <a:avLst/>
@@ -16824,26 +16917,26 @@
           <a:p>
             <a:pPr algn="l"/>
             <a:r>
-              <a:rPr sz="1400" b="0">
-                <a:solidFill>
-                  <a:srgbClr val="212121"/>
-                </a:solidFill>
-              </a:rPr>
-              <a:t>DSP-onlyおよびGTCRNは全ノイズ条件でCERを有意に悪化させる（30検定中26件 p&lt;0.05）</a:t>
-            </a:r>
-          </a:p>
-        </p:txBody>
-      </p:sp>
-      <p:sp>
-        <p:nvSpPr>
-          <p:cNvPr id="8" name="Rectangle 7"/>
+              <a:rPr sz="1100" b="0">
+                <a:solidFill>
+                  <a:srgbClr val="78909C"/>
+                </a:solidFill>
+              </a:rPr>
+              <a:t>低域にアーティファクト追加</a:t>
+            </a:r>
+          </a:p>
+        </p:txBody>
+      </p:sp>
+      <p:sp>
+        <p:nvSpPr>
+          <p:cNvPr id="11" name="Rectangle 10"/>
           <p:cNvSpPr/>
           <p:nvPr/>
         </p:nvSpPr>
         <p:spPr>
           <a:xfrm>
-            <a:off x="365760" y="2212848"/>
-            <a:ext cx="11430000" cy="621792"/>
+            <a:off x="7863840" y="2651760"/>
+            <a:ext cx="4114800" cy="731520"/>
           </a:xfrm>
           <a:prstGeom prst="rect">
             <a:avLst/>
@@ -16879,14 +16972,14 @@
       </p:sp>
       <p:sp>
         <p:nvSpPr>
-          <p:cNvPr id="9" name="TextBox 8"/>
-          <p:cNvSpPr txBox="1"/>
-          <p:nvPr/>
-        </p:nvSpPr>
-        <p:spPr>
-          <a:xfrm>
-            <a:off x="502920" y="2304288"/>
-            <a:ext cx="731520" cy="411480"/>
+          <p:cNvPr id="12" name="TextBox 11"/>
+          <p:cNvSpPr txBox="1"/>
+          <p:nvPr/>
+        </p:nvSpPr>
+        <p:spPr>
+          <a:xfrm>
+            <a:off x="7955279" y="2688336"/>
+            <a:ext cx="1280160" cy="320040"/>
           </a:xfrm>
           <a:prstGeom prst="rect">
             <a:avLst/>
@@ -16901,26 +16994,60 @@
           <a:p>
             <a:pPr algn="l"/>
             <a:r>
-              <a:rPr sz="1400" b="1">
+              <a:rPr sz="1200" b="1">
+                <a:solidFill>
+                  <a:srgbClr val="212121"/>
+                </a:solidFill>
+              </a:rPr>
+              <a:t>0.5–2.0 kHz</a:t>
+            </a:r>
+          </a:p>
+        </p:txBody>
+      </p:sp>
+      <p:sp>
+        <p:nvSpPr>
+          <p:cNvPr id="13" name="TextBox 12"/>
+          <p:cNvSpPr txBox="1"/>
+          <p:nvPr/>
+        </p:nvSpPr>
+        <p:spPr>
+          <a:xfrm>
+            <a:off x="9235440" y="2688336"/>
+            <a:ext cx="1371600" cy="320040"/>
+          </a:xfrm>
+          <a:prstGeom prst="rect">
+            <a:avLst/>
+          </a:prstGeom>
+          <a:noFill/>
+        </p:spPr>
+        <p:txBody>
+          <a:bodyPr wrap="square">
+            <a:spAutoFit/>
+          </a:bodyPr>
+          <a:lstStyle/>
+          <a:p>
+            <a:pPr algn="l"/>
+            <a:r>
+              <a:rPr sz="1300" b="1">
                 <a:solidFill>
                   <a:srgbClr val="FF9800"/>
                 </a:solidFill>
               </a:rPr>
-              <a:t>（2）</a:t>
-            </a:r>
-          </a:p>
-        </p:txBody>
-      </p:sp>
-      <p:sp>
-        <p:nvSpPr>
-          <p:cNvPr id="10" name="TextBox 9"/>
-          <p:cNvSpPr txBox="1"/>
-          <p:nvPr/>
-        </p:nvSpPr>
-        <p:spPr>
-          <a:xfrm>
-            <a:off x="1143000" y="2304288"/>
-            <a:ext cx="10424160" cy="411480"/>
+              <a:t>−0.43〜−1.05 dB</a:t>
+            </a:r>
+          </a:p>
+        </p:txBody>
+      </p:sp>
+      <p:sp>
+        <p:nvSpPr>
+          <p:cNvPr id="14" name="TextBox 13"/>
+          <p:cNvSpPr txBox="1"/>
+          <p:nvPr/>
+        </p:nvSpPr>
+        <p:spPr>
+          <a:xfrm>
+            <a:off x="7955279" y="3035808"/>
+            <a:ext cx="3840480" cy="274320"/>
           </a:xfrm>
           <a:prstGeom prst="rect">
             <a:avLst/>
@@ -16935,26 +17062,26 @@
           <a:p>
             <a:pPr algn="l"/>
             <a:r>
-              <a:rPr sz="1400" b="0">
-                <a:solidFill>
-                  <a:srgbClr val="212121"/>
-                </a:solidFill>
-              </a:rPr>
-              <a:t>GTCRNはSTOI・PESQを改善しながらCERを悪化させる三重パラドックスが全ノイズ条件で観測された</a:t>
-            </a:r>
-          </a:p>
-        </p:txBody>
-      </p:sp>
-      <p:sp>
-        <p:nvSpPr>
-          <p:cNvPr id="11" name="Rectangle 10"/>
+              <a:rPr sz="1100" b="0">
+                <a:solidFill>
+                  <a:srgbClr val="78909C"/>
+                </a:solidFill>
+              </a:rPr>
+              <a:t>中域を削除</a:t>
+            </a:r>
+          </a:p>
+        </p:txBody>
+      </p:sp>
+      <p:sp>
+        <p:nvSpPr>
+          <p:cNvPr id="15" name="Rectangle 14"/>
           <p:cNvSpPr/>
           <p:nvPr/>
         </p:nvSpPr>
         <p:spPr>
           <a:xfrm>
-            <a:off x="365760" y="2916936"/>
-            <a:ext cx="11430000" cy="621792"/>
+            <a:off x="7863840" y="3474720"/>
+            <a:ext cx="4114800" cy="731520"/>
           </a:xfrm>
           <a:prstGeom prst="rect">
             <a:avLst/>
@@ -16990,14 +17117,14 @@
       </p:sp>
       <p:sp>
         <p:nvSpPr>
-          <p:cNvPr id="12" name="TextBox 11"/>
-          <p:cNvSpPr txBox="1"/>
-          <p:nvPr/>
-        </p:nvSpPr>
-        <p:spPr>
-          <a:xfrm>
-            <a:off x="502920" y="3008376"/>
-            <a:ext cx="731520" cy="411480"/>
+          <p:cNvPr id="16" name="TextBox 15"/>
+          <p:cNvSpPr txBox="1"/>
+          <p:nvPr/>
+        </p:nvSpPr>
+        <p:spPr>
+          <a:xfrm>
+            <a:off x="7955279" y="3511296"/>
+            <a:ext cx="1280160" cy="320040"/>
           </a:xfrm>
           <a:prstGeom prst="rect">
             <a:avLst/>
@@ -17012,26 +17139,60 @@
           <a:p>
             <a:pPr algn="l"/>
             <a:r>
-              <a:rPr sz="1400" b="1">
+              <a:rPr sz="1200" b="1">
+                <a:solidFill>
+                  <a:srgbClr val="212121"/>
+                </a:solidFill>
+              </a:rPr>
+              <a:t>2.0–4.0 kHz</a:t>
+            </a:r>
+          </a:p>
+        </p:txBody>
+      </p:sp>
+      <p:sp>
+        <p:nvSpPr>
+          <p:cNvPr id="17" name="TextBox 16"/>
+          <p:cNvSpPr txBox="1"/>
+          <p:nvPr/>
+        </p:nvSpPr>
+        <p:spPr>
+          <a:xfrm>
+            <a:off x="9235440" y="3511296"/>
+            <a:ext cx="1371600" cy="320040"/>
+          </a:xfrm>
+          <a:prstGeom prst="rect">
+            <a:avLst/>
+          </a:prstGeom>
+          <a:noFill/>
+        </p:spPr>
+        <p:txBody>
+          <a:bodyPr wrap="square">
+            <a:spAutoFit/>
+          </a:bodyPr>
+          <a:lstStyle/>
+          <a:p>
+            <a:pPr algn="l"/>
+            <a:r>
+              <a:rPr sz="1300" b="1">
                 <a:solidFill>
                   <a:srgbClr val="FF9800"/>
                 </a:solidFill>
               </a:rPr>
-              <a:t>（3）</a:t>
-            </a:r>
-          </a:p>
-        </p:txBody>
-      </p:sp>
-      <p:sp>
-        <p:nvSpPr>
-          <p:cNvPr id="13" name="TextBox 12"/>
-          <p:cNvSpPr txBox="1"/>
-          <p:nvPr/>
-        </p:nvSpPr>
-        <p:spPr>
-          <a:xfrm>
-            <a:off x="1143000" y="3008376"/>
-            <a:ext cx="10424160" cy="411480"/>
+              <a:t>−2.23 dB</a:t>
+            </a:r>
+          </a:p>
+        </p:txBody>
+      </p:sp>
+      <p:sp>
+        <p:nvSpPr>
+          <p:cNvPr id="18" name="TextBox 17"/>
+          <p:cNvSpPr txBox="1"/>
+          <p:nvPr/>
+        </p:nvSpPr>
+        <p:spPr>
+          <a:xfrm>
+            <a:off x="7955279" y="3858768"/>
+            <a:ext cx="3840480" cy="274320"/>
           </a:xfrm>
           <a:prstGeom prst="rect">
             <a:avLst/>
@@ -17046,26 +17207,26 @@
           <a:p>
             <a:pPr algn="l"/>
             <a:r>
-              <a:rPr sz="1400" b="0">
-                <a:solidFill>
-                  <a:srgbClr val="212121"/>
-                </a:solidFill>
-              </a:rPr>
-              <a:t>DSP-onlyは3指標すべてを悪化させ、喉マイクには不適切な前処理である</a:t>
-            </a:r>
-          </a:p>
-        </p:txBody>
-      </p:sp>
-      <p:sp>
-        <p:nvSpPr>
-          <p:cNvPr id="14" name="Rectangle 13"/>
+              <a:rPr sz="1100" b="0">
+                <a:solidFill>
+                  <a:srgbClr val="78909C"/>
+                </a:solidFill>
+              </a:rPr>
+              <a:t>フォルマント主要帯域を抑制</a:t>
+            </a:r>
+          </a:p>
+        </p:txBody>
+      </p:sp>
+      <p:sp>
+        <p:nvSpPr>
+          <p:cNvPr id="19" name="Rectangle 18"/>
           <p:cNvSpPr/>
           <p:nvPr/>
         </p:nvSpPr>
         <p:spPr>
           <a:xfrm>
-            <a:off x="365760" y="3621024"/>
-            <a:ext cx="11430000" cy="621792"/>
+            <a:off x="7863840" y="4297680"/>
+            <a:ext cx="4114800" cy="731520"/>
           </a:xfrm>
           <a:prstGeom prst="rect">
             <a:avLst/>
@@ -17101,14 +17262,14 @@
       </p:sp>
       <p:sp>
         <p:nvSpPr>
-          <p:cNvPr id="15" name="TextBox 14"/>
-          <p:cNvSpPr txBox="1"/>
-          <p:nvPr/>
-        </p:nvSpPr>
-        <p:spPr>
-          <a:xfrm>
-            <a:off x="502920" y="3712464"/>
-            <a:ext cx="731520" cy="411480"/>
+          <p:cNvPr id="20" name="TextBox 19"/>
+          <p:cNvSpPr txBox="1"/>
+          <p:nvPr/>
+        </p:nvSpPr>
+        <p:spPr>
+          <a:xfrm>
+            <a:off x="7955279" y="4334256"/>
+            <a:ext cx="1280160" cy="320040"/>
           </a:xfrm>
           <a:prstGeom prst="rect">
             <a:avLst/>
@@ -17123,26 +17284,26 @@
           <a:p>
             <a:pPr algn="l"/>
             <a:r>
-              <a:rPr sz="1400" b="1">
-                <a:solidFill>
-                  <a:srgbClr val="43A047"/>
-                </a:solidFill>
-              </a:rPr>
-              <a:t>（4）</a:t>
-            </a:r>
-          </a:p>
-        </p:txBody>
-      </p:sp>
-      <p:sp>
-        <p:nvSpPr>
-          <p:cNvPr id="16" name="TextBox 15"/>
-          <p:cNvSpPr txBox="1"/>
-          <p:nvPr/>
-        </p:nvSpPr>
-        <p:spPr>
-          <a:xfrm>
-            <a:off x="1143000" y="3712464"/>
-            <a:ext cx="10424160" cy="411480"/>
+              <a:rPr sz="1200" b="1">
+                <a:solidFill>
+                  <a:srgbClr val="212121"/>
+                </a:solidFill>
+              </a:rPr>
+              <a:t>4.0–8.0 kHz</a:t>
+            </a:r>
+          </a:p>
+        </p:txBody>
+      </p:sp>
+      <p:sp>
+        <p:nvSpPr>
+          <p:cNvPr id="21" name="TextBox 20"/>
+          <p:cNvSpPr txBox="1"/>
+          <p:nvPr/>
+        </p:nvSpPr>
+        <p:spPr>
+          <a:xfrm>
+            <a:off x="9235440" y="4334256"/>
+            <a:ext cx="1371600" cy="320040"/>
           </a:xfrm>
           <a:prstGeom prst="rect">
             <a:avLst/>
@@ -17157,32 +17318,66 @@
           <a:p>
             <a:pPr algn="l"/>
             <a:r>
-              <a:rPr sz="1400" b="0">
-                <a:solidFill>
-                  <a:srgbClr val="212121"/>
-                </a:solidFill>
-              </a:rPr>
-              <a:t>Whisper FTによりCERが0.544→0.150（72.4%改善，10話者）—全話者で一貫した改善を確認</a:t>
-            </a:r>
-          </a:p>
-        </p:txBody>
-      </p:sp>
-      <p:sp>
-        <p:nvSpPr>
-          <p:cNvPr id="17" name="Rectangle 16"/>
+              <a:rPr sz="1300" b="1">
+                <a:solidFill>
+                  <a:srgbClr val="C62828"/>
+                </a:solidFill>
+              </a:rPr>
+              <a:t>−12.73 dB</a:t>
+            </a:r>
+          </a:p>
+        </p:txBody>
+      </p:sp>
+      <p:sp>
+        <p:nvSpPr>
+          <p:cNvPr id="22" name="TextBox 21"/>
+          <p:cNvSpPr txBox="1"/>
+          <p:nvPr/>
+        </p:nvSpPr>
+        <p:spPr>
+          <a:xfrm>
+            <a:off x="7955279" y="4681728"/>
+            <a:ext cx="3840480" cy="274320"/>
+          </a:xfrm>
+          <a:prstGeom prst="rect">
+            <a:avLst/>
+          </a:prstGeom>
+          <a:noFill/>
+        </p:spPr>
+        <p:txBody>
+          <a:bodyPr wrap="square">
+            <a:spAutoFit/>
+          </a:bodyPr>
+          <a:lstStyle/>
+          <a:p>
+            <a:pPr algn="l"/>
+            <a:r>
+              <a:rPr sz="1100" b="0">
+                <a:solidFill>
+                  <a:srgbClr val="78909C"/>
+                </a:solidFill>
+              </a:rPr>
+              <a:t>高域を壊滅的に削除</a:t>
+            </a:r>
+          </a:p>
+        </p:txBody>
+      </p:sp>
+      <p:sp>
+        <p:nvSpPr>
+          <p:cNvPr id="23" name="Rectangle 22"/>
           <p:cNvSpPr/>
           <p:nvPr/>
         </p:nvSpPr>
         <p:spPr>
           <a:xfrm>
-            <a:off x="365760" y="4325112"/>
-            <a:ext cx="11430000" cy="621792"/>
+            <a:off x="7818120" y="5349240"/>
+            <a:ext cx="4206240" cy="1143000"/>
           </a:xfrm>
           <a:prstGeom prst="rect">
             <a:avLst/>
           </a:prstGeom>
           <a:solidFill>
-            <a:srgbClr val="F5F5F5"/>
+            <a:srgbClr val="FFEBEE"/>
           </a:solidFill>
           <a:ln>
             <a:noFill/>
@@ -17212,14 +17407,14 @@
       </p:sp>
       <p:sp>
         <p:nvSpPr>
-          <p:cNvPr id="18" name="TextBox 17"/>
-          <p:cNvSpPr txBox="1"/>
-          <p:nvPr/>
-        </p:nvSpPr>
-        <p:spPr>
-          <a:xfrm>
-            <a:off x="502920" y="4416552"/>
-            <a:ext cx="731520" cy="411480"/>
+          <p:cNvPr id="24" name="TextBox 23"/>
+          <p:cNvSpPr txBox="1"/>
+          <p:nvPr/>
+        </p:nvSpPr>
+        <p:spPr>
+          <a:xfrm>
+            <a:off x="7955279" y="5394960"/>
+            <a:ext cx="3931920" cy="1005840"/>
           </a:xfrm>
           <a:prstGeom prst="rect">
             <a:avLst/>
@@ -17234,53 +17429,21 @@
           <a:p>
             <a:pPr algn="l"/>
             <a:r>
-              <a:rPr sz="1400" b="1">
-                <a:solidFill>
-                  <a:srgbClr val="43A047"/>
-                </a:solidFill>
-              </a:rPr>
-              <a:t>（5）</a:t>
-            </a:r>
-          </a:p>
-        </p:txBody>
-      </p:sp>
-      <p:sp>
-        <p:nvSpPr>
-          <p:cNvPr id="19" name="TextBox 18"/>
-          <p:cNvSpPr txBox="1"/>
-          <p:nvPr/>
-        </p:nvSpPr>
-        <p:spPr>
-          <a:xfrm>
-            <a:off x="1143000" y="4416552"/>
-            <a:ext cx="10424160" cy="411480"/>
-          </a:xfrm>
-          <a:prstGeom prst="rect">
-            <a:avLst/>
-          </a:prstGeom>
-          <a:noFill/>
-        </p:spPr>
-        <p:txBody>
-          <a:bodyPr wrap="square">
-            <a:spAutoFit/>
-          </a:bodyPr>
-          <a:lstStyle/>
-          <a:p>
-            <a:pPr algn="l"/>
-            <a:r>
-              <a:rPr sz="1400" b="0">
-                <a:solidFill>
-                  <a:srgbClr val="212121"/>
-                </a:solidFill>
-              </a:rPr>
-              <a:t>FT後もSEの逆効果は残存するが悪化幅は縮小（+0.091→+0.036）—FTがSEアーティファクト感受性を低減</a:t>
-            </a:r>
-          </a:p>
-        </p:txBody>
-      </p:sp>
-      <p:sp>
-        <p:nvSpPr>
-          <p:cNvPr id="20" name="Rectangle 19"/>
+              <a:rPr sz="1300" b="0">
+                <a:solidFill>
+                  <a:srgbClr val="1A237E"/>
+                </a:solidFill>
+              </a:rPr>
+              <a:t>喉マイクは既に高域が欠落
+→ GTCRNがさらに除去（逆方向の動作）
+→ フォルマント情報を損失→ CER悪化</a:t>
+            </a:r>
+          </a:p>
+        </p:txBody>
+      </p:sp>
+      <p:sp>
+        <p:nvSpPr>
+          <p:cNvPr id="25" name="Rectangle 24"/>
           <p:cNvSpPr/>
           <p:nvPr/>
         </p:nvSpPr>
@@ -17323,7 +17486,7 @@
       </p:sp>
       <p:sp>
         <p:nvSpPr>
-          <p:cNvPr id="21" name="TextBox 20"/>
+          <p:cNvPr id="26" name="TextBox 25"/>
           <p:cNvSpPr txBox="1"/>
           <p:nvPr/>
         </p:nvSpPr>
@@ -17350,7 +17513,7 @@
                   <a:srgbClr val="1A237E"/>
                 </a:solidFill>
               </a:rPr>
-              <a:t>25 / 28</a:t>
+              <a:t>25 / 29</a:t>
             </a:r>
           </a:p>
         </p:txBody>
@@ -17445,27 +17608,61 @@
                   <a:srgbClr val="FFFFFF"/>
                 </a:solidFill>
               </a:rPr>
-              <a:t>今後の展望</a:t>
-            </a:r>
-          </a:p>
-        </p:txBody>
-      </p:sp>
-      <p:sp>
-        <p:nvSpPr>
-          <p:cNvPr id="4" name="Rectangle 3"/>
+              <a:t>まとめ</a:t>
+            </a:r>
+          </a:p>
+        </p:txBody>
+      </p:sp>
+      <p:sp>
+        <p:nvSpPr>
+          <p:cNvPr id="4" name="TextBox 3"/>
+          <p:cNvSpPr txBox="1"/>
+          <p:nvPr/>
+        </p:nvSpPr>
+        <p:spPr>
+          <a:xfrm>
+            <a:off x="365760" y="1463040"/>
+            <a:ext cx="11430000" cy="502920"/>
+          </a:xfrm>
+          <a:prstGeom prst="rect">
+            <a:avLst/>
+          </a:prstGeom>
+          <a:noFill/>
+        </p:spPr>
+        <p:txBody>
+          <a:bodyPr wrap="square">
+            <a:spAutoFit/>
+          </a:bodyPr>
+          <a:lstStyle/>
+          <a:p>
+            <a:pPr algn="l"/>
+            <a:r>
+              <a:rPr sz="1700" b="0">
+                <a:solidFill>
+                  <a:srgbClr val="212121"/>
+                </a:solidFill>
+              </a:rPr>
+              <a:t>喉マイク音声に対するSEの効果と、ASRモデルのドメイン適応効果を定量評価した。</a:t>
+            </a:r>
+          </a:p>
+        </p:txBody>
+      </p:sp>
+      <p:sp>
+        <p:nvSpPr>
+          <p:cNvPr id="5" name="Rectangle 4"/>
           <p:cNvSpPr/>
           <p:nvPr/>
         </p:nvSpPr>
         <p:spPr>
           <a:xfrm>
-            <a:off x="365760" y="1463040"/>
-            <a:ext cx="11430000" cy="1463040"/>
+            <a:off x="365760" y="1508760"/>
+            <a:ext cx="11430000" cy="621792"/>
           </a:xfrm>
           <a:prstGeom prst="rect">
             <a:avLst/>
           </a:prstGeom>
           <a:solidFill>
-            <a:srgbClr val="FFEBEE"/>
+            <a:srgbClr val="F5F5F5"/>
           </a:solidFill>
           <a:ln>
             <a:noFill/>
@@ -17495,14 +17692,14 @@
       </p:sp>
       <p:sp>
         <p:nvSpPr>
-          <p:cNvPr id="5" name="TextBox 4"/>
-          <p:cNvSpPr txBox="1"/>
-          <p:nvPr/>
-        </p:nvSpPr>
-        <p:spPr>
-          <a:xfrm>
-            <a:off x="502920" y="1508760"/>
-            <a:ext cx="2560320" cy="320040"/>
+          <p:cNvPr id="6" name="TextBox 5"/>
+          <p:cNvSpPr txBox="1"/>
+          <p:nvPr/>
+        </p:nvSpPr>
+        <p:spPr>
+          <a:xfrm>
+            <a:off x="502920" y="1600200"/>
+            <a:ext cx="731520" cy="411480"/>
           </a:xfrm>
           <a:prstGeom prst="rect">
             <a:avLst/>
@@ -17517,26 +17714,26 @@
           <a:p>
             <a:pPr algn="l"/>
             <a:r>
-              <a:rPr sz="1100" b="1">
-                <a:solidFill>
-                  <a:srgbClr val="78909C"/>
-                </a:solidFill>
-              </a:rPr>
-              <a:t>優先度：高</a:t>
-            </a:r>
-          </a:p>
-        </p:txBody>
-      </p:sp>
-      <p:sp>
-        <p:nvSpPr>
-          <p:cNvPr id="6" name="TextBox 5"/>
-          <p:cNvSpPr txBox="1"/>
-          <p:nvPr/>
-        </p:nvSpPr>
-        <p:spPr>
-          <a:xfrm>
-            <a:off x="502920" y="1810512"/>
-            <a:ext cx="11064240" cy="384048"/>
+              <a:rPr sz="1400" b="1">
+                <a:solidFill>
+                  <a:srgbClr val="C62828"/>
+                </a:solidFill>
+              </a:rPr>
+              <a:t>（1）</a:t>
+            </a:r>
+          </a:p>
+        </p:txBody>
+      </p:sp>
+      <p:sp>
+        <p:nvSpPr>
+          <p:cNvPr id="7" name="TextBox 6"/>
+          <p:cNvSpPr txBox="1"/>
+          <p:nvPr/>
+        </p:nvSpPr>
+        <p:spPr>
+          <a:xfrm>
+            <a:off x="1143000" y="1600200"/>
+            <a:ext cx="10424160" cy="411480"/>
           </a:xfrm>
           <a:prstGeom prst="rect">
             <a:avLst/>
@@ -17551,100 +17748,32 @@
           <a:p>
             <a:pPr algn="l"/>
             <a:r>
-              <a:rPr sz="1600" b="1">
-                <a:solidFill>
-                  <a:srgbClr val="1A237E"/>
-                </a:solidFill>
-              </a:rPr>
-              <a:t>Whisper large-v3 でのFTと比較</a:t>
-            </a:r>
-          </a:p>
-        </p:txBody>
-      </p:sp>
-      <p:sp>
-        <p:nvSpPr>
-          <p:cNvPr id="7" name="TextBox 6"/>
-          <p:cNvSpPr txBox="1"/>
-          <p:nvPr/>
-        </p:nvSpPr>
-        <p:spPr>
-          <a:xfrm>
-            <a:off x="640080" y="2267712"/>
-            <a:ext cx="10972800" cy="292608"/>
-          </a:xfrm>
-          <a:prstGeom prst="rect">
-            <a:avLst/>
-          </a:prstGeom>
-          <a:noFill/>
-        </p:spPr>
-        <p:txBody>
-          <a:bodyPr wrap="square">
-            <a:spAutoFit/>
-          </a:bodyPr>
-          <a:lstStyle/>
-          <a:p>
-            <a:pPr algn="l"/>
-            <a:r>
-              <a:rPr sz="1300" b="0">
+              <a:rPr sz="1400" b="0">
                 <a:solidFill>
                   <a:srgbClr val="212121"/>
                 </a:solidFill>
               </a:rPr>
-              <a:t>・ smallとlargeでFT効果の差を比較</a:t>
-            </a:r>
-          </a:p>
-        </p:txBody>
-      </p:sp>
-      <p:sp>
-        <p:nvSpPr>
-          <p:cNvPr id="8" name="TextBox 7"/>
-          <p:cNvSpPr txBox="1"/>
-          <p:nvPr/>
-        </p:nvSpPr>
-        <p:spPr>
-          <a:xfrm>
-            <a:off x="640080" y="2587752"/>
-            <a:ext cx="10972800" cy="292608"/>
-          </a:xfrm>
-          <a:prstGeom prst="rect">
-            <a:avLst/>
-          </a:prstGeom>
-          <a:noFill/>
-        </p:spPr>
-        <p:txBody>
-          <a:bodyPr wrap="square">
-            <a:spAutoFit/>
-          </a:bodyPr>
-          <a:lstStyle/>
-          <a:p>
-            <a:pPr algn="l"/>
-            <a:r>
-              <a:rPr sz="1300" b="0">
-                <a:solidFill>
-                  <a:srgbClr val="212121"/>
-                </a:solidFill>
-              </a:rPr>
-              <a:t>・ モデルサイズとドメイン適応効果の関係を明らかにする</a:t>
-            </a:r>
-          </a:p>
-        </p:txBody>
-      </p:sp>
-      <p:sp>
-        <p:nvSpPr>
-          <p:cNvPr id="9" name="Rectangle 8"/>
+              <a:t>DSP-onlyおよびGTCRNは全ノイズ条件でCERを有意に悪化させる（30検定中26件 p&lt;0.05）</a:t>
+            </a:r>
+          </a:p>
+        </p:txBody>
+      </p:sp>
+      <p:sp>
+        <p:nvSpPr>
+          <p:cNvPr id="8" name="Rectangle 7"/>
           <p:cNvSpPr/>
           <p:nvPr/>
         </p:nvSpPr>
         <p:spPr>
           <a:xfrm>
-            <a:off x="365760" y="3063240"/>
-            <a:ext cx="11430000" cy="1463040"/>
+            <a:off x="365760" y="2212848"/>
+            <a:ext cx="11430000" cy="621792"/>
           </a:xfrm>
           <a:prstGeom prst="rect">
             <a:avLst/>
           </a:prstGeom>
           <a:solidFill>
-            <a:srgbClr val="FFF8E1"/>
+            <a:srgbClr val="F5F5F5"/>
           </a:solidFill>
           <a:ln>
             <a:noFill/>
@@ -17674,14 +17803,48 @@
       </p:sp>
       <p:sp>
         <p:nvSpPr>
+          <p:cNvPr id="9" name="TextBox 8"/>
+          <p:cNvSpPr txBox="1"/>
+          <p:nvPr/>
+        </p:nvSpPr>
+        <p:spPr>
+          <a:xfrm>
+            <a:off x="502920" y="2304288"/>
+            <a:ext cx="731520" cy="411480"/>
+          </a:xfrm>
+          <a:prstGeom prst="rect">
+            <a:avLst/>
+          </a:prstGeom>
+          <a:noFill/>
+        </p:spPr>
+        <p:txBody>
+          <a:bodyPr wrap="square">
+            <a:spAutoFit/>
+          </a:bodyPr>
+          <a:lstStyle/>
+          <a:p>
+            <a:pPr algn="l"/>
+            <a:r>
+              <a:rPr sz="1400" b="1">
+                <a:solidFill>
+                  <a:srgbClr val="FF9800"/>
+                </a:solidFill>
+              </a:rPr>
+              <a:t>（2）</a:t>
+            </a:r>
+          </a:p>
+        </p:txBody>
+      </p:sp>
+      <p:sp>
+        <p:nvSpPr>
           <p:cNvPr id="10" name="TextBox 9"/>
           <p:cNvSpPr txBox="1"/>
           <p:nvPr/>
         </p:nvSpPr>
         <p:spPr>
           <a:xfrm>
-            <a:off x="502920" y="3108960"/>
-            <a:ext cx="2560320" cy="320040"/>
+            <a:off x="1143000" y="2304288"/>
+            <a:ext cx="10424160" cy="411480"/>
           </a:xfrm>
           <a:prstGeom prst="rect">
             <a:avLst/>
@@ -17696,134 +17859,32 @@
           <a:p>
             <a:pPr algn="l"/>
             <a:r>
-              <a:rPr sz="1100" b="1">
-                <a:solidFill>
-                  <a:srgbClr val="78909C"/>
-                </a:solidFill>
-              </a:rPr>
-              <a:t>優先度：中</a:t>
-            </a:r>
-          </a:p>
-        </p:txBody>
-      </p:sp>
-      <p:sp>
-        <p:nvSpPr>
-          <p:cNvPr id="11" name="TextBox 10"/>
-          <p:cNvSpPr txBox="1"/>
-          <p:nvPr/>
-        </p:nvSpPr>
-        <p:spPr>
-          <a:xfrm>
-            <a:off x="502920" y="3410712"/>
-            <a:ext cx="11064240" cy="384048"/>
-          </a:xfrm>
-          <a:prstGeom prst="rect">
-            <a:avLst/>
-          </a:prstGeom>
-          <a:noFill/>
-        </p:spPr>
-        <p:txBody>
-          <a:bodyPr wrap="square">
-            <a:spAutoFit/>
-          </a:bodyPr>
-          <a:lstStyle/>
-          <a:p>
-            <a:pPr algn="l"/>
-            <a:r>
-              <a:rPr sz="1600" b="1">
-                <a:solidFill>
-                  <a:srgbClr val="1A237E"/>
-                </a:solidFill>
-              </a:rPr>
-              <a:t>ノイズ条件下でのWhisper FT評価</a:t>
-            </a:r>
-          </a:p>
-        </p:txBody>
-      </p:sp>
-      <p:sp>
-        <p:nvSpPr>
-          <p:cNvPr id="12" name="TextBox 11"/>
-          <p:cNvSpPr txBox="1"/>
-          <p:nvPr/>
-        </p:nvSpPr>
-        <p:spPr>
-          <a:xfrm>
-            <a:off x="640080" y="3867912"/>
-            <a:ext cx="10972800" cy="292608"/>
-          </a:xfrm>
-          <a:prstGeom prst="rect">
-            <a:avLst/>
-          </a:prstGeom>
-          <a:noFill/>
-        </p:spPr>
-        <p:txBody>
-          <a:bodyPr wrap="square">
-            <a:spAutoFit/>
-          </a:bodyPr>
-          <a:lstStyle/>
-          <a:p>
-            <a:pPr algn="l"/>
-            <a:r>
-              <a:rPr sz="1300" b="0">
+              <a:rPr sz="1400" b="0">
                 <a:solidFill>
                   <a:srgbClr val="212121"/>
                 </a:solidFill>
               </a:rPr>
-              <a:t>・ 現在のFT評価はクリーン音声のみ</a:t>
-            </a:r>
-          </a:p>
-        </p:txBody>
-      </p:sp>
-      <p:sp>
-        <p:nvSpPr>
-          <p:cNvPr id="13" name="TextBox 12"/>
-          <p:cNvSpPr txBox="1"/>
-          <p:nvPr/>
-        </p:nvSpPr>
-        <p:spPr>
-          <a:xfrm>
-            <a:off x="640080" y="4187952"/>
-            <a:ext cx="10972800" cy="292608"/>
-          </a:xfrm>
-          <a:prstGeom prst="rect">
-            <a:avLst/>
-          </a:prstGeom>
-          <a:noFill/>
-        </p:spPr>
-        <p:txBody>
-          <a:bodyPr wrap="square">
-            <a:spAutoFit/>
-          </a:bodyPr>
-          <a:lstStyle/>
-          <a:p>
-            <a:pPr algn="l"/>
-            <a:r>
-              <a:rPr sz="1300" b="0">
-                <a:solidFill>
-                  <a:srgbClr val="212121"/>
-                </a:solidFill>
-              </a:rPr>
-              <a:t>・ フェーズ1と同じSNR条件（白色・ピンクノイズ）でのCER比較</a:t>
-            </a:r>
-          </a:p>
-        </p:txBody>
-      </p:sp>
-      <p:sp>
-        <p:nvSpPr>
-          <p:cNvPr id="14" name="Rectangle 13"/>
+              <a:t>GTCRNはSTOI・PESQを改善しながらCERを悪化させる三重パラドックスが全ノイズ条件で観測された</a:t>
+            </a:r>
+          </a:p>
+        </p:txBody>
+      </p:sp>
+      <p:sp>
+        <p:nvSpPr>
+          <p:cNvPr id="11" name="Rectangle 10"/>
           <p:cNvSpPr/>
           <p:nvPr/>
         </p:nvSpPr>
         <p:spPr>
           <a:xfrm>
-            <a:off x="365760" y="4663440"/>
-            <a:ext cx="11430000" cy="1463040"/>
+            <a:off x="365760" y="2916936"/>
+            <a:ext cx="11430000" cy="621792"/>
           </a:xfrm>
           <a:prstGeom prst="rect">
             <a:avLst/>
           </a:prstGeom>
           <a:solidFill>
-            <a:srgbClr val="E8F5E9"/>
+            <a:srgbClr val="F5F5F5"/>
           </a:solidFill>
           <a:ln>
             <a:noFill/>
@@ -17853,14 +17914,125 @@
       </p:sp>
       <p:sp>
         <p:nvSpPr>
+          <p:cNvPr id="12" name="TextBox 11"/>
+          <p:cNvSpPr txBox="1"/>
+          <p:nvPr/>
+        </p:nvSpPr>
+        <p:spPr>
+          <a:xfrm>
+            <a:off x="502920" y="3008376"/>
+            <a:ext cx="731520" cy="411480"/>
+          </a:xfrm>
+          <a:prstGeom prst="rect">
+            <a:avLst/>
+          </a:prstGeom>
+          <a:noFill/>
+        </p:spPr>
+        <p:txBody>
+          <a:bodyPr wrap="square">
+            <a:spAutoFit/>
+          </a:bodyPr>
+          <a:lstStyle/>
+          <a:p>
+            <a:pPr algn="l"/>
+            <a:r>
+              <a:rPr sz="1400" b="1">
+                <a:solidFill>
+                  <a:srgbClr val="FF9800"/>
+                </a:solidFill>
+              </a:rPr>
+              <a:t>（3）</a:t>
+            </a:r>
+          </a:p>
+        </p:txBody>
+      </p:sp>
+      <p:sp>
+        <p:nvSpPr>
+          <p:cNvPr id="13" name="TextBox 12"/>
+          <p:cNvSpPr txBox="1"/>
+          <p:nvPr/>
+        </p:nvSpPr>
+        <p:spPr>
+          <a:xfrm>
+            <a:off x="1143000" y="3008376"/>
+            <a:ext cx="10424160" cy="411480"/>
+          </a:xfrm>
+          <a:prstGeom prst="rect">
+            <a:avLst/>
+          </a:prstGeom>
+          <a:noFill/>
+        </p:spPr>
+        <p:txBody>
+          <a:bodyPr wrap="square">
+            <a:spAutoFit/>
+          </a:bodyPr>
+          <a:lstStyle/>
+          <a:p>
+            <a:pPr algn="l"/>
+            <a:r>
+              <a:rPr sz="1400" b="0">
+                <a:solidFill>
+                  <a:srgbClr val="212121"/>
+                </a:solidFill>
+              </a:rPr>
+              <a:t>DSP-onlyは3指標すべてを悪化させ、喉マイクには不適切な前処理である</a:t>
+            </a:r>
+          </a:p>
+        </p:txBody>
+      </p:sp>
+      <p:sp>
+        <p:nvSpPr>
+          <p:cNvPr id="14" name="Rectangle 13"/>
+          <p:cNvSpPr/>
+          <p:nvPr/>
+        </p:nvSpPr>
+        <p:spPr>
+          <a:xfrm>
+            <a:off x="365760" y="3621024"/>
+            <a:ext cx="11430000" cy="621792"/>
+          </a:xfrm>
+          <a:prstGeom prst="rect">
+            <a:avLst/>
+          </a:prstGeom>
+          <a:solidFill>
+            <a:srgbClr val="F5F5F5"/>
+          </a:solidFill>
+          <a:ln>
+            <a:noFill/>
+          </a:ln>
+        </p:spPr>
+        <p:style>
+          <a:lnRef idx="1">
+            <a:schemeClr val="accent1"/>
+          </a:lnRef>
+          <a:fillRef idx="3">
+            <a:schemeClr val="accent1"/>
+          </a:fillRef>
+          <a:effectRef idx="2">
+            <a:schemeClr val="accent1"/>
+          </a:effectRef>
+          <a:fontRef idx="minor">
+            <a:schemeClr val="lt1"/>
+          </a:fontRef>
+        </p:style>
+        <p:txBody>
+          <a:bodyPr rtlCol="0" anchor="ctr"/>
+          <a:lstStyle/>
+          <a:p>
+            <a:pPr algn="ctr"/>
+          </a:p>
+        </p:txBody>
+      </p:sp>
+      <p:sp>
+        <p:nvSpPr>
           <p:cNvPr id="15" name="TextBox 14"/>
           <p:cNvSpPr txBox="1"/>
           <p:nvPr/>
         </p:nvSpPr>
         <p:spPr>
           <a:xfrm>
-            <a:off x="502920" y="4709160"/>
-            <a:ext cx="2560320" cy="320040"/>
+            <a:off x="502920" y="3712464"/>
+            <a:ext cx="731520" cy="411480"/>
           </a:xfrm>
           <a:prstGeom prst="rect">
             <a:avLst/>
@@ -17875,12 +18047,12 @@
           <a:p>
             <a:pPr algn="l"/>
             <a:r>
-              <a:rPr sz="1100" b="1">
-                <a:solidFill>
-                  <a:srgbClr val="78909C"/>
-                </a:solidFill>
-              </a:rPr>
-              <a:t>優先度：中</a:t>
+              <a:rPr sz="1400" b="1">
+                <a:solidFill>
+                  <a:srgbClr val="43A047"/>
+                </a:solidFill>
+              </a:rPr>
+              <a:t>（4）</a:t>
             </a:r>
           </a:p>
         </p:txBody>
@@ -17893,8 +18065,8 @@
         </p:nvSpPr>
         <p:spPr>
           <a:xfrm>
-            <a:off x="502920" y="5010912"/>
-            <a:ext cx="11064240" cy="384048"/>
+            <a:off x="1143000" y="3712464"/>
+            <a:ext cx="10424160" cy="411480"/>
           </a:xfrm>
           <a:prstGeom prst="rect">
             <a:avLst/>
@@ -17909,26 +18081,69 @@
           <a:p>
             <a:pPr algn="l"/>
             <a:r>
-              <a:rPr sz="1600" b="1">
-                <a:solidFill>
-                  <a:srgbClr val="1A237E"/>
-                </a:solidFill>
-              </a:rPr>
-              <a:t>実環境ノイズでの検証</a:t>
-            </a:r>
-          </a:p>
-        </p:txBody>
-      </p:sp>
-      <p:sp>
-        <p:nvSpPr>
-          <p:cNvPr id="17" name="TextBox 16"/>
-          <p:cNvSpPr txBox="1"/>
-          <p:nvPr/>
-        </p:nvSpPr>
-        <p:spPr>
-          <a:xfrm>
-            <a:off x="640080" y="5468112"/>
-            <a:ext cx="10972800" cy="292608"/>
+              <a:rPr sz="1400" b="0">
+                <a:solidFill>
+                  <a:srgbClr val="212121"/>
+                </a:solidFill>
+              </a:rPr>
+              <a:t>Whisper FTによりCERが0.544→0.150（72.4%改善，10話者）—全話者で一貫した改善を確認</a:t>
+            </a:r>
+          </a:p>
+        </p:txBody>
+      </p:sp>
+      <p:sp>
+        <p:nvSpPr>
+          <p:cNvPr id="17" name="Rectangle 16"/>
+          <p:cNvSpPr/>
+          <p:nvPr/>
+        </p:nvSpPr>
+        <p:spPr>
+          <a:xfrm>
+            <a:off x="365760" y="4325112"/>
+            <a:ext cx="11430000" cy="621792"/>
+          </a:xfrm>
+          <a:prstGeom prst="rect">
+            <a:avLst/>
+          </a:prstGeom>
+          <a:solidFill>
+            <a:srgbClr val="F5F5F5"/>
+          </a:solidFill>
+          <a:ln>
+            <a:noFill/>
+          </a:ln>
+        </p:spPr>
+        <p:style>
+          <a:lnRef idx="1">
+            <a:schemeClr val="accent1"/>
+          </a:lnRef>
+          <a:fillRef idx="3">
+            <a:schemeClr val="accent1"/>
+          </a:fillRef>
+          <a:effectRef idx="2">
+            <a:schemeClr val="accent1"/>
+          </a:effectRef>
+          <a:fontRef idx="minor">
+            <a:schemeClr val="lt1"/>
+          </a:fontRef>
+        </p:style>
+        <p:txBody>
+          <a:bodyPr rtlCol="0" anchor="ctr"/>
+          <a:lstStyle/>
+          <a:p>
+            <a:pPr algn="ctr"/>
+          </a:p>
+        </p:txBody>
+      </p:sp>
+      <p:sp>
+        <p:nvSpPr>
+          <p:cNvPr id="18" name="TextBox 17"/>
+          <p:cNvSpPr txBox="1"/>
+          <p:nvPr/>
+        </p:nvSpPr>
+        <p:spPr>
+          <a:xfrm>
+            <a:off x="502920" y="4416552"/>
+            <a:ext cx="731520" cy="411480"/>
           </a:xfrm>
           <a:prstGeom prst="rect">
             <a:avLst/>
@@ -17943,53 +18158,53 @@
           <a:p>
             <a:pPr algn="l"/>
             <a:r>
-              <a:rPr sz="1300" b="0">
+              <a:rPr sz="1400" b="1">
+                <a:solidFill>
+                  <a:srgbClr val="43A047"/>
+                </a:solidFill>
+              </a:rPr>
+              <a:t>（5）</a:t>
+            </a:r>
+          </a:p>
+        </p:txBody>
+      </p:sp>
+      <p:sp>
+        <p:nvSpPr>
+          <p:cNvPr id="19" name="TextBox 18"/>
+          <p:cNvSpPr txBox="1"/>
+          <p:nvPr/>
+        </p:nvSpPr>
+        <p:spPr>
+          <a:xfrm>
+            <a:off x="1143000" y="4416552"/>
+            <a:ext cx="10424160" cy="411480"/>
+          </a:xfrm>
+          <a:prstGeom prst="rect">
+            <a:avLst/>
+          </a:prstGeom>
+          <a:noFill/>
+        </p:spPr>
+        <p:txBody>
+          <a:bodyPr wrap="square">
+            <a:spAutoFit/>
+          </a:bodyPr>
+          <a:lstStyle/>
+          <a:p>
+            <a:pPr algn="l"/>
+            <a:r>
+              <a:rPr sz="1400" b="0">
                 <a:solidFill>
                   <a:srgbClr val="212121"/>
                 </a:solidFill>
               </a:rPr>
-              <a:t>・ 現在は人工ノイズ（白色・ピンク）のみ</a:t>
-            </a:r>
-          </a:p>
-        </p:txBody>
-      </p:sp>
-      <p:sp>
-        <p:nvSpPr>
-          <p:cNvPr id="18" name="TextBox 17"/>
-          <p:cNvSpPr txBox="1"/>
-          <p:nvPr/>
-        </p:nvSpPr>
-        <p:spPr>
-          <a:xfrm>
-            <a:off x="640080" y="5788152"/>
-            <a:ext cx="10972800" cy="292608"/>
-          </a:xfrm>
-          <a:prstGeom prst="rect">
-            <a:avLst/>
-          </a:prstGeom>
-          <a:noFill/>
-        </p:spPr>
-        <p:txBody>
-          <a:bodyPr wrap="square">
-            <a:spAutoFit/>
-          </a:bodyPr>
-          <a:lstStyle/>
-          <a:p>
-            <a:pPr algn="l"/>
-            <a:r>
-              <a:rPr sz="1300" b="0">
-                <a:solidFill>
-                  <a:srgbClr val="212121"/>
-                </a:solidFill>
-              </a:rPr>
-              <a:t>・ MUSAN・DEMANDなどの実録音ノイズで再現実験</a:t>
-            </a:r>
-          </a:p>
-        </p:txBody>
-      </p:sp>
-      <p:sp>
-        <p:nvSpPr>
-          <p:cNvPr id="19" name="Rectangle 18"/>
+              <a:t>FT後もSEの逆効果は残存するが悪化幅は縮小（+0.091→+0.036）—FTがSEアーティファクト感受性を低減</a:t>
+            </a:r>
+          </a:p>
+        </p:txBody>
+      </p:sp>
+      <p:sp>
+        <p:nvSpPr>
+          <p:cNvPr id="20" name="Rectangle 19"/>
           <p:cNvSpPr/>
           <p:nvPr/>
         </p:nvSpPr>
@@ -18032,7 +18247,7 @@
       </p:sp>
       <p:sp>
         <p:nvSpPr>
-          <p:cNvPr id="20" name="TextBox 19"/>
+          <p:cNvPr id="21" name="TextBox 20"/>
           <p:cNvSpPr txBox="1"/>
           <p:nvPr/>
         </p:nvSpPr>
@@ -18059,7 +18274,7 @@
                   <a:srgbClr val="1A237E"/>
                 </a:solidFill>
               </a:rPr>
-              <a:t>26 / 28</a:t>
+              <a:t>26 / 29</a:t>
             </a:r>
           </a:p>
         </p:txBody>
@@ -18154,7 +18369,7 @@
                   <a:srgbClr val="FFFFFF"/>
                 </a:solidFill>
               </a:rPr>
-              <a:t>参考文献</a:t>
+              <a:t>今後の展望</a:t>
             </a:r>
           </a:p>
         </p:txBody>
@@ -18167,14 +18382,14 @@
         </p:nvSpPr>
         <p:spPr>
           <a:xfrm>
-            <a:off x="365760" y="1508760"/>
-            <a:ext cx="11430000" cy="1143000"/>
+            <a:off x="365760" y="1463040"/>
+            <a:ext cx="11430000" cy="1463040"/>
           </a:xfrm>
           <a:prstGeom prst="rect">
             <a:avLst/>
           </a:prstGeom>
           <a:solidFill>
-            <a:srgbClr val="F5F5F5"/>
+            <a:srgbClr val="FFEBEE"/>
           </a:solidFill>
           <a:ln>
             <a:noFill/>
@@ -18210,8 +18425,8 @@
         </p:nvSpPr>
         <p:spPr>
           <a:xfrm>
-            <a:off x="502920" y="1581912"/>
-            <a:ext cx="11155680" cy="1005840"/>
+            <a:off x="502920" y="1508760"/>
+            <a:ext cx="2560320" cy="320040"/>
           </a:xfrm>
           <a:prstGeom prst="rect">
             <a:avLst/>
@@ -18226,35 +18441,134 @@
           <a:p>
             <a:pPr algn="l"/>
             <a:r>
-              <a:rPr sz="1200" b="0">
+              <a:rPr sz="1100" b="1">
+                <a:solidFill>
+                  <a:srgbClr val="78909C"/>
+                </a:solidFill>
+              </a:rPr>
+              <a:t>優先度：高</a:t>
+            </a:r>
+          </a:p>
+        </p:txBody>
+      </p:sp>
+      <p:sp>
+        <p:nvSpPr>
+          <p:cNvPr id="6" name="TextBox 5"/>
+          <p:cNvSpPr txBox="1"/>
+          <p:nvPr/>
+        </p:nvSpPr>
+        <p:spPr>
+          <a:xfrm>
+            <a:off x="502920" y="1810512"/>
+            <a:ext cx="11064240" cy="384048"/>
+          </a:xfrm>
+          <a:prstGeom prst="rect">
+            <a:avLst/>
+          </a:prstGeom>
+          <a:noFill/>
+        </p:spPr>
+        <p:txBody>
+          <a:bodyPr wrap="square">
+            <a:spAutoFit/>
+          </a:bodyPr>
+          <a:lstStyle/>
+          <a:p>
+            <a:pPr algn="l"/>
+            <a:r>
+              <a:rPr sz="1600" b="1">
+                <a:solidFill>
+                  <a:srgbClr val="1A237E"/>
+                </a:solidFill>
+              </a:rPr>
+              <a:t>Whisper large-v3 でのFTと比較</a:t>
+            </a:r>
+          </a:p>
+        </p:txBody>
+      </p:sp>
+      <p:sp>
+        <p:nvSpPr>
+          <p:cNvPr id="7" name="TextBox 6"/>
+          <p:cNvSpPr txBox="1"/>
+          <p:nvPr/>
+        </p:nvSpPr>
+        <p:spPr>
+          <a:xfrm>
+            <a:off x="640080" y="2267712"/>
+            <a:ext cx="10972800" cy="292608"/>
+          </a:xfrm>
+          <a:prstGeom prst="rect">
+            <a:avLst/>
+          </a:prstGeom>
+          <a:noFill/>
+        </p:spPr>
+        <p:txBody>
+          <a:bodyPr wrap="square">
+            <a:spAutoFit/>
+          </a:bodyPr>
+          <a:lstStyle/>
+          <a:p>
+            <a:pPr algn="l"/>
+            <a:r>
+              <a:rPr sz="1300" b="0">
                 <a:solidFill>
                   <a:srgbClr val="212121"/>
                 </a:solidFill>
               </a:rPr>
-              <a:t>[1]  C.O. Mawalim, S. Okada, M. Unoki,
-     "Are Recent Deep Learning-Based Speech Enhancement Methods Ready to Confront
-     Real-World Noisy Environments?"
-     Interspeech 2024, pp. 1735–1739, DOI: 10.21437/Interspeech.2024-129</a:t>
-            </a:r>
-          </a:p>
-        </p:txBody>
-      </p:sp>
-      <p:sp>
-        <p:nvSpPr>
-          <p:cNvPr id="6" name="Rectangle 5"/>
+              <a:t>・ smallとlargeでFT効果の差を比較</a:t>
+            </a:r>
+          </a:p>
+        </p:txBody>
+      </p:sp>
+      <p:sp>
+        <p:nvSpPr>
+          <p:cNvPr id="8" name="TextBox 7"/>
+          <p:cNvSpPr txBox="1"/>
+          <p:nvPr/>
+        </p:nvSpPr>
+        <p:spPr>
+          <a:xfrm>
+            <a:off x="640080" y="2587752"/>
+            <a:ext cx="10972800" cy="292608"/>
+          </a:xfrm>
+          <a:prstGeom prst="rect">
+            <a:avLst/>
+          </a:prstGeom>
+          <a:noFill/>
+        </p:spPr>
+        <p:txBody>
+          <a:bodyPr wrap="square">
+            <a:spAutoFit/>
+          </a:bodyPr>
+          <a:lstStyle/>
+          <a:p>
+            <a:pPr algn="l"/>
+            <a:r>
+              <a:rPr sz="1300" b="0">
+                <a:solidFill>
+                  <a:srgbClr val="212121"/>
+                </a:solidFill>
+              </a:rPr>
+              <a:t>・ モデルサイズとドメイン適応効果の関係を明らかにする</a:t>
+            </a:r>
+          </a:p>
+        </p:txBody>
+      </p:sp>
+      <p:sp>
+        <p:nvSpPr>
+          <p:cNvPr id="9" name="Rectangle 8"/>
           <p:cNvSpPr/>
           <p:nvPr/>
         </p:nvSpPr>
         <p:spPr>
           <a:xfrm>
-            <a:off x="365760" y="2743200"/>
-            <a:ext cx="11430000" cy="1143000"/>
+            <a:off x="365760" y="3063240"/>
+            <a:ext cx="11430000" cy="1463040"/>
           </a:xfrm>
           <a:prstGeom prst="rect">
             <a:avLst/>
           </a:prstGeom>
           <a:solidFill>
-            <a:srgbClr val="F5F5F5"/>
+            <a:srgbClr val="FFF8E1"/>
           </a:solidFill>
           <a:ln>
             <a:noFill/>
@@ -18284,14 +18598,14 @@
       </p:sp>
       <p:sp>
         <p:nvSpPr>
-          <p:cNvPr id="7" name="TextBox 6"/>
-          <p:cNvSpPr txBox="1"/>
-          <p:nvPr/>
-        </p:nvSpPr>
-        <p:spPr>
-          <a:xfrm>
-            <a:off x="502920" y="2816352"/>
-            <a:ext cx="11155680" cy="1005840"/>
+          <p:cNvPr id="10" name="TextBox 9"/>
+          <p:cNvSpPr txBox="1"/>
+          <p:nvPr/>
+        </p:nvSpPr>
+        <p:spPr>
+          <a:xfrm>
+            <a:off x="502920" y="3108960"/>
+            <a:ext cx="2560320" cy="320040"/>
           </a:xfrm>
           <a:prstGeom prst="rect">
             <a:avLst/>
@@ -18306,35 +18620,134 @@
           <a:p>
             <a:pPr algn="l"/>
             <a:r>
-              <a:rPr sz="1200" b="0">
+              <a:rPr sz="1100" b="1">
+                <a:solidFill>
+                  <a:srgbClr val="78909C"/>
+                </a:solidFill>
+              </a:rPr>
+              <a:t>優先度：中</a:t>
+            </a:r>
+          </a:p>
+        </p:txBody>
+      </p:sp>
+      <p:sp>
+        <p:nvSpPr>
+          <p:cNvPr id="11" name="TextBox 10"/>
+          <p:cNvSpPr txBox="1"/>
+          <p:nvPr/>
+        </p:nvSpPr>
+        <p:spPr>
+          <a:xfrm>
+            <a:off x="502920" y="3410712"/>
+            <a:ext cx="11064240" cy="384048"/>
+          </a:xfrm>
+          <a:prstGeom prst="rect">
+            <a:avLst/>
+          </a:prstGeom>
+          <a:noFill/>
+        </p:spPr>
+        <p:txBody>
+          <a:bodyPr wrap="square">
+            <a:spAutoFit/>
+          </a:bodyPr>
+          <a:lstStyle/>
+          <a:p>
+            <a:pPr algn="l"/>
+            <a:r>
+              <a:rPr sz="1600" b="1">
+                <a:solidFill>
+                  <a:srgbClr val="1A237E"/>
+                </a:solidFill>
+              </a:rPr>
+              <a:t>ノイズ条件下でのWhisper FT評価</a:t>
+            </a:r>
+          </a:p>
+        </p:txBody>
+      </p:sp>
+      <p:sp>
+        <p:nvSpPr>
+          <p:cNvPr id="12" name="TextBox 11"/>
+          <p:cNvSpPr txBox="1"/>
+          <p:nvPr/>
+        </p:nvSpPr>
+        <p:spPr>
+          <a:xfrm>
+            <a:off x="640080" y="3867912"/>
+            <a:ext cx="10972800" cy="292608"/>
+          </a:xfrm>
+          <a:prstGeom prst="rect">
+            <a:avLst/>
+          </a:prstGeom>
+          <a:noFill/>
+        </p:spPr>
+        <p:txBody>
+          <a:bodyPr wrap="square">
+            <a:spAutoFit/>
+          </a:bodyPr>
+          <a:lstStyle/>
+          <a:p>
+            <a:pPr algn="l"/>
+            <a:r>
+              <a:rPr sz="1300" b="0">
                 <a:solidFill>
                   <a:srgbClr val="212121"/>
                 </a:solidFill>
               </a:rPr>
-              <a:t>[2]  T. Ochiai, K. Iwamoto, M. Delcroix et al.,
-     "Rethinking Processing Distortions: How Do They Affect the Downstream ASR Performance?"
-     IEEE/ACM Transactions on Audio, Speech, and Language Processing, TASLP 2024,
-     arXiv:2404.14860</a:t>
-            </a:r>
-          </a:p>
-        </p:txBody>
-      </p:sp>
-      <p:sp>
-        <p:nvSpPr>
-          <p:cNvPr id="8" name="Rectangle 7"/>
+              <a:t>・ 現在のFT評価はクリーン音声のみ</a:t>
+            </a:r>
+          </a:p>
+        </p:txBody>
+      </p:sp>
+      <p:sp>
+        <p:nvSpPr>
+          <p:cNvPr id="13" name="TextBox 12"/>
+          <p:cNvSpPr txBox="1"/>
+          <p:nvPr/>
+        </p:nvSpPr>
+        <p:spPr>
+          <a:xfrm>
+            <a:off x="640080" y="4187952"/>
+            <a:ext cx="10972800" cy="292608"/>
+          </a:xfrm>
+          <a:prstGeom prst="rect">
+            <a:avLst/>
+          </a:prstGeom>
+          <a:noFill/>
+        </p:spPr>
+        <p:txBody>
+          <a:bodyPr wrap="square">
+            <a:spAutoFit/>
+          </a:bodyPr>
+          <a:lstStyle/>
+          <a:p>
+            <a:pPr algn="l"/>
+            <a:r>
+              <a:rPr sz="1300" b="0">
+                <a:solidFill>
+                  <a:srgbClr val="212121"/>
+                </a:solidFill>
+              </a:rPr>
+              <a:t>・ フェーズ1と同じSNR条件（白色・ピンクノイズ）でのCER比較</a:t>
+            </a:r>
+          </a:p>
+        </p:txBody>
+      </p:sp>
+      <p:sp>
+        <p:nvSpPr>
+          <p:cNvPr id="14" name="Rectangle 13"/>
           <p:cNvSpPr/>
           <p:nvPr/>
         </p:nvSpPr>
         <p:spPr>
           <a:xfrm>
-            <a:off x="365760" y="3977640"/>
-            <a:ext cx="11430000" cy="1143000"/>
+            <a:off x="365760" y="4663440"/>
+            <a:ext cx="11430000" cy="1463040"/>
           </a:xfrm>
           <a:prstGeom prst="rect">
             <a:avLst/>
           </a:prstGeom>
           <a:solidFill>
-            <a:srgbClr val="F5F5F5"/>
+            <a:srgbClr val="E8F5E9"/>
           </a:solidFill>
           <a:ln>
             <a:noFill/>
@@ -18364,14 +18777,14 @@
       </p:sp>
       <p:sp>
         <p:nvSpPr>
-          <p:cNvPr id="9" name="TextBox 8"/>
-          <p:cNvSpPr txBox="1"/>
-          <p:nvPr/>
-        </p:nvSpPr>
-        <p:spPr>
-          <a:xfrm>
-            <a:off x="502920" y="4050792"/>
-            <a:ext cx="11155680" cy="1005840"/>
+          <p:cNvPr id="15" name="TextBox 14"/>
+          <p:cNvSpPr txBox="1"/>
+          <p:nvPr/>
+        </p:nvSpPr>
+        <p:spPr>
+          <a:xfrm>
+            <a:off x="502920" y="4709160"/>
+            <a:ext cx="2560320" cy="320040"/>
           </a:xfrm>
           <a:prstGeom prst="rect">
             <a:avLst/>
@@ -18386,71 +18799,94 @@
           <a:p>
             <a:pPr algn="l"/>
             <a:r>
-              <a:rPr sz="1200" b="0">
+              <a:rPr sz="1100" b="1">
+                <a:solidFill>
+                  <a:srgbClr val="78909C"/>
+                </a:solidFill>
+              </a:rPr>
+              <a:t>優先度：中</a:t>
+            </a:r>
+          </a:p>
+        </p:txBody>
+      </p:sp>
+      <p:sp>
+        <p:nvSpPr>
+          <p:cNvPr id="16" name="TextBox 15"/>
+          <p:cNvSpPr txBox="1"/>
+          <p:nvPr/>
+        </p:nvSpPr>
+        <p:spPr>
+          <a:xfrm>
+            <a:off x="502920" y="5010912"/>
+            <a:ext cx="11064240" cy="384048"/>
+          </a:xfrm>
+          <a:prstGeom prst="rect">
+            <a:avLst/>
+          </a:prstGeom>
+          <a:noFill/>
+        </p:spPr>
+        <p:txBody>
+          <a:bodyPr wrap="square">
+            <a:spAutoFit/>
+          </a:bodyPr>
+          <a:lstStyle/>
+          <a:p>
+            <a:pPr algn="l"/>
+            <a:r>
+              <a:rPr sz="1600" b="1">
+                <a:solidFill>
+                  <a:srgbClr val="1A237E"/>
+                </a:solidFill>
+              </a:rPr>
+              <a:t>実環境ノイズでの検証</a:t>
+            </a:r>
+          </a:p>
+        </p:txBody>
+      </p:sp>
+      <p:sp>
+        <p:nvSpPr>
+          <p:cNvPr id="17" name="TextBox 16"/>
+          <p:cNvSpPr txBox="1"/>
+          <p:nvPr/>
+        </p:nvSpPr>
+        <p:spPr>
+          <a:xfrm>
+            <a:off x="640080" y="5468112"/>
+            <a:ext cx="10972800" cy="292608"/>
+          </a:xfrm>
+          <a:prstGeom prst="rect">
+            <a:avLst/>
+          </a:prstGeom>
+          <a:noFill/>
+        </p:spPr>
+        <p:txBody>
+          <a:bodyPr wrap="square">
+            <a:spAutoFit/>
+          </a:bodyPr>
+          <a:lstStyle/>
+          <a:p>
+            <a:pPr algn="l"/>
+            <a:r>
+              <a:rPr sz="1300" b="0">
                 <a:solidFill>
                   <a:srgbClr val="212121"/>
                 </a:solidFill>
               </a:rPr>
-              <a:t>[3]  X. Rong, C. Li, J. Xiao,
-     "GTCRN: A Speech Enhancement Model Requiring Ultra-Tiny Resources"
-     arXiv:2404.11567, 2024</a:t>
-            </a:r>
-          </a:p>
-        </p:txBody>
-      </p:sp>
-      <p:sp>
-        <p:nvSpPr>
-          <p:cNvPr id="10" name="Rectangle 9"/>
-          <p:cNvSpPr/>
-          <p:nvPr/>
-        </p:nvSpPr>
-        <p:spPr>
-          <a:xfrm>
-            <a:off x="365760" y="5212080"/>
-            <a:ext cx="11430000" cy="1143000"/>
-          </a:xfrm>
-          <a:prstGeom prst="rect">
-            <a:avLst/>
-          </a:prstGeom>
-          <a:solidFill>
-            <a:srgbClr val="F5F5F5"/>
-          </a:solidFill>
-          <a:ln>
-            <a:noFill/>
-          </a:ln>
-        </p:spPr>
-        <p:style>
-          <a:lnRef idx="1">
-            <a:schemeClr val="accent1"/>
-          </a:lnRef>
-          <a:fillRef idx="3">
-            <a:schemeClr val="accent1"/>
-          </a:fillRef>
-          <a:effectRef idx="2">
-            <a:schemeClr val="accent1"/>
-          </a:effectRef>
-          <a:fontRef idx="minor">
-            <a:schemeClr val="lt1"/>
-          </a:fontRef>
-        </p:style>
-        <p:txBody>
-          <a:bodyPr rtlCol="0" anchor="ctr"/>
-          <a:lstStyle/>
-          <a:p>
-            <a:pPr algn="ctr"/>
-          </a:p>
-        </p:txBody>
-      </p:sp>
-      <p:sp>
-        <p:nvSpPr>
-          <p:cNvPr id="11" name="TextBox 10"/>
-          <p:cNvSpPr txBox="1"/>
-          <p:nvPr/>
-        </p:nvSpPr>
-        <p:spPr>
-          <a:xfrm>
-            <a:off x="502920" y="5285232"/>
-            <a:ext cx="11155680" cy="1005840"/>
+              <a:t>・ 現在は人工ノイズ（白色・ピンク）のみ</a:t>
+            </a:r>
+          </a:p>
+        </p:txBody>
+      </p:sp>
+      <p:sp>
+        <p:nvSpPr>
+          <p:cNvPr id="18" name="TextBox 17"/>
+          <p:cNvSpPr txBox="1"/>
+          <p:nvPr/>
+        </p:nvSpPr>
+        <p:spPr>
+          <a:xfrm>
+            <a:off x="640080" y="5788152"/>
+            <a:ext cx="10972800" cy="292608"/>
           </a:xfrm>
           <a:prstGeom prst="rect">
             <a:avLst/>
@@ -18465,21 +18901,19 @@
           <a:p>
             <a:pPr algn="l"/>
             <a:r>
-              <a:rPr sz="1200" b="0">
+              <a:rPr sz="1300" b="0">
                 <a:solidFill>
                   <a:srgbClr val="212121"/>
                 </a:solidFill>
               </a:rPr>
-              <a:t>[4]  Y. Kim et al.,
-     "TAPS: Throat and Acoustic Pairing Speech Dataset"
-     HuggingFace: yskim3271/Throat_and_Acoustic_Pairing_Speech_Dataset</a:t>
-            </a:r>
-          </a:p>
-        </p:txBody>
-      </p:sp>
-      <p:sp>
-        <p:nvSpPr>
-          <p:cNvPr id="12" name="Rectangle 11"/>
+              <a:t>・ MUSAN・DEMANDなどの実録音ノイズで再現実験</a:t>
+            </a:r>
+          </a:p>
+        </p:txBody>
+      </p:sp>
+      <p:sp>
+        <p:nvSpPr>
+          <p:cNvPr id="19" name="Rectangle 18"/>
           <p:cNvSpPr/>
           <p:nvPr/>
         </p:nvSpPr>
@@ -18522,7 +18956,7 @@
       </p:sp>
       <p:sp>
         <p:nvSpPr>
-          <p:cNvPr id="13" name="TextBox 12"/>
+          <p:cNvPr id="20" name="TextBox 19"/>
           <p:cNvSpPr txBox="1"/>
           <p:nvPr/>
         </p:nvSpPr>
@@ -18549,7 +18983,7 @@
                   <a:srgbClr val="1A237E"/>
                 </a:solidFill>
               </a:rPr>
-              <a:t>27 / 28</a:t>
+              <a:t>27 / 29</a:t>
             </a:r>
           </a:p>
         </p:txBody>
@@ -18581,7 +19015,7 @@
         <p:spPr>
           <a:xfrm>
             <a:off x="0" y="0"/>
-            <a:ext cx="12188952" cy="6858000"/>
+            <a:ext cx="12188952" cy="1280160"/>
           </a:xfrm>
           <a:prstGeom prst="rect">
             <a:avLst/>
@@ -18617,6 +19051,496 @@
       </p:sp>
       <p:sp>
         <p:nvSpPr>
+          <p:cNvPr id="3" name="TextBox 2"/>
+          <p:cNvSpPr txBox="1"/>
+          <p:nvPr/>
+        </p:nvSpPr>
+        <p:spPr>
+          <a:xfrm>
+            <a:off x="365760" y="164592"/>
+            <a:ext cx="11430000" cy="822960"/>
+          </a:xfrm>
+          <a:prstGeom prst="rect">
+            <a:avLst/>
+          </a:prstGeom>
+          <a:noFill/>
+        </p:spPr>
+        <p:txBody>
+          <a:bodyPr wrap="square">
+            <a:spAutoFit/>
+          </a:bodyPr>
+          <a:lstStyle/>
+          <a:p>
+            <a:pPr algn="l"/>
+            <a:r>
+              <a:rPr sz="2800" b="1">
+                <a:solidFill>
+                  <a:srgbClr val="FFFFFF"/>
+                </a:solidFill>
+              </a:rPr>
+              <a:t>参考文献</a:t>
+            </a:r>
+          </a:p>
+        </p:txBody>
+      </p:sp>
+      <p:sp>
+        <p:nvSpPr>
+          <p:cNvPr id="4" name="Rectangle 3"/>
+          <p:cNvSpPr/>
+          <p:nvPr/>
+        </p:nvSpPr>
+        <p:spPr>
+          <a:xfrm>
+            <a:off x="365760" y="1508760"/>
+            <a:ext cx="11430000" cy="1143000"/>
+          </a:xfrm>
+          <a:prstGeom prst="rect">
+            <a:avLst/>
+          </a:prstGeom>
+          <a:solidFill>
+            <a:srgbClr val="F5F5F5"/>
+          </a:solidFill>
+          <a:ln>
+            <a:noFill/>
+          </a:ln>
+        </p:spPr>
+        <p:style>
+          <a:lnRef idx="1">
+            <a:schemeClr val="accent1"/>
+          </a:lnRef>
+          <a:fillRef idx="3">
+            <a:schemeClr val="accent1"/>
+          </a:fillRef>
+          <a:effectRef idx="2">
+            <a:schemeClr val="accent1"/>
+          </a:effectRef>
+          <a:fontRef idx="minor">
+            <a:schemeClr val="lt1"/>
+          </a:fontRef>
+        </p:style>
+        <p:txBody>
+          <a:bodyPr rtlCol="0" anchor="ctr"/>
+          <a:lstStyle/>
+          <a:p>
+            <a:pPr algn="ctr"/>
+          </a:p>
+        </p:txBody>
+      </p:sp>
+      <p:sp>
+        <p:nvSpPr>
+          <p:cNvPr id="5" name="TextBox 4"/>
+          <p:cNvSpPr txBox="1"/>
+          <p:nvPr/>
+        </p:nvSpPr>
+        <p:spPr>
+          <a:xfrm>
+            <a:off x="502920" y="1581912"/>
+            <a:ext cx="11155680" cy="1005840"/>
+          </a:xfrm>
+          <a:prstGeom prst="rect">
+            <a:avLst/>
+          </a:prstGeom>
+          <a:noFill/>
+        </p:spPr>
+        <p:txBody>
+          <a:bodyPr wrap="square">
+            <a:spAutoFit/>
+          </a:bodyPr>
+          <a:lstStyle/>
+          <a:p>
+            <a:pPr algn="l"/>
+            <a:r>
+              <a:rPr sz="1200" b="0">
+                <a:solidFill>
+                  <a:srgbClr val="212121"/>
+                </a:solidFill>
+              </a:rPr>
+              <a:t>[1]  C.O. Mawalim, S. Okada, M. Unoki,
+     "Are Recent Deep Learning-Based Speech Enhancement Methods Ready to Confront
+     Real-World Noisy Environments?"
+     Interspeech 2024, pp. 1735–1739, DOI: 10.21437/Interspeech.2024-129</a:t>
+            </a:r>
+          </a:p>
+        </p:txBody>
+      </p:sp>
+      <p:sp>
+        <p:nvSpPr>
+          <p:cNvPr id="6" name="Rectangle 5"/>
+          <p:cNvSpPr/>
+          <p:nvPr/>
+        </p:nvSpPr>
+        <p:spPr>
+          <a:xfrm>
+            <a:off x="365760" y="2743200"/>
+            <a:ext cx="11430000" cy="1143000"/>
+          </a:xfrm>
+          <a:prstGeom prst="rect">
+            <a:avLst/>
+          </a:prstGeom>
+          <a:solidFill>
+            <a:srgbClr val="F5F5F5"/>
+          </a:solidFill>
+          <a:ln>
+            <a:noFill/>
+          </a:ln>
+        </p:spPr>
+        <p:style>
+          <a:lnRef idx="1">
+            <a:schemeClr val="accent1"/>
+          </a:lnRef>
+          <a:fillRef idx="3">
+            <a:schemeClr val="accent1"/>
+          </a:fillRef>
+          <a:effectRef idx="2">
+            <a:schemeClr val="accent1"/>
+          </a:effectRef>
+          <a:fontRef idx="minor">
+            <a:schemeClr val="lt1"/>
+          </a:fontRef>
+        </p:style>
+        <p:txBody>
+          <a:bodyPr rtlCol="0" anchor="ctr"/>
+          <a:lstStyle/>
+          <a:p>
+            <a:pPr algn="ctr"/>
+          </a:p>
+        </p:txBody>
+      </p:sp>
+      <p:sp>
+        <p:nvSpPr>
+          <p:cNvPr id="7" name="TextBox 6"/>
+          <p:cNvSpPr txBox="1"/>
+          <p:nvPr/>
+        </p:nvSpPr>
+        <p:spPr>
+          <a:xfrm>
+            <a:off x="502920" y="2816352"/>
+            <a:ext cx="11155680" cy="1005840"/>
+          </a:xfrm>
+          <a:prstGeom prst="rect">
+            <a:avLst/>
+          </a:prstGeom>
+          <a:noFill/>
+        </p:spPr>
+        <p:txBody>
+          <a:bodyPr wrap="square">
+            <a:spAutoFit/>
+          </a:bodyPr>
+          <a:lstStyle/>
+          <a:p>
+            <a:pPr algn="l"/>
+            <a:r>
+              <a:rPr sz="1200" b="0">
+                <a:solidFill>
+                  <a:srgbClr val="212121"/>
+                </a:solidFill>
+              </a:rPr>
+              <a:t>[2]  T. Ochiai, K. Iwamoto, M. Delcroix et al.,
+     "Rethinking Processing Distortions: How Do They Affect the Downstream ASR Performance?"
+     IEEE/ACM Transactions on Audio, Speech, and Language Processing, TASLP 2024,
+     arXiv:2404.14860</a:t>
+            </a:r>
+          </a:p>
+        </p:txBody>
+      </p:sp>
+      <p:sp>
+        <p:nvSpPr>
+          <p:cNvPr id="8" name="Rectangle 7"/>
+          <p:cNvSpPr/>
+          <p:nvPr/>
+        </p:nvSpPr>
+        <p:spPr>
+          <a:xfrm>
+            <a:off x="365760" y="3977640"/>
+            <a:ext cx="11430000" cy="1143000"/>
+          </a:xfrm>
+          <a:prstGeom prst="rect">
+            <a:avLst/>
+          </a:prstGeom>
+          <a:solidFill>
+            <a:srgbClr val="F5F5F5"/>
+          </a:solidFill>
+          <a:ln>
+            <a:noFill/>
+          </a:ln>
+        </p:spPr>
+        <p:style>
+          <a:lnRef idx="1">
+            <a:schemeClr val="accent1"/>
+          </a:lnRef>
+          <a:fillRef idx="3">
+            <a:schemeClr val="accent1"/>
+          </a:fillRef>
+          <a:effectRef idx="2">
+            <a:schemeClr val="accent1"/>
+          </a:effectRef>
+          <a:fontRef idx="minor">
+            <a:schemeClr val="lt1"/>
+          </a:fontRef>
+        </p:style>
+        <p:txBody>
+          <a:bodyPr rtlCol="0" anchor="ctr"/>
+          <a:lstStyle/>
+          <a:p>
+            <a:pPr algn="ctr"/>
+          </a:p>
+        </p:txBody>
+      </p:sp>
+      <p:sp>
+        <p:nvSpPr>
+          <p:cNvPr id="9" name="TextBox 8"/>
+          <p:cNvSpPr txBox="1"/>
+          <p:nvPr/>
+        </p:nvSpPr>
+        <p:spPr>
+          <a:xfrm>
+            <a:off x="502920" y="4050792"/>
+            <a:ext cx="11155680" cy="1005840"/>
+          </a:xfrm>
+          <a:prstGeom prst="rect">
+            <a:avLst/>
+          </a:prstGeom>
+          <a:noFill/>
+        </p:spPr>
+        <p:txBody>
+          <a:bodyPr wrap="square">
+            <a:spAutoFit/>
+          </a:bodyPr>
+          <a:lstStyle/>
+          <a:p>
+            <a:pPr algn="l"/>
+            <a:r>
+              <a:rPr sz="1200" b="0">
+                <a:solidFill>
+                  <a:srgbClr val="212121"/>
+                </a:solidFill>
+              </a:rPr>
+              <a:t>[3]  X. Rong, C. Li, J. Xiao,
+     "GTCRN: A Speech Enhancement Model Requiring Ultra-Tiny Resources"
+     arXiv:2404.11567, 2024</a:t>
+            </a:r>
+          </a:p>
+        </p:txBody>
+      </p:sp>
+      <p:sp>
+        <p:nvSpPr>
+          <p:cNvPr id="10" name="Rectangle 9"/>
+          <p:cNvSpPr/>
+          <p:nvPr/>
+        </p:nvSpPr>
+        <p:spPr>
+          <a:xfrm>
+            <a:off x="365760" y="5212080"/>
+            <a:ext cx="11430000" cy="1143000"/>
+          </a:xfrm>
+          <a:prstGeom prst="rect">
+            <a:avLst/>
+          </a:prstGeom>
+          <a:solidFill>
+            <a:srgbClr val="F5F5F5"/>
+          </a:solidFill>
+          <a:ln>
+            <a:noFill/>
+          </a:ln>
+        </p:spPr>
+        <p:style>
+          <a:lnRef idx="1">
+            <a:schemeClr val="accent1"/>
+          </a:lnRef>
+          <a:fillRef idx="3">
+            <a:schemeClr val="accent1"/>
+          </a:fillRef>
+          <a:effectRef idx="2">
+            <a:schemeClr val="accent1"/>
+          </a:effectRef>
+          <a:fontRef idx="minor">
+            <a:schemeClr val="lt1"/>
+          </a:fontRef>
+        </p:style>
+        <p:txBody>
+          <a:bodyPr rtlCol="0" anchor="ctr"/>
+          <a:lstStyle/>
+          <a:p>
+            <a:pPr algn="ctr"/>
+          </a:p>
+        </p:txBody>
+      </p:sp>
+      <p:sp>
+        <p:nvSpPr>
+          <p:cNvPr id="11" name="TextBox 10"/>
+          <p:cNvSpPr txBox="1"/>
+          <p:nvPr/>
+        </p:nvSpPr>
+        <p:spPr>
+          <a:xfrm>
+            <a:off x="502920" y="5285232"/>
+            <a:ext cx="11155680" cy="1005840"/>
+          </a:xfrm>
+          <a:prstGeom prst="rect">
+            <a:avLst/>
+          </a:prstGeom>
+          <a:noFill/>
+        </p:spPr>
+        <p:txBody>
+          <a:bodyPr wrap="square">
+            <a:spAutoFit/>
+          </a:bodyPr>
+          <a:lstStyle/>
+          <a:p>
+            <a:pPr algn="l"/>
+            <a:r>
+              <a:rPr sz="1200" b="0">
+                <a:solidFill>
+                  <a:srgbClr val="212121"/>
+                </a:solidFill>
+              </a:rPr>
+              <a:t>[4]  Y. Kim et al.,
+     "TAPS: Throat and Acoustic Pairing Speech Dataset"
+     HuggingFace: yskim3271/Throat_and_Acoustic_Pairing_Speech_Dataset</a:t>
+            </a:r>
+          </a:p>
+        </p:txBody>
+      </p:sp>
+      <p:sp>
+        <p:nvSpPr>
+          <p:cNvPr id="12" name="Rectangle 11"/>
+          <p:cNvSpPr/>
+          <p:nvPr/>
+        </p:nvSpPr>
+        <p:spPr>
+          <a:xfrm>
+            <a:off x="0" y="6537960"/>
+            <a:ext cx="12188952" cy="320040"/>
+          </a:xfrm>
+          <a:prstGeom prst="rect">
+            <a:avLst/>
+          </a:prstGeom>
+          <a:solidFill>
+            <a:srgbClr val="E8EAF6"/>
+          </a:solidFill>
+          <a:ln>
+            <a:noFill/>
+          </a:ln>
+        </p:spPr>
+        <p:style>
+          <a:lnRef idx="1">
+            <a:schemeClr val="accent1"/>
+          </a:lnRef>
+          <a:fillRef idx="3">
+            <a:schemeClr val="accent1"/>
+          </a:fillRef>
+          <a:effectRef idx="2">
+            <a:schemeClr val="accent1"/>
+          </a:effectRef>
+          <a:fontRef idx="minor">
+            <a:schemeClr val="lt1"/>
+          </a:fontRef>
+        </p:style>
+        <p:txBody>
+          <a:bodyPr rtlCol="0" anchor="ctr"/>
+          <a:lstStyle/>
+          <a:p>
+            <a:pPr algn="ctr"/>
+          </a:p>
+        </p:txBody>
+      </p:sp>
+      <p:sp>
+        <p:nvSpPr>
+          <p:cNvPr id="13" name="TextBox 12"/>
+          <p:cNvSpPr txBox="1"/>
+          <p:nvPr/>
+        </p:nvSpPr>
+        <p:spPr>
+          <a:xfrm>
+            <a:off x="11091672" y="6565392"/>
+            <a:ext cx="1005840" cy="274320"/>
+          </a:xfrm>
+          <a:prstGeom prst="rect">
+            <a:avLst/>
+          </a:prstGeom>
+          <a:noFill/>
+        </p:spPr>
+        <p:txBody>
+          <a:bodyPr wrap="square">
+            <a:spAutoFit/>
+          </a:bodyPr>
+          <a:lstStyle/>
+          <a:p>
+            <a:pPr algn="r"/>
+            <a:r>
+              <a:rPr sz="1000" b="0">
+                <a:solidFill>
+                  <a:srgbClr val="1A237E"/>
+                </a:solidFill>
+              </a:rPr>
+              <a:t>28 / 29</a:t>
+            </a:r>
+          </a:p>
+        </p:txBody>
+      </p:sp>
+    </p:spTree>
+  </p:cSld>
+  <p:clrMapOvr>
+    <a:masterClrMapping/>
+  </p:clrMapOvr>
+</p:sld>
+</file>
+
+<file path=ppt/slides/slide29.xml><?xml version="1.0" encoding="utf-8"?>
+<p:sld xmlns:a="http://schemas.openxmlformats.org/drawingml/2006/main" xmlns:p="http://schemas.openxmlformats.org/presentationml/2006/main" xmlns:r="http://schemas.openxmlformats.org/officeDocument/2006/relationships">
+  <p:cSld>
+    <p:spTree>
+      <p:nvGrpSpPr>
+        <p:cNvPr id="1" name=""/>
+        <p:cNvGrpSpPr/>
+        <p:nvPr/>
+      </p:nvGrpSpPr>
+      <p:grpSpPr/>
+      <p:sp>
+        <p:nvSpPr>
+          <p:cNvPr id="2" name="Rectangle 1"/>
+          <p:cNvSpPr/>
+          <p:nvPr/>
+        </p:nvSpPr>
+        <p:spPr>
+          <a:xfrm>
+            <a:off x="0" y="0"/>
+            <a:ext cx="12188952" cy="6858000"/>
+          </a:xfrm>
+          <a:prstGeom prst="rect">
+            <a:avLst/>
+          </a:prstGeom>
+          <a:solidFill>
+            <a:srgbClr val="1A237E"/>
+          </a:solidFill>
+          <a:ln>
+            <a:noFill/>
+          </a:ln>
+        </p:spPr>
+        <p:style>
+          <a:lnRef idx="1">
+            <a:schemeClr val="accent1"/>
+          </a:lnRef>
+          <a:fillRef idx="3">
+            <a:schemeClr val="accent1"/>
+          </a:fillRef>
+          <a:effectRef idx="2">
+            <a:schemeClr val="accent1"/>
+          </a:effectRef>
+          <a:fontRef idx="minor">
+            <a:schemeClr val="lt1"/>
+          </a:fontRef>
+        </p:style>
+        <p:txBody>
+          <a:bodyPr rtlCol="0" anchor="ctr"/>
+          <a:lstStyle/>
+          <a:p>
+            <a:pPr algn="ctr"/>
+          </a:p>
+        </p:txBody>
+      </p:sp>
+      <p:sp>
+        <p:nvSpPr>
           <p:cNvPr id="3" name="Rectangle 2"/>
           <p:cNvSpPr/>
           <p:nvPr/>
@@ -18833,7 +19757,7 @@
                   <a:srgbClr val="1A237E"/>
                 </a:solidFill>
               </a:rPr>
-              <a:t>28 / 28</a:t>
+              <a:t>29 / 29</a:t>
             </a:r>
           </a:p>
         </p:txBody>
@@ -19687,7 +20611,7 @@
                   <a:srgbClr val="1A237E"/>
                 </a:solidFill>
               </a:rPr>
-              <a:t>3 / 28</a:t>
+              <a:t>3 / 29</a:t>
             </a:r>
           </a:p>
         </p:txBody>
@@ -20877,7 +21801,7 @@
                   <a:srgbClr val="1A237E"/>
                 </a:solidFill>
               </a:rPr>
-              <a:t>4 / 28</a:t>
+              <a:t>4 / 29</a:t>
             </a:r>
           </a:p>
         </p:txBody>
@@ -21429,7 +22353,7 @@
                   <a:srgbClr val="1A237E"/>
                 </a:solidFill>
               </a:rPr>
-              <a:t>5 / 28</a:t>
+              <a:t>5 / 29</a:t>
             </a:r>
           </a:p>
         </p:txBody>
@@ -22162,7 +23086,7 @@
                   <a:srgbClr val="1A237E"/>
                 </a:solidFill>
               </a:rPr>
-              <a:t>6 / 28</a:t>
+              <a:t>6 / 29</a:t>
             </a:r>
           </a:p>
         </p:txBody>
@@ -22857,7 +23781,7 @@
                   <a:srgbClr val="1A237E"/>
                 </a:solidFill>
               </a:rPr>
-              <a:t>7 / 28</a:t>
+              <a:t>7 / 29</a:t>
             </a:r>
           </a:p>
         </p:txBody>
@@ -23852,7 +24776,7 @@
                   <a:srgbClr val="1A237E"/>
                 </a:solidFill>
               </a:rPr>
-              <a:t>8 / 28</a:t>
+              <a:t>8 / 29</a:t>
             </a:r>
           </a:p>
         </p:txBody>
@@ -24710,7 +25634,7 @@
                   <a:srgbClr val="1A237E"/>
                 </a:solidFill>
               </a:rPr>
-              <a:t>9 / 28</a:t>
+              <a:t>9 / 29</a:t>
             </a:r>
           </a:p>
         </p:txBody>
